--- a/slides/Defect-to-Delivery_262-034.pptx
+++ b/slides/Defect-to-Delivery_262-034.pptx
@@ -30,11 +30,6 @@
     <p:sldId id="268" r:id="rId24"/>
     <p:sldId id="269" r:id="rId25"/>
     <p:sldId id="270" r:id="rId26"/>
-    <p:sldId id="271" r:id="rId27"/>
-    <p:sldId id="272" r:id="rId28"/>
-    <p:sldId id="273" r:id="rId29"/>
-    <p:sldId id="274" r:id="rId30"/>
-    <p:sldId id="275" r:id="rId31"/>
     <p:sldId id="276" r:id="rId32"/>
     <p:sldId id="277" r:id="rId33"/>
     <p:sldId id="278" r:id="rId34"/>
@@ -3202,7 +3197,7 @@
                 </a:solidFill>
                 <a:latin typeface="Calibri"/>
               </a:rPr>
-              <a:t>1 / 30</a:t>
+              <a:t>1 / 35</a:t>
             </a:r>
           </a:p>
         </p:txBody>
@@ -3447,7 +3442,7 @@
                 </a:solidFill>
                 <a:latin typeface="Calibri"/>
               </a:rPr>
-              <a:t>10 / 30</a:t>
+              <a:t>10 / 35</a:t>
             </a:r>
           </a:p>
         </p:txBody>
@@ -5174,7 +5169,7 @@
                 </a:solidFill>
                 <a:latin typeface="Calibri"/>
               </a:rPr>
-              <a:t>11 / 30</a:t>
+              <a:t>11 / 35</a:t>
             </a:r>
           </a:p>
         </p:txBody>
@@ -5301,7 +5296,7 @@
                 </a:solidFill>
                 <a:latin typeface="Calibri"/>
               </a:rPr>
-              <a:t>12 / 30</a:t>
+              <a:t>12 / 35</a:t>
             </a:r>
           </a:p>
         </p:txBody>
@@ -6089,13 +6084,6 @@
                   <a:extLst>
                     <a:ext uri="{9D8B030D-6E8A-4147-A177-3AD203B41FA5}">
                       <a16:colId xmlns:a16="http://schemas.microsoft.com/office/drawing/2014/main" val="20001"/>
-                    </a:ext>
-                  </a:extLst>
-                </a:gridCol>
-                <a:gridCol w="1580605">
-                  <a:extLst>
-                    <a:ext uri="{9D8B030D-6E8A-4147-A177-3AD203B41FA5}">
-                      <a16:colId xmlns:a16="http://schemas.microsoft.com/office/drawing/2014/main" val="20002"/>
                     </a:ext>
                   </a:extLst>
                 </a:gridCol>
@@ -6131,10 +6119,10 @@
               <a:tr h="384048">
                 <a:tc>
                   <a:txBody>
-                    <a:bodyPr/>
+                    <a:bodyPr wrap="square" lIns="54864" rIns="54864" tIns="27432" bIns="27432" anchor="ctr"/>
                     <a:lstStyle/>
                     <a:p>
-                      <a:pPr algn="ctr"/>
+                      <a:pPr algn="l"/>
                       <a:r>
                         <a:rPr sz="1100" b="1">
                           <a:solidFill>
@@ -6148,16 +6136,16 @@
                   </a:txBody>
                   <a:tcPr anchor="ctr">
                     <a:solidFill>
-                      <a:srgbClr val="144E7D"/>
+                      <a:srgbClr val="D99A06"/>
                     </a:solidFill>
                   </a:tcPr>
                 </a:tc>
                 <a:tc>
                   <a:txBody>
-                    <a:bodyPr/>
+                    <a:bodyPr wrap="square" lIns="54864" rIns="54864" tIns="27432" bIns="27432" anchor="ctr"/>
                     <a:lstStyle/>
                     <a:p>
-                      <a:pPr algn="ctr"/>
+                      <a:pPr algn="l"/>
                       <a:r>
                         <a:rPr sz="1100" b="1">
                           <a:solidFill>
@@ -6171,39 +6159,16 @@
                   </a:txBody>
                   <a:tcPr anchor="ctr">
                     <a:solidFill>
-                      <a:srgbClr val="144E7D"/>
+                      <a:srgbClr val="D99A06"/>
                     </a:solidFill>
                   </a:tcPr>
                 </a:tc>
                 <a:tc>
                   <a:txBody>
-                    <a:bodyPr/>
+                    <a:bodyPr wrap="square" lIns="54864" rIns="54864" tIns="27432" bIns="27432" anchor="ctr"/>
                     <a:lstStyle/>
                     <a:p>
-                      <a:pPr algn="ctr"/>
-                      <a:r>
-                        <a:rPr sz="1100" b="1">
-                          <a:solidFill>
-                            <a:srgbClr val="FFFFFF"/>
-                          </a:solidFill>
-                          <a:latin typeface="Calibri"/>
-                        </a:rPr>
-                        <a:t>Kotha</a:t>
-                      </a:r>
-                    </a:p>
-                  </a:txBody>
-                  <a:tcPr anchor="ctr">
-                    <a:solidFill>
-                      <a:srgbClr val="144E7D"/>
-                    </a:solidFill>
-                  </a:tcPr>
-                </a:tc>
-                <a:tc>
-                  <a:txBody>
-                    <a:bodyPr/>
-                    <a:lstStyle/>
-                    <a:p>
-                      <a:pPr algn="ctr"/>
+                      <a:pPr algn="l"/>
                       <a:r>
                         <a:rPr sz="1100" b="1">
                           <a:solidFill>
@@ -6217,16 +6182,16 @@
                   </a:txBody>
                   <a:tcPr anchor="ctr">
                     <a:solidFill>
-                      <a:srgbClr val="144E7D"/>
+                      <a:srgbClr val="D99A06"/>
                     </a:solidFill>
                   </a:tcPr>
                 </a:tc>
                 <a:tc>
                   <a:txBody>
-                    <a:bodyPr/>
+                    <a:bodyPr wrap="square" lIns="54864" rIns="54864" tIns="27432" bIns="27432" anchor="ctr"/>
                     <a:lstStyle/>
                     <a:p>
-                      <a:pPr algn="ctr"/>
+                      <a:pPr algn="l"/>
                       <a:r>
                         <a:rPr sz="1100" b="1">
                           <a:solidFill>
@@ -6240,16 +6205,16 @@
                   </a:txBody>
                   <a:tcPr anchor="ctr">
                     <a:solidFill>
-                      <a:srgbClr val="144E7D"/>
+                      <a:srgbClr val="D99A06"/>
                     </a:solidFill>
                   </a:tcPr>
                 </a:tc>
                 <a:tc>
                   <a:txBody>
-                    <a:bodyPr/>
+                    <a:bodyPr wrap="square" lIns="54864" rIns="54864" tIns="27432" bIns="27432" anchor="ctr"/>
                     <a:lstStyle/>
                     <a:p>
-                      <a:pPr algn="ctr"/>
+                      <a:pPr algn="l"/>
                       <a:r>
                         <a:rPr sz="1100" b="1">
                           <a:solidFill>
@@ -6263,16 +6228,16 @@
                   </a:txBody>
                   <a:tcPr anchor="ctr">
                     <a:solidFill>
-                      <a:srgbClr val="144E7D"/>
+                      <a:srgbClr val="D99A06"/>
                     </a:solidFill>
                   </a:tcPr>
                 </a:tc>
                 <a:tc>
                   <a:txBody>
-                    <a:bodyPr/>
+                    <a:bodyPr wrap="square" lIns="54864" rIns="54864" tIns="27432" bIns="27432" anchor="ctr"/>
                     <a:lstStyle/>
                     <a:p>
-                      <a:pPr algn="ctr"/>
+                      <a:pPr algn="l"/>
                       <a:r>
                         <a:rPr sz="1100" b="1">
                           <a:solidFill>
@@ -6286,7 +6251,7 @@
                   </a:txBody>
                   <a:tcPr anchor="ctr">
                     <a:solidFill>
-                      <a:srgbClr val="144E7D"/>
+                      <a:srgbClr val="D99A06"/>
                     </a:solidFill>
                   </a:tcPr>
                 </a:tc>
@@ -6299,14 +6264,14 @@
               <a:tr h="384048">
                 <a:tc>
                   <a:txBody>
-                    <a:bodyPr/>
+                    <a:bodyPr wrap="square" lIns="54864" rIns="54864" tIns="27432" bIns="27432" anchor="ctr"/>
                     <a:lstStyle/>
                     <a:p>
-                      <a:pPr algn="ctr"/>
+                      <a:pPr algn="l"/>
                       <a:r>
-                        <a:rPr sz="1100">
+                        <a:rPr sz="1100" b="1">
                           <a:solidFill>
-                            <a:srgbClr val="144E7D"/>
+                            <a:srgbClr val="144E4C"/>
                           </a:solidFill>
                           <a:latin typeface="Calibri"/>
                         </a:rPr>
@@ -6322,14 +6287,14 @@
                 </a:tc>
                 <a:tc>
                   <a:txBody>
-                    <a:bodyPr/>
+                    <a:bodyPr wrap="square" lIns="54864" rIns="54864" tIns="27432" bIns="27432" anchor="ctr"/>
                     <a:lstStyle/>
                     <a:p>
                       <a:pPr algn="ctr"/>
                       <a:r>
-                        <a:rPr sz="1100">
+                        <a:rPr sz="1100" b="0">
                           <a:solidFill>
-                            <a:srgbClr val="144E7D"/>
+                            <a:srgbClr val="5B6570"/>
                           </a:solidFill>
                           <a:latin typeface="Calibri"/>
                         </a:rPr>
@@ -6345,14 +6310,37 @@
                 </a:tc>
                 <a:tc>
                   <a:txBody>
-                    <a:bodyPr/>
+                    <a:bodyPr wrap="square" lIns="54864" rIns="54864" tIns="27432" bIns="27432" anchor="ctr"/>
                     <a:lstStyle/>
                     <a:p>
                       <a:pPr algn="ctr"/>
                       <a:r>
-                        <a:rPr sz="1100">
+                        <a:rPr sz="1100" b="0">
                           <a:solidFill>
-                            <a:srgbClr val="144E7D"/>
+                            <a:srgbClr val="5B6570"/>
+                          </a:solidFill>
+                          <a:latin typeface="Calibri"/>
+                        </a:rPr>
+                        <a:t>✓</a:t>
+                      </a:r>
+                    </a:p>
+                  </a:txBody>
+                  <a:tcPr anchor="ctr">
+                    <a:solidFill>
+                      <a:srgbClr val="FFFFFF"/>
+                    </a:solidFill>
+                  </a:tcPr>
+                </a:tc>
+                <a:tc>
+                  <a:txBody>
+                    <a:bodyPr wrap="square" lIns="54864" rIns="54864" tIns="27432" bIns="27432" anchor="ctr"/>
+                    <a:lstStyle/>
+                    <a:p>
+                      <a:pPr algn="ctr"/>
+                      <a:r>
+                        <a:rPr sz="1100" b="0">
+                          <a:solidFill>
+                            <a:srgbClr val="5B6570"/>
                           </a:solidFill>
                           <a:latin typeface="Calibri"/>
                         </a:rPr>
@@ -6368,37 +6356,14 @@
                 </a:tc>
                 <a:tc>
                   <a:txBody>
-                    <a:bodyPr/>
+                    <a:bodyPr wrap="square" lIns="54864" rIns="54864" tIns="27432" bIns="27432" anchor="ctr"/>
                     <a:lstStyle/>
                     <a:p>
                       <a:pPr algn="ctr"/>
                       <a:r>
-                        <a:rPr sz="1100">
+                        <a:rPr sz="1100" b="0">
                           <a:solidFill>
-                            <a:srgbClr val="144E7D"/>
-                          </a:solidFill>
-                          <a:latin typeface="Calibri"/>
-                        </a:rPr>
-                        <a:t>✓</a:t>
-                      </a:r>
-                    </a:p>
-                  </a:txBody>
-                  <a:tcPr anchor="ctr">
-                    <a:solidFill>
-                      <a:srgbClr val="FFFFFF"/>
-                    </a:solidFill>
-                  </a:tcPr>
-                </a:tc>
-                <a:tc>
-                  <a:txBody>
-                    <a:bodyPr/>
-                    <a:lstStyle/>
-                    <a:p>
-                      <a:pPr algn="ctr"/>
-                      <a:r>
-                        <a:rPr sz="1100">
-                          <a:solidFill>
-                            <a:srgbClr val="144E7D"/>
+                            <a:srgbClr val="5B6570"/>
                           </a:solidFill>
                           <a:latin typeface="Calibri"/>
                         </a:rPr>
@@ -6414,41 +6379,18 @@
                 </a:tc>
                 <a:tc>
                   <a:txBody>
-                    <a:bodyPr/>
+                    <a:bodyPr wrap="square" lIns="54864" rIns="54864" tIns="27432" bIns="27432" anchor="ctr"/>
                     <a:lstStyle/>
                     <a:p>
                       <a:pPr algn="ctr"/>
                       <a:r>
-                        <a:rPr sz="1100">
+                        <a:rPr sz="1100" b="0">
                           <a:solidFill>
-                            <a:srgbClr val="144E7D"/>
+                            <a:srgbClr val="5B6570"/>
                           </a:solidFill>
                           <a:latin typeface="Calibri"/>
                         </a:rPr>
-                        <a:t>—</a:t>
-                      </a:r>
-                    </a:p>
-                  </a:txBody>
-                  <a:tcPr anchor="ctr">
-                    <a:solidFill>
-                      <a:srgbClr val="FFFFFF"/>
-                    </a:solidFill>
-                  </a:tcPr>
-                </a:tc>
-                <a:tc>
-                  <a:txBody>
-                    <a:bodyPr/>
-                    <a:lstStyle/>
-                    <a:p>
-                      <a:pPr algn="ctr"/>
-                      <a:r>
-                        <a:rPr sz="1100">
-                          <a:solidFill>
-                            <a:srgbClr val="144E7D"/>
-                          </a:solidFill>
-                          <a:latin typeface="Calibri"/>
-                        </a:rPr>
-                        <a:t>Audit 2081/468</a:t>
+                        <a:t>Group-aware split (2,081/468)</a:t>
                       </a:r>
                     </a:p>
                   </a:txBody>
@@ -6467,14 +6409,14 @@
               <a:tr h="384048">
                 <a:tc>
                   <a:txBody>
-                    <a:bodyPr/>
+                    <a:bodyPr wrap="square" lIns="54864" rIns="54864" tIns="27432" bIns="27432" anchor="ctr"/>
                     <a:lstStyle/>
                     <a:p>
-                      <a:pPr algn="ctr"/>
+                      <a:pPr algn="l"/>
                       <a:r>
-                        <a:rPr sz="1100">
+                        <a:rPr sz="1100" b="1">
                           <a:solidFill>
-                            <a:srgbClr val="144E7D"/>
+                            <a:srgbClr val="144E4C"/>
                           </a:solidFill>
                           <a:latin typeface="Calibri"/>
                         </a:rPr>
@@ -6490,14 +6432,14 @@
                 </a:tc>
                 <a:tc>
                   <a:txBody>
-                    <a:bodyPr/>
+                    <a:bodyPr wrap="square" lIns="54864" rIns="54864" tIns="27432" bIns="27432" anchor="ctr"/>
                     <a:lstStyle/>
                     <a:p>
                       <a:pPr algn="ctr"/>
                       <a:r>
-                        <a:rPr sz="1100">
+                        <a:rPr sz="1100" b="0">
                           <a:solidFill>
-                            <a:srgbClr val="144E7D"/>
+                            <a:srgbClr val="5B6570"/>
                           </a:solidFill>
                           <a:latin typeface="Calibri"/>
                         </a:rPr>
@@ -6513,14 +6455,37 @@
                 </a:tc>
                 <a:tc>
                   <a:txBody>
-                    <a:bodyPr/>
+                    <a:bodyPr wrap="square" lIns="54864" rIns="54864" tIns="27432" bIns="27432" anchor="ctr"/>
                     <a:lstStyle/>
                     <a:p>
                       <a:pPr algn="ctr"/>
                       <a:r>
-                        <a:rPr sz="1100">
+                        <a:rPr sz="1100" b="0">
                           <a:solidFill>
-                            <a:srgbClr val="144E7D"/>
+                            <a:srgbClr val="5B6570"/>
+                          </a:solidFill>
+                          <a:latin typeface="Calibri"/>
+                        </a:rPr>
+                        <a:t>✓</a:t>
+                      </a:r>
+                    </a:p>
+                  </a:txBody>
+                  <a:tcPr anchor="ctr">
+                    <a:solidFill>
+                      <a:srgbClr val="FAE7EF"/>
+                    </a:solidFill>
+                  </a:tcPr>
+                </a:tc>
+                <a:tc>
+                  <a:txBody>
+                    <a:bodyPr wrap="square" lIns="54864" rIns="54864" tIns="27432" bIns="27432" anchor="ctr"/>
+                    <a:lstStyle/>
+                    <a:p>
+                      <a:pPr algn="ctr"/>
+                      <a:r>
+                        <a:rPr sz="1100" b="0">
+                          <a:solidFill>
+                            <a:srgbClr val="5B6570"/>
                           </a:solidFill>
                           <a:latin typeface="Calibri"/>
                         </a:rPr>
@@ -6536,14 +6501,14 @@
                 </a:tc>
                 <a:tc>
                   <a:txBody>
-                    <a:bodyPr/>
+                    <a:bodyPr wrap="square" lIns="54864" rIns="54864" tIns="27432" bIns="27432" anchor="ctr"/>
                     <a:lstStyle/>
                     <a:p>
                       <a:pPr algn="ctr"/>
                       <a:r>
-                        <a:rPr sz="1100">
+                        <a:rPr sz="1100" b="0">
                           <a:solidFill>
-                            <a:srgbClr val="144E7D"/>
+                            <a:srgbClr val="5B6570"/>
                           </a:solidFill>
                           <a:latin typeface="Calibri"/>
                         </a:rPr>
@@ -6559,64 +6524,18 @@
                 </a:tc>
                 <a:tc>
                   <a:txBody>
-                    <a:bodyPr/>
+                    <a:bodyPr wrap="square" lIns="54864" rIns="54864" tIns="27432" bIns="27432" anchor="ctr"/>
                     <a:lstStyle/>
                     <a:p>
                       <a:pPr algn="ctr"/>
                       <a:r>
-                        <a:rPr sz="1100">
+                        <a:rPr sz="1100" b="0">
                           <a:solidFill>
-                            <a:srgbClr val="144E7D"/>
+                            <a:srgbClr val="5B6570"/>
                           </a:solidFill>
                           <a:latin typeface="Calibri"/>
                         </a:rPr>
-                        <a:t>—</a:t>
-                      </a:r>
-                    </a:p>
-                  </a:txBody>
-                  <a:tcPr anchor="ctr">
-                    <a:solidFill>
-                      <a:srgbClr val="FAE7EF"/>
-                    </a:solidFill>
-                  </a:tcPr>
-                </a:tc>
-                <a:tc>
-                  <a:txBody>
-                    <a:bodyPr/>
-                    <a:lstStyle/>
-                    <a:p>
-                      <a:pPr algn="ctr"/>
-                      <a:r>
-                        <a:rPr sz="1100">
-                          <a:solidFill>
-                            <a:srgbClr val="144E7D"/>
-                          </a:solidFill>
-                          <a:latin typeface="Calibri"/>
-                        </a:rPr>
-                        <a:t>—</a:t>
-                      </a:r>
-                    </a:p>
-                  </a:txBody>
-                  <a:tcPr anchor="ctr">
-                    <a:solidFill>
-                      <a:srgbClr val="FAE7EF"/>
-                    </a:solidFill>
-                  </a:tcPr>
-                </a:tc>
-                <a:tc>
-                  <a:txBody>
-                    <a:bodyPr/>
-                    <a:lstStyle/>
-                    <a:p>
-                      <a:pPr algn="ctr"/>
-                      <a:r>
-                        <a:rPr sz="1100">
-                          <a:solidFill>
-                            <a:srgbClr val="144E7D"/>
-                          </a:solidFill>
-                          <a:latin typeface="Calibri"/>
-                        </a:rPr>
-                        <a:t>ASTM D5430</a:t>
+                        <a:t>Four-point grading</a:t>
                       </a:r>
                     </a:p>
                   </a:txBody>
@@ -6635,14 +6554,14 @@
               <a:tr h="384048">
                 <a:tc>
                   <a:txBody>
-                    <a:bodyPr/>
+                    <a:bodyPr wrap="square" lIns="54864" rIns="54864" tIns="27432" bIns="27432" anchor="ctr"/>
                     <a:lstStyle/>
                     <a:p>
-                      <a:pPr algn="ctr"/>
+                      <a:pPr algn="l"/>
                       <a:r>
-                        <a:rPr sz="1100">
+                        <a:rPr sz="1100" b="1">
                           <a:solidFill>
-                            <a:srgbClr val="144E7D"/>
+                            <a:srgbClr val="144E4C"/>
                           </a:solidFill>
                           <a:latin typeface="Calibri"/>
                         </a:rPr>
@@ -6658,14 +6577,14 @@
                 </a:tc>
                 <a:tc>
                   <a:txBody>
-                    <a:bodyPr/>
+                    <a:bodyPr wrap="square" lIns="54864" rIns="54864" tIns="27432" bIns="27432" anchor="ctr"/>
                     <a:lstStyle/>
                     <a:p>
                       <a:pPr algn="ctr"/>
                       <a:r>
-                        <a:rPr sz="1100">
+                        <a:rPr sz="1100" b="0">
                           <a:solidFill>
-                            <a:srgbClr val="144E7D"/>
+                            <a:srgbClr val="5B6570"/>
                           </a:solidFill>
                           <a:latin typeface="Calibri"/>
                         </a:rPr>
@@ -6681,14 +6600,14 @@
                 </a:tc>
                 <a:tc>
                   <a:txBody>
-                    <a:bodyPr/>
+                    <a:bodyPr wrap="square" lIns="54864" rIns="54864" tIns="27432" bIns="27432" anchor="ctr"/>
                     <a:lstStyle/>
                     <a:p>
                       <a:pPr algn="ctr"/>
                       <a:r>
-                        <a:rPr sz="1100">
+                        <a:rPr sz="1100" b="0">
                           <a:solidFill>
-                            <a:srgbClr val="144E7D"/>
+                            <a:srgbClr val="5B6570"/>
                           </a:solidFill>
                           <a:latin typeface="Calibri"/>
                         </a:rPr>
@@ -6704,14 +6623,14 @@
                 </a:tc>
                 <a:tc>
                   <a:txBody>
-                    <a:bodyPr/>
+                    <a:bodyPr wrap="square" lIns="54864" rIns="54864" tIns="27432" bIns="27432" anchor="ctr"/>
                     <a:lstStyle/>
                     <a:p>
                       <a:pPr algn="ctr"/>
                       <a:r>
-                        <a:rPr sz="1100">
+                        <a:rPr sz="1100" b="0">
                           <a:solidFill>
-                            <a:srgbClr val="144E7D"/>
+                            <a:srgbClr val="5B6570"/>
                           </a:solidFill>
                           <a:latin typeface="Calibri"/>
                         </a:rPr>
@@ -6727,14 +6646,14 @@
                 </a:tc>
                 <a:tc>
                   <a:txBody>
-                    <a:bodyPr/>
+                    <a:bodyPr wrap="square" lIns="54864" rIns="54864" tIns="27432" bIns="27432" anchor="ctr"/>
                     <a:lstStyle/>
                     <a:p>
                       <a:pPr algn="ctr"/>
                       <a:r>
-                        <a:rPr sz="1100">
+                        <a:rPr sz="1100" b="0">
                           <a:solidFill>
-                            <a:srgbClr val="144E7D"/>
+                            <a:srgbClr val="5B6570"/>
                           </a:solidFill>
                           <a:latin typeface="Calibri"/>
                         </a:rPr>
@@ -6750,41 +6669,18 @@
                 </a:tc>
                 <a:tc>
                   <a:txBody>
-                    <a:bodyPr/>
+                    <a:bodyPr wrap="square" lIns="54864" rIns="54864" tIns="27432" bIns="27432" anchor="ctr"/>
                     <a:lstStyle/>
                     <a:p>
                       <a:pPr algn="ctr"/>
                       <a:r>
-                        <a:rPr sz="1100">
+                        <a:rPr sz="1100" b="0">
                           <a:solidFill>
-                            <a:srgbClr val="144E7D"/>
+                            <a:srgbClr val="5B6570"/>
                           </a:solidFill>
                           <a:latin typeface="Calibri"/>
                         </a:rPr>
-                        <a:t>—</a:t>
-                      </a:r>
-                    </a:p>
-                  </a:txBody>
-                  <a:tcPr anchor="ctr">
-                    <a:solidFill>
-                      <a:srgbClr val="FFFFFF"/>
-                    </a:solidFill>
-                  </a:tcPr>
-                </a:tc>
-                <a:tc>
-                  <a:txBody>
-                    <a:bodyPr/>
-                    <a:lstStyle/>
-                    <a:p>
-                      <a:pPr algn="ctr"/>
-                      <a:r>
-                        <a:rPr sz="1100">
-                          <a:solidFill>
-                            <a:srgbClr val="144E7D"/>
-                          </a:solidFill>
-                          <a:latin typeface="Calibri"/>
-                        </a:rPr>
-                        <a:t>Jetson demo</a:t>
+                        <a:t>Jetson-class target</a:t>
                       </a:r>
                     </a:p>
                   </a:txBody>
@@ -6803,14 +6699,14 @@
               <a:tr h="384048">
                 <a:tc>
                   <a:txBody>
-                    <a:bodyPr/>
+                    <a:bodyPr wrap="square" lIns="54864" rIns="54864" tIns="27432" bIns="27432" anchor="ctr"/>
                     <a:lstStyle/>
                     <a:p>
-                      <a:pPr algn="ctr"/>
+                      <a:pPr algn="l"/>
                       <a:r>
-                        <a:rPr sz="1100">
+                        <a:rPr sz="1100" b="1">
                           <a:solidFill>
-                            <a:srgbClr val="144E7D"/>
+                            <a:srgbClr val="144E4C"/>
                           </a:solidFill>
                           <a:latin typeface="Calibri"/>
                         </a:rPr>
@@ -6826,14 +6722,14 @@
                 </a:tc>
                 <a:tc>
                   <a:txBody>
-                    <a:bodyPr/>
+                    <a:bodyPr wrap="square" lIns="54864" rIns="54864" tIns="27432" bIns="27432" anchor="ctr"/>
                     <a:lstStyle/>
                     <a:p>
                       <a:pPr algn="ctr"/>
                       <a:r>
-                        <a:rPr sz="1100">
+                        <a:rPr sz="1100" b="0">
                           <a:solidFill>
-                            <a:srgbClr val="144E7D"/>
+                            <a:srgbClr val="5B6570"/>
                           </a:solidFill>
                           <a:latin typeface="Calibri"/>
                         </a:rPr>
@@ -6849,14 +6745,14 @@
                 </a:tc>
                 <a:tc>
                   <a:txBody>
-                    <a:bodyPr/>
+                    <a:bodyPr wrap="square" lIns="54864" rIns="54864" tIns="27432" bIns="27432" anchor="ctr"/>
                     <a:lstStyle/>
                     <a:p>
                       <a:pPr algn="ctr"/>
                       <a:r>
-                        <a:rPr sz="1100">
+                        <a:rPr sz="1100" b="0">
                           <a:solidFill>
-                            <a:srgbClr val="144E7D"/>
+                            <a:srgbClr val="5B6570"/>
                           </a:solidFill>
                           <a:latin typeface="Calibri"/>
                         </a:rPr>
@@ -6872,14 +6768,14 @@
                 </a:tc>
                 <a:tc>
                   <a:txBody>
-                    <a:bodyPr/>
+                    <a:bodyPr wrap="square" lIns="54864" rIns="54864" tIns="27432" bIns="27432" anchor="ctr"/>
                     <a:lstStyle/>
                     <a:p>
                       <a:pPr algn="ctr"/>
                       <a:r>
-                        <a:rPr sz="1100">
+                        <a:rPr sz="1100" b="0">
                           <a:solidFill>
-                            <a:srgbClr val="144E7D"/>
+                            <a:srgbClr val="5B6570"/>
                           </a:solidFill>
                           <a:latin typeface="Calibri"/>
                         </a:rPr>
@@ -6895,14 +6791,14 @@
                 </a:tc>
                 <a:tc>
                   <a:txBody>
-                    <a:bodyPr/>
+                    <a:bodyPr wrap="square" lIns="54864" rIns="54864" tIns="27432" bIns="27432" anchor="ctr"/>
                     <a:lstStyle/>
                     <a:p>
                       <a:pPr algn="ctr"/>
                       <a:r>
-                        <a:rPr sz="1100">
+                        <a:rPr sz="1100" b="0">
                           <a:solidFill>
-                            <a:srgbClr val="144E7D"/>
+                            <a:srgbClr val="5B6570"/>
                           </a:solidFill>
                           <a:latin typeface="Calibri"/>
                         </a:rPr>
@@ -6918,41 +6814,18 @@
                 </a:tc>
                 <a:tc>
                   <a:txBody>
-                    <a:bodyPr/>
+                    <a:bodyPr wrap="square" lIns="54864" rIns="54864" tIns="27432" bIns="27432" anchor="ctr"/>
                     <a:lstStyle/>
                     <a:p>
                       <a:pPr algn="ctr"/>
                       <a:r>
-                        <a:rPr sz="1100">
+                        <a:rPr sz="1100" b="0">
                           <a:solidFill>
-                            <a:srgbClr val="144E7D"/>
+                            <a:srgbClr val="5B6570"/>
                           </a:solidFill>
                           <a:latin typeface="Calibri"/>
                         </a:rPr>
-                        <a:t>—</a:t>
-                      </a:r>
-                    </a:p>
-                  </a:txBody>
-                  <a:tcPr anchor="ctr">
-                    <a:solidFill>
-                      <a:srgbClr val="FAE7EF"/>
-                    </a:solidFill>
-                  </a:tcPr>
-                </a:tc>
-                <a:tc>
-                  <a:txBody>
-                    <a:bodyPr/>
-                    <a:lstStyle/>
-                    <a:p>
-                      <a:pPr algn="ctr"/>
-                      <a:r>
-                        <a:rPr sz="1100">
-                          <a:solidFill>
-                            <a:srgbClr val="144E7D"/>
-                          </a:solidFill>
-                          <a:latin typeface="Calibri"/>
-                        </a:rPr>
-                        <a:t>0.937→0.940</a:t>
+                        <a:t>Seed 42; 2,081 train / 468 test</a:t>
                       </a:r>
                     </a:p>
                   </a:txBody>
@@ -6971,14 +6844,14 @@
               <a:tr h="384048">
                 <a:tc>
                   <a:txBody>
-                    <a:bodyPr/>
+                    <a:bodyPr wrap="square" lIns="54864" rIns="54864" tIns="27432" bIns="27432" anchor="ctr"/>
                     <a:lstStyle/>
                     <a:p>
-                      <a:pPr algn="ctr"/>
+                      <a:pPr algn="l"/>
                       <a:r>
-                        <a:rPr sz="1100">
+                        <a:rPr sz="1100" b="1">
                           <a:solidFill>
-                            <a:srgbClr val="144E7D"/>
+                            <a:srgbClr val="144E4C"/>
                           </a:solidFill>
                           <a:latin typeface="Calibri"/>
                         </a:rPr>
@@ -6994,14 +6867,14 @@
                 </a:tc>
                 <a:tc>
                   <a:txBody>
-                    <a:bodyPr/>
+                    <a:bodyPr wrap="square" lIns="54864" rIns="54864" tIns="27432" bIns="27432" anchor="ctr"/>
                     <a:lstStyle/>
                     <a:p>
                       <a:pPr algn="ctr"/>
                       <a:r>
-                        <a:rPr sz="1100">
+                        <a:rPr sz="1100" b="0">
                           <a:solidFill>
-                            <a:srgbClr val="144E7D"/>
+                            <a:srgbClr val="5B6570"/>
                           </a:solidFill>
                           <a:latin typeface="Calibri"/>
                         </a:rPr>
@@ -7017,14 +6890,37 @@
                 </a:tc>
                 <a:tc>
                   <a:txBody>
-                    <a:bodyPr/>
+                    <a:bodyPr wrap="square" lIns="54864" rIns="54864" tIns="27432" bIns="27432" anchor="ctr"/>
                     <a:lstStyle/>
                     <a:p>
                       <a:pPr algn="ctr"/>
                       <a:r>
-                        <a:rPr sz="1100">
+                        <a:rPr sz="1100" b="0">
                           <a:solidFill>
-                            <a:srgbClr val="144E7D"/>
+                            <a:srgbClr val="5B6570"/>
+                          </a:solidFill>
+                          <a:latin typeface="Calibri"/>
+                        </a:rPr>
+                        <a:t>✓</a:t>
+                      </a:r>
+                    </a:p>
+                  </a:txBody>
+                  <a:tcPr anchor="ctr">
+                    <a:solidFill>
+                      <a:srgbClr val="FFFFFF"/>
+                    </a:solidFill>
+                  </a:tcPr>
+                </a:tc>
+                <a:tc>
+                  <a:txBody>
+                    <a:bodyPr wrap="square" lIns="54864" rIns="54864" tIns="27432" bIns="27432" anchor="ctr"/>
+                    <a:lstStyle/>
+                    <a:p>
+                      <a:pPr algn="ctr"/>
+                      <a:r>
+                        <a:rPr sz="1100" b="0">
+                          <a:solidFill>
+                            <a:srgbClr val="5B6570"/>
                           </a:solidFill>
                           <a:latin typeface="Calibri"/>
                         </a:rPr>
@@ -7040,37 +6936,14 @@
                 </a:tc>
                 <a:tc>
                   <a:txBody>
-                    <a:bodyPr/>
+                    <a:bodyPr wrap="square" lIns="54864" rIns="54864" tIns="27432" bIns="27432" anchor="ctr"/>
                     <a:lstStyle/>
                     <a:p>
                       <a:pPr algn="ctr"/>
                       <a:r>
-                        <a:rPr sz="1100">
+                        <a:rPr sz="1100" b="0">
                           <a:solidFill>
-                            <a:srgbClr val="144E7D"/>
-                          </a:solidFill>
-                          <a:latin typeface="Calibri"/>
-                        </a:rPr>
-                        <a:t>✓</a:t>
-                      </a:r>
-                    </a:p>
-                  </a:txBody>
-                  <a:tcPr anchor="ctr">
-                    <a:solidFill>
-                      <a:srgbClr val="FFFFFF"/>
-                    </a:solidFill>
-                  </a:tcPr>
-                </a:tc>
-                <a:tc>
-                  <a:txBody>
-                    <a:bodyPr/>
-                    <a:lstStyle/>
-                    <a:p>
-                      <a:pPr algn="ctr"/>
-                      <a:r>
-                        <a:rPr sz="1100">
-                          <a:solidFill>
-                            <a:srgbClr val="144E7D"/>
+                            <a:srgbClr val="5B6570"/>
                           </a:solidFill>
                           <a:latin typeface="Calibri"/>
                         </a:rPr>
@@ -7086,41 +6959,18 @@
                 </a:tc>
                 <a:tc>
                   <a:txBody>
-                    <a:bodyPr/>
+                    <a:bodyPr wrap="square" lIns="54864" rIns="54864" tIns="27432" bIns="27432" anchor="ctr"/>
                     <a:lstStyle/>
                     <a:p>
                       <a:pPr algn="ctr"/>
                       <a:r>
-                        <a:rPr sz="1100">
+                        <a:rPr sz="1100" b="0">
                           <a:solidFill>
-                            <a:srgbClr val="144E7D"/>
+                            <a:srgbClr val="5B6570"/>
                           </a:solidFill>
                           <a:latin typeface="Calibri"/>
                         </a:rPr>
-                        <a:t>—</a:t>
-                      </a:r>
-                    </a:p>
-                  </a:txBody>
-                  <a:tcPr anchor="ctr">
-                    <a:solidFill>
-                      <a:srgbClr val="FFFFFF"/>
-                    </a:solidFill>
-                  </a:tcPr>
-                </a:tc>
-                <a:tc>
-                  <a:txBody>
-                    <a:bodyPr/>
-                    <a:lstStyle/>
-                    <a:p>
-                      <a:pPr algn="ctr"/>
-                      <a:r>
-                        <a:rPr sz="1100">
-                          <a:solidFill>
-                            <a:srgbClr val="144E7D"/>
-                          </a:solidFill>
-                          <a:latin typeface="Calibri"/>
-                        </a:rPr>
-                        <a:t>Fusion</a:t>
+                        <a:t>Vision-to-hours fusion</a:t>
                       </a:r>
                     </a:p>
                   </a:txBody>
@@ -7139,18 +6989,18 @@
               <a:tr h="384048">
                 <a:tc>
                   <a:txBody>
-                    <a:bodyPr/>
+                    <a:bodyPr wrap="square" lIns="54864" rIns="54864" tIns="27432" bIns="27432" anchor="ctr"/>
                     <a:lstStyle/>
                     <a:p>
-                      <a:pPr algn="ctr"/>
+                      <a:pPr algn="l"/>
                       <a:r>
-                        <a:rPr sz="1100">
+                        <a:rPr sz="1100" b="1">
                           <a:solidFill>
-                            <a:srgbClr val="144E7D"/>
+                            <a:srgbClr val="144E4C"/>
                           </a:solidFill>
                           <a:latin typeface="Calibri"/>
                         </a:rPr>
-                        <a:t>Dashboard/WPF</a:t>
+                        <a:t>Planner Dashboard</a:t>
                       </a:r>
                     </a:p>
                   </a:txBody>
@@ -7162,14 +7012,14 @@
                 </a:tc>
                 <a:tc>
                   <a:txBody>
-                    <a:bodyPr/>
+                    <a:bodyPr wrap="square" lIns="54864" rIns="54864" tIns="27432" bIns="27432" anchor="ctr"/>
                     <a:lstStyle/>
                     <a:p>
                       <a:pPr algn="ctr"/>
                       <a:r>
-                        <a:rPr sz="1100">
+                        <a:rPr sz="1100" b="0">
                           <a:solidFill>
-                            <a:srgbClr val="144E7D"/>
+                            <a:srgbClr val="5B6570"/>
                           </a:solidFill>
                           <a:latin typeface="Calibri"/>
                         </a:rPr>
@@ -7185,37 +7035,14 @@
                 </a:tc>
                 <a:tc>
                   <a:txBody>
-                    <a:bodyPr/>
+                    <a:bodyPr wrap="square" lIns="54864" rIns="54864" tIns="27432" bIns="27432" anchor="ctr"/>
                     <a:lstStyle/>
                     <a:p>
                       <a:pPr algn="ctr"/>
                       <a:r>
-                        <a:rPr sz="1100">
+                        <a:rPr sz="1100" b="0">
                           <a:solidFill>
-                            <a:srgbClr val="144E7D"/>
-                          </a:solidFill>
-                          <a:latin typeface="Calibri"/>
-                        </a:rPr>
-                        <a:t>✓</a:t>
-                      </a:r>
-                    </a:p>
-                  </a:txBody>
-                  <a:tcPr anchor="ctr">
-                    <a:solidFill>
-                      <a:srgbClr val="FAE7EF"/>
-                    </a:solidFill>
-                  </a:tcPr>
-                </a:tc>
-                <a:tc>
-                  <a:txBody>
-                    <a:bodyPr/>
-                    <a:lstStyle/>
-                    <a:p>
-                      <a:pPr algn="ctr"/>
-                      <a:r>
-                        <a:rPr sz="1100">
-                          <a:solidFill>
-                            <a:srgbClr val="144E7D"/>
+                            <a:srgbClr val="5B6570"/>
                           </a:solidFill>
                           <a:latin typeface="Calibri"/>
                         </a:rPr>
@@ -7231,14 +7058,14 @@
                 </a:tc>
                 <a:tc>
                   <a:txBody>
-                    <a:bodyPr/>
+                    <a:bodyPr wrap="square" lIns="54864" rIns="54864" tIns="27432" bIns="27432" anchor="ctr"/>
                     <a:lstStyle/>
                     <a:p>
                       <a:pPr algn="ctr"/>
                       <a:r>
-                        <a:rPr sz="1100">
+                        <a:rPr sz="1100" b="0">
                           <a:solidFill>
-                            <a:srgbClr val="144E7D"/>
+                            <a:srgbClr val="5B6570"/>
                           </a:solidFill>
                           <a:latin typeface="Calibri"/>
                         </a:rPr>
@@ -7254,18 +7081,18 @@
                 </a:tc>
                 <a:tc>
                   <a:txBody>
-                    <a:bodyPr/>
+                    <a:bodyPr wrap="square" lIns="54864" rIns="54864" tIns="27432" bIns="27432" anchor="ctr"/>
                     <a:lstStyle/>
                     <a:p>
                       <a:pPr algn="ctr"/>
                       <a:r>
-                        <a:rPr sz="1100">
+                        <a:rPr sz="1100" b="0">
                           <a:solidFill>
-                            <a:srgbClr val="144E7D"/>
+                            <a:srgbClr val="5B6570"/>
                           </a:solidFill>
                           <a:latin typeface="Calibri"/>
                         </a:rPr>
-                        <a:t>—</a:t>
+                        <a:t>Planner dashboard</a:t>
                       </a:r>
                     </a:p>
                   </a:txBody>
@@ -7277,18 +7104,18 @@
                 </a:tc>
                 <a:tc>
                   <a:txBody>
-                    <a:bodyPr/>
+                    <a:bodyPr wrap="square" lIns="54864" rIns="54864" tIns="27432" bIns="27432" anchor="ctr"/>
                     <a:lstStyle/>
                     <a:p>
                       <a:pPr algn="ctr"/>
                       <a:r>
-                        <a:rPr sz="1100">
+                        <a:rPr sz="1100" b="0">
                           <a:solidFill>
-                            <a:srgbClr val="144E7D"/>
+                            <a:srgbClr val="5B6570"/>
                           </a:solidFill>
                           <a:latin typeface="Calibri"/>
                         </a:rPr>
-                        <a:t>Mockup</a:t>
+                        <a:t>Planned output</a:t>
                       </a:r>
                     </a:p>
                   </a:txBody>
@@ -7307,14 +7134,14 @@
               <a:tr h="384048">
                 <a:tc>
                   <a:txBody>
-                    <a:bodyPr/>
+                    <a:bodyPr wrap="square" lIns="54864" rIns="54864" tIns="27432" bIns="27432" anchor="ctr"/>
                     <a:lstStyle/>
                     <a:p>
-                      <a:pPr algn="ctr"/>
+                      <a:pPr algn="l"/>
                       <a:r>
-                        <a:rPr sz="1100">
+                        <a:rPr sz="1100" b="1">
                           <a:solidFill>
-                            <a:srgbClr val="144E7D"/>
+                            <a:srgbClr val="144E4C"/>
                           </a:solidFill>
                           <a:latin typeface="Calibri"/>
                         </a:rPr>
@@ -7330,14 +7157,14 @@
                 </a:tc>
                 <a:tc>
                   <a:txBody>
-                    <a:bodyPr/>
+                    <a:bodyPr wrap="square" lIns="54864" rIns="54864" tIns="27432" bIns="27432" anchor="ctr"/>
                     <a:lstStyle/>
                     <a:p>
                       <a:pPr algn="ctr"/>
                       <a:r>
-                        <a:rPr sz="1100">
+                        <a:rPr sz="1100" b="0">
                           <a:solidFill>
-                            <a:srgbClr val="144E7D"/>
+                            <a:srgbClr val="5B6570"/>
                           </a:solidFill>
                           <a:latin typeface="Calibri"/>
                         </a:rPr>
@@ -7353,14 +7180,14 @@
                 </a:tc>
                 <a:tc>
                   <a:txBody>
-                    <a:bodyPr/>
+                    <a:bodyPr wrap="square" lIns="54864" rIns="54864" tIns="27432" bIns="27432" anchor="ctr"/>
                     <a:lstStyle/>
                     <a:p>
                       <a:pPr algn="ctr"/>
                       <a:r>
-                        <a:rPr sz="1100">
+                        <a:rPr sz="1100" b="0">
                           <a:solidFill>
-                            <a:srgbClr val="144E7D"/>
+                            <a:srgbClr val="5B6570"/>
                           </a:solidFill>
                           <a:latin typeface="Calibri"/>
                         </a:rPr>
@@ -7376,14 +7203,14 @@
                 </a:tc>
                 <a:tc>
                   <a:txBody>
-                    <a:bodyPr/>
+                    <a:bodyPr wrap="square" lIns="54864" rIns="54864" tIns="27432" bIns="27432" anchor="ctr"/>
                     <a:lstStyle/>
                     <a:p>
                       <a:pPr algn="ctr"/>
                       <a:r>
-                        <a:rPr sz="1100">
+                        <a:rPr sz="1100" b="0">
                           <a:solidFill>
-                            <a:srgbClr val="144E7D"/>
+                            <a:srgbClr val="5B6570"/>
                           </a:solidFill>
                           <a:latin typeface="Calibri"/>
                         </a:rPr>
@@ -7399,14 +7226,14 @@
                 </a:tc>
                 <a:tc>
                   <a:txBody>
-                    <a:bodyPr/>
+                    <a:bodyPr wrap="square" lIns="54864" rIns="54864" tIns="27432" bIns="27432" anchor="ctr"/>
                     <a:lstStyle/>
                     <a:p>
                       <a:pPr algn="ctr"/>
                       <a:r>
-                        <a:rPr sz="1100">
+                        <a:rPr sz="1100" b="0">
                           <a:solidFill>
-                            <a:srgbClr val="144E7D"/>
+                            <a:srgbClr val="5B6570"/>
                           </a:solidFill>
                           <a:latin typeface="Calibri"/>
                         </a:rPr>
@@ -7422,37 +7249,14 @@
                 </a:tc>
                 <a:tc>
                   <a:txBody>
-                    <a:bodyPr/>
+                    <a:bodyPr wrap="square" lIns="54864" rIns="54864" tIns="27432" bIns="27432" anchor="ctr"/>
                     <a:lstStyle/>
                     <a:p>
                       <a:pPr algn="ctr"/>
                       <a:r>
-                        <a:rPr sz="1100">
+                        <a:rPr sz="1100" b="0">
                           <a:solidFill>
-                            <a:srgbClr val="144E7D"/>
-                          </a:solidFill>
-                          <a:latin typeface="Calibri"/>
-                        </a:rPr>
-                        <a:t>—</a:t>
-                      </a:r>
-                    </a:p>
-                  </a:txBody>
-                  <a:tcPr anchor="ctr">
-                    <a:solidFill>
-                      <a:srgbClr val="FFFFFF"/>
-                    </a:solidFill>
-                  </a:tcPr>
-                </a:tc>
-                <a:tc>
-                  <a:txBody>
-                    <a:bodyPr/>
-                    <a:lstStyle/>
-                    <a:p>
-                      <a:pPr algn="ctr"/>
-                      <a:r>
-                        <a:rPr sz="1100">
-                          <a:solidFill>
-                            <a:srgbClr val="144E7D"/>
+                            <a:srgbClr val="5B6570"/>
                           </a:solidFill>
                           <a:latin typeface="Calibri"/>
                         </a:rPr>
@@ -7540,7 +7344,7 @@
                 </a:solidFill>
                 <a:latin typeface="Calibri"/>
               </a:rPr>
-              <a:t>13 / 30</a:t>
+              <a:t>13 / 35</a:t>
             </a:r>
           </a:p>
         </p:txBody>
@@ -7643,7 +7447,7 @@
                 </a:solidFill>
                 <a:latin typeface="Calibri"/>
               </a:rPr>
-              <a:t>14 / 30</a:t>
+              <a:t>14 / 35</a:t>
             </a:r>
           </a:p>
         </p:txBody>
@@ -7683,54 +7487,6 @@
           </a:p>
         </p:txBody>
       </p:sp>
-      <p:pic>
-        <p:nvPicPr>
-          <p:cNvPr id="7" name="Picture 6" descr="req_functional.png"/>
-          <p:cNvPicPr>
-            <a:picLocks noChangeAspect="1"/>
-          </p:cNvPicPr>
-          <p:nvPr/>
-        </p:nvPicPr>
-        <p:blipFill>
-          <a:blip r:embed="rId2"/>
-          <a:stretch>
-            <a:fillRect/>
-          </a:stretch>
-        </p:blipFill>
-        <p:spPr>
-          <a:xfrm>
-            <a:off x="320040" y="1463040"/>
-            <a:ext cx="5623560" cy="3566160"/>
-          </a:xfrm>
-          <a:prstGeom prst="rect">
-            <a:avLst/>
-          </a:prstGeom>
-        </p:spPr>
-      </p:pic>
-      <p:pic>
-        <p:nvPicPr>
-          <p:cNvPr id="8" name="Picture 7" descr="req_nonfunctional.png"/>
-          <p:cNvPicPr>
-            <a:picLocks noChangeAspect="1"/>
-          </p:cNvPicPr>
-          <p:nvPr/>
-        </p:nvPicPr>
-        <p:blipFill>
-          <a:blip r:embed="rId3"/>
-          <a:stretch>
-            <a:fillRect/>
-          </a:stretch>
-        </p:blipFill>
-        <p:spPr>
-          <a:xfrm>
-            <a:off x="6245352" y="1463040"/>
-            <a:ext cx="5623560" cy="3566160"/>
-          </a:xfrm>
-          <a:prstGeom prst="rect">
-            <a:avLst/>
-          </a:prstGeom>
-        </p:spPr>
-      </p:pic>
       <p:sp>
         <p:nvSpPr>
           <p:cNvPr id="9" name="TextBox 8"/>
@@ -7753,15 +7509,14 @@
           </a:bodyPr>
           <a:lstStyle/>
           <a:p>
-            <a:pPr algn="ctr"/>
-            <a:r>
-              <a:rPr sz="1400" b="1" i="0">
-                <a:solidFill>
-                  <a:srgbClr val="F5F7F2"/>
-                </a:solidFill>
-                <a:latin typeface="Calibri"/>
-              </a:rPr>
-              <a:t>Functional Requirements (FR1–FR6)</a:t>
+            <a:r>
+              <a:rPr sz="1200" b="1">
+                <a:solidFill>
+                  <a:srgbClr val="FFFFFF"/>
+                </a:solidFill>
+                <a:latin typeface="Calibri"/>
+              </a:rPr>
+              <a:t>Functional Requirements (FR1–FR7) — Report Table 3.1</a:t>
             </a:r>
           </a:p>
         </p:txBody>
@@ -7788,15 +7543,14 @@
           </a:bodyPr>
           <a:lstStyle/>
           <a:p>
-            <a:pPr algn="ctr"/>
-            <a:r>
-              <a:rPr sz="1400" b="1" i="0">
-                <a:solidFill>
-                  <a:srgbClr val="F5F7F2"/>
-                </a:solidFill>
-                <a:latin typeface="Calibri"/>
-              </a:rPr>
-              <a:t>Non-Functional Requirements (NFR1–NFR6)</a:t>
+            <a:r>
+              <a:rPr sz="1200" b="1">
+                <a:solidFill>
+                  <a:srgbClr val="FFFFFF"/>
+                </a:solidFill>
+                <a:latin typeface="Calibri"/>
+              </a:rPr>
+              <a:t>Non-Functional Requirements (NFR1–NFR5) — Report Table 3.1</a:t>
             </a:r>
           </a:p>
         </p:txBody>
@@ -7823,22 +7577,1376 @@
           </a:bodyPr>
           <a:lstStyle/>
           <a:p>
-            <a:pPr algn="l">
-              <a:spcBef>
-                <a:spcPts val="0"/>
-              </a:spcBef>
-              <a:spcAft>
-                <a:spcPts val="800"/>
-              </a:spcAft>
-            </a:pPr>
-            <a:r>
-              <a:rPr sz="1300" b="0" i="0">
-                <a:solidFill>
-                  <a:srgbClr val="F5F7F2"/>
-                </a:solidFill>
-                <a:latin typeface="Calibri"/>
-              </a:rPr>
-              <a:t>▪  Six Pipeline Function Groups From Image Input To Dashboard Display, Plus Six Quality Attributes With Measurable Targets (≥15 FPS, mAP Tracking, Zero-Overlap Splits).</a:t>
+            <a:r>
+              <a:t>▪  Report Table 3.1 Lists 7 Functional And 5 Non-Functional Requirements, With Measurable Targets (≥15 FPS, mAP Tracking, Zero-Overlap Group-Aware Splits).</a:t>
+            </a:r>
+          </a:p>
+        </p:txBody>
+      </p:sp>
+      <p:sp>
+        <p:nvSpPr>
+          <p:cNvPr id="12" name="Rectangle 11"/>
+          <p:cNvSpPr/>
+          <p:nvPr/>
+        </p:nvSpPr>
+        <p:spPr>
+          <a:xfrm>
+            <a:off x="320040" y="1481328"/>
+            <a:ext cx="5623560" cy="420624"/>
+          </a:xfrm>
+          <a:prstGeom prst="rect">
+            <a:avLst/>
+          </a:prstGeom>
+          <a:solidFill>
+            <a:srgbClr val="D99A06"/>
+          </a:solidFill>
+          <a:ln>
+            <a:noFill/>
+          </a:ln>
+          <a:effectLst/>
+        </p:spPr>
+        <p:style>
+          <a:lnRef idx="1">
+            <a:schemeClr val="accent1"/>
+          </a:lnRef>
+          <a:fillRef idx="3">
+            <a:schemeClr val="accent1"/>
+          </a:fillRef>
+          <a:effectRef idx="2">
+            <a:schemeClr val="accent1"/>
+          </a:effectRef>
+          <a:fontRef idx="minor">
+            <a:schemeClr val="lt1"/>
+          </a:fontRef>
+        </p:style>
+        <p:txBody>
+          <a:bodyPr rtlCol="0" anchor="ctr"/>
+          <a:lstStyle/>
+          <a:p>
+            <a:pPr algn="ctr"/>
+          </a:p>
+        </p:txBody>
+      </p:sp>
+      <p:sp>
+        <p:nvSpPr>
+          <p:cNvPr id="13" name="TextBox 12"/>
+          <p:cNvSpPr txBox="1"/>
+          <p:nvPr/>
+        </p:nvSpPr>
+        <p:spPr>
+          <a:xfrm>
+            <a:off x="484632" y="1517904"/>
+            <a:ext cx="5294376" cy="182880"/>
+          </a:xfrm>
+          <a:prstGeom prst="rect">
+            <a:avLst/>
+          </a:prstGeom>
+          <a:noFill/>
+        </p:spPr>
+        <p:txBody>
+          <a:bodyPr wrap="square" lIns="0" rIns="0" tIns="0" bIns="0">
+            <a:spAutoFit/>
+          </a:bodyPr>
+          <a:lstStyle/>
+          <a:p>
+            <a:pPr algn="l"/>
+            <a:r>
+              <a:rPr sz="1050" b="1">
+                <a:solidFill>
+                  <a:srgbClr val="144E4C"/>
+                </a:solidFill>
+                <a:latin typeface="Calibri"/>
+              </a:rPr>
+              <a:t>FR1 — Input</a:t>
+            </a:r>
+          </a:p>
+        </p:txBody>
+      </p:sp>
+      <p:sp>
+        <p:nvSpPr>
+          <p:cNvPr id="14" name="TextBox 13"/>
+          <p:cNvSpPr txBox="1"/>
+          <p:nvPr/>
+        </p:nvSpPr>
+        <p:spPr>
+          <a:xfrm>
+            <a:off x="484632" y="1691640"/>
+            <a:ext cx="5294376" cy="182880"/>
+          </a:xfrm>
+          <a:prstGeom prst="rect">
+            <a:avLst/>
+          </a:prstGeom>
+          <a:noFill/>
+        </p:spPr>
+        <p:txBody>
+          <a:bodyPr wrap="square" lIns="0" rIns="0" tIns="0" bIns="0">
+            <a:spAutoFit/>
+          </a:bodyPr>
+          <a:lstStyle/>
+          <a:p>
+            <a:pPr algn="l"/>
+            <a:r>
+              <a:rPr sz="950" b="0">
+                <a:solidFill>
+                  <a:srgbClr val="5B6570"/>
+                </a:solidFill>
+                <a:latin typeface="Calibri"/>
+              </a:rPr>
+              <a:t>Fabric image / video stream accepted</a:t>
+            </a:r>
+          </a:p>
+        </p:txBody>
+      </p:sp>
+      <p:sp>
+        <p:nvSpPr>
+          <p:cNvPr id="15" name="Rectangle 14"/>
+          <p:cNvSpPr/>
+          <p:nvPr/>
+        </p:nvSpPr>
+        <p:spPr>
+          <a:xfrm>
+            <a:off x="320040" y="1975104"/>
+            <a:ext cx="5623560" cy="420624"/>
+          </a:xfrm>
+          <a:prstGeom prst="rect">
+            <a:avLst/>
+          </a:prstGeom>
+          <a:solidFill>
+            <a:srgbClr val="D99A06"/>
+          </a:solidFill>
+          <a:ln>
+            <a:noFill/>
+          </a:ln>
+          <a:effectLst/>
+        </p:spPr>
+        <p:style>
+          <a:lnRef idx="1">
+            <a:schemeClr val="accent1"/>
+          </a:lnRef>
+          <a:fillRef idx="3">
+            <a:schemeClr val="accent1"/>
+          </a:fillRef>
+          <a:effectRef idx="2">
+            <a:schemeClr val="accent1"/>
+          </a:effectRef>
+          <a:fontRef idx="minor">
+            <a:schemeClr val="lt1"/>
+          </a:fontRef>
+        </p:style>
+        <p:txBody>
+          <a:bodyPr rtlCol="0" anchor="ctr"/>
+          <a:lstStyle/>
+          <a:p>
+            <a:pPr algn="ctr"/>
+          </a:p>
+        </p:txBody>
+      </p:sp>
+      <p:sp>
+        <p:nvSpPr>
+          <p:cNvPr id="16" name="TextBox 15"/>
+          <p:cNvSpPr txBox="1"/>
+          <p:nvPr/>
+        </p:nvSpPr>
+        <p:spPr>
+          <a:xfrm>
+            <a:off x="484632" y="2011680"/>
+            <a:ext cx="5294376" cy="182880"/>
+          </a:xfrm>
+          <a:prstGeom prst="rect">
+            <a:avLst/>
+          </a:prstGeom>
+          <a:noFill/>
+        </p:spPr>
+        <p:txBody>
+          <a:bodyPr wrap="square" lIns="0" rIns="0" tIns="0" bIns="0">
+            <a:spAutoFit/>
+          </a:bodyPr>
+          <a:lstStyle/>
+          <a:p>
+            <a:pPr algn="l"/>
+            <a:r>
+              <a:rPr sz="1050" b="1">
+                <a:solidFill>
+                  <a:srgbClr val="144E4C"/>
+                </a:solidFill>
+                <a:latin typeface="Calibri"/>
+              </a:rPr>
+              <a:t>FR2 — Preprocess</a:t>
+            </a:r>
+          </a:p>
+        </p:txBody>
+      </p:sp>
+      <p:sp>
+        <p:nvSpPr>
+          <p:cNvPr id="17" name="TextBox 16"/>
+          <p:cNvSpPr txBox="1"/>
+          <p:nvPr/>
+        </p:nvSpPr>
+        <p:spPr>
+          <a:xfrm>
+            <a:off x="484632" y="2185416"/>
+            <a:ext cx="5294376" cy="182880"/>
+          </a:xfrm>
+          <a:prstGeom prst="rect">
+            <a:avLst/>
+          </a:prstGeom>
+          <a:noFill/>
+        </p:spPr>
+        <p:txBody>
+          <a:bodyPr wrap="square" lIns="0" rIns="0" tIns="0" bIns="0">
+            <a:spAutoFit/>
+          </a:bodyPr>
+          <a:lstStyle/>
+          <a:p>
+            <a:pPr algn="l"/>
+            <a:r>
+              <a:rPr sz="950" b="0">
+                <a:solidFill>
+                  <a:srgbClr val="5B6570"/>
+                </a:solidFill>
+                <a:latin typeface="Calibri"/>
+              </a:rPr>
+              <a:t>Denoise, deblur, low-light normalisation</a:t>
+            </a:r>
+          </a:p>
+        </p:txBody>
+      </p:sp>
+      <p:sp>
+        <p:nvSpPr>
+          <p:cNvPr id="18" name="Rectangle 17"/>
+          <p:cNvSpPr/>
+          <p:nvPr/>
+        </p:nvSpPr>
+        <p:spPr>
+          <a:xfrm>
+            <a:off x="320040" y="2468880"/>
+            <a:ext cx="5623560" cy="420624"/>
+          </a:xfrm>
+          <a:prstGeom prst="rect">
+            <a:avLst/>
+          </a:prstGeom>
+          <a:solidFill>
+            <a:srgbClr val="D99A06"/>
+          </a:solidFill>
+          <a:ln>
+            <a:noFill/>
+          </a:ln>
+          <a:effectLst/>
+        </p:spPr>
+        <p:style>
+          <a:lnRef idx="1">
+            <a:schemeClr val="accent1"/>
+          </a:lnRef>
+          <a:fillRef idx="3">
+            <a:schemeClr val="accent1"/>
+          </a:fillRef>
+          <a:effectRef idx="2">
+            <a:schemeClr val="accent1"/>
+          </a:effectRef>
+          <a:fontRef idx="minor">
+            <a:schemeClr val="lt1"/>
+          </a:fontRef>
+        </p:style>
+        <p:txBody>
+          <a:bodyPr rtlCol="0" anchor="ctr"/>
+          <a:lstStyle/>
+          <a:p>
+            <a:pPr algn="ctr"/>
+          </a:p>
+        </p:txBody>
+      </p:sp>
+      <p:sp>
+        <p:nvSpPr>
+          <p:cNvPr id="19" name="TextBox 18"/>
+          <p:cNvSpPr txBox="1"/>
+          <p:nvPr/>
+        </p:nvSpPr>
+        <p:spPr>
+          <a:xfrm>
+            <a:off x="484632" y="2505456"/>
+            <a:ext cx="5294376" cy="182880"/>
+          </a:xfrm>
+          <a:prstGeom prst="rect">
+            <a:avLst/>
+          </a:prstGeom>
+          <a:noFill/>
+        </p:spPr>
+        <p:txBody>
+          <a:bodyPr wrap="square" lIns="0" rIns="0" tIns="0" bIns="0">
+            <a:spAutoFit/>
+          </a:bodyPr>
+          <a:lstStyle/>
+          <a:p>
+            <a:pPr algn="l"/>
+            <a:r>
+              <a:rPr sz="1050" b="1">
+                <a:solidFill>
+                  <a:srgbClr val="144E4C"/>
+                </a:solidFill>
+                <a:latin typeface="Calibri"/>
+              </a:rPr>
+              <a:t>FR3 — Detect</a:t>
+            </a:r>
+          </a:p>
+        </p:txBody>
+      </p:sp>
+      <p:sp>
+        <p:nvSpPr>
+          <p:cNvPr id="20" name="TextBox 19"/>
+          <p:cNvSpPr txBox="1"/>
+          <p:nvPr/>
+        </p:nvSpPr>
+        <p:spPr>
+          <a:xfrm>
+            <a:off x="484632" y="2679192"/>
+            <a:ext cx="5294376" cy="182880"/>
+          </a:xfrm>
+          <a:prstGeom prst="rect">
+            <a:avLst/>
+          </a:prstGeom>
+          <a:noFill/>
+        </p:spPr>
+        <p:txBody>
+          <a:bodyPr wrap="square" lIns="0" rIns="0" tIns="0" bIns="0">
+            <a:spAutoFit/>
+          </a:bodyPr>
+          <a:lstStyle/>
+          <a:p>
+            <a:pPr algn="l"/>
+            <a:r>
+              <a:rPr sz="950" b="0">
+                <a:solidFill>
+                  <a:srgbClr val="5B6570"/>
+                </a:solidFill>
+                <a:latin typeface="Calibri"/>
+              </a:rPr>
+              <a:t>Defect type from YOLO detection</a:t>
+            </a:r>
+          </a:p>
+        </p:txBody>
+      </p:sp>
+      <p:sp>
+        <p:nvSpPr>
+          <p:cNvPr id="21" name="Rectangle 20"/>
+          <p:cNvSpPr/>
+          <p:nvPr/>
+        </p:nvSpPr>
+        <p:spPr>
+          <a:xfrm>
+            <a:off x="320040" y="2962656"/>
+            <a:ext cx="5623560" cy="420624"/>
+          </a:xfrm>
+          <a:prstGeom prst="rect">
+            <a:avLst/>
+          </a:prstGeom>
+          <a:solidFill>
+            <a:srgbClr val="D99A06"/>
+          </a:solidFill>
+          <a:ln>
+            <a:noFill/>
+          </a:ln>
+          <a:effectLst/>
+        </p:spPr>
+        <p:style>
+          <a:lnRef idx="1">
+            <a:schemeClr val="accent1"/>
+          </a:lnRef>
+          <a:fillRef idx="3">
+            <a:schemeClr val="accent1"/>
+          </a:fillRef>
+          <a:effectRef idx="2">
+            <a:schemeClr val="accent1"/>
+          </a:effectRef>
+          <a:fontRef idx="minor">
+            <a:schemeClr val="lt1"/>
+          </a:fontRef>
+        </p:style>
+        <p:txBody>
+          <a:bodyPr rtlCol="0" anchor="ctr"/>
+          <a:lstStyle/>
+          <a:p>
+            <a:pPr algn="ctr"/>
+          </a:p>
+        </p:txBody>
+      </p:sp>
+      <p:sp>
+        <p:nvSpPr>
+          <p:cNvPr id="22" name="TextBox 21"/>
+          <p:cNvSpPr txBox="1"/>
+          <p:nvPr/>
+        </p:nvSpPr>
+        <p:spPr>
+          <a:xfrm>
+            <a:off x="484632" y="2999232"/>
+            <a:ext cx="5294376" cy="182880"/>
+          </a:xfrm>
+          <a:prstGeom prst="rect">
+            <a:avLst/>
+          </a:prstGeom>
+          <a:noFill/>
+        </p:spPr>
+        <p:txBody>
+          <a:bodyPr wrap="square" lIns="0" rIns="0" tIns="0" bIns="0">
+            <a:spAutoFit/>
+          </a:bodyPr>
+          <a:lstStyle/>
+          <a:p>
+            <a:pPr algn="l"/>
+            <a:r>
+              <a:rPr sz="1050" b="1">
+                <a:solidFill>
+                  <a:srgbClr val="144E4C"/>
+                </a:solidFill>
+                <a:latin typeface="Calibri"/>
+              </a:rPr>
+              <a:t>FR4 — Classify</a:t>
+            </a:r>
+          </a:p>
+        </p:txBody>
+      </p:sp>
+      <p:sp>
+        <p:nvSpPr>
+          <p:cNvPr id="23" name="TextBox 22"/>
+          <p:cNvSpPr txBox="1"/>
+          <p:nvPr/>
+        </p:nvSpPr>
+        <p:spPr>
+          <a:xfrm>
+            <a:off x="484632" y="3172968"/>
+            <a:ext cx="5294376" cy="182880"/>
+          </a:xfrm>
+          <a:prstGeom prst="rect">
+            <a:avLst/>
+          </a:prstGeom>
+          <a:noFill/>
+        </p:spPr>
+        <p:txBody>
+          <a:bodyPr wrap="square" lIns="0" rIns="0" tIns="0" bIns="0">
+            <a:spAutoFit/>
+          </a:bodyPr>
+          <a:lstStyle/>
+          <a:p>
+            <a:pPr algn="l"/>
+            <a:r>
+              <a:rPr sz="950" b="0">
+                <a:solidFill>
+                  <a:srgbClr val="5B6570"/>
+                </a:solidFill>
+                <a:latin typeface="Calibri"/>
+              </a:rPr>
+              <a:t>Defect-free frames identified</a:t>
+            </a:r>
+          </a:p>
+        </p:txBody>
+      </p:sp>
+      <p:sp>
+        <p:nvSpPr>
+          <p:cNvPr id="24" name="Rectangle 23"/>
+          <p:cNvSpPr/>
+          <p:nvPr/>
+        </p:nvSpPr>
+        <p:spPr>
+          <a:xfrm>
+            <a:off x="320040" y="3456432"/>
+            <a:ext cx="5623560" cy="420624"/>
+          </a:xfrm>
+          <a:prstGeom prst="rect">
+            <a:avLst/>
+          </a:prstGeom>
+          <a:solidFill>
+            <a:srgbClr val="D99A06"/>
+          </a:solidFill>
+          <a:ln>
+            <a:noFill/>
+          </a:ln>
+          <a:effectLst/>
+        </p:spPr>
+        <p:style>
+          <a:lnRef idx="1">
+            <a:schemeClr val="accent1"/>
+          </a:lnRef>
+          <a:fillRef idx="3">
+            <a:schemeClr val="accent1"/>
+          </a:fillRef>
+          <a:effectRef idx="2">
+            <a:schemeClr val="accent1"/>
+          </a:effectRef>
+          <a:fontRef idx="minor">
+            <a:schemeClr val="lt1"/>
+          </a:fontRef>
+        </p:style>
+        <p:txBody>
+          <a:bodyPr rtlCol="0" anchor="ctr"/>
+          <a:lstStyle/>
+          <a:p>
+            <a:pPr algn="ctr"/>
+          </a:p>
+        </p:txBody>
+      </p:sp>
+      <p:sp>
+        <p:nvSpPr>
+          <p:cNvPr id="25" name="TextBox 24"/>
+          <p:cNvSpPr txBox="1"/>
+          <p:nvPr/>
+        </p:nvSpPr>
+        <p:spPr>
+          <a:xfrm>
+            <a:off x="484632" y="3493008"/>
+            <a:ext cx="5294376" cy="182880"/>
+          </a:xfrm>
+          <a:prstGeom prst="rect">
+            <a:avLst/>
+          </a:prstGeom>
+          <a:noFill/>
+        </p:spPr>
+        <p:txBody>
+          <a:bodyPr wrap="square" lIns="0" rIns="0" tIns="0" bIns="0">
+            <a:spAutoFit/>
+          </a:bodyPr>
+          <a:lstStyle/>
+          <a:p>
+            <a:pPr algn="l"/>
+            <a:r>
+              <a:rPr sz="1050" b="1">
+                <a:solidFill>
+                  <a:srgbClr val="144E4C"/>
+                </a:solidFill>
+                <a:latin typeface="Calibri"/>
+              </a:rPr>
+              <a:t>FR5 — Score</a:t>
+            </a:r>
+          </a:p>
+        </p:txBody>
+      </p:sp>
+      <p:sp>
+        <p:nvSpPr>
+          <p:cNvPr id="26" name="TextBox 25"/>
+          <p:cNvSpPr txBox="1"/>
+          <p:nvPr/>
+        </p:nvSpPr>
+        <p:spPr>
+          <a:xfrm>
+            <a:off x="484632" y="3666744"/>
+            <a:ext cx="5294376" cy="182880"/>
+          </a:xfrm>
+          <a:prstGeom prst="rect">
+            <a:avLst/>
+          </a:prstGeom>
+          <a:noFill/>
+        </p:spPr>
+        <p:txBody>
+          <a:bodyPr wrap="square" lIns="0" rIns="0" tIns="0" bIns="0">
+            <a:spAutoFit/>
+          </a:bodyPr>
+          <a:lstStyle/>
+          <a:p>
+            <a:pPr algn="l"/>
+            <a:r>
+              <a:rPr sz="950" b="0">
+                <a:solidFill>
+                  <a:srgbClr val="5B6570"/>
+                </a:solidFill>
+                <a:latin typeface="Calibri"/>
+              </a:rPr>
+              <a:t>Area ratio and Defect Density Score (Ds)</a:t>
+            </a:r>
+          </a:p>
+        </p:txBody>
+      </p:sp>
+      <p:sp>
+        <p:nvSpPr>
+          <p:cNvPr id="27" name="Rectangle 26"/>
+          <p:cNvSpPr/>
+          <p:nvPr/>
+        </p:nvSpPr>
+        <p:spPr>
+          <a:xfrm>
+            <a:off x="320040" y="3950208"/>
+            <a:ext cx="5623560" cy="420624"/>
+          </a:xfrm>
+          <a:prstGeom prst="rect">
+            <a:avLst/>
+          </a:prstGeom>
+          <a:solidFill>
+            <a:srgbClr val="D99A06"/>
+          </a:solidFill>
+          <a:ln>
+            <a:noFill/>
+          </a:ln>
+          <a:effectLst/>
+        </p:spPr>
+        <p:style>
+          <a:lnRef idx="1">
+            <a:schemeClr val="accent1"/>
+          </a:lnRef>
+          <a:fillRef idx="3">
+            <a:schemeClr val="accent1"/>
+          </a:fillRef>
+          <a:effectRef idx="2">
+            <a:schemeClr val="accent1"/>
+          </a:effectRef>
+          <a:fontRef idx="minor">
+            <a:schemeClr val="lt1"/>
+          </a:fontRef>
+        </p:style>
+        <p:txBody>
+          <a:bodyPr rtlCol="0" anchor="ctr"/>
+          <a:lstStyle/>
+          <a:p>
+            <a:pPr algn="ctr"/>
+          </a:p>
+        </p:txBody>
+      </p:sp>
+      <p:sp>
+        <p:nvSpPr>
+          <p:cNvPr id="28" name="TextBox 27"/>
+          <p:cNvSpPr txBox="1"/>
+          <p:nvPr/>
+        </p:nvSpPr>
+        <p:spPr>
+          <a:xfrm>
+            <a:off x="484632" y="3986784"/>
+            <a:ext cx="5294376" cy="182880"/>
+          </a:xfrm>
+          <a:prstGeom prst="rect">
+            <a:avLst/>
+          </a:prstGeom>
+          <a:noFill/>
+        </p:spPr>
+        <p:txBody>
+          <a:bodyPr wrap="square" lIns="0" rIns="0" tIns="0" bIns="0">
+            <a:spAutoFit/>
+          </a:bodyPr>
+          <a:lstStyle/>
+          <a:p>
+            <a:pPr algn="l"/>
+            <a:r>
+              <a:rPr sz="1050" b="1">
+                <a:solidFill>
+                  <a:srgbClr val="144E4C"/>
+                </a:solidFill>
+                <a:latin typeface="Calibri"/>
+              </a:rPr>
+              <a:t>FR6 — Predict</a:t>
+            </a:r>
+          </a:p>
+        </p:txBody>
+      </p:sp>
+      <p:sp>
+        <p:nvSpPr>
+          <p:cNvPr id="29" name="TextBox 28"/>
+          <p:cNvSpPr txBox="1"/>
+          <p:nvPr/>
+        </p:nvSpPr>
+        <p:spPr>
+          <a:xfrm>
+            <a:off x="484632" y="4160520"/>
+            <a:ext cx="5294376" cy="182880"/>
+          </a:xfrm>
+          <a:prstGeom prst="rect">
+            <a:avLst/>
+          </a:prstGeom>
+          <a:noFill/>
+        </p:spPr>
+        <p:txBody>
+          <a:bodyPr wrap="square" lIns="0" rIns="0" tIns="0" bIns="0">
+            <a:spAutoFit/>
+          </a:bodyPr>
+          <a:lstStyle/>
+          <a:p>
+            <a:pPr algn="l"/>
+            <a:r>
+              <a:rPr sz="950" b="0">
+                <a:solidFill>
+                  <a:srgbClr val="5B6570"/>
+                </a:solidFill>
+                <a:latin typeface="Calibri"/>
+              </a:rPr>
+              <a:t>Random Forest lead-time prediction</a:t>
+            </a:r>
+          </a:p>
+        </p:txBody>
+      </p:sp>
+      <p:sp>
+        <p:nvSpPr>
+          <p:cNvPr id="30" name="Rectangle 29"/>
+          <p:cNvSpPr/>
+          <p:nvPr/>
+        </p:nvSpPr>
+        <p:spPr>
+          <a:xfrm>
+            <a:off x="320040" y="4443984"/>
+            <a:ext cx="5623560" cy="420624"/>
+          </a:xfrm>
+          <a:prstGeom prst="rect">
+            <a:avLst/>
+          </a:prstGeom>
+          <a:solidFill>
+            <a:srgbClr val="D99A06"/>
+          </a:solidFill>
+          <a:ln>
+            <a:noFill/>
+          </a:ln>
+          <a:effectLst/>
+        </p:spPr>
+        <p:style>
+          <a:lnRef idx="1">
+            <a:schemeClr val="accent1"/>
+          </a:lnRef>
+          <a:fillRef idx="3">
+            <a:schemeClr val="accent1"/>
+          </a:fillRef>
+          <a:effectRef idx="2">
+            <a:schemeClr val="accent1"/>
+          </a:effectRef>
+          <a:fontRef idx="minor">
+            <a:schemeClr val="lt1"/>
+          </a:fontRef>
+        </p:style>
+        <p:txBody>
+          <a:bodyPr rtlCol="0" anchor="ctr"/>
+          <a:lstStyle/>
+          <a:p>
+            <a:pPr algn="ctr"/>
+          </a:p>
+        </p:txBody>
+      </p:sp>
+      <p:sp>
+        <p:nvSpPr>
+          <p:cNvPr id="31" name="TextBox 30"/>
+          <p:cNvSpPr txBox="1"/>
+          <p:nvPr/>
+        </p:nvSpPr>
+        <p:spPr>
+          <a:xfrm>
+            <a:off x="484632" y="4480560"/>
+            <a:ext cx="5294376" cy="182880"/>
+          </a:xfrm>
+          <a:prstGeom prst="rect">
+            <a:avLst/>
+          </a:prstGeom>
+          <a:noFill/>
+        </p:spPr>
+        <p:txBody>
+          <a:bodyPr wrap="square" lIns="0" rIns="0" tIns="0" bIns="0">
+            <a:spAutoFit/>
+          </a:bodyPr>
+          <a:lstStyle/>
+          <a:p>
+            <a:pPr algn="l"/>
+            <a:r>
+              <a:rPr sz="1050" b="1">
+                <a:solidFill>
+                  <a:srgbClr val="144E4C"/>
+                </a:solidFill>
+                <a:latin typeface="Calibri"/>
+              </a:rPr>
+              <a:t>FR7 — Output</a:t>
+            </a:r>
+          </a:p>
+        </p:txBody>
+      </p:sp>
+      <p:sp>
+        <p:nvSpPr>
+          <p:cNvPr id="32" name="TextBox 31"/>
+          <p:cNvSpPr txBox="1"/>
+          <p:nvPr/>
+        </p:nvSpPr>
+        <p:spPr>
+          <a:xfrm>
+            <a:off x="484632" y="4654296"/>
+            <a:ext cx="5294376" cy="182880"/>
+          </a:xfrm>
+          <a:prstGeom prst="rect">
+            <a:avLst/>
+          </a:prstGeom>
+          <a:noFill/>
+        </p:spPr>
+        <p:txBody>
+          <a:bodyPr wrap="square" lIns="0" rIns="0" tIns="0" bIns="0">
+            <a:spAutoFit/>
+          </a:bodyPr>
+          <a:lstStyle/>
+          <a:p>
+            <a:pPr algn="l"/>
+            <a:r>
+              <a:rPr sz="950" b="0">
+                <a:solidFill>
+                  <a:srgbClr val="5B6570"/>
+                </a:solidFill>
+                <a:latin typeface="Calibri"/>
+              </a:rPr>
+              <a:t>Result output to the planner dashboard</a:t>
+            </a:r>
+          </a:p>
+        </p:txBody>
+      </p:sp>
+      <p:sp>
+        <p:nvSpPr>
+          <p:cNvPr id="33" name="Rectangle 32"/>
+          <p:cNvSpPr/>
+          <p:nvPr/>
+        </p:nvSpPr>
+        <p:spPr>
+          <a:xfrm>
+            <a:off x="6245352" y="1481328"/>
+            <a:ext cx="5623560" cy="621792"/>
+          </a:xfrm>
+          <a:prstGeom prst="rect">
+            <a:avLst/>
+          </a:prstGeom>
+          <a:solidFill>
+            <a:srgbClr val="D99A06"/>
+          </a:solidFill>
+          <a:ln>
+            <a:noFill/>
+          </a:ln>
+          <a:effectLst/>
+        </p:spPr>
+        <p:style>
+          <a:lnRef idx="1">
+            <a:schemeClr val="accent1"/>
+          </a:lnRef>
+          <a:fillRef idx="3">
+            <a:schemeClr val="accent1"/>
+          </a:fillRef>
+          <a:effectRef idx="2">
+            <a:schemeClr val="accent1"/>
+          </a:effectRef>
+          <a:fontRef idx="minor">
+            <a:schemeClr val="lt1"/>
+          </a:fontRef>
+        </p:style>
+        <p:txBody>
+          <a:bodyPr rtlCol="0" anchor="ctr"/>
+          <a:lstStyle/>
+          <a:p>
+            <a:pPr algn="ctr"/>
+          </a:p>
+        </p:txBody>
+      </p:sp>
+      <p:sp>
+        <p:nvSpPr>
+          <p:cNvPr id="34" name="TextBox 33"/>
+          <p:cNvSpPr txBox="1"/>
+          <p:nvPr/>
+        </p:nvSpPr>
+        <p:spPr>
+          <a:xfrm>
+            <a:off x="6409944" y="1554480"/>
+            <a:ext cx="5294376" cy="219456"/>
+          </a:xfrm>
+          <a:prstGeom prst="rect">
+            <a:avLst/>
+          </a:prstGeom>
+          <a:noFill/>
+        </p:spPr>
+        <p:txBody>
+          <a:bodyPr wrap="square" lIns="0" rIns="0" tIns="0" bIns="0">
+            <a:spAutoFit/>
+          </a:bodyPr>
+          <a:lstStyle/>
+          <a:p>
+            <a:pPr algn="l"/>
+            <a:r>
+              <a:rPr sz="1100" b="1">
+                <a:solidFill>
+                  <a:srgbClr val="144E4C"/>
+                </a:solidFill>
+                <a:latin typeface="Calibri"/>
+              </a:rPr>
+              <a:t>NFR1 — Accurate</a:t>
+            </a:r>
+          </a:p>
+        </p:txBody>
+      </p:sp>
+      <p:sp>
+        <p:nvSpPr>
+          <p:cNvPr id="35" name="TextBox 34"/>
+          <p:cNvSpPr txBox="1"/>
+          <p:nvPr/>
+        </p:nvSpPr>
+        <p:spPr>
+          <a:xfrm>
+            <a:off x="6409944" y="1810512"/>
+            <a:ext cx="5294376" cy="219456"/>
+          </a:xfrm>
+          <a:prstGeom prst="rect">
+            <a:avLst/>
+          </a:prstGeom>
+          <a:noFill/>
+        </p:spPr>
+        <p:txBody>
+          <a:bodyPr wrap="square" lIns="0" rIns="0" tIns="0" bIns="0">
+            <a:spAutoFit/>
+          </a:bodyPr>
+          <a:lstStyle/>
+          <a:p>
+            <a:pPr algn="l"/>
+            <a:r>
+              <a:rPr sz="1000" b="0">
+                <a:solidFill>
+                  <a:srgbClr val="5B6570"/>
+                </a:solidFill>
+                <a:latin typeface="Calibri"/>
+              </a:rPr>
+              <a:t>mAP tracking during evaluation</a:t>
+            </a:r>
+          </a:p>
+        </p:txBody>
+      </p:sp>
+      <p:sp>
+        <p:nvSpPr>
+          <p:cNvPr id="36" name="Rectangle 35"/>
+          <p:cNvSpPr/>
+          <p:nvPr/>
+        </p:nvSpPr>
+        <p:spPr>
+          <a:xfrm>
+            <a:off x="6245352" y="2176272"/>
+            <a:ext cx="5623560" cy="621792"/>
+          </a:xfrm>
+          <a:prstGeom prst="rect">
+            <a:avLst/>
+          </a:prstGeom>
+          <a:solidFill>
+            <a:srgbClr val="D99A06"/>
+          </a:solidFill>
+          <a:ln>
+            <a:noFill/>
+          </a:ln>
+          <a:effectLst/>
+        </p:spPr>
+        <p:style>
+          <a:lnRef idx="1">
+            <a:schemeClr val="accent1"/>
+          </a:lnRef>
+          <a:fillRef idx="3">
+            <a:schemeClr val="accent1"/>
+          </a:fillRef>
+          <a:effectRef idx="2">
+            <a:schemeClr val="accent1"/>
+          </a:effectRef>
+          <a:fontRef idx="minor">
+            <a:schemeClr val="lt1"/>
+          </a:fontRef>
+        </p:style>
+        <p:txBody>
+          <a:bodyPr rtlCol="0" anchor="ctr"/>
+          <a:lstStyle/>
+          <a:p>
+            <a:pPr algn="ctr"/>
+          </a:p>
+        </p:txBody>
+      </p:sp>
+      <p:sp>
+        <p:nvSpPr>
+          <p:cNvPr id="37" name="TextBox 36"/>
+          <p:cNvSpPr txBox="1"/>
+          <p:nvPr/>
+        </p:nvSpPr>
+        <p:spPr>
+          <a:xfrm>
+            <a:off x="6409944" y="2249424"/>
+            <a:ext cx="5294376" cy="219456"/>
+          </a:xfrm>
+          <a:prstGeom prst="rect">
+            <a:avLst/>
+          </a:prstGeom>
+          <a:noFill/>
+        </p:spPr>
+        <p:txBody>
+          <a:bodyPr wrap="square" lIns="0" rIns="0" tIns="0" bIns="0">
+            <a:spAutoFit/>
+          </a:bodyPr>
+          <a:lstStyle/>
+          <a:p>
+            <a:pPr algn="l"/>
+            <a:r>
+              <a:rPr sz="1100" b="1">
+                <a:solidFill>
+                  <a:srgbClr val="144E4C"/>
+                </a:solidFill>
+                <a:latin typeface="Calibri"/>
+              </a:rPr>
+              <a:t>NFR2 — Robust</a:t>
+            </a:r>
+          </a:p>
+        </p:txBody>
+      </p:sp>
+      <p:sp>
+        <p:nvSpPr>
+          <p:cNvPr id="38" name="TextBox 37"/>
+          <p:cNvSpPr txBox="1"/>
+          <p:nvPr/>
+        </p:nvSpPr>
+        <p:spPr>
+          <a:xfrm>
+            <a:off x="6409944" y="2505456"/>
+            <a:ext cx="5294376" cy="219456"/>
+          </a:xfrm>
+          <a:prstGeom prst="rect">
+            <a:avLst/>
+          </a:prstGeom>
+          <a:noFill/>
+        </p:spPr>
+        <p:txBody>
+          <a:bodyPr wrap="square" lIns="0" rIns="0" tIns="0" bIns="0">
+            <a:spAutoFit/>
+          </a:bodyPr>
+          <a:lstStyle/>
+          <a:p>
+            <a:pPr algn="l"/>
+            <a:r>
+              <a:rPr sz="1000" b="0">
+                <a:solidFill>
+                  <a:srgbClr val="5B6570"/>
+                </a:solidFill>
+                <a:latin typeface="Calibri"/>
+              </a:rPr>
+              <a:t>Lighting and texture variation</a:t>
+            </a:r>
+          </a:p>
+        </p:txBody>
+      </p:sp>
+      <p:sp>
+        <p:nvSpPr>
+          <p:cNvPr id="39" name="Rectangle 38"/>
+          <p:cNvSpPr/>
+          <p:nvPr/>
+        </p:nvSpPr>
+        <p:spPr>
+          <a:xfrm>
+            <a:off x="6245352" y="2871216"/>
+            <a:ext cx="5623560" cy="621792"/>
+          </a:xfrm>
+          <a:prstGeom prst="rect">
+            <a:avLst/>
+          </a:prstGeom>
+          <a:solidFill>
+            <a:srgbClr val="D99A06"/>
+          </a:solidFill>
+          <a:ln>
+            <a:noFill/>
+          </a:ln>
+          <a:effectLst/>
+        </p:spPr>
+        <p:style>
+          <a:lnRef idx="1">
+            <a:schemeClr val="accent1"/>
+          </a:lnRef>
+          <a:fillRef idx="3">
+            <a:schemeClr val="accent1"/>
+          </a:fillRef>
+          <a:effectRef idx="2">
+            <a:schemeClr val="accent1"/>
+          </a:effectRef>
+          <a:fontRef idx="minor">
+            <a:schemeClr val="lt1"/>
+          </a:fontRef>
+        </p:style>
+        <p:txBody>
+          <a:bodyPr rtlCol="0" anchor="ctr"/>
+          <a:lstStyle/>
+          <a:p>
+            <a:pPr algn="ctr"/>
+          </a:p>
+        </p:txBody>
+      </p:sp>
+      <p:sp>
+        <p:nvSpPr>
+          <p:cNvPr id="40" name="TextBox 39"/>
+          <p:cNvSpPr txBox="1"/>
+          <p:nvPr/>
+        </p:nvSpPr>
+        <p:spPr>
+          <a:xfrm>
+            <a:off x="6409944" y="2944368"/>
+            <a:ext cx="5294376" cy="219456"/>
+          </a:xfrm>
+          <a:prstGeom prst="rect">
+            <a:avLst/>
+          </a:prstGeom>
+          <a:noFill/>
+        </p:spPr>
+        <p:txBody>
+          <a:bodyPr wrap="square" lIns="0" rIns="0" tIns="0" bIns="0">
+            <a:spAutoFit/>
+          </a:bodyPr>
+          <a:lstStyle/>
+          <a:p>
+            <a:pPr algn="l"/>
+            <a:r>
+              <a:rPr sz="1100" b="1">
+                <a:solidFill>
+                  <a:srgbClr val="144E4C"/>
+                </a:solidFill>
+                <a:latin typeface="Calibri"/>
+              </a:rPr>
+              <a:t>NFR3 — Efficient</a:t>
+            </a:r>
+          </a:p>
+        </p:txBody>
+      </p:sp>
+      <p:sp>
+        <p:nvSpPr>
+          <p:cNvPr id="41" name="TextBox 40"/>
+          <p:cNvSpPr txBox="1"/>
+          <p:nvPr/>
+        </p:nvSpPr>
+        <p:spPr>
+          <a:xfrm>
+            <a:off x="6409944" y="3200400"/>
+            <a:ext cx="5294376" cy="219456"/>
+          </a:xfrm>
+          <a:prstGeom prst="rect">
+            <a:avLst/>
+          </a:prstGeom>
+          <a:noFill/>
+        </p:spPr>
+        <p:txBody>
+          <a:bodyPr wrap="square" lIns="0" rIns="0" tIns="0" bIns="0">
+            <a:spAutoFit/>
+          </a:bodyPr>
+          <a:lstStyle/>
+          <a:p>
+            <a:pPr algn="l"/>
+            <a:r>
+              <a:rPr sz="1000" b="0">
+                <a:solidFill>
+                  <a:srgbClr val="5B6570"/>
+                </a:solidFill>
+                <a:latin typeface="Calibri"/>
+              </a:rPr>
+              <a:t>≥15 FPS at the edge</a:t>
+            </a:r>
+          </a:p>
+        </p:txBody>
+      </p:sp>
+      <p:sp>
+        <p:nvSpPr>
+          <p:cNvPr id="42" name="Rectangle 41"/>
+          <p:cNvSpPr/>
+          <p:nvPr/>
+        </p:nvSpPr>
+        <p:spPr>
+          <a:xfrm>
+            <a:off x="6245352" y="3566160"/>
+            <a:ext cx="5623560" cy="621792"/>
+          </a:xfrm>
+          <a:prstGeom prst="rect">
+            <a:avLst/>
+          </a:prstGeom>
+          <a:solidFill>
+            <a:srgbClr val="D99A06"/>
+          </a:solidFill>
+          <a:ln>
+            <a:noFill/>
+          </a:ln>
+          <a:effectLst/>
+        </p:spPr>
+        <p:style>
+          <a:lnRef idx="1">
+            <a:schemeClr val="accent1"/>
+          </a:lnRef>
+          <a:fillRef idx="3">
+            <a:schemeClr val="accent1"/>
+          </a:fillRef>
+          <a:effectRef idx="2">
+            <a:schemeClr val="accent1"/>
+          </a:effectRef>
+          <a:fontRef idx="minor">
+            <a:schemeClr val="lt1"/>
+          </a:fontRef>
+        </p:style>
+        <p:txBody>
+          <a:bodyPr rtlCol="0" anchor="ctr"/>
+          <a:lstStyle/>
+          <a:p>
+            <a:pPr algn="ctr"/>
+          </a:p>
+        </p:txBody>
+      </p:sp>
+      <p:sp>
+        <p:nvSpPr>
+          <p:cNvPr id="43" name="TextBox 42"/>
+          <p:cNvSpPr txBox="1"/>
+          <p:nvPr/>
+        </p:nvSpPr>
+        <p:spPr>
+          <a:xfrm>
+            <a:off x="6409944" y="3639312"/>
+            <a:ext cx="5294376" cy="219456"/>
+          </a:xfrm>
+          <a:prstGeom prst="rect">
+            <a:avLst/>
+          </a:prstGeom>
+          <a:noFill/>
+        </p:spPr>
+        <p:txBody>
+          <a:bodyPr wrap="square" lIns="0" rIns="0" tIns="0" bIns="0">
+            <a:spAutoFit/>
+          </a:bodyPr>
+          <a:lstStyle/>
+          <a:p>
+            <a:pPr algn="l"/>
+            <a:r>
+              <a:rPr sz="1100" b="1">
+                <a:solidFill>
+                  <a:srgbClr val="144E4C"/>
+                </a:solidFill>
+                <a:latin typeface="Calibri"/>
+              </a:rPr>
+              <a:t>NFR4 — Scalable</a:t>
+            </a:r>
+          </a:p>
+        </p:txBody>
+      </p:sp>
+      <p:sp>
+        <p:nvSpPr>
+          <p:cNvPr id="44" name="TextBox 43"/>
+          <p:cNvSpPr txBox="1"/>
+          <p:nvPr/>
+        </p:nvSpPr>
+        <p:spPr>
+          <a:xfrm>
+            <a:off x="6409944" y="3895344"/>
+            <a:ext cx="5294376" cy="219456"/>
+          </a:xfrm>
+          <a:prstGeom prst="rect">
+            <a:avLst/>
+          </a:prstGeom>
+          <a:noFill/>
+        </p:spPr>
+        <p:txBody>
+          <a:bodyPr wrap="square" lIns="0" rIns="0" tIns="0" bIns="0">
+            <a:spAutoFit/>
+          </a:bodyPr>
+          <a:lstStyle/>
+          <a:p>
+            <a:pPr algn="l"/>
+            <a:r>
+              <a:rPr sz="1000" b="0">
+                <a:solidFill>
+                  <a:srgbClr val="5B6570"/>
+                </a:solidFill>
+                <a:latin typeface="Calibri"/>
+              </a:rPr>
+              <a:t>New fabrics via the few-shot branch</a:t>
+            </a:r>
+          </a:p>
+        </p:txBody>
+      </p:sp>
+      <p:sp>
+        <p:nvSpPr>
+          <p:cNvPr id="45" name="Rectangle 44"/>
+          <p:cNvSpPr/>
+          <p:nvPr/>
+        </p:nvSpPr>
+        <p:spPr>
+          <a:xfrm>
+            <a:off x="6245352" y="4261104"/>
+            <a:ext cx="5623560" cy="621792"/>
+          </a:xfrm>
+          <a:prstGeom prst="rect">
+            <a:avLst/>
+          </a:prstGeom>
+          <a:solidFill>
+            <a:srgbClr val="D99A06"/>
+          </a:solidFill>
+          <a:ln>
+            <a:noFill/>
+          </a:ln>
+          <a:effectLst/>
+        </p:spPr>
+        <p:style>
+          <a:lnRef idx="1">
+            <a:schemeClr val="accent1"/>
+          </a:lnRef>
+          <a:fillRef idx="3">
+            <a:schemeClr val="accent1"/>
+          </a:fillRef>
+          <a:effectRef idx="2">
+            <a:schemeClr val="accent1"/>
+          </a:effectRef>
+          <a:fontRef idx="minor">
+            <a:schemeClr val="lt1"/>
+          </a:fontRef>
+        </p:style>
+        <p:txBody>
+          <a:bodyPr rtlCol="0" anchor="ctr"/>
+          <a:lstStyle/>
+          <a:p>
+            <a:pPr algn="ctr"/>
+          </a:p>
+        </p:txBody>
+      </p:sp>
+      <p:sp>
+        <p:nvSpPr>
+          <p:cNvPr id="46" name="TextBox 45"/>
+          <p:cNvSpPr txBox="1"/>
+          <p:nvPr/>
+        </p:nvSpPr>
+        <p:spPr>
+          <a:xfrm>
+            <a:off x="6409944" y="4334256"/>
+            <a:ext cx="5294376" cy="219456"/>
+          </a:xfrm>
+          <a:prstGeom prst="rect">
+            <a:avLst/>
+          </a:prstGeom>
+          <a:noFill/>
+        </p:spPr>
+        <p:txBody>
+          <a:bodyPr wrap="square" lIns="0" rIns="0" tIns="0" bIns="0">
+            <a:spAutoFit/>
+          </a:bodyPr>
+          <a:lstStyle/>
+          <a:p>
+            <a:pPr algn="l"/>
+            <a:r>
+              <a:rPr sz="1100" b="1">
+                <a:solidFill>
+                  <a:srgbClr val="144E4C"/>
+                </a:solidFill>
+                <a:latin typeface="Calibri"/>
+              </a:rPr>
+              <a:t>NFR5 — Maintainable</a:t>
+            </a:r>
+          </a:p>
+        </p:txBody>
+      </p:sp>
+      <p:sp>
+        <p:nvSpPr>
+          <p:cNvPr id="47" name="TextBox 46"/>
+          <p:cNvSpPr txBox="1"/>
+          <p:nvPr/>
+        </p:nvSpPr>
+        <p:spPr>
+          <a:xfrm>
+            <a:off x="6409944" y="4590288"/>
+            <a:ext cx="5294376" cy="219456"/>
+          </a:xfrm>
+          <a:prstGeom prst="rect">
+            <a:avLst/>
+          </a:prstGeom>
+          <a:noFill/>
+        </p:spPr>
+        <p:txBody>
+          <a:bodyPr wrap="square" lIns="0" rIns="0" tIns="0" bIns="0">
+            <a:spAutoFit/>
+          </a:bodyPr>
+          <a:lstStyle/>
+          <a:p>
+            <a:pPr algn="l"/>
+            <a:r>
+              <a:rPr sz="1000" b="0">
+                <a:solidFill>
+                  <a:srgbClr val="5B6570"/>
+                </a:solidFill>
+                <a:latin typeface="Calibri"/>
+              </a:rPr>
+              <a:t>Modular code, one config point</a:t>
             </a:r>
           </a:p>
         </p:txBody>
@@ -7904,7 +9012,7 @@
                   <a:srgbClr val="F5F7F2"/>
                 </a:solidFill>
               </a:rPr>
-              <a:t>System Design Overview</a:t>
+              <a:t>Proposed System Diagram (Fig. 3.2)</a:t>
             </a:r>
           </a:p>
         </p:txBody>
@@ -7925,14 +9033,93 @@
         </p:blipFill>
         <p:spPr>
           <a:xfrm>
-            <a:off x="640080" y="914400"/>
-            <a:ext cx="10881360" cy="5029200"/>
+            <a:off x="1251616" y="914400"/>
+            <a:ext cx="9658286" cy="5029200"/>
           </a:xfrm>
           <a:prstGeom prst="rect">
             <a:avLst/>
           </a:prstGeom>
         </p:spPr>
       </p:pic>
+      <p:sp>
+        <p:nvSpPr>
+          <p:cNvPr id="5" name="Rectangle 4"/>
+          <p:cNvSpPr/>
+          <p:nvPr/>
+        </p:nvSpPr>
+        <p:spPr>
+          <a:xfrm>
+            <a:off x="411480" y="6382512"/>
+            <a:ext cx="11338560" cy="18288"/>
+          </a:xfrm>
+          <a:prstGeom prst="rect">
+            <a:avLst/>
+          </a:prstGeom>
+          <a:solidFill>
+            <a:srgbClr val="D99A06"/>
+          </a:solidFill>
+          <a:ln>
+            <a:noFill/>
+          </a:ln>
+          <a:effectLst/>
+        </p:spPr>
+        <p:style>
+          <a:lnRef idx="1">
+            <a:schemeClr val="accent1"/>
+          </a:lnRef>
+          <a:fillRef idx="3">
+            <a:schemeClr val="accent1"/>
+          </a:fillRef>
+          <a:effectRef idx="2">
+            <a:schemeClr val="accent1"/>
+          </a:effectRef>
+          <a:fontRef idx="minor">
+            <a:schemeClr val="lt1"/>
+          </a:fontRef>
+        </p:style>
+        <p:txBody>
+          <a:bodyPr rtlCol="0" anchor="ctr"/>
+          <a:lstStyle/>
+          <a:p>
+            <a:pPr algn="ctr"/>
+          </a:p>
+        </p:txBody>
+      </p:sp>
+      <p:sp>
+        <p:nvSpPr>
+          <p:cNvPr id="6" name="TextBox 5"/>
+          <p:cNvSpPr txBox="1"/>
+          <p:nvPr/>
+        </p:nvSpPr>
+        <p:spPr>
+          <a:xfrm>
+            <a:off x="10972800" y="6419088"/>
+            <a:ext cx="914400" cy="274320"/>
+          </a:xfrm>
+          <a:prstGeom prst="rect">
+            <a:avLst/>
+          </a:prstGeom>
+          <a:noFill/>
+        </p:spPr>
+        <p:txBody>
+          <a:bodyPr wrap="none">
+            <a:spAutoFit/>
+          </a:bodyPr>
+          <a:lstStyle/>
+          <a:p>
+            <a:pPr algn="ctr"/>
+            <a:r>
+              <a:rPr sz="900">
+                <a:solidFill>
+                  <a:srgbClr val="F5F7F2"/>
+                </a:solidFill>
+                <a:latin typeface="Calibri"/>
+              </a:rPr>
+              <a:t>15 / 35</a:t>
+            </a:r>
+          </a:p>
+        </p:txBody>
+      </p:sp>
     </p:spTree>
   </p:cSld>
   <p:clrMapOvr>
@@ -7994,7 +9181,7 @@
                   <a:srgbClr val="F5F7F2"/>
                 </a:solidFill>
               </a:rPr>
-              <a:t>Context Diagram</a:t>
+              <a:t>Context Diagram (Fig. 3.1)</a:t>
             </a:r>
           </a:p>
         </p:txBody>
@@ -8015,14 +9202,93 @@
         </p:blipFill>
         <p:spPr>
           <a:xfrm>
-            <a:off x="640080" y="914400"/>
-            <a:ext cx="10881360" cy="5029200"/>
+            <a:off x="735773" y="914400"/>
+            <a:ext cx="10689973" cy="5029200"/>
           </a:xfrm>
           <a:prstGeom prst="rect">
             <a:avLst/>
           </a:prstGeom>
         </p:spPr>
       </p:pic>
+      <p:sp>
+        <p:nvSpPr>
+          <p:cNvPr id="5" name="Rectangle 4"/>
+          <p:cNvSpPr/>
+          <p:nvPr/>
+        </p:nvSpPr>
+        <p:spPr>
+          <a:xfrm>
+            <a:off x="411480" y="6382512"/>
+            <a:ext cx="11338560" cy="18288"/>
+          </a:xfrm>
+          <a:prstGeom prst="rect">
+            <a:avLst/>
+          </a:prstGeom>
+          <a:solidFill>
+            <a:srgbClr val="D99A06"/>
+          </a:solidFill>
+          <a:ln>
+            <a:noFill/>
+          </a:ln>
+          <a:effectLst/>
+        </p:spPr>
+        <p:style>
+          <a:lnRef idx="1">
+            <a:schemeClr val="accent1"/>
+          </a:lnRef>
+          <a:fillRef idx="3">
+            <a:schemeClr val="accent1"/>
+          </a:fillRef>
+          <a:effectRef idx="2">
+            <a:schemeClr val="accent1"/>
+          </a:effectRef>
+          <a:fontRef idx="minor">
+            <a:schemeClr val="lt1"/>
+          </a:fontRef>
+        </p:style>
+        <p:txBody>
+          <a:bodyPr rtlCol="0" anchor="ctr"/>
+          <a:lstStyle/>
+          <a:p>
+            <a:pPr algn="ctr"/>
+          </a:p>
+        </p:txBody>
+      </p:sp>
+      <p:sp>
+        <p:nvSpPr>
+          <p:cNvPr id="6" name="TextBox 5"/>
+          <p:cNvSpPr txBox="1"/>
+          <p:nvPr/>
+        </p:nvSpPr>
+        <p:spPr>
+          <a:xfrm>
+            <a:off x="10972800" y="6419088"/>
+            <a:ext cx="914400" cy="274320"/>
+          </a:xfrm>
+          <a:prstGeom prst="rect">
+            <a:avLst/>
+          </a:prstGeom>
+          <a:noFill/>
+        </p:spPr>
+        <p:txBody>
+          <a:bodyPr wrap="none">
+            <a:spAutoFit/>
+          </a:bodyPr>
+          <a:lstStyle/>
+          <a:p>
+            <a:pPr algn="ctr"/>
+            <a:r>
+              <a:rPr sz="900">
+                <a:solidFill>
+                  <a:srgbClr val="F5F7F2"/>
+                </a:solidFill>
+                <a:latin typeface="Calibri"/>
+              </a:rPr>
+              <a:t>16 / 35</a:t>
+            </a:r>
+          </a:p>
+        </p:txBody>
+      </p:sp>
     </p:spTree>
   </p:cSld>
   <p:clrMapOvr>
@@ -8084,7 +9350,7 @@
                   <a:srgbClr val="F5F7F2"/>
                 </a:solidFill>
               </a:rPr>
-              <a:t>Use Case Diagram</a:t>
+              <a:t>Use Case Diagram (Fig. 3.4)</a:t>
             </a:r>
           </a:p>
         </p:txBody>
@@ -8105,14 +9371,93 @@
         </p:blipFill>
         <p:spPr>
           <a:xfrm>
-            <a:off x="640080" y="914400"/>
-            <a:ext cx="10881360" cy="5029200"/>
+            <a:off x="2308860" y="914400"/>
+            <a:ext cx="7543800" cy="5029200"/>
           </a:xfrm>
           <a:prstGeom prst="rect">
             <a:avLst/>
           </a:prstGeom>
         </p:spPr>
       </p:pic>
+      <p:sp>
+        <p:nvSpPr>
+          <p:cNvPr id="5" name="Rectangle 4"/>
+          <p:cNvSpPr/>
+          <p:nvPr/>
+        </p:nvSpPr>
+        <p:spPr>
+          <a:xfrm>
+            <a:off x="411480" y="6382512"/>
+            <a:ext cx="11338560" cy="18288"/>
+          </a:xfrm>
+          <a:prstGeom prst="rect">
+            <a:avLst/>
+          </a:prstGeom>
+          <a:solidFill>
+            <a:srgbClr val="D99A06"/>
+          </a:solidFill>
+          <a:ln>
+            <a:noFill/>
+          </a:ln>
+          <a:effectLst/>
+        </p:spPr>
+        <p:style>
+          <a:lnRef idx="1">
+            <a:schemeClr val="accent1"/>
+          </a:lnRef>
+          <a:fillRef idx="3">
+            <a:schemeClr val="accent1"/>
+          </a:fillRef>
+          <a:effectRef idx="2">
+            <a:schemeClr val="accent1"/>
+          </a:effectRef>
+          <a:fontRef idx="minor">
+            <a:schemeClr val="lt1"/>
+          </a:fontRef>
+        </p:style>
+        <p:txBody>
+          <a:bodyPr rtlCol="0" anchor="ctr"/>
+          <a:lstStyle/>
+          <a:p>
+            <a:pPr algn="ctr"/>
+          </a:p>
+        </p:txBody>
+      </p:sp>
+      <p:sp>
+        <p:nvSpPr>
+          <p:cNvPr id="6" name="TextBox 5"/>
+          <p:cNvSpPr txBox="1"/>
+          <p:nvPr/>
+        </p:nvSpPr>
+        <p:spPr>
+          <a:xfrm>
+            <a:off x="10972800" y="6419088"/>
+            <a:ext cx="914400" cy="274320"/>
+          </a:xfrm>
+          <a:prstGeom prst="rect">
+            <a:avLst/>
+          </a:prstGeom>
+          <a:noFill/>
+        </p:spPr>
+        <p:txBody>
+          <a:bodyPr wrap="none">
+            <a:spAutoFit/>
+          </a:bodyPr>
+          <a:lstStyle/>
+          <a:p>
+            <a:pPr algn="ctr"/>
+            <a:r>
+              <a:rPr sz="900">
+                <a:solidFill>
+                  <a:srgbClr val="F5F7F2"/>
+                </a:solidFill>
+                <a:latin typeface="Calibri"/>
+              </a:rPr>
+              <a:t>17 / 35</a:t>
+            </a:r>
+          </a:p>
+        </p:txBody>
+      </p:sp>
     </p:spTree>
   </p:cSld>
   <p:clrMapOvr>
@@ -8174,7 +9519,7 @@
                   <a:srgbClr val="F5F7F2"/>
                 </a:solidFill>
               </a:rPr>
-              <a:t>System Workflow</a:t>
+              <a:t>System Workflow (Fig. 3.5)</a:t>
             </a:r>
           </a:p>
         </p:txBody>
@@ -8201,14 +9546,93 @@
         </p:blipFill>
         <p:spPr>
           <a:xfrm>
-            <a:off x="3362324" y="339479"/>
-            <a:ext cx="5691783" cy="6289921"/>
+            <a:off x="3700766" y="914400"/>
+            <a:ext cx="4759987" cy="5029200"/>
           </a:xfrm>
           <a:prstGeom prst="rect">
             <a:avLst/>
           </a:prstGeom>
         </p:spPr>
       </p:pic>
+      <p:sp>
+        <p:nvSpPr>
+          <p:cNvPr id="7" name="Rectangle 6"/>
+          <p:cNvSpPr/>
+          <p:nvPr/>
+        </p:nvSpPr>
+        <p:spPr>
+          <a:xfrm>
+            <a:off x="411480" y="6382512"/>
+            <a:ext cx="11338560" cy="18288"/>
+          </a:xfrm>
+          <a:prstGeom prst="rect">
+            <a:avLst/>
+          </a:prstGeom>
+          <a:solidFill>
+            <a:srgbClr val="D99A06"/>
+          </a:solidFill>
+          <a:ln>
+            <a:noFill/>
+          </a:ln>
+          <a:effectLst/>
+        </p:spPr>
+        <p:style>
+          <a:lnRef idx="1">
+            <a:schemeClr val="accent1"/>
+          </a:lnRef>
+          <a:fillRef idx="3">
+            <a:schemeClr val="accent1"/>
+          </a:fillRef>
+          <a:effectRef idx="2">
+            <a:schemeClr val="accent1"/>
+          </a:effectRef>
+          <a:fontRef idx="minor">
+            <a:schemeClr val="lt1"/>
+          </a:fontRef>
+        </p:style>
+        <p:txBody>
+          <a:bodyPr rtlCol="0" anchor="ctr"/>
+          <a:lstStyle/>
+          <a:p>
+            <a:pPr algn="ctr"/>
+          </a:p>
+        </p:txBody>
+      </p:sp>
+      <p:sp>
+        <p:nvSpPr>
+          <p:cNvPr id="8" name="TextBox 7"/>
+          <p:cNvSpPr txBox="1"/>
+          <p:nvPr/>
+        </p:nvSpPr>
+        <p:spPr>
+          <a:xfrm>
+            <a:off x="10972800" y="6419088"/>
+            <a:ext cx="914400" cy="274320"/>
+          </a:xfrm>
+          <a:prstGeom prst="rect">
+            <a:avLst/>
+          </a:prstGeom>
+          <a:noFill/>
+        </p:spPr>
+        <p:txBody>
+          <a:bodyPr wrap="none">
+            <a:spAutoFit/>
+          </a:bodyPr>
+          <a:lstStyle/>
+          <a:p>
+            <a:pPr algn="ctr"/>
+            <a:r>
+              <a:rPr sz="900">
+                <a:solidFill>
+                  <a:srgbClr val="F5F7F2"/>
+                </a:solidFill>
+                <a:latin typeface="Calibri"/>
+              </a:rPr>
+              <a:t>18 / 35</a:t>
+            </a:r>
+          </a:p>
+        </p:txBody>
+      </p:sp>
     </p:spTree>
   </p:cSld>
   <p:clrMapOvr>
@@ -8270,7 +9694,7 @@
                   <a:srgbClr val="F5F7F2"/>
                 </a:solidFill>
               </a:rPr>
-              <a:t>Proposed System Diagram</a:t>
+              <a:t>Workflow Decision Loop (Fig. 3.5)</a:t>
             </a:r>
           </a:p>
         </p:txBody>
@@ -8291,14 +9715,93 @@
         </p:blipFill>
         <p:spPr>
           <a:xfrm>
-            <a:off x="640080" y="914400"/>
-            <a:ext cx="10881360" cy="5029200"/>
+            <a:off x="640080" y="1371734"/>
+            <a:ext cx="10881360" cy="4114530"/>
           </a:xfrm>
           <a:prstGeom prst="rect">
             <a:avLst/>
           </a:prstGeom>
         </p:spPr>
       </p:pic>
+      <p:sp>
+        <p:nvSpPr>
+          <p:cNvPr id="5" name="Rectangle 4"/>
+          <p:cNvSpPr/>
+          <p:nvPr/>
+        </p:nvSpPr>
+        <p:spPr>
+          <a:xfrm>
+            <a:off x="411480" y="6382512"/>
+            <a:ext cx="11338560" cy="18288"/>
+          </a:xfrm>
+          <a:prstGeom prst="rect">
+            <a:avLst/>
+          </a:prstGeom>
+          <a:solidFill>
+            <a:srgbClr val="D99A06"/>
+          </a:solidFill>
+          <a:ln>
+            <a:noFill/>
+          </a:ln>
+          <a:effectLst/>
+        </p:spPr>
+        <p:style>
+          <a:lnRef idx="1">
+            <a:schemeClr val="accent1"/>
+          </a:lnRef>
+          <a:fillRef idx="3">
+            <a:schemeClr val="accent1"/>
+          </a:fillRef>
+          <a:effectRef idx="2">
+            <a:schemeClr val="accent1"/>
+          </a:effectRef>
+          <a:fontRef idx="minor">
+            <a:schemeClr val="lt1"/>
+          </a:fontRef>
+        </p:style>
+        <p:txBody>
+          <a:bodyPr rtlCol="0" anchor="ctr"/>
+          <a:lstStyle/>
+          <a:p>
+            <a:pPr algn="ctr"/>
+          </a:p>
+        </p:txBody>
+      </p:sp>
+      <p:sp>
+        <p:nvSpPr>
+          <p:cNvPr id="6" name="TextBox 5"/>
+          <p:cNvSpPr txBox="1"/>
+          <p:nvPr/>
+        </p:nvSpPr>
+        <p:spPr>
+          <a:xfrm>
+            <a:off x="10972800" y="6419088"/>
+            <a:ext cx="914400" cy="274320"/>
+          </a:xfrm>
+          <a:prstGeom prst="rect">
+            <a:avLst/>
+          </a:prstGeom>
+          <a:noFill/>
+        </p:spPr>
+        <p:txBody>
+          <a:bodyPr wrap="none">
+            <a:spAutoFit/>
+          </a:bodyPr>
+          <a:lstStyle/>
+          <a:p>
+            <a:pPr algn="ctr"/>
+            <a:r>
+              <a:rPr sz="900">
+                <a:solidFill>
+                  <a:srgbClr val="F5F7F2"/>
+                </a:solidFill>
+                <a:latin typeface="Calibri"/>
+              </a:rPr>
+              <a:t>19 / 35</a:t>
+            </a:r>
+          </a:p>
+        </p:txBody>
+      </p:sp>
     </p:spTree>
   </p:cSld>
   <p:clrMapOvr>
@@ -8397,7 +9900,7 @@
                 </a:solidFill>
                 <a:latin typeface="Calibri"/>
               </a:rPr>
-              <a:t>2 / 30</a:t>
+              <a:t>2 / 35</a:t>
             </a:r>
           </a:p>
         </p:txBody>
@@ -9072,13 +10575,13 @@
               <a:rPr sz="1350" b="1" i="0" dirty="0" err="1">
                 <a:latin typeface="Calibri"/>
               </a:rPr>
-              <a:t>Nafiz</a:t>
+              <a:t>Nafiz Imtiaz Labib</a:t>
             </a:r>
             <a:r>
               <a:rPr sz="1350" b="1" i="0" dirty="0">
                 <a:latin typeface="Calibri"/>
               </a:rPr>
-              <a:t> Imtiaz Labib</a:t>
+              <a:t/>
             </a:r>
           </a:p>
           <a:p>
@@ -9091,11 +10594,11 @@
               <a:rPr sz="1100" b="0" i="0" dirty="0">
                 <a:latin typeface="Calibri"/>
               </a:rPr>
-              <a:t>Literature</a:t>
+              <a:t>0112310422</a:t>
             </a:r>
             <a:r>
               <a:rPr lang="en-US" sz="1100" dirty="0"/>
-              <a:t>0112310422</a:t>
+              <a:t/>
             </a:r>
           </a:p>
           <a:p>
@@ -9111,7 +10614,7 @@
               <a:rPr sz="1100" b="0" i="0" dirty="0">
                 <a:latin typeface="Calibri"/>
               </a:rPr>
-              <a:t> Review &amp; Gap Analysis</a:t>
+              <a:t>Literature Review &amp; Gap Analysis</a:t>
             </a:r>
           </a:p>
         </p:txBody>
@@ -9990,7 +11493,7 @@
                   <a:srgbClr val="F5F7F2"/>
                 </a:solidFill>
               </a:rPr>
-              <a:t>Machine Learning Pipeline</a:t>
+              <a:t>Machine Learning Pipeline (Fig. 3.7)</a:t>
             </a:r>
           </a:p>
         </p:txBody>
@@ -10011,14 +11514,93 @@
         </p:blipFill>
         <p:spPr>
           <a:xfrm>
-            <a:off x="640080" y="914400"/>
-            <a:ext cx="10881360" cy="5029200"/>
+            <a:off x="640080" y="1615440"/>
+            <a:ext cx="10881360" cy="3627120"/>
           </a:xfrm>
           <a:prstGeom prst="rect">
             <a:avLst/>
           </a:prstGeom>
         </p:spPr>
       </p:pic>
+      <p:sp>
+        <p:nvSpPr>
+          <p:cNvPr id="5" name="Rectangle 4"/>
+          <p:cNvSpPr/>
+          <p:nvPr/>
+        </p:nvSpPr>
+        <p:spPr>
+          <a:xfrm>
+            <a:off x="411480" y="6382512"/>
+            <a:ext cx="11338560" cy="18288"/>
+          </a:xfrm>
+          <a:prstGeom prst="rect">
+            <a:avLst/>
+          </a:prstGeom>
+          <a:solidFill>
+            <a:srgbClr val="D99A06"/>
+          </a:solidFill>
+          <a:ln>
+            <a:noFill/>
+          </a:ln>
+          <a:effectLst/>
+        </p:spPr>
+        <p:style>
+          <a:lnRef idx="1">
+            <a:schemeClr val="accent1"/>
+          </a:lnRef>
+          <a:fillRef idx="3">
+            <a:schemeClr val="accent1"/>
+          </a:fillRef>
+          <a:effectRef idx="2">
+            <a:schemeClr val="accent1"/>
+          </a:effectRef>
+          <a:fontRef idx="minor">
+            <a:schemeClr val="lt1"/>
+          </a:fontRef>
+        </p:style>
+        <p:txBody>
+          <a:bodyPr rtlCol="0" anchor="ctr"/>
+          <a:lstStyle/>
+          <a:p>
+            <a:pPr algn="ctr"/>
+          </a:p>
+        </p:txBody>
+      </p:sp>
+      <p:sp>
+        <p:nvSpPr>
+          <p:cNvPr id="6" name="TextBox 5"/>
+          <p:cNvSpPr txBox="1"/>
+          <p:nvPr/>
+        </p:nvSpPr>
+        <p:spPr>
+          <a:xfrm>
+            <a:off x="10972800" y="6419088"/>
+            <a:ext cx="914400" cy="274320"/>
+          </a:xfrm>
+          <a:prstGeom prst="rect">
+            <a:avLst/>
+          </a:prstGeom>
+          <a:noFill/>
+        </p:spPr>
+        <p:txBody>
+          <a:bodyPr wrap="none">
+            <a:spAutoFit/>
+          </a:bodyPr>
+          <a:lstStyle/>
+          <a:p>
+            <a:pPr algn="ctr"/>
+            <a:r>
+              <a:rPr sz="900">
+                <a:solidFill>
+                  <a:srgbClr val="F5F7F2"/>
+                </a:solidFill>
+                <a:latin typeface="Calibri"/>
+              </a:rPr>
+              <a:t>20 / 35</a:t>
+            </a:r>
+          </a:p>
+        </p:txBody>
+      </p:sp>
     </p:spTree>
   </p:cSld>
   <p:clrMapOvr>
@@ -10080,7 +11662,7 @@
                   <a:srgbClr val="F5F7F2"/>
                 </a:solidFill>
               </a:rPr>
-              <a:t>Metadata Bridge</a:t>
+              <a:t>Metadata Bridge (Fig. 3.6)</a:t>
             </a:r>
           </a:p>
         </p:txBody>
@@ -10101,14 +11683,93 @@
         </p:blipFill>
         <p:spPr>
           <a:xfrm>
-            <a:off x="640080" y="914400"/>
-            <a:ext cx="10881360" cy="5029200"/>
+            <a:off x="640080" y="1492003"/>
+            <a:ext cx="10881360" cy="3873992"/>
           </a:xfrm>
           <a:prstGeom prst="rect">
             <a:avLst/>
           </a:prstGeom>
         </p:spPr>
       </p:pic>
+      <p:sp>
+        <p:nvSpPr>
+          <p:cNvPr id="5" name="Rectangle 4"/>
+          <p:cNvSpPr/>
+          <p:nvPr/>
+        </p:nvSpPr>
+        <p:spPr>
+          <a:xfrm>
+            <a:off x="411480" y="6382512"/>
+            <a:ext cx="11338560" cy="18288"/>
+          </a:xfrm>
+          <a:prstGeom prst="rect">
+            <a:avLst/>
+          </a:prstGeom>
+          <a:solidFill>
+            <a:srgbClr val="D99A06"/>
+          </a:solidFill>
+          <a:ln>
+            <a:noFill/>
+          </a:ln>
+          <a:effectLst/>
+        </p:spPr>
+        <p:style>
+          <a:lnRef idx="1">
+            <a:schemeClr val="accent1"/>
+          </a:lnRef>
+          <a:fillRef idx="3">
+            <a:schemeClr val="accent1"/>
+          </a:fillRef>
+          <a:effectRef idx="2">
+            <a:schemeClr val="accent1"/>
+          </a:effectRef>
+          <a:fontRef idx="minor">
+            <a:schemeClr val="lt1"/>
+          </a:fontRef>
+        </p:style>
+        <p:txBody>
+          <a:bodyPr rtlCol="0" anchor="ctr"/>
+          <a:lstStyle/>
+          <a:p>
+            <a:pPr algn="ctr"/>
+          </a:p>
+        </p:txBody>
+      </p:sp>
+      <p:sp>
+        <p:nvSpPr>
+          <p:cNvPr id="6" name="TextBox 5"/>
+          <p:cNvSpPr txBox="1"/>
+          <p:nvPr/>
+        </p:nvSpPr>
+        <p:spPr>
+          <a:xfrm>
+            <a:off x="10972800" y="6419088"/>
+            <a:ext cx="914400" cy="274320"/>
+          </a:xfrm>
+          <a:prstGeom prst="rect">
+            <a:avLst/>
+          </a:prstGeom>
+          <a:noFill/>
+        </p:spPr>
+        <p:txBody>
+          <a:bodyPr wrap="none">
+            <a:spAutoFit/>
+          </a:bodyPr>
+          <a:lstStyle/>
+          <a:p>
+            <a:pPr algn="ctr"/>
+            <a:r>
+              <a:rPr sz="900">
+                <a:solidFill>
+                  <a:srgbClr val="F5F7F2"/>
+                </a:solidFill>
+                <a:latin typeface="Calibri"/>
+              </a:rPr>
+              <a:t>21 / 35</a:t>
+            </a:r>
+          </a:p>
+        </p:txBody>
+      </p:sp>
     </p:spTree>
   </p:cSld>
   <p:clrMapOvr>
@@ -10170,7 +11831,7 @@
                   <a:srgbClr val="F5F7F2"/>
                 </a:solidFill>
               </a:rPr>
-              <a:t>4-Point Grading Module</a:t>
+              <a:t>Four-Point Grading Logic (Fig. 3.8)</a:t>
             </a:r>
           </a:p>
         </p:txBody>
@@ -10191,14 +11852,93 @@
         </p:blipFill>
         <p:spPr>
           <a:xfrm>
-            <a:off x="640080" y="914400"/>
-            <a:ext cx="10881360" cy="5029200"/>
+            <a:off x="640080" y="1589363"/>
+            <a:ext cx="10881360" cy="3679272"/>
           </a:xfrm>
           <a:prstGeom prst="rect">
             <a:avLst/>
           </a:prstGeom>
         </p:spPr>
       </p:pic>
+      <p:sp>
+        <p:nvSpPr>
+          <p:cNvPr id="5" name="Rectangle 4"/>
+          <p:cNvSpPr/>
+          <p:nvPr/>
+        </p:nvSpPr>
+        <p:spPr>
+          <a:xfrm>
+            <a:off x="411480" y="6382512"/>
+            <a:ext cx="11338560" cy="18288"/>
+          </a:xfrm>
+          <a:prstGeom prst="rect">
+            <a:avLst/>
+          </a:prstGeom>
+          <a:solidFill>
+            <a:srgbClr val="D99A06"/>
+          </a:solidFill>
+          <a:ln>
+            <a:noFill/>
+          </a:ln>
+          <a:effectLst/>
+        </p:spPr>
+        <p:style>
+          <a:lnRef idx="1">
+            <a:schemeClr val="accent1"/>
+          </a:lnRef>
+          <a:fillRef idx="3">
+            <a:schemeClr val="accent1"/>
+          </a:fillRef>
+          <a:effectRef idx="2">
+            <a:schemeClr val="accent1"/>
+          </a:effectRef>
+          <a:fontRef idx="minor">
+            <a:schemeClr val="lt1"/>
+          </a:fontRef>
+        </p:style>
+        <p:txBody>
+          <a:bodyPr rtlCol="0" anchor="ctr"/>
+          <a:lstStyle/>
+          <a:p>
+            <a:pPr algn="ctr"/>
+          </a:p>
+        </p:txBody>
+      </p:sp>
+      <p:sp>
+        <p:nvSpPr>
+          <p:cNvPr id="6" name="TextBox 5"/>
+          <p:cNvSpPr txBox="1"/>
+          <p:nvPr/>
+        </p:nvSpPr>
+        <p:spPr>
+          <a:xfrm>
+            <a:off x="10972800" y="6419088"/>
+            <a:ext cx="914400" cy="274320"/>
+          </a:xfrm>
+          <a:prstGeom prst="rect">
+            <a:avLst/>
+          </a:prstGeom>
+          <a:noFill/>
+        </p:spPr>
+        <p:txBody>
+          <a:bodyPr wrap="none">
+            <a:spAutoFit/>
+          </a:bodyPr>
+          <a:lstStyle/>
+          <a:p>
+            <a:pPr algn="ctr"/>
+            <a:r>
+              <a:rPr sz="900">
+                <a:solidFill>
+                  <a:srgbClr val="F5F7F2"/>
+                </a:solidFill>
+                <a:latin typeface="Calibri"/>
+              </a:rPr>
+              <a:t>22 / 35</a:t>
+            </a:r>
+          </a:p>
+        </p:txBody>
+      </p:sp>
     </p:spTree>
   </p:cSld>
   <p:clrMapOvr>
@@ -10297,7 +12037,7 @@
                 </a:solidFill>
                 <a:latin typeface="Calibri"/>
               </a:rPr>
-              <a:t>15 / 30</a:t>
+              <a:t>23 / 35</a:t>
             </a:r>
           </a:p>
         </p:txBody>
@@ -11255,7 +12995,7 @@
                 </a:solidFill>
                 <a:latin typeface="Calibri"/>
               </a:rPr>
-              <a:t>16 / 30</a:t>
+              <a:t>24 / 35</a:t>
             </a:r>
           </a:p>
         </p:txBody>
@@ -11817,7 +13557,7 @@
                 </a:solidFill>
                 <a:latin typeface="Calibri"/>
               </a:rPr>
-              <a:t>17 / 30</a:t>
+              <a:t>25 / 35</a:t>
             </a:r>
           </a:p>
         </p:txBody>
@@ -11879,98 +13619,33 @@
           </a:bodyPr>
           <a:lstStyle/>
           <a:p>
-            <a:pPr algn="l">
-              <a:spcBef>
-                <a:spcPts val="0"/>
-              </a:spcBef>
-              <a:spcAft>
-                <a:spcPts val="800"/>
-              </a:spcAft>
-            </a:pPr>
-            <a:r>
-              <a:rPr sz="1500" b="0" i="0">
-                <a:solidFill>
-                  <a:srgbClr val="F5F7F2"/>
-                </a:solidFill>
-                <a:latin typeface="Calibri"/>
-              </a:rPr>
-              <a:t>▪  naive=0.937 (n=510), honest=0.940 (n=468), accuracy_drop=-0.003.</a:t>
-            </a:r>
-          </a:p>
-          <a:p>
-            <a:pPr algn="l">
-              <a:spcBef>
-                <a:spcPts val="0"/>
-              </a:spcBef>
-              <a:spcAft>
-                <a:spcPts val="800"/>
-              </a:spcAft>
-            </a:pPr>
-            <a:r>
-              <a:rPr sz="1500" b="0" i="0">
-                <a:solidFill>
-                  <a:srgbClr val="F5F7F2"/>
-                </a:solidFill>
-                <a:latin typeface="Calibri"/>
-              </a:rPr>
-              <a:t>▪  The 98% prior claim is unreproducible under clean conditions.</a:t>
-            </a:r>
-          </a:p>
-          <a:p>
-            <a:pPr algn="l">
-              <a:spcBef>
-                <a:spcPts val="0"/>
-              </a:spcBef>
-              <a:spcAft>
-                <a:spcPts val="800"/>
-              </a:spcAft>
-            </a:pPr>
-            <a:r>
-              <a:rPr sz="1500" b="0" i="0">
-                <a:solidFill>
-                  <a:srgbClr val="F5F7F2"/>
-                </a:solidFill>
-                <a:latin typeface="Calibri"/>
-              </a:rPr>
-              <a:t>▪  Per-class honest F1: defect_free 0.98, stain 0.94, hole 0.88,</a:t>
-            </a:r>
-          </a:p>
-          <a:p>
-            <a:pPr algn="l">
-              <a:spcBef>
-                <a:spcPts val="0"/>
-              </a:spcBef>
-              <a:spcAft>
-                <a:spcPts val="800"/>
-              </a:spcAft>
-            </a:pPr>
-            <a:r>
-              <a:rPr sz="1500" b="0" i="0">
-                <a:solidFill>
-                  <a:srgbClr val="F5F7F2"/>
-                </a:solidFill>
-                <a:latin typeface="Calibri"/>
-              </a:rPr>
-              <a:t>▪  horizontal 0.79 (recall 0.68), Vertical 0.70, lines too small to quote.</a:t>
-            </a:r>
-          </a:p>
-          <a:p>
-            <a:pPr algn="l">
-              <a:spcBef>
-                <a:spcPts val="0"/>
-              </a:spcBef>
-              <a:spcAft>
-                <a:spcPts val="800"/>
-              </a:spcAft>
-            </a:pPr>
-            <a:r>
-              <a:rPr sz="1500" b="0" i="0">
-                <a:solidFill>
-                  <a:srgbClr val="F5F7F2"/>
-                </a:solidFill>
-                <a:latin typeface="Calibri"/>
-              </a:rPr>
-              <a:t>▪  Conclusion: audit supported; claim void; Track 2 MAY START.</a:t>
+            <a:r>
+              <a:t>▪  Report Table 6.1 — Pilot Reference And Upper Bound:</a:t>
+            </a:r>
+          </a:p>
+          <a:p>
+            <a:r>
+              <a:t>▪  Class accuracy (random split): 98% — a reference, not a reproduced result.</a:t>
+            </a:r>
+          </a:p>
+          <a:p>
+            <a:r>
+              <a:t>▪  Reference preparation time: 5.44 hours.</a:t>
+            </a:r>
+          </a:p>
+          <a:p>
+            <a:r>
+              <a:t>▪  MAE improvement (synthetic planning data): 92.0%.</a:t>
+            </a:r>
+          </a:p>
+          <a:p>
+            <a:r>
+              <a:t>▪  Confusion overlap: Horizontal → Hole 8%, Hole → Horizontal 7%.</a:t>
+            </a:r>
+          </a:p>
+          <a:p>
+            <a:r>
+              <a:t>▪  Chapter 4 is still pending, so no measured result is claimed.</a:t>
             </a:r>
           </a:p>
         </p:txBody>
@@ -15139,16 +16814,13 @@
           </a:bodyPr>
           <a:lstStyle/>
           <a:p>
-            <a:pPr algn="ctr"/>
-            <a:r>
-              <a:rPr sz="1250" b="0" i="0" dirty="0">
-                <a:solidFill>
-                  <a:schemeClr val="tx1"/>
-                </a:solidFill>
-                <a:latin typeface="Calibri"/>
-              </a:rPr>
-              <a:t>Machine Speed
-20–100 m/min</a:t>
+            <a:r>
+              <a:t>Machine Speed</a:t>
+            </a:r>
+          </a:p>
+          <a:p>
+            <a:r>
+              <a:t>(From Plant Records)</a:t>
             </a:r>
           </a:p>
         </p:txBody>
@@ -15198,16 +16870,13 @@
           </a:bodyPr>
           <a:lstStyle/>
           <a:p>
-            <a:pPr algn="ctr"/>
-            <a:r>
-              <a:rPr sz="1250" b="0" i="0" dirty="0">
-                <a:solidFill>
-                  <a:schemeClr val="tx1"/>
-                </a:solidFill>
-                <a:latin typeface="Calibri"/>
-              </a:rPr>
-              <a:t>Order Quantity
-100–10,000</a:t>
+            <a:r>
+              <a:t>Order Quantity</a:t>
+            </a:r>
+          </a:p>
+          <a:p>
+            <a:r>
+              <a:t>(From Order Records)</a:t>
             </a:r>
           </a:p>
         </p:txBody>
@@ -15257,16 +16926,13 @@
           </a:bodyPr>
           <a:lstStyle/>
           <a:p>
-            <a:pPr algn="ctr"/>
-            <a:r>
-              <a:rPr sz="1250" b="0" i="0" dirty="0">
-                <a:solidFill>
-                  <a:schemeClr val="tx1"/>
-                </a:solidFill>
-                <a:latin typeface="Calibri"/>
-              </a:rPr>
-              <a:t>Defect Density Ds
-0.0–0.5</a:t>
+            <a:r>
+              <a:t>Defect Density Ds</a:t>
+            </a:r>
+          </a:p>
+          <a:p>
+            <a:r>
+              <a:t>(Ratio)</a:t>
             </a:r>
           </a:p>
         </p:txBody>
@@ -15316,16 +16982,13 @@
           </a:bodyPr>
           <a:lstStyle/>
           <a:p>
-            <a:pPr algn="ctr"/>
-            <a:r>
-              <a:rPr sz="1250" b="1" i="0" dirty="0">
-                <a:solidFill>
-                  <a:schemeClr val="tx1"/>
-                </a:solidFill>
-                <a:latin typeface="Calibri"/>
-              </a:rPr>
-              <a:t>Random Forest
-100 Trees</a:t>
+            <a:r>
+              <a:t>Random Forest</a:t>
+            </a:r>
+          </a:p>
+          <a:p>
+            <a:r>
+              <a:t>Regression</a:t>
             </a:r>
           </a:p>
         </p:txBody>
@@ -15702,15 +17365,13 @@
           </a:bodyPr>
           <a:lstStyle/>
           <a:p>
-            <a:pPr algn="ctr"/>
-            <a:r>
-              <a:rPr sz="1150" b="0" i="0">
-                <a:solidFill>
-                  <a:srgbClr val="F5F7F2"/>
-                </a:solidFill>
-                <a:latin typeface="Calibri"/>
-              </a:rPr>
-              <a:t>Example: Ds = 0.2 Inflates Predicted Time By 40%. Features: Speed 20–100 m/min, Quantity 100–10,000, Ds 0–0.5, 100-Tree Random Forest, Evaluated Vs Static-Mean And No-Ds Baselines.</a:t>
+            <a:r>
+              <a:t>Order Quantity</a:t>
+            </a:r>
+          </a:p>
+          <a:p>
+            <a:r>
+              <a:t>(From Order Records)</a:t>
             </a:r>
           </a:p>
         </p:txBody>
@@ -15813,7 +17474,7 @@
                 </a:solidFill>
                 <a:latin typeface="Calibri"/>
               </a:rPr>
-              <a:t>3 / 30</a:t>
+              <a:t>3 / 35</a:t>
             </a:r>
           </a:p>
         </p:txBody>
@@ -17429,7 +19090,7 @@
                 </a:solidFill>
                 <a:latin typeface="Calibri"/>
               </a:rPr>
-              <a:t>23 / 30</a:t>
+              <a:t>26 / 35</a:t>
             </a:r>
           </a:p>
         </p:txBody>
@@ -18035,7 +19696,7 @@
                 </a:solidFill>
                 <a:latin typeface="Calibri"/>
               </a:rPr>
-              <a:t>24 / 30</a:t>
+              <a:t>27 / 35</a:t>
             </a:r>
           </a:p>
         </p:txBody>
@@ -18688,7 +20349,7 @@
                 </a:solidFill>
                 <a:latin typeface="Calibri"/>
               </a:rPr>
-              <a:t>25 / 30</a:t>
+              <a:t>28 / 35</a:t>
             </a:r>
           </a:p>
         </p:txBody>
@@ -18723,7 +20384,7 @@
                 </a:solidFill>
                 <a:latin typeface="Georgia"/>
               </a:rPr>
-              <a:t>Estimated Project Budget (Table 4.1)</a:t>
+              <a:t>Estimated Project Budget (Table 5.1)</a:t>
             </a:r>
           </a:p>
         </p:txBody>
@@ -18753,13 +20414,6 @@
                 <a:tableStyleId>{5C22544A-7EE6-4342-B048-85BDC9FD1C3A}</a:tableStyleId>
               </a:tblPr>
               <a:tblGrid>
-                <a:gridCol w="640080">
-                  <a:extLst>
-                    <a:ext uri="{9D8B030D-6E8A-4147-A177-3AD203B41FA5}">
-                      <a16:colId xmlns:a16="http://schemas.microsoft.com/office/drawing/2014/main" val="20000"/>
-                    </a:ext>
-                  </a:extLst>
-                </a:gridCol>
                 <a:gridCol w="5486400">
                   <a:extLst>
                     <a:ext uri="{9D8B030D-6E8A-4147-A177-3AD203B41FA5}">
@@ -18778,70 +20432,47 @@
               <a:tr h="384048">
                 <a:tc>
                   <a:txBody>
-                    <a:bodyPr/>
+                    <a:bodyPr wrap="square" lIns="54864" rIns="54864" tIns="27432" bIns="27432" anchor="ctr"/>
                     <a:lstStyle/>
                     <a:p>
-                      <a:pPr algn="ctr"/>
+                      <a:pPr algn="l"/>
                       <a:r>
-                        <a:rPr sz="1300" b="1" i="0">
+                        <a:rPr sz="1100" b="1">
                           <a:solidFill>
                             <a:srgbClr val="FFFFFF"/>
                           </a:solidFill>
                           <a:latin typeface="Calibri"/>
                         </a:rPr>
-                        <a:t>SL</a:t>
+                        <a:t>Cost Category</a:t>
                       </a:r>
                     </a:p>
                   </a:txBody>
                   <a:tcPr marL="73152" marR="73152" anchor="ctr">
                     <a:solidFill>
-                      <a:srgbClr val="144E4C"/>
+                      <a:srgbClr val="D99A06"/>
                     </a:solidFill>
                   </a:tcPr>
                 </a:tc>
                 <a:tc>
                   <a:txBody>
-                    <a:bodyPr/>
+                    <a:bodyPr wrap="square" lIns="54864" rIns="54864" tIns="27432" bIns="27432" anchor="ctr"/>
                     <a:lstStyle/>
                     <a:p>
-                      <a:pPr algn="ctr"/>
+                      <a:pPr algn="l"/>
                       <a:r>
-                        <a:rPr sz="1300" b="1" i="0" dirty="0">
+                        <a:rPr sz="1100" b="1">
                           <a:solidFill>
                             <a:srgbClr val="FFFFFF"/>
                           </a:solidFill>
                           <a:latin typeface="Calibri"/>
                         </a:rPr>
-                        <a:t>Purpose</a:t>
+                        <a:t>Estimated Cost (BDT)</a:t>
                       </a:r>
                     </a:p>
                   </a:txBody>
                   <a:tcPr marL="73152" marR="73152" anchor="ctr">
                     <a:solidFill>
-                      <a:srgbClr val="144E4C"/>
-                    </a:solidFill>
-                  </a:tcPr>
-                </a:tc>
-                <a:tc>
-                  <a:txBody>
-                    <a:bodyPr/>
-                    <a:lstStyle/>
-                    <a:p>
-                      <a:pPr algn="ctr"/>
-                      <a:r>
-                        <a:rPr sz="1300" b="1" i="0">
-                          <a:solidFill>
-                            <a:srgbClr val="FFFFFF"/>
-                          </a:solidFill>
-                          <a:latin typeface="Calibri"/>
-                        </a:rPr>
-                        <a:t>Amount (BDT)</a:t>
-                      </a:r>
-                    </a:p>
-                  </a:txBody>
-                  <a:tcPr marL="73152" marR="73152" anchor="ctr">
-                    <a:solidFill>
-                      <a:srgbClr val="144E4C"/>
+                      <a:srgbClr val="D99A06"/>
                     </a:solidFill>
                   </a:tcPr>
                 </a:tc>
@@ -18854,18 +20485,18 @@
               <a:tr h="384048">
                 <a:tc>
                   <a:txBody>
-                    <a:bodyPr/>
+                    <a:bodyPr wrap="square" lIns="54864" rIns="54864" tIns="27432" bIns="27432" anchor="ctr"/>
                     <a:lstStyle/>
                     <a:p>
-                      <a:pPr algn="ctr"/>
+                      <a:pPr algn="l"/>
                       <a:r>
-                        <a:rPr sz="1200" b="0" i="0">
+                        <a:rPr sz="1100" b="1">
                           <a:solidFill>
-                            <a:srgbClr val="1F2937"/>
+                            <a:srgbClr val="144E4C"/>
                           </a:solidFill>
                           <a:latin typeface="Calibri"/>
                         </a:rPr>
-                        <a:t>1</a:t>
+                        <a:t>Dataset preparation and auditing</a:t>
                       </a:r>
                     </a:p>
                   </a:txBody>
@@ -18877,41 +20508,18 @@
                 </a:tc>
                 <a:tc>
                   <a:txBody>
-                    <a:bodyPr/>
+                    <a:bodyPr wrap="square" lIns="54864" rIns="54864" tIns="27432" bIns="27432" anchor="ctr"/>
                     <a:lstStyle/>
                     <a:p>
                       <a:pPr algn="ctr"/>
                       <a:r>
-                        <a:rPr sz="1200" b="0" i="0">
+                        <a:rPr sz="1100" b="0">
                           <a:solidFill>
-                            <a:srgbClr val="1F2937"/>
+                            <a:srgbClr val="5B6570"/>
                           </a:solidFill>
                           <a:latin typeface="Calibri"/>
                         </a:rPr>
-                        <a:t>Fabric Swatch Collection &amp; Manual Verification</a:t>
-                      </a:r>
-                    </a:p>
-                  </a:txBody>
-                  <a:tcPr marL="73152" marR="73152" anchor="ctr">
-                    <a:solidFill>
-                      <a:srgbClr val="FFFFFF"/>
-                    </a:solidFill>
-                  </a:tcPr>
-                </a:tc>
-                <a:tc>
-                  <a:txBody>
-                    <a:bodyPr/>
-                    <a:lstStyle/>
-                    <a:p>
-                      <a:pPr algn="ctr"/>
-                      <a:r>
-                        <a:rPr sz="1200" b="0" i="0">
-                          <a:solidFill>
-                            <a:srgbClr val="1F2937"/>
-                          </a:solidFill>
-                          <a:latin typeface="Calibri"/>
-                        </a:rPr>
-                        <a:t>1,500</a:t>
+                        <a:t>2,000</a:t>
                       </a:r>
                     </a:p>
                   </a:txBody>
@@ -18930,18 +20538,18 @@
               <a:tr h="384048">
                 <a:tc>
                   <a:txBody>
-                    <a:bodyPr/>
+                    <a:bodyPr wrap="square" lIns="54864" rIns="54864" tIns="27432" bIns="27432" anchor="ctr"/>
                     <a:lstStyle/>
                     <a:p>
-                      <a:pPr algn="ctr"/>
+                      <a:pPr algn="l"/>
                       <a:r>
-                        <a:rPr sz="1200" b="0" i="0">
+                        <a:rPr sz="1100" b="1">
                           <a:solidFill>
-                            <a:srgbClr val="1F2937"/>
+                            <a:srgbClr val="144E4C"/>
                           </a:solidFill>
                           <a:latin typeface="Calibri"/>
                         </a:rPr>
-                        <a:t>2</a:t>
+                        <a:t>Camera and image acquisition resources</a:t>
                       </a:r>
                     </a:p>
                   </a:txBody>
@@ -18953,41 +20561,18 @@
                 </a:tc>
                 <a:tc>
                   <a:txBody>
-                    <a:bodyPr/>
+                    <a:bodyPr wrap="square" lIns="54864" rIns="54864" tIns="27432" bIns="27432" anchor="ctr"/>
                     <a:lstStyle/>
                     <a:p>
                       <a:pPr algn="ctr"/>
                       <a:r>
-                        <a:rPr sz="1200" b="0" i="0">
+                        <a:rPr sz="1100" b="0">
                           <a:solidFill>
-                            <a:srgbClr val="1F2937"/>
+                            <a:srgbClr val="5B6570"/>
                           </a:solidFill>
                           <a:latin typeface="Calibri"/>
                         </a:rPr>
-                        <a:t>Industrial Inspection Camera (USB 1080p)</a:t>
-                      </a:r>
-                    </a:p>
-                  </a:txBody>
-                  <a:tcPr marL="73152" marR="73152" anchor="ctr">
-                    <a:solidFill>
-                      <a:srgbClr val="EFEAD9"/>
-                    </a:solidFill>
-                  </a:tcPr>
-                </a:tc>
-                <a:tc>
-                  <a:txBody>
-                    <a:bodyPr/>
-                    <a:lstStyle/>
-                    <a:p>
-                      <a:pPr algn="ctr"/>
-                      <a:r>
-                        <a:rPr sz="1200" b="0" i="0">
-                          <a:solidFill>
-                            <a:srgbClr val="1F2937"/>
-                          </a:solidFill>
-                          <a:latin typeface="Calibri"/>
-                        </a:rPr>
-                        <a:t>3,500</a:t>
+                        <a:t>4,000</a:t>
                       </a:r>
                     </a:p>
                   </a:txBody>
@@ -19006,18 +20591,18 @@
               <a:tr h="384048">
                 <a:tc>
                   <a:txBody>
-                    <a:bodyPr/>
+                    <a:bodyPr wrap="square" lIns="54864" rIns="54864" tIns="27432" bIns="27432" anchor="ctr"/>
                     <a:lstStyle/>
                     <a:p>
-                      <a:pPr algn="ctr"/>
+                      <a:pPr algn="l"/>
                       <a:r>
-                        <a:rPr sz="1200" b="0" i="0">
+                        <a:rPr sz="1100" b="1">
                           <a:solidFill>
-                            <a:srgbClr val="1F2937"/>
+                            <a:srgbClr val="144E4C"/>
                           </a:solidFill>
                           <a:latin typeface="Calibri"/>
                         </a:rPr>
-                        <a:t>3</a:t>
+                        <a:t>Computing and development resources</a:t>
                       </a:r>
                     </a:p>
                   </a:txBody>
@@ -19029,41 +20614,18 @@
                 </a:tc>
                 <a:tc>
                   <a:txBody>
-                    <a:bodyPr/>
+                    <a:bodyPr wrap="square" lIns="54864" rIns="54864" tIns="27432" bIns="27432" anchor="ctr"/>
                     <a:lstStyle/>
                     <a:p>
                       <a:pPr algn="ctr"/>
                       <a:r>
-                        <a:rPr sz="1200" b="0" i="0">
+                        <a:rPr sz="1100" b="0">
                           <a:solidFill>
-                            <a:srgbClr val="1F2937"/>
+                            <a:srgbClr val="5B6570"/>
                           </a:solidFill>
                           <a:latin typeface="Calibri"/>
                         </a:rPr>
-                        <a:t>Fixed-Geometry Mounting Frame / Fixture</a:t>
-                      </a:r>
-                    </a:p>
-                  </a:txBody>
-                  <a:tcPr marL="73152" marR="73152" anchor="ctr">
-                    <a:solidFill>
-                      <a:srgbClr val="FFFFFF"/>
-                    </a:solidFill>
-                  </a:tcPr>
-                </a:tc>
-                <a:tc>
-                  <a:txBody>
-                    <a:bodyPr/>
-                    <a:lstStyle/>
-                    <a:p>
-                      <a:pPr algn="ctr"/>
-                      <a:r>
-                        <a:rPr sz="1200" b="0" i="0">
-                          <a:solidFill>
-                            <a:srgbClr val="1F2937"/>
-                          </a:solidFill>
-                          <a:latin typeface="Calibri"/>
-                        </a:rPr>
-                        <a:t>1,000</a:t>
+                        <a:t>3,000</a:t>
                       </a:r>
                     </a:p>
                   </a:txBody>
@@ -19082,18 +20644,18 @@
               <a:tr h="384048">
                 <a:tc>
                   <a:txBody>
-                    <a:bodyPr/>
+                    <a:bodyPr wrap="square" lIns="54864" rIns="54864" tIns="27432" bIns="27432" anchor="ctr"/>
                     <a:lstStyle/>
                     <a:p>
-                      <a:pPr algn="ctr"/>
+                      <a:pPr algn="l"/>
                       <a:r>
-                        <a:rPr sz="1200" b="0" i="0">
+                        <a:rPr sz="1100" b="1">
                           <a:solidFill>
-                            <a:srgbClr val="1F2937"/>
+                            <a:srgbClr val="144E4C"/>
                           </a:solidFill>
                           <a:latin typeface="Calibri"/>
                         </a:rPr>
-                        <a:t>4</a:t>
+                        <a:t>Testing and integration</a:t>
                       </a:r>
                     </a:p>
                   </a:txBody>
@@ -19105,41 +20667,18 @@
                 </a:tc>
                 <a:tc>
                   <a:txBody>
-                    <a:bodyPr/>
+                    <a:bodyPr wrap="square" lIns="54864" rIns="54864" tIns="27432" bIns="27432" anchor="ctr"/>
                     <a:lstStyle/>
                     <a:p>
                       <a:pPr algn="ctr"/>
                       <a:r>
-                        <a:rPr sz="1200" b="0" i="0">
+                        <a:rPr sz="1100" b="0">
                           <a:solidFill>
-                            <a:srgbClr val="1F2937"/>
+                            <a:srgbClr val="5B6570"/>
                           </a:solidFill>
                           <a:latin typeface="Calibri"/>
                         </a:rPr>
-                        <a:t>Calibration Materials (Ruler, Grid Chart)</a:t>
-                      </a:r>
-                    </a:p>
-                  </a:txBody>
-                  <a:tcPr marL="73152" marR="73152" anchor="ctr">
-                    <a:solidFill>
-                      <a:srgbClr val="EFEAD9"/>
-                    </a:solidFill>
-                  </a:tcPr>
-                </a:tc>
-                <a:tc>
-                  <a:txBody>
-                    <a:bodyPr/>
-                    <a:lstStyle/>
-                    <a:p>
-                      <a:pPr algn="ctr"/>
-                      <a:r>
-                        <a:rPr sz="1200" b="0" i="0">
-                          <a:solidFill>
-                            <a:srgbClr val="1F2937"/>
-                          </a:solidFill>
-                          <a:latin typeface="Calibri"/>
-                        </a:rPr>
-                        <a:t>600</a:t>
+                        <a:t>2,000</a:t>
                       </a:r>
                     </a:p>
                   </a:txBody>
@@ -19158,18 +20697,18 @@
               <a:tr h="384048">
                 <a:tc>
                   <a:txBody>
-                    <a:bodyPr/>
+                    <a:bodyPr wrap="square" lIns="54864" rIns="54864" tIns="27432" bIns="27432" anchor="ctr"/>
                     <a:lstStyle/>
                     <a:p>
-                      <a:pPr algn="ctr"/>
+                      <a:pPr algn="l"/>
                       <a:r>
-                        <a:rPr sz="1200" b="0" i="0">
+                        <a:rPr sz="1100" b="1">
                           <a:solidFill>
-                            <a:srgbClr val="1F2937"/>
+                            <a:srgbClr val="144E4C"/>
                           </a:solidFill>
                           <a:latin typeface="Calibri"/>
                         </a:rPr>
-                        <a:t>5</a:t>
+                        <a:t>Edge deployment and hardware-related resources</a:t>
                       </a:r>
                     </a:p>
                   </a:txBody>
@@ -19181,41 +20720,18 @@
                 </a:tc>
                 <a:tc>
                   <a:txBody>
-                    <a:bodyPr/>
+                    <a:bodyPr wrap="square" lIns="54864" rIns="54864" tIns="27432" bIns="27432" anchor="ctr"/>
                     <a:lstStyle/>
                     <a:p>
                       <a:pPr algn="ctr"/>
                       <a:r>
-                        <a:rPr sz="1200" b="0" i="0">
+                        <a:rPr sz="1100" b="0">
                           <a:solidFill>
-                            <a:srgbClr val="1F2937"/>
+                            <a:srgbClr val="5B6570"/>
                           </a:solidFill>
                           <a:latin typeface="Calibri"/>
                         </a:rPr>
-                        <a:t>Dept. GPU Lab + Free Cloud Compute</a:t>
-                      </a:r>
-                    </a:p>
-                  </a:txBody>
-                  <a:tcPr marL="73152" marR="73152" anchor="ctr">
-                    <a:solidFill>
-                      <a:srgbClr val="FFFFFF"/>
-                    </a:solidFill>
-                  </a:tcPr>
-                </a:tc>
-                <a:tc>
-                  <a:txBody>
-                    <a:bodyPr/>
-                    <a:lstStyle/>
-                    <a:p>
-                      <a:pPr algn="ctr"/>
-                      <a:r>
-                        <a:rPr sz="1200" b="0" i="0">
-                          <a:solidFill>
-                            <a:srgbClr val="1F2937"/>
-                          </a:solidFill>
-                          <a:latin typeface="Calibri"/>
-                        </a:rPr>
-                        <a:t>0</a:t>
+                        <a:t>3,000</a:t>
                       </a:r>
                     </a:p>
                   </a:txBody>
@@ -19234,18 +20750,18 @@
               <a:tr h="384048">
                 <a:tc>
                   <a:txBody>
-                    <a:bodyPr/>
+                    <a:bodyPr wrap="square" lIns="54864" rIns="54864" tIns="27432" bIns="27432" anchor="ctr"/>
                     <a:lstStyle/>
                     <a:p>
-                      <a:pPr algn="ctr"/>
+                      <a:pPr algn="l"/>
                       <a:r>
-                        <a:rPr sz="1200" b="0" i="0">
+                        <a:rPr sz="1100" b="1">
                           <a:solidFill>
-                            <a:srgbClr val="1F2937"/>
+                            <a:srgbClr val="144E4C"/>
                           </a:solidFill>
                           <a:latin typeface="Calibri"/>
                         </a:rPr>
-                        <a:t>6</a:t>
+                        <a:t>Documentation and presentation</a:t>
                       </a:r>
                     </a:p>
                   </a:txBody>
@@ -19257,41 +20773,18 @@
                 </a:tc>
                 <a:tc>
                   <a:txBody>
-                    <a:bodyPr/>
+                    <a:bodyPr wrap="square" lIns="54864" rIns="54864" tIns="27432" bIns="27432" anchor="ctr"/>
                     <a:lstStyle/>
                     <a:p>
                       <a:pPr algn="ctr"/>
                       <a:r>
-                        <a:rPr sz="1200" b="0" i="0">
+                        <a:rPr sz="1100" b="0">
                           <a:solidFill>
-                            <a:srgbClr val="1F2937"/>
+                            <a:srgbClr val="5B6570"/>
                           </a:solidFill>
                           <a:latin typeface="Calibri"/>
                         </a:rPr>
-                        <a:t>Additional GPU Compute Beyond Free Quota</a:t>
-                      </a:r>
-                    </a:p>
-                  </a:txBody>
-                  <a:tcPr marL="73152" marR="73152" anchor="ctr">
-                    <a:solidFill>
-                      <a:srgbClr val="EFEAD9"/>
-                    </a:solidFill>
-                  </a:tcPr>
-                </a:tc>
-                <a:tc>
-                  <a:txBody>
-                    <a:bodyPr/>
-                    <a:lstStyle/>
-                    <a:p>
-                      <a:pPr algn="ctr"/>
-                      <a:r>
-                        <a:rPr sz="1200" b="0" i="0">
-                          <a:solidFill>
-                            <a:srgbClr val="1F2937"/>
-                          </a:solidFill>
-                          <a:latin typeface="Calibri"/>
-                        </a:rPr>
-                        <a:t>3,000</a:t>
+                        <a:t>1,000</a:t>
                       </a:r>
                     </a:p>
                   </a:txBody>
@@ -19310,18 +20803,18 @@
               <a:tr h="384048">
                 <a:tc>
                   <a:txBody>
-                    <a:bodyPr/>
+                    <a:bodyPr wrap="square" lIns="54864" rIns="54864" tIns="27432" bIns="27432" anchor="ctr"/>
                     <a:lstStyle/>
                     <a:p>
-                      <a:pPr algn="ctr"/>
+                      <a:pPr algn="l"/>
                       <a:r>
-                        <a:rPr sz="1200" b="0" i="0">
+                        <a:rPr sz="1100" b="1">
                           <a:solidFill>
-                            <a:srgbClr val="1F2937"/>
+                            <a:srgbClr val="144E4C"/>
                           </a:solidFill>
                           <a:latin typeface="Calibri"/>
                         </a:rPr>
-                        <a:t>7</a:t>
+                        <a:t>Miscellaneous expenses</a:t>
                       </a:r>
                     </a:p>
                   </a:txBody>
@@ -19333,41 +20826,18 @@
                 </a:tc>
                 <a:tc>
                   <a:txBody>
-                    <a:bodyPr/>
+                    <a:bodyPr wrap="square" lIns="54864" rIns="54864" tIns="27432" bIns="27432" anchor="ctr"/>
                     <a:lstStyle/>
                     <a:p>
                       <a:pPr algn="ctr"/>
                       <a:r>
-                        <a:rPr sz="1200" b="0" i="0">
+                        <a:rPr sz="1100" b="0">
                           <a:solidFill>
-                            <a:srgbClr val="1F2937"/>
+                            <a:srgbClr val="5B6570"/>
                           </a:solidFill>
                           <a:latin typeface="Calibri"/>
                         </a:rPr>
-                        <a:t>Cloud Storage For Dataset &amp; Hash Manifests (1 Yr)</a:t>
-                      </a:r>
-                    </a:p>
-                  </a:txBody>
-                  <a:tcPr marL="73152" marR="73152" anchor="ctr">
-                    <a:solidFill>
-                      <a:srgbClr val="FFFFFF"/>
-                    </a:solidFill>
-                  </a:tcPr>
-                </a:tc>
-                <a:tc>
-                  <a:txBody>
-                    <a:bodyPr/>
-                    <a:lstStyle/>
-                    <a:p>
-                      <a:pPr algn="ctr"/>
-                      <a:r>
-                        <a:rPr sz="1200" b="0" i="0">
-                          <a:solidFill>
-                            <a:srgbClr val="1F2937"/>
-                          </a:solidFill>
-                          <a:latin typeface="Calibri"/>
-                        </a:rPr>
-                        <a:t>2,400</a:t>
+                        <a:t>1,000</a:t>
                       </a:r>
                     </a:p>
                   </a:txBody>
@@ -19386,18 +20856,18 @@
               <a:tr h="384048">
                 <a:tc>
                   <a:txBody>
-                    <a:bodyPr/>
+                    <a:bodyPr wrap="square" lIns="54864" rIns="54864" tIns="27432" bIns="27432" anchor="ctr"/>
                     <a:lstStyle/>
                     <a:p>
-                      <a:pPr algn="ctr"/>
+                      <a:pPr algn="l"/>
                       <a:r>
-                        <a:rPr sz="1200" b="0" i="0">
+                        <a:rPr sz="1100" b="0">
                           <a:solidFill>
-                            <a:srgbClr val="1F2937"/>
+                            <a:srgbClr val="5B6570"/>
                           </a:solidFill>
                           <a:latin typeface="Calibri"/>
                         </a:rPr>
-                        <a:t>8</a:t>
+                        <a:t/>
                       </a:r>
                     </a:p>
                   </a:txBody>
@@ -19409,41 +20879,18 @@
                 </a:tc>
                 <a:tc>
                   <a:txBody>
-                    <a:bodyPr/>
+                    <a:bodyPr wrap="square" lIns="54864" rIns="54864" tIns="27432" bIns="27432" anchor="ctr"/>
                     <a:lstStyle/>
                     <a:p>
-                      <a:pPr algn="ctr"/>
+                      <a:pPr algn="l"/>
                       <a:r>
-                        <a:rPr sz="1200" b="0" i="0">
+                        <a:rPr sz="1100" b="0">
                           <a:solidFill>
-                            <a:srgbClr val="1F2937"/>
+                            <a:srgbClr val="5B6570"/>
                           </a:solidFill>
                           <a:latin typeface="Calibri"/>
                         </a:rPr>
-                        <a:t>Existing Laptops / PCs</a:t>
-                      </a:r>
-                    </a:p>
-                  </a:txBody>
-                  <a:tcPr marL="73152" marR="73152" anchor="ctr">
-                    <a:solidFill>
-                      <a:srgbClr val="EFEAD9"/>
-                    </a:solidFill>
-                  </a:tcPr>
-                </a:tc>
-                <a:tc>
-                  <a:txBody>
-                    <a:bodyPr/>
-                    <a:lstStyle/>
-                    <a:p>
-                      <a:pPr algn="ctr"/>
-                      <a:r>
-                        <a:rPr sz="1200" b="0" i="0">
-                          <a:solidFill>
-                            <a:srgbClr val="1F2937"/>
-                          </a:solidFill>
-                          <a:latin typeface="Calibri"/>
-                        </a:rPr>
-                        <a:t>0</a:t>
+                        <a:t/>
                       </a:r>
                     </a:p>
                   </a:txBody>
@@ -19459,386 +20906,6 @@
                   </a:ext>
                 </a:extLst>
               </a:tr>
-              <a:tr h="384048">
-                <a:tc>
-                  <a:txBody>
-                    <a:bodyPr/>
-                    <a:lstStyle/>
-                    <a:p>
-                      <a:pPr algn="ctr"/>
-                      <a:r>
-                        <a:rPr sz="1200" b="0" i="0">
-                          <a:solidFill>
-                            <a:srgbClr val="1F2937"/>
-                          </a:solidFill>
-                          <a:latin typeface="Calibri"/>
-                        </a:rPr>
-                        <a:t>9</a:t>
-                      </a:r>
-                    </a:p>
-                  </a:txBody>
-                  <a:tcPr marL="73152" marR="73152" anchor="ctr">
-                    <a:solidFill>
-                      <a:srgbClr val="FFFFFF"/>
-                    </a:solidFill>
-                  </a:tcPr>
-                </a:tc>
-                <a:tc>
-                  <a:txBody>
-                    <a:bodyPr/>
-                    <a:lstStyle/>
-                    <a:p>
-                      <a:pPr algn="ctr"/>
-                      <a:r>
-                        <a:rPr sz="1200" b="0" i="0">
-                          <a:solidFill>
-                            <a:srgbClr val="1F2937"/>
-                          </a:solidFill>
-                          <a:latin typeface="Calibri"/>
-                        </a:rPr>
-                        <a:t>ML Libraries (YOLO, OpenCV, Scikit-Learn)</a:t>
-                      </a:r>
-                    </a:p>
-                  </a:txBody>
-                  <a:tcPr marL="73152" marR="73152" anchor="ctr">
-                    <a:solidFill>
-                      <a:srgbClr val="FFFFFF"/>
-                    </a:solidFill>
-                  </a:tcPr>
-                </a:tc>
-                <a:tc>
-                  <a:txBody>
-                    <a:bodyPr/>
-                    <a:lstStyle/>
-                    <a:p>
-                      <a:pPr algn="ctr"/>
-                      <a:r>
-                        <a:rPr sz="1200" b="0" i="0">
-                          <a:solidFill>
-                            <a:srgbClr val="1F2937"/>
-                          </a:solidFill>
-                          <a:latin typeface="Calibri"/>
-                        </a:rPr>
-                        <a:t>0</a:t>
-                      </a:r>
-                    </a:p>
-                  </a:txBody>
-                  <a:tcPr marL="73152" marR="73152" anchor="ctr">
-                    <a:solidFill>
-                      <a:srgbClr val="FFFFFF"/>
-                    </a:solidFill>
-                  </a:tcPr>
-                </a:tc>
-                <a:extLst>
-                  <a:ext uri="{0D108BD9-81ED-4DB2-BD59-A6C34878D82A}">
-                    <a16:rowId xmlns:a16="http://schemas.microsoft.com/office/drawing/2014/main" val="10009"/>
-                  </a:ext>
-                </a:extLst>
-              </a:tr>
-              <a:tr h="384048">
-                <a:tc>
-                  <a:txBody>
-                    <a:bodyPr/>
-                    <a:lstStyle/>
-                    <a:p>
-                      <a:pPr algn="ctr"/>
-                      <a:r>
-                        <a:rPr sz="1200" b="0" i="0">
-                          <a:solidFill>
-                            <a:srgbClr val="1F2937"/>
-                          </a:solidFill>
-                          <a:latin typeface="Calibri"/>
-                        </a:rPr>
-                        <a:t>10</a:t>
-                      </a:r>
-                    </a:p>
-                  </a:txBody>
-                  <a:tcPr marL="73152" marR="73152" anchor="ctr">
-                    <a:solidFill>
-                      <a:srgbClr val="EFEAD9"/>
-                    </a:solidFill>
-                  </a:tcPr>
-                </a:tc>
-                <a:tc>
-                  <a:txBody>
-                    <a:bodyPr/>
-                    <a:lstStyle/>
-                    <a:p>
-                      <a:pPr algn="ctr"/>
-                      <a:r>
-                        <a:rPr sz="1200" b="0" i="0">
-                          <a:solidFill>
-                            <a:srgbClr val="1F2937"/>
-                          </a:solidFill>
-                          <a:latin typeface="Calibri"/>
-                        </a:rPr>
-                        <a:t>Dev Tools &amp; Version Control</a:t>
-                      </a:r>
-                    </a:p>
-                  </a:txBody>
-                  <a:tcPr marL="73152" marR="73152" anchor="ctr">
-                    <a:solidFill>
-                      <a:srgbClr val="EFEAD9"/>
-                    </a:solidFill>
-                  </a:tcPr>
-                </a:tc>
-                <a:tc>
-                  <a:txBody>
-                    <a:bodyPr/>
-                    <a:lstStyle/>
-                    <a:p>
-                      <a:pPr algn="ctr"/>
-                      <a:r>
-                        <a:rPr sz="1200" b="0" i="0">
-                          <a:solidFill>
-                            <a:srgbClr val="1F2937"/>
-                          </a:solidFill>
-                          <a:latin typeface="Calibri"/>
-                        </a:rPr>
-                        <a:t>0</a:t>
-                      </a:r>
-                    </a:p>
-                  </a:txBody>
-                  <a:tcPr marL="73152" marR="73152" anchor="ctr">
-                    <a:solidFill>
-                      <a:srgbClr val="EFEAD9"/>
-                    </a:solidFill>
-                  </a:tcPr>
-                </a:tc>
-                <a:extLst>
-                  <a:ext uri="{0D108BD9-81ED-4DB2-BD59-A6C34878D82A}">
-                    <a16:rowId xmlns:a16="http://schemas.microsoft.com/office/drawing/2014/main" val="10010"/>
-                  </a:ext>
-                </a:extLst>
-              </a:tr>
-              <a:tr h="384048">
-                <a:tc>
-                  <a:txBody>
-                    <a:bodyPr/>
-                    <a:lstStyle/>
-                    <a:p>
-                      <a:pPr algn="ctr"/>
-                      <a:r>
-                        <a:rPr sz="1200" b="0" i="0">
-                          <a:solidFill>
-                            <a:srgbClr val="1F2937"/>
-                          </a:solidFill>
-                          <a:latin typeface="Calibri"/>
-                        </a:rPr>
-                        <a:t>11</a:t>
-                      </a:r>
-                    </a:p>
-                  </a:txBody>
-                  <a:tcPr marL="73152" marR="73152" anchor="ctr">
-                    <a:solidFill>
-                      <a:srgbClr val="FFFFFF"/>
-                    </a:solidFill>
-                  </a:tcPr>
-                </a:tc>
-                <a:tc>
-                  <a:txBody>
-                    <a:bodyPr/>
-                    <a:lstStyle/>
-                    <a:p>
-                      <a:pPr algn="ctr"/>
-                      <a:r>
-                        <a:rPr sz="1200" b="0" i="0">
-                          <a:solidFill>
-                            <a:srgbClr val="1F2937"/>
-                          </a:solidFill>
-                          <a:latin typeface="Calibri"/>
-                        </a:rPr>
-                        <a:t>Internet Connectivity &amp; Dataset Transfer</a:t>
-                      </a:r>
-                    </a:p>
-                  </a:txBody>
-                  <a:tcPr marL="73152" marR="73152" anchor="ctr">
-                    <a:solidFill>
-                      <a:srgbClr val="FFFFFF"/>
-                    </a:solidFill>
-                  </a:tcPr>
-                </a:tc>
-                <a:tc>
-                  <a:txBody>
-                    <a:bodyPr/>
-                    <a:lstStyle/>
-                    <a:p>
-                      <a:pPr algn="ctr"/>
-                      <a:r>
-                        <a:rPr sz="1200" b="0" i="0">
-                          <a:solidFill>
-                            <a:srgbClr val="1F2937"/>
-                          </a:solidFill>
-                          <a:latin typeface="Calibri"/>
-                        </a:rPr>
-                        <a:t>1,500</a:t>
-                      </a:r>
-                    </a:p>
-                  </a:txBody>
-                  <a:tcPr marL="73152" marR="73152" anchor="ctr">
-                    <a:solidFill>
-                      <a:srgbClr val="FFFFFF"/>
-                    </a:solidFill>
-                  </a:tcPr>
-                </a:tc>
-                <a:extLst>
-                  <a:ext uri="{0D108BD9-81ED-4DB2-BD59-A6C34878D82A}">
-                    <a16:rowId xmlns:a16="http://schemas.microsoft.com/office/drawing/2014/main" val="10011"/>
-                  </a:ext>
-                </a:extLst>
-              </a:tr>
-              <a:tr h="384048">
-                <a:tc>
-                  <a:txBody>
-                    <a:bodyPr/>
-                    <a:lstStyle/>
-                    <a:p>
-                      <a:pPr algn="ctr"/>
-                      <a:r>
-                        <a:rPr sz="1200" b="0" i="0">
-                          <a:solidFill>
-                            <a:srgbClr val="1F2937"/>
-                          </a:solidFill>
-                          <a:latin typeface="Calibri"/>
-                        </a:rPr>
-                        <a:t>12</a:t>
-                      </a:r>
-                    </a:p>
-                  </a:txBody>
-                  <a:tcPr marL="73152" marR="73152" anchor="ctr">
-                    <a:solidFill>
-                      <a:srgbClr val="EFEAD9"/>
-                    </a:solidFill>
-                  </a:tcPr>
-                </a:tc>
-                <a:tc>
-                  <a:txBody>
-                    <a:bodyPr/>
-                    <a:lstStyle/>
-                    <a:p>
-                      <a:pPr algn="ctr"/>
-                      <a:r>
-                        <a:rPr sz="1200" b="0" i="0">
-                          <a:solidFill>
-                            <a:srgbClr val="1F2937"/>
-                          </a:solidFill>
-                          <a:latin typeface="Calibri"/>
-                        </a:rPr>
-                        <a:t>Jetson Orin Nano / Edge Deployment Kit</a:t>
-                      </a:r>
-                    </a:p>
-                  </a:txBody>
-                  <a:tcPr marL="73152" marR="73152" anchor="ctr">
-                    <a:solidFill>
-                      <a:srgbClr val="EFEAD9"/>
-                    </a:solidFill>
-                  </a:tcPr>
-                </a:tc>
-                <a:tc>
-                  <a:txBody>
-                    <a:bodyPr/>
-                    <a:lstStyle/>
-                    <a:p>
-                      <a:pPr algn="ctr"/>
-                      <a:r>
-                        <a:rPr sz="1200" b="0" i="0">
-                          <a:solidFill>
-                            <a:srgbClr val="1F2937"/>
-                          </a:solidFill>
-                          <a:latin typeface="Calibri"/>
-                        </a:rPr>
-                        <a:t>25,000</a:t>
-                      </a:r>
-                    </a:p>
-                  </a:txBody>
-                  <a:tcPr marL="73152" marR="73152" anchor="ctr">
-                    <a:solidFill>
-                      <a:srgbClr val="EFEAD9"/>
-                    </a:solidFill>
-                  </a:tcPr>
-                </a:tc>
-                <a:extLst>
-                  <a:ext uri="{0D108BD9-81ED-4DB2-BD59-A6C34878D82A}">
-                    <a16:rowId xmlns:a16="http://schemas.microsoft.com/office/drawing/2014/main" val="10012"/>
-                  </a:ext>
-                </a:extLst>
-              </a:tr>
-              <a:tr h="384048">
-                <a:tc>
-                  <a:txBody>
-                    <a:bodyPr/>
-                    <a:lstStyle/>
-                    <a:p>
-                      <a:pPr algn="ctr"/>
-                      <a:r>
-                        <a:rPr sz="1200" b="0" i="0">
-                          <a:solidFill>
-                            <a:srgbClr val="1F2937"/>
-                          </a:solidFill>
-                          <a:latin typeface="Calibri"/>
-                        </a:rPr>
-                        <a:t>13</a:t>
-                      </a:r>
-                    </a:p>
-                  </a:txBody>
-                  <a:tcPr marL="73152" marR="73152" anchor="ctr">
-                    <a:solidFill>
-                      <a:srgbClr val="FFFFFF"/>
-                    </a:solidFill>
-                  </a:tcPr>
-                </a:tc>
-                <a:tc>
-                  <a:txBody>
-                    <a:bodyPr/>
-                    <a:lstStyle/>
-                    <a:p>
-                      <a:pPr algn="ctr"/>
-                      <a:r>
-                        <a:rPr sz="1200" b="0" i="0">
-                          <a:solidFill>
-                            <a:srgbClr val="1F2937"/>
-                          </a:solidFill>
-                          <a:latin typeface="Calibri"/>
-                        </a:rPr>
-                        <a:t>Documentation, Printing, Binding, Presentation</a:t>
-                      </a:r>
-                    </a:p>
-                  </a:txBody>
-                  <a:tcPr marL="73152" marR="73152" anchor="ctr">
-                    <a:solidFill>
-                      <a:srgbClr val="FFFFFF"/>
-                    </a:solidFill>
-                  </a:tcPr>
-                </a:tc>
-                <a:tc>
-                  <a:txBody>
-                    <a:bodyPr/>
-                    <a:lstStyle/>
-                    <a:p>
-                      <a:pPr algn="ctr"/>
-                      <a:r>
-                        <a:rPr sz="1200" b="0" i="0" dirty="0">
-                          <a:solidFill>
-                            <a:srgbClr val="1F2937"/>
-                          </a:solidFill>
-                          <a:latin typeface="Calibri"/>
-                        </a:rPr>
-                        <a:t>2,500</a:t>
-                      </a:r>
-                    </a:p>
-                  </a:txBody>
-                  <a:tcPr marL="73152" marR="73152" anchor="ctr">
-                    <a:solidFill>
-                      <a:srgbClr val="FFFFFF"/>
-                    </a:solidFill>
-                  </a:tcPr>
-                </a:tc>
-                <a:extLst>
-                  <a:ext uri="{0D108BD9-81ED-4DB2-BD59-A6C34878D82A}">
-                    <a16:rowId xmlns:a16="http://schemas.microsoft.com/office/drawing/2014/main" val="10013"/>
-                  </a:ext>
-                </a:extLst>
-              </a:tr>
             </a:tbl>
           </a:graphicData>
         </a:graphic>
@@ -19882,16 +20949,13 @@
           <a:bodyPr rtlCol="0" anchor="ctr"/>
           <a:lstStyle/>
           <a:p>
-            <a:pPr algn="ctr"/>
-            <a:r>
-              <a:rPr sz="1800" b="1" i="0">
-                <a:solidFill>
-                  <a:srgbClr val="F5F7F2"/>
-                </a:solidFill>
-                <a:latin typeface="Calibri"/>
-              </a:rPr>
-              <a:t>Estimation Total
-42,000 BDT</a:t>
+            <a:r>
+              <a:t>Estimation Total</a:t>
+            </a:r>
+          </a:p>
+          <a:p>
+            <a:r>
+              <a:t>16,000 BDT</a:t>
             </a:r>
           </a:p>
         </p:txBody>
@@ -19994,7 +21058,7 @@
                 </a:solidFill>
                 <a:latin typeface="Calibri"/>
               </a:rPr>
-              <a:t>26 / 30</a:t>
+              <a:t>29 / 35</a:t>
             </a:r>
           </a:p>
         </p:txBody>
@@ -20029,7 +21093,7 @@
                 </a:solidFill>
                 <a:latin typeface="Georgia"/>
               </a:rPr>
-              <a:t>Project Plan (Fig. 5.1)</a:t>
+              <a:t>Project Plan (Table 3.7; Gantt: Fig. 3.9)</a:t>
             </a:r>
           </a:p>
         </p:txBody>
@@ -20053,125 +21117,53 @@
                 <a:tableStyleId>{5C22544A-7EE6-4342-B048-85BDC9FD1C3A}</a:tableStyleId>
               </a:tblPr>
               <a:tblGrid>
-                <a:gridCol w="914400">
-                  <a:extLst>
-                    <a:ext uri="{9D8B030D-6E8A-4147-A177-3AD203B41FA5}">
-                      <a16:colId xmlns:a16="http://schemas.microsoft.com/office/drawing/2014/main" val="20000"/>
-                    </a:ext>
-                  </a:extLst>
-                </a:gridCol>
-                <a:gridCol w="5120640">
-                  <a:extLst>
-                    <a:ext uri="{9D8B030D-6E8A-4147-A177-3AD203B41FA5}">
-                      <a16:colId xmlns:a16="http://schemas.microsoft.com/office/drawing/2014/main" val="20001"/>
-                    </a:ext>
-                  </a:extLst>
-                </a:gridCol>
-                <a:gridCol w="2011680">
-                  <a:extLst>
-                    <a:ext uri="{9D8B030D-6E8A-4147-A177-3AD203B41FA5}">
-                      <a16:colId xmlns:a16="http://schemas.microsoft.com/office/drawing/2014/main" val="20002"/>
-                    </a:ext>
-                  </a:extLst>
-                </a:gridCol>
-                <a:gridCol w="3017520">
-                  <a:extLst>
-                    <a:ext uri="{9D8B030D-6E8A-4147-A177-3AD203B41FA5}">
-                      <a16:colId xmlns:a16="http://schemas.microsoft.com/office/drawing/2014/main" val="20003"/>
-                    </a:ext>
-                  </a:extLst>
-                </a:gridCol>
+                <a:gridCol w="6583680"/>
+                <a:gridCol w="3291840"/>
               </a:tblGrid>
               <a:tr h="502920">
                 <a:tc>
                   <a:txBody>
-                    <a:bodyPr/>
+                    <a:bodyPr wrap="square" lIns="54864" rIns="54864" tIns="27432" bIns="27432" anchor="ctr"/>
                     <a:lstStyle/>
                     <a:p>
-                      <a:pPr algn="ctr"/>
+                      <a:pPr algn="l"/>
                       <a:r>
-                        <a:rPr sz="1400" b="1" i="0">
+                        <a:rPr sz="1100" b="1">
                           <a:solidFill>
                             <a:srgbClr val="FFFFFF"/>
                           </a:solidFill>
                           <a:latin typeface="Calibri"/>
                         </a:rPr>
-                        <a:t>Sprint</a:t>
+                        <a:t>Stage</a:t>
                       </a:r>
                     </a:p>
                   </a:txBody>
                   <a:tcPr marL="73152" marR="73152" anchor="ctr">
                     <a:solidFill>
-                      <a:srgbClr val="144E4C"/>
+                      <a:srgbClr val="D99A06"/>
                     </a:solidFill>
                   </a:tcPr>
                 </a:tc>
                 <a:tc>
                   <a:txBody>
-                    <a:bodyPr/>
+                    <a:bodyPr wrap="square" lIns="54864" rIns="54864" tIns="27432" bIns="27432" anchor="ctr"/>
                     <a:lstStyle/>
                     <a:p>
-                      <a:pPr algn="ctr"/>
+                      <a:pPr algn="l"/>
                       <a:r>
-                        <a:rPr sz="1400" b="1" i="0">
+                        <a:rPr sz="1100" b="1">
                           <a:solidFill>
                             <a:srgbClr val="FFFFFF"/>
                           </a:solidFill>
                           <a:latin typeface="Calibri"/>
                         </a:rPr>
-                        <a:t>Focus</a:t>
+                        <a:t>Schedule / Status</a:t>
                       </a:r>
                     </a:p>
                   </a:txBody>
                   <a:tcPr marL="73152" marR="73152" anchor="ctr">
                     <a:solidFill>
-                      <a:srgbClr val="144E4C"/>
-                    </a:solidFill>
-                  </a:tcPr>
-                </a:tc>
-                <a:tc>
-                  <a:txBody>
-                    <a:bodyPr/>
-                    <a:lstStyle/>
-                    <a:p>
-                      <a:pPr algn="ctr"/>
-                      <a:r>
-                        <a:rPr sz="1400" b="1" i="0">
-                          <a:solidFill>
-                            <a:srgbClr val="FFFFFF"/>
-                          </a:solidFill>
-                          <a:latin typeface="Calibri"/>
-                        </a:rPr>
-                        <a:t>Weeks</a:t>
-                      </a:r>
-                    </a:p>
-                  </a:txBody>
-                  <a:tcPr marL="73152" marR="73152" anchor="ctr">
-                    <a:solidFill>
-                      <a:srgbClr val="144E4C"/>
-                    </a:solidFill>
-                  </a:tcPr>
-                </a:tc>
-                <a:tc>
-                  <a:txBody>
-                    <a:bodyPr/>
-                    <a:lstStyle/>
-                    <a:p>
-                      <a:pPr algn="ctr"/>
-                      <a:r>
-                        <a:rPr sz="1400" b="1" i="0">
-                          <a:solidFill>
-                            <a:srgbClr val="FFFFFF"/>
-                          </a:solidFill>
-                          <a:latin typeface="Calibri"/>
-                        </a:rPr>
-                        <a:t>Owner</a:t>
-                      </a:r>
-                    </a:p>
-                  </a:txBody>
-                  <a:tcPr marL="73152" marR="73152" anchor="ctr">
-                    <a:solidFill>
-                      <a:srgbClr val="144E4C"/>
+                      <a:srgbClr val="D99A06"/>
                     </a:solidFill>
                   </a:tcPr>
                 </a:tc>
@@ -20184,18 +21176,18 @@
               <a:tr h="502920">
                 <a:tc>
                   <a:txBody>
-                    <a:bodyPr/>
+                    <a:bodyPr wrap="square" lIns="54864" rIns="54864" tIns="27432" bIns="27432" anchor="ctr"/>
                     <a:lstStyle/>
                     <a:p>
-                      <a:pPr algn="ctr"/>
+                      <a:pPr algn="l"/>
                       <a:r>
-                        <a:rPr sz="1300" b="0" i="0">
+                        <a:rPr sz="1100" b="1">
                           <a:solidFill>
-                            <a:srgbClr val="1F2937"/>
+                            <a:srgbClr val="144E4C"/>
                           </a:solidFill>
                           <a:latin typeface="Calibri"/>
                         </a:rPr>
-                        <a:t>S1</a:t>
+                        <a:t>Audit / Split</a:t>
                       </a:r>
                     </a:p>
                   </a:txBody>
@@ -20207,64 +21199,18 @@
                 </a:tc>
                 <a:tc>
                   <a:txBody>
-                    <a:bodyPr/>
+                    <a:bodyPr wrap="square" lIns="54864" rIns="54864" tIns="27432" bIns="27432" anchor="ctr"/>
                     <a:lstStyle/>
                     <a:p>
                       <a:pPr algn="ctr"/>
                       <a:r>
-                        <a:rPr sz="1300" b="0" i="0">
+                        <a:rPr sz="1100" b="0">
                           <a:solidFill>
-                            <a:srgbClr val="1F2937"/>
+                            <a:srgbClr val="5B6570"/>
                           </a:solidFill>
                           <a:latin typeface="Calibri"/>
                         </a:rPr>
-                        <a:t>Data Preparation And Requirements</a:t>
-                      </a:r>
-                    </a:p>
-                  </a:txBody>
-                  <a:tcPr marL="73152" marR="73152" anchor="ctr">
-                    <a:solidFill>
-                      <a:srgbClr val="FFFFFF"/>
-                    </a:solidFill>
-                  </a:tcPr>
-                </a:tc>
-                <a:tc>
-                  <a:txBody>
-                    <a:bodyPr/>
-                    <a:lstStyle/>
-                    <a:p>
-                      <a:pPr algn="ctr"/>
-                      <a:r>
-                        <a:rPr sz="1300" b="0" i="0">
-                          <a:solidFill>
-                            <a:srgbClr val="1F2937"/>
-                          </a:solidFill>
-                          <a:latin typeface="Calibri"/>
-                        </a:rPr>
-                        <a:t>1–2</a:t>
-                      </a:r>
-                    </a:p>
-                  </a:txBody>
-                  <a:tcPr marL="73152" marR="73152" anchor="ctr">
-                    <a:solidFill>
-                      <a:srgbClr val="FFFFFF"/>
-                    </a:solidFill>
-                  </a:tcPr>
-                </a:tc>
-                <a:tc>
-                  <a:txBody>
-                    <a:bodyPr/>
-                    <a:lstStyle/>
-                    <a:p>
-                      <a:pPr algn="ctr"/>
-                      <a:r>
-                        <a:rPr sz="1300" b="0" i="0">
-                          <a:solidFill>
-                            <a:srgbClr val="1F2937"/>
-                          </a:solidFill>
-                          <a:latin typeface="Calibri"/>
-                        </a:rPr>
-                        <a:t>Riya, Labib</a:t>
+                        <a:t>Completed</a:t>
                       </a:r>
                     </a:p>
                   </a:txBody>
@@ -20283,18 +21229,18 @@
               <a:tr h="502920">
                 <a:tc>
                   <a:txBody>
-                    <a:bodyPr/>
+                    <a:bodyPr wrap="square" lIns="54864" rIns="54864" tIns="27432" bIns="27432" anchor="ctr"/>
                     <a:lstStyle/>
                     <a:p>
-                      <a:pPr algn="ctr"/>
+                      <a:pPr algn="l"/>
                       <a:r>
-                        <a:rPr sz="1300" b="0" i="0">
+                        <a:rPr sz="1100" b="1">
                           <a:solidFill>
-                            <a:srgbClr val="1F2937"/>
+                            <a:srgbClr val="144E4C"/>
                           </a:solidFill>
                           <a:latin typeface="Calibri"/>
                         </a:rPr>
-                        <a:t>S2</a:t>
+                        <a:t>Reproduction</a:t>
                       </a:r>
                     </a:p>
                   </a:txBody>
@@ -20306,64 +21252,18 @@
                 </a:tc>
                 <a:tc>
                   <a:txBody>
-                    <a:bodyPr/>
+                    <a:bodyPr wrap="square" lIns="54864" rIns="54864" tIns="27432" bIns="27432" anchor="ctr"/>
                     <a:lstStyle/>
                     <a:p>
                       <a:pPr algn="ctr"/>
                       <a:r>
-                        <a:rPr sz="1300" b="0" i="0">
+                        <a:rPr sz="1100" b="0">
                           <a:solidFill>
-                            <a:srgbClr val="1F2937"/>
+                            <a:srgbClr val="5B6570"/>
                           </a:solidFill>
                           <a:latin typeface="Calibri"/>
                         </a:rPr>
-                        <a:t>Setup And Preprocessing</a:t>
-                      </a:r>
-                    </a:p>
-                  </a:txBody>
-                  <a:tcPr marL="73152" marR="73152" anchor="ctr">
-                    <a:solidFill>
-                      <a:srgbClr val="EFEAD9"/>
-                    </a:solidFill>
-                  </a:tcPr>
-                </a:tc>
-                <a:tc>
-                  <a:txBody>
-                    <a:bodyPr/>
-                    <a:lstStyle/>
-                    <a:p>
-                      <a:pPr algn="ctr"/>
-                      <a:r>
-                        <a:rPr sz="1300" b="0" i="0">
-                          <a:solidFill>
-                            <a:srgbClr val="1F2937"/>
-                          </a:solidFill>
-                          <a:latin typeface="Calibri"/>
-                        </a:rPr>
-                        <a:t>3–4</a:t>
-                      </a:r>
-                    </a:p>
-                  </a:txBody>
-                  <a:tcPr marL="73152" marR="73152" anchor="ctr">
-                    <a:solidFill>
-                      <a:srgbClr val="EFEAD9"/>
-                    </a:solidFill>
-                  </a:tcPr>
-                </a:tc>
-                <a:tc>
-                  <a:txBody>
-                    <a:bodyPr/>
-                    <a:lstStyle/>
-                    <a:p>
-                      <a:pPr algn="ctr"/>
-                      <a:r>
-                        <a:rPr sz="1300" b="0" i="0">
-                          <a:solidFill>
-                            <a:srgbClr val="1F2937"/>
-                          </a:solidFill>
-                          <a:latin typeface="Calibri"/>
-                        </a:rPr>
-                        <a:t>Zahin, Riya</a:t>
+                        <a:t>Weeks 1–2</a:t>
                       </a:r>
                     </a:p>
                   </a:txBody>
@@ -20382,18 +21282,18 @@
               <a:tr h="502920">
                 <a:tc>
                   <a:txBody>
-                    <a:bodyPr/>
+                    <a:bodyPr wrap="square" lIns="54864" rIns="54864" tIns="27432" bIns="27432" anchor="ctr"/>
                     <a:lstStyle/>
                     <a:p>
-                      <a:pPr algn="ctr"/>
+                      <a:pPr algn="l"/>
                       <a:r>
-                        <a:rPr sz="1300" b="0" i="0">
+                        <a:rPr sz="1100" b="1">
                           <a:solidFill>
-                            <a:srgbClr val="1F2937"/>
+                            <a:srgbClr val="144E4C"/>
                           </a:solidFill>
                           <a:latin typeface="Calibri"/>
                         </a:rPr>
-                        <a:t>S3</a:t>
+                        <a:t>Segmentation</a:t>
                       </a:r>
                     </a:p>
                   </a:txBody>
@@ -20405,64 +21305,18 @@
                 </a:tc>
                 <a:tc>
                   <a:txBody>
-                    <a:bodyPr/>
+                    <a:bodyPr wrap="square" lIns="54864" rIns="54864" tIns="27432" bIns="27432" anchor="ctr"/>
                     <a:lstStyle/>
                     <a:p>
                       <a:pPr algn="ctr"/>
                       <a:r>
-                        <a:rPr sz="1300" b="0" i="0">
+                        <a:rPr sz="1100" b="0">
                           <a:solidFill>
-                            <a:srgbClr val="1F2937"/>
+                            <a:srgbClr val="5B6570"/>
                           </a:solidFill>
                           <a:latin typeface="Calibri"/>
                         </a:rPr>
-                        <a:t>Defect Detection</a:t>
-                      </a:r>
-                    </a:p>
-                  </a:txBody>
-                  <a:tcPr marL="73152" marR="73152" anchor="ctr">
-                    <a:solidFill>
-                      <a:srgbClr val="FFFFFF"/>
-                    </a:solidFill>
-                  </a:tcPr>
-                </a:tc>
-                <a:tc>
-                  <a:txBody>
-                    <a:bodyPr/>
-                    <a:lstStyle/>
-                    <a:p>
-                      <a:pPr algn="ctr"/>
-                      <a:r>
-                        <a:rPr sz="1300" b="0" i="0">
-                          <a:solidFill>
-                            <a:srgbClr val="1F2937"/>
-                          </a:solidFill>
-                          <a:latin typeface="Calibri"/>
-                        </a:rPr>
-                        <a:t>5–6</a:t>
-                      </a:r>
-                    </a:p>
-                  </a:txBody>
-                  <a:tcPr marL="73152" marR="73152" anchor="ctr">
-                    <a:solidFill>
-                      <a:srgbClr val="FFFFFF"/>
-                    </a:solidFill>
-                  </a:tcPr>
-                </a:tc>
-                <a:tc>
-                  <a:txBody>
-                    <a:bodyPr/>
-                    <a:lstStyle/>
-                    <a:p>
-                      <a:pPr algn="ctr"/>
-                      <a:r>
-                        <a:rPr sz="1300" b="0" i="0">
-                          <a:solidFill>
-                            <a:srgbClr val="1F2937"/>
-                          </a:solidFill>
-                          <a:latin typeface="Calibri"/>
-                        </a:rPr>
-                        <a:t>Zahin</a:t>
+                        <a:t>Weeks 3–10</a:t>
                       </a:r>
                     </a:p>
                   </a:txBody>
@@ -20481,18 +21335,18 @@
               <a:tr h="502920">
                 <a:tc>
                   <a:txBody>
-                    <a:bodyPr/>
+                    <a:bodyPr wrap="square" lIns="54864" rIns="54864" tIns="27432" bIns="27432" anchor="ctr"/>
                     <a:lstStyle/>
                     <a:p>
-                      <a:pPr algn="ctr"/>
+                      <a:pPr algn="l"/>
                       <a:r>
-                        <a:rPr sz="1300" b="0" i="0">
+                        <a:rPr sz="1100" b="1">
                           <a:solidFill>
-                            <a:srgbClr val="1F2937"/>
+                            <a:srgbClr val="144E4C"/>
                           </a:solidFill>
                           <a:latin typeface="Calibri"/>
                         </a:rPr>
-                        <a:t>S4</a:t>
+                        <a:t>Anomaly Detection</a:t>
                       </a:r>
                     </a:p>
                   </a:txBody>
@@ -20504,64 +21358,18 @@
                 </a:tc>
                 <a:tc>
                   <a:txBody>
-                    <a:bodyPr/>
+                    <a:bodyPr wrap="square" lIns="54864" rIns="54864" tIns="27432" bIns="27432" anchor="ctr"/>
                     <a:lstStyle/>
                     <a:p>
                       <a:pPr algn="ctr"/>
                       <a:r>
-                        <a:rPr sz="1300" b="0" i="0">
+                        <a:rPr sz="1100" b="0">
                           <a:solidFill>
-                            <a:srgbClr val="1F2937"/>
+                            <a:srgbClr val="5B6570"/>
                           </a:solidFill>
                           <a:latin typeface="Calibri"/>
                         </a:rPr>
-                        <a:t>Anomaly Detection And Metadata</a:t>
-                      </a:r>
-                    </a:p>
-                  </a:txBody>
-                  <a:tcPr marL="73152" marR="73152" anchor="ctr">
-                    <a:solidFill>
-                      <a:srgbClr val="EFEAD9"/>
-                    </a:solidFill>
-                  </a:tcPr>
-                </a:tc>
-                <a:tc>
-                  <a:txBody>
-                    <a:bodyPr/>
-                    <a:lstStyle/>
-                    <a:p>
-                      <a:pPr algn="ctr"/>
-                      <a:r>
-                        <a:rPr sz="1300" b="0" i="0">
-                          <a:solidFill>
-                            <a:srgbClr val="1F2937"/>
-                          </a:solidFill>
-                          <a:latin typeface="Calibri"/>
-                        </a:rPr>
-                        <a:t>7–8</a:t>
-                      </a:r>
-                    </a:p>
-                  </a:txBody>
-                  <a:tcPr marL="73152" marR="73152" anchor="ctr">
-                    <a:solidFill>
-                      <a:srgbClr val="EFEAD9"/>
-                    </a:solidFill>
-                  </a:tcPr>
-                </a:tc>
-                <a:tc>
-                  <a:txBody>
-                    <a:bodyPr/>
-                    <a:lstStyle/>
-                    <a:p>
-                      <a:pPr algn="ctr"/>
-                      <a:r>
-                        <a:rPr sz="1300" b="0" i="0">
-                          <a:solidFill>
-                            <a:srgbClr val="1F2937"/>
-                          </a:solidFill>
-                          <a:latin typeface="Calibri"/>
-                        </a:rPr>
-                        <a:t>Amin, Niloy</a:t>
+                        <a:t>Weeks 8–14</a:t>
                       </a:r>
                     </a:p>
                   </a:txBody>
@@ -20580,18 +21388,18 @@
               <a:tr h="502920">
                 <a:tc>
                   <a:txBody>
-                    <a:bodyPr/>
+                    <a:bodyPr wrap="square" lIns="54864" rIns="54864" tIns="27432" bIns="27432" anchor="ctr"/>
                     <a:lstStyle/>
                     <a:p>
-                      <a:pPr algn="ctr"/>
+                      <a:pPr algn="l"/>
                       <a:r>
-                        <a:rPr sz="1300" b="0" i="0">
+                        <a:rPr sz="1100" b="1">
                           <a:solidFill>
-                            <a:srgbClr val="1F2937"/>
+                            <a:srgbClr val="144E4C"/>
                           </a:solidFill>
                           <a:latin typeface="Calibri"/>
                         </a:rPr>
-                        <a:t>S5</a:t>
+                        <a:t>Lead-Time Planning</a:t>
                       </a:r>
                     </a:p>
                   </a:txBody>
@@ -20603,64 +21411,18 @@
                 </a:tc>
                 <a:tc>
                   <a:txBody>
-                    <a:bodyPr/>
+                    <a:bodyPr wrap="square" lIns="54864" rIns="54864" tIns="27432" bIns="27432" anchor="ctr"/>
                     <a:lstStyle/>
                     <a:p>
                       <a:pPr algn="ctr"/>
                       <a:r>
-                        <a:rPr sz="1300" b="0" i="0">
+                        <a:rPr sz="1100" b="0">
                           <a:solidFill>
-                            <a:srgbClr val="1F2937"/>
+                            <a:srgbClr val="5B6570"/>
                           </a:solidFill>
                           <a:latin typeface="Calibri"/>
                         </a:rPr>
-                        <a:t>Lead-Time Prediction</a:t>
-                      </a:r>
-                    </a:p>
-                  </a:txBody>
-                  <a:tcPr marL="73152" marR="73152" anchor="ctr">
-                    <a:solidFill>
-                      <a:srgbClr val="FFFFFF"/>
-                    </a:solidFill>
-                  </a:tcPr>
-                </a:tc>
-                <a:tc>
-                  <a:txBody>
-                    <a:bodyPr/>
-                    <a:lstStyle/>
-                    <a:p>
-                      <a:pPr algn="ctr"/>
-                      <a:r>
-                        <a:rPr sz="1300" b="0" i="0">
-                          <a:solidFill>
-                            <a:srgbClr val="1F2937"/>
-                          </a:solidFill>
-                          <a:latin typeface="Calibri"/>
-                        </a:rPr>
-                        <a:t>9–10</a:t>
-                      </a:r>
-                    </a:p>
-                  </a:txBody>
-                  <a:tcPr marL="73152" marR="73152" anchor="ctr">
-                    <a:solidFill>
-                      <a:srgbClr val="FFFFFF"/>
-                    </a:solidFill>
-                  </a:tcPr>
-                </a:tc>
-                <a:tc>
-                  <a:txBody>
-                    <a:bodyPr/>
-                    <a:lstStyle/>
-                    <a:p>
-                      <a:pPr algn="ctr"/>
-                      <a:r>
-                        <a:rPr sz="1300" b="0" i="0">
-                          <a:solidFill>
-                            <a:srgbClr val="1F2937"/>
-                          </a:solidFill>
-                          <a:latin typeface="Calibri"/>
-                        </a:rPr>
-                        <a:t>Zahin</a:t>
+                        <a:t>Weeks 12–18</a:t>
                       </a:r>
                     </a:p>
                   </a:txBody>
@@ -20679,18 +21441,18 @@
               <a:tr h="502920">
                 <a:tc>
                   <a:txBody>
-                    <a:bodyPr/>
+                    <a:bodyPr wrap="square" lIns="54864" rIns="54864" tIns="27432" bIns="27432" anchor="ctr"/>
                     <a:lstStyle/>
                     <a:p>
-                      <a:pPr algn="ctr"/>
+                      <a:pPr algn="l"/>
                       <a:r>
-                        <a:rPr sz="1300" b="0" i="0">
+                        <a:rPr sz="1100" b="1">
                           <a:solidFill>
-                            <a:srgbClr val="1F2937"/>
+                            <a:srgbClr val="144E4C"/>
                           </a:solidFill>
                           <a:latin typeface="Calibri"/>
                         </a:rPr>
-                        <a:t>S6</a:t>
+                        <a:t>Edge Deployment</a:t>
                       </a:r>
                     </a:p>
                   </a:txBody>
@@ -20702,64 +21464,18 @@
                 </a:tc>
                 <a:tc>
                   <a:txBody>
-                    <a:bodyPr/>
+                    <a:bodyPr wrap="square" lIns="54864" rIns="54864" tIns="27432" bIns="27432" anchor="ctr"/>
                     <a:lstStyle/>
                     <a:p>
                       <a:pPr algn="ctr"/>
                       <a:r>
-                        <a:rPr sz="1300" b="0" i="0">
+                        <a:rPr sz="1100" b="0">
                           <a:solidFill>
-                            <a:srgbClr val="1F2937"/>
+                            <a:srgbClr val="5B6570"/>
                           </a:solidFill>
                           <a:latin typeface="Calibri"/>
                         </a:rPr>
-                        <a:t>Dashboard Development</a:t>
-                      </a:r>
-                    </a:p>
-                  </a:txBody>
-                  <a:tcPr marL="73152" marR="73152" anchor="ctr">
-                    <a:solidFill>
-                      <a:srgbClr val="EFEAD9"/>
-                    </a:solidFill>
-                  </a:tcPr>
-                </a:tc>
-                <a:tc>
-                  <a:txBody>
-                    <a:bodyPr/>
-                    <a:lstStyle/>
-                    <a:p>
-                      <a:pPr algn="ctr"/>
-                      <a:r>
-                        <a:rPr sz="1300" b="0" i="0">
-                          <a:solidFill>
-                            <a:srgbClr val="1F2937"/>
-                          </a:solidFill>
-                          <a:latin typeface="Calibri"/>
-                        </a:rPr>
-                        <a:t>11–12</a:t>
-                      </a:r>
-                    </a:p>
-                  </a:txBody>
-                  <a:tcPr marL="73152" marR="73152" anchor="ctr">
-                    <a:solidFill>
-                      <a:srgbClr val="EFEAD9"/>
-                    </a:solidFill>
-                  </a:tcPr>
-                </a:tc>
-                <a:tc>
-                  <a:txBody>
-                    <a:bodyPr/>
-                    <a:lstStyle/>
-                    <a:p>
-                      <a:pPr algn="ctr"/>
-                      <a:r>
-                        <a:rPr sz="1300" b="0" i="0">
-                          <a:solidFill>
-                            <a:srgbClr val="1F2937"/>
-                          </a:solidFill>
-                          <a:latin typeface="Calibri"/>
-                        </a:rPr>
-                        <a:t>Niloy</a:t>
+                        <a:t>Weeks 16–24</a:t>
                       </a:r>
                     </a:p>
                   </a:txBody>
@@ -20778,18 +21494,18 @@
               <a:tr h="502920">
                 <a:tc>
                   <a:txBody>
-                    <a:bodyPr/>
+                    <a:bodyPr wrap="square" lIns="54864" rIns="54864" tIns="27432" bIns="27432" anchor="ctr"/>
                     <a:lstStyle/>
                     <a:p>
-                      <a:pPr algn="ctr"/>
+                      <a:pPr algn="l"/>
                       <a:r>
-                        <a:rPr sz="1300" b="0" i="0">
+                        <a:rPr sz="1100" b="1">
                           <a:solidFill>
-                            <a:srgbClr val="1F2937"/>
+                            <a:srgbClr val="144E4C"/>
                           </a:solidFill>
                           <a:latin typeface="Calibri"/>
                         </a:rPr>
-                        <a:t>S7</a:t>
+                        <a:t>Testing and Evaluation</a:t>
                       </a:r>
                     </a:p>
                   </a:txBody>
@@ -20801,64 +21517,18 @@
                 </a:tc>
                 <a:tc>
                   <a:txBody>
-                    <a:bodyPr/>
+                    <a:bodyPr wrap="square" lIns="54864" rIns="54864" tIns="27432" bIns="27432" anchor="ctr"/>
                     <a:lstStyle/>
                     <a:p>
                       <a:pPr algn="ctr"/>
                       <a:r>
-                        <a:rPr sz="1300" b="0" i="0">
+                        <a:rPr sz="1100" b="0">
                           <a:solidFill>
-                            <a:srgbClr val="1F2937"/>
+                            <a:srgbClr val="5B6570"/>
                           </a:solidFill>
                           <a:latin typeface="Calibri"/>
                         </a:rPr>
-                        <a:t>Deployment, Testing And Documentation</a:t>
-                      </a:r>
-                    </a:p>
-                  </a:txBody>
-                  <a:tcPr marL="73152" marR="73152" anchor="ctr">
-                    <a:solidFill>
-                      <a:srgbClr val="FFFFFF"/>
-                    </a:solidFill>
-                  </a:tcPr>
-                </a:tc>
-                <a:tc>
-                  <a:txBody>
-                    <a:bodyPr/>
-                    <a:lstStyle/>
-                    <a:p>
-                      <a:pPr algn="ctr"/>
-                      <a:r>
-                        <a:rPr sz="1300" b="0" i="0">
-                          <a:solidFill>
-                            <a:srgbClr val="1F2937"/>
-                          </a:solidFill>
-                          <a:latin typeface="Calibri"/>
-                        </a:rPr>
-                        <a:t>13–14</a:t>
-                      </a:r>
-                    </a:p>
-                  </a:txBody>
-                  <a:tcPr marL="73152" marR="73152" anchor="ctr">
-                    <a:solidFill>
-                      <a:srgbClr val="FFFFFF"/>
-                    </a:solidFill>
-                  </a:tcPr>
-                </a:tc>
-                <a:tc>
-                  <a:txBody>
-                    <a:bodyPr/>
-                    <a:lstStyle/>
-                    <a:p>
-                      <a:pPr algn="ctr"/>
-                      <a:r>
-                        <a:rPr sz="1300" b="0" i="0">
-                          <a:solidFill>
-                            <a:srgbClr val="1F2937"/>
-                          </a:solidFill>
-                          <a:latin typeface="Calibri"/>
-                        </a:rPr>
-                        <a:t>Labib, Murad, Riya</a:t>
+                        <a:t>Weeks 24–28</a:t>
                       </a:r>
                     </a:p>
                   </a:txBody>
@@ -20877,18 +21547,18 @@
               <a:tr h="502920">
                 <a:tc>
                   <a:txBody>
-                    <a:bodyPr/>
+                    <a:bodyPr wrap="square" lIns="54864" rIns="54864" tIns="27432" bIns="27432" anchor="ctr"/>
                     <a:lstStyle/>
                     <a:p>
-                      <a:pPr algn="ctr"/>
+                      <a:pPr algn="l"/>
                       <a:r>
-                        <a:rPr sz="1300" b="0" i="0">
+                        <a:rPr sz="1100" b="1">
                           <a:solidFill>
-                            <a:srgbClr val="1F2937"/>
+                            <a:srgbClr val="144E4C"/>
                           </a:solidFill>
                           <a:latin typeface="Calibri"/>
                         </a:rPr>
-                        <a:t>S8</a:t>
+                        <a:t>Documentation and Write-up</a:t>
                       </a:r>
                     </a:p>
                   </a:txBody>
@@ -20900,64 +21570,18 @@
                 </a:tc>
                 <a:tc>
                   <a:txBody>
-                    <a:bodyPr/>
+                    <a:bodyPr wrap="square" lIns="54864" rIns="54864" tIns="27432" bIns="27432" anchor="ctr"/>
                     <a:lstStyle/>
                     <a:p>
                       <a:pPr algn="ctr"/>
                       <a:r>
-                        <a:rPr sz="1300" b="0" i="0">
+                        <a:rPr sz="1100" b="0">
                           <a:solidFill>
-                            <a:srgbClr val="1F2937"/>
+                            <a:srgbClr val="5B6570"/>
                           </a:solidFill>
                           <a:latin typeface="Calibri"/>
                         </a:rPr>
-                        <a:t>Final Integration And Presentation</a:t>
-                      </a:r>
-                    </a:p>
-                  </a:txBody>
-                  <a:tcPr marL="73152" marR="73152" anchor="ctr">
-                    <a:solidFill>
-                      <a:srgbClr val="EFEAD9"/>
-                    </a:solidFill>
-                  </a:tcPr>
-                </a:tc>
-                <a:tc>
-                  <a:txBody>
-                    <a:bodyPr/>
-                    <a:lstStyle/>
-                    <a:p>
-                      <a:pPr algn="ctr"/>
-                      <a:r>
-                        <a:rPr sz="1300" b="0" i="0">
-                          <a:solidFill>
-                            <a:srgbClr val="1F2937"/>
-                          </a:solidFill>
-                          <a:latin typeface="Calibri"/>
-                        </a:rPr>
-                        <a:t>15–16</a:t>
-                      </a:r>
-                    </a:p>
-                  </a:txBody>
-                  <a:tcPr marL="73152" marR="73152" anchor="ctr">
-                    <a:solidFill>
-                      <a:srgbClr val="EFEAD9"/>
-                    </a:solidFill>
-                  </a:tcPr>
-                </a:tc>
-                <a:tc>
-                  <a:txBody>
-                    <a:bodyPr/>
-                    <a:lstStyle/>
-                    <a:p>
-                      <a:pPr algn="ctr"/>
-                      <a:r>
-                        <a:rPr sz="1300" b="0" i="0">
-                          <a:solidFill>
-                            <a:srgbClr val="1F2937"/>
-                          </a:solidFill>
-                          <a:latin typeface="Calibri"/>
-                        </a:rPr>
-                        <a:t>All</a:t>
+                        <a:t>Weeks 24–32</a:t>
                       </a:r>
                     </a:p>
                   </a:txBody>
@@ -21487,19 +22111,19 @@
               <a:tr h="845820">
                 <a:tc>
                   <a:txBody>
-                    <a:bodyPr/>
+                    <a:bodyPr wrap="square" lIns="54864" rIns="54864" tIns="27432" bIns="27432" anchor="ctr"/>
                     <a:lstStyle/>
                     <a:p>
-                      <a:pPr algn="ctr"/>
+                      <a:pPr algn="l"/>
                       <a:r>
-                        <a:rPr lang="en-US" sz="1400" dirty="0"/>
-                        <a:t>✅</a:t>
+                        <a:rPr sz="1100" b="1">
+                          <a:solidFill>
+                            <a:srgbClr val="144E4C"/>
+                          </a:solidFill>
+                          <a:latin typeface="Calibri"/>
+                        </a:rPr>
+                        <a:t>Yes</a:t>
                       </a:r>
-                      <a:endParaRPr sz="1400" b="0" dirty="0">
-                        <a:solidFill>
-                          <a:srgbClr val="1A424D"/>
-                        </a:solidFill>
-                      </a:endParaRPr>
                     </a:p>
                   </a:txBody>
                   <a:tcPr anchor="ctr">
@@ -21510,19 +22134,19 @@
                 </a:tc>
                 <a:tc>
                   <a:txBody>
-                    <a:bodyPr/>
+                    <a:bodyPr wrap="square" lIns="54864" rIns="54864" tIns="27432" bIns="27432" anchor="ctr"/>
                     <a:lstStyle/>
                     <a:p>
-                      <a:pPr algn="ctr"/>
+                      <a:pPr algn="l"/>
                       <a:r>
-                        <a:rPr lang="en-US" sz="1400" dirty="0"/>
-                        <a:t>✅</a:t>
+                        <a:rPr sz="1100" b="1">
+                          <a:solidFill>
+                            <a:srgbClr val="144E4C"/>
+                          </a:solidFill>
+                          <a:latin typeface="Calibri"/>
+                        </a:rPr>
+                        <a:t>Yes</a:t>
                       </a:r>
-                      <a:endParaRPr sz="1400" b="0" dirty="0">
-                        <a:solidFill>
-                          <a:srgbClr val="1A424D"/>
-                        </a:solidFill>
-                      </a:endParaRPr>
                     </a:p>
                   </a:txBody>
                   <a:tcPr anchor="ctr">
@@ -21533,19 +22157,19 @@
                 </a:tc>
                 <a:tc>
                   <a:txBody>
-                    <a:bodyPr/>
+                    <a:bodyPr wrap="square" lIns="54864" rIns="54864" tIns="27432" bIns="27432" anchor="ctr"/>
                     <a:lstStyle/>
                     <a:p>
-                      <a:pPr algn="ctr"/>
+                      <a:pPr algn="l"/>
                       <a:r>
-                        <a:rPr lang="en-US" sz="1400" dirty="0"/>
-                        <a:t>✅</a:t>
+                        <a:rPr sz="1100" b="1">
+                          <a:solidFill>
+                            <a:srgbClr val="144E4C"/>
+                          </a:solidFill>
+                          <a:latin typeface="Calibri"/>
+                        </a:rPr>
+                        <a:t>Yes</a:t>
                       </a:r>
-                      <a:endParaRPr sz="1400" b="0" dirty="0">
-                        <a:solidFill>
-                          <a:srgbClr val="1A424D"/>
-                        </a:solidFill>
-                      </a:endParaRPr>
                     </a:p>
                   </a:txBody>
                   <a:tcPr anchor="ctr">
@@ -21556,19 +22180,19 @@
                 </a:tc>
                 <a:tc>
                   <a:txBody>
-                    <a:bodyPr/>
+                    <a:bodyPr wrap="square" lIns="54864" rIns="54864" tIns="27432" bIns="27432" anchor="ctr"/>
                     <a:lstStyle/>
                     <a:p>
-                      <a:pPr algn="ctr"/>
+                      <a:pPr algn="l"/>
                       <a:r>
-                        <a:rPr lang="en-US" sz="1400" dirty="0"/>
-                        <a:t>❌</a:t>
+                        <a:rPr sz="1100" b="1">
+                          <a:solidFill>
+                            <a:srgbClr val="5B6570"/>
+                          </a:solidFill>
+                          <a:latin typeface="Calibri"/>
+                        </a:rPr>
+                        <a:t>No</a:t>
                       </a:r>
-                      <a:endParaRPr sz="1400" b="0" dirty="0">
-                        <a:solidFill>
-                          <a:srgbClr val="1A424D"/>
-                        </a:solidFill>
-                      </a:endParaRPr>
                     </a:p>
                   </a:txBody>
                   <a:tcPr anchor="ctr">
@@ -21579,19 +22203,19 @@
                 </a:tc>
                 <a:tc>
                   <a:txBody>
-                    <a:bodyPr/>
+                    <a:bodyPr wrap="square" lIns="54864" rIns="54864" tIns="27432" bIns="27432" anchor="ctr"/>
                     <a:lstStyle/>
                     <a:p>
-                      <a:pPr algn="ctr"/>
+                      <a:pPr algn="l"/>
                       <a:r>
-                        <a:rPr lang="en-US" sz="1400" dirty="0"/>
-                        <a:t>❌</a:t>
+                        <a:rPr sz="1100" b="1">
+                          <a:solidFill>
+                            <a:srgbClr val="5B6570"/>
+                          </a:solidFill>
+                          <a:latin typeface="Calibri"/>
+                        </a:rPr>
+                        <a:t>No</a:t>
                       </a:r>
-                      <a:endParaRPr sz="1400" b="0" dirty="0">
-                        <a:solidFill>
-                          <a:srgbClr val="1A424D"/>
-                        </a:solidFill>
-                      </a:endParaRPr>
                     </a:p>
                   </a:txBody>
                   <a:tcPr anchor="ctr">
@@ -21602,19 +22226,19 @@
                 </a:tc>
                 <a:tc>
                   <a:txBody>
-                    <a:bodyPr/>
+                    <a:bodyPr wrap="square" lIns="54864" rIns="54864" tIns="27432" bIns="27432" anchor="ctr"/>
                     <a:lstStyle/>
                     <a:p>
-                      <a:pPr algn="ctr"/>
+                      <a:pPr algn="l"/>
                       <a:r>
-                        <a:rPr lang="en-US" sz="1400" dirty="0"/>
-                        <a:t>✅</a:t>
+                        <a:rPr sz="1100" b="1">
+                          <a:solidFill>
+                            <a:srgbClr val="144E4C"/>
+                          </a:solidFill>
+                          <a:latin typeface="Calibri"/>
+                        </a:rPr>
+                        <a:t>Yes</a:t>
                       </a:r>
-                      <a:endParaRPr sz="1400" b="0" dirty="0">
-                        <a:solidFill>
-                          <a:srgbClr val="1A424D"/>
-                        </a:solidFill>
-                      </a:endParaRPr>
                     </a:p>
                   </a:txBody>
                   <a:tcPr anchor="ctr">
@@ -21625,19 +22249,19 @@
                 </a:tc>
                 <a:tc>
                   <a:txBody>
-                    <a:bodyPr/>
+                    <a:bodyPr wrap="square" lIns="54864" rIns="54864" tIns="27432" bIns="27432" anchor="ctr"/>
                     <a:lstStyle/>
                     <a:p>
-                      <a:pPr algn="ctr"/>
+                      <a:pPr algn="l"/>
                       <a:r>
-                        <a:rPr lang="en-US" sz="1400" dirty="0"/>
-                        <a:t>✅</a:t>
+                        <a:rPr sz="1100" b="1">
+                          <a:solidFill>
+                            <a:srgbClr val="144E4C"/>
+                          </a:solidFill>
+                          <a:latin typeface="Calibri"/>
+                        </a:rPr>
+                        <a:t>Yes</a:t>
                       </a:r>
-                      <a:endParaRPr sz="1400" b="0" dirty="0">
-                        <a:solidFill>
-                          <a:srgbClr val="1A424D"/>
-                        </a:solidFill>
-                      </a:endParaRPr>
                     </a:p>
                   </a:txBody>
                   <a:tcPr anchor="ctr">
@@ -22105,8 +22729,8 @@
         </p:nvSpPr>
         <p:spPr>
           <a:xfrm>
-            <a:off x="8412480" y="6419088"/>
-            <a:ext cx="3291840" cy="182880"/>
+            <a:off x="5486400" y="6419088"/>
+            <a:ext cx="2743200" cy="182880"/>
           </a:xfrm>
           <a:prstGeom prst="rect">
             <a:avLst/>
@@ -22142,6 +22766,85 @@
                 </a:solidFill>
               </a:rPr>
               <a:t>Report: Table 5.2 and Section 5.4.1</a:t>
+            </a:r>
+          </a:p>
+        </p:txBody>
+      </p:sp>
+      <p:sp>
+        <p:nvSpPr>
+          <p:cNvPr id="18" name="Rectangle 17"/>
+          <p:cNvSpPr/>
+          <p:nvPr/>
+        </p:nvSpPr>
+        <p:spPr>
+          <a:xfrm>
+            <a:off x="411480" y="6382512"/>
+            <a:ext cx="11338560" cy="18288"/>
+          </a:xfrm>
+          <a:prstGeom prst="rect">
+            <a:avLst/>
+          </a:prstGeom>
+          <a:solidFill>
+            <a:srgbClr val="D99A06"/>
+          </a:solidFill>
+          <a:ln>
+            <a:noFill/>
+          </a:ln>
+          <a:effectLst/>
+        </p:spPr>
+        <p:style>
+          <a:lnRef idx="1">
+            <a:schemeClr val="accent1"/>
+          </a:lnRef>
+          <a:fillRef idx="3">
+            <a:schemeClr val="accent1"/>
+          </a:fillRef>
+          <a:effectRef idx="2">
+            <a:schemeClr val="accent1"/>
+          </a:effectRef>
+          <a:fontRef idx="minor">
+            <a:schemeClr val="lt1"/>
+          </a:fontRef>
+        </p:style>
+        <p:txBody>
+          <a:bodyPr rtlCol="0" anchor="ctr"/>
+          <a:lstStyle/>
+          <a:p>
+            <a:pPr algn="ctr"/>
+          </a:p>
+        </p:txBody>
+      </p:sp>
+      <p:sp>
+        <p:nvSpPr>
+          <p:cNvPr id="19" name="TextBox 18"/>
+          <p:cNvSpPr txBox="1"/>
+          <p:nvPr/>
+        </p:nvSpPr>
+        <p:spPr>
+          <a:xfrm>
+            <a:off x="10972800" y="6419088"/>
+            <a:ext cx="914400" cy="274320"/>
+          </a:xfrm>
+          <a:prstGeom prst="rect">
+            <a:avLst/>
+          </a:prstGeom>
+          <a:noFill/>
+        </p:spPr>
+        <p:txBody>
+          <a:bodyPr wrap="none">
+            <a:spAutoFit/>
+          </a:bodyPr>
+          <a:lstStyle/>
+          <a:p>
+            <a:pPr algn="ctr"/>
+            <a:r>
+              <a:rPr sz="900">
+                <a:solidFill>
+                  <a:srgbClr val="F5F7F2"/>
+                </a:solidFill>
+                <a:latin typeface="Calibri"/>
+              </a:rPr>
+              <a:t>30 / 35</a:t>
             </a:r>
           </a:p>
         </p:txBody>
@@ -22508,19 +23211,19 @@
               <a:tr h="659827">
                 <a:tc>
                   <a:txBody>
-                    <a:bodyPr/>
+                    <a:bodyPr wrap="square" lIns="54864" rIns="54864" tIns="27432" bIns="27432" anchor="ctr"/>
                     <a:lstStyle/>
                     <a:p>
-                      <a:pPr algn="ctr"/>
+                      <a:pPr algn="l"/>
                       <a:r>
-                        <a:rPr lang="en-US" sz="1400" dirty="0"/>
-                        <a:t>✅</a:t>
+                        <a:rPr sz="1100" b="1">
+                          <a:solidFill>
+                            <a:srgbClr val="144E4C"/>
+                          </a:solidFill>
+                          <a:latin typeface="Calibri"/>
+                        </a:rPr>
+                        <a:t>Yes</a:t>
                       </a:r>
-                      <a:endParaRPr sz="1400" b="0" dirty="0">
-                        <a:solidFill>
-                          <a:srgbClr val="1A424D"/>
-                        </a:solidFill>
-                      </a:endParaRPr>
                     </a:p>
                   </a:txBody>
                   <a:tcPr anchor="ctr">
@@ -22531,19 +23234,19 @@
                 </a:tc>
                 <a:tc>
                   <a:txBody>
-                    <a:bodyPr/>
+                    <a:bodyPr wrap="square" lIns="54864" rIns="54864" tIns="27432" bIns="27432" anchor="ctr"/>
                     <a:lstStyle/>
                     <a:p>
-                      <a:pPr algn="ctr"/>
+                      <a:pPr algn="l"/>
                       <a:r>
-                        <a:rPr lang="en-US" sz="1400" dirty="0"/>
-                        <a:t>✅</a:t>
+                        <a:rPr sz="1100" b="1">
+                          <a:solidFill>
+                            <a:srgbClr val="144E4C"/>
+                          </a:solidFill>
+                          <a:latin typeface="Calibri"/>
+                        </a:rPr>
+                        <a:t>Yes</a:t>
                       </a:r>
-                      <a:endParaRPr sz="1400" b="0" dirty="0">
-                        <a:solidFill>
-                          <a:srgbClr val="1A424D"/>
-                        </a:solidFill>
-                      </a:endParaRPr>
                     </a:p>
                   </a:txBody>
                   <a:tcPr anchor="ctr">
@@ -22554,19 +23257,19 @@
                 </a:tc>
                 <a:tc>
                   <a:txBody>
-                    <a:bodyPr/>
+                    <a:bodyPr wrap="square" lIns="54864" rIns="54864" tIns="27432" bIns="27432" anchor="ctr"/>
                     <a:lstStyle/>
                     <a:p>
-                      <a:pPr algn="ctr"/>
+                      <a:pPr algn="l"/>
                       <a:r>
-                        <a:rPr lang="en-US" sz="1400" dirty="0"/>
-                        <a:t>✅</a:t>
+                        <a:rPr sz="1100" b="1">
+                          <a:solidFill>
+                            <a:srgbClr val="144E4C"/>
+                          </a:solidFill>
+                          <a:latin typeface="Calibri"/>
+                        </a:rPr>
+                        <a:t>Yes</a:t>
                       </a:r>
-                      <a:endParaRPr sz="1400" b="0" dirty="0">
-                        <a:solidFill>
-                          <a:srgbClr val="1A424D"/>
-                        </a:solidFill>
-                      </a:endParaRPr>
                     </a:p>
                   </a:txBody>
                   <a:tcPr anchor="ctr">
@@ -22577,19 +23280,19 @@
                 </a:tc>
                 <a:tc>
                   <a:txBody>
-                    <a:bodyPr/>
+                    <a:bodyPr wrap="square" lIns="54864" rIns="54864" tIns="27432" bIns="27432" anchor="ctr"/>
                     <a:lstStyle/>
                     <a:p>
-                      <a:pPr algn="ctr"/>
+                      <a:pPr algn="l"/>
                       <a:r>
-                        <a:rPr lang="en-US" sz="1400" dirty="0"/>
-                        <a:t>✅</a:t>
+                        <a:rPr sz="1100" b="1">
+                          <a:solidFill>
+                            <a:srgbClr val="144E4C"/>
+                          </a:solidFill>
+                          <a:latin typeface="Calibri"/>
+                        </a:rPr>
+                        <a:t>Yes</a:t>
                       </a:r>
-                      <a:endParaRPr sz="1400" b="0" dirty="0">
-                        <a:solidFill>
-                          <a:srgbClr val="1A424D"/>
-                        </a:solidFill>
-                      </a:endParaRPr>
                     </a:p>
                   </a:txBody>
                   <a:tcPr anchor="ctr">
@@ -22600,19 +23303,19 @@
                 </a:tc>
                 <a:tc>
                   <a:txBody>
-                    <a:bodyPr/>
+                    <a:bodyPr wrap="square" lIns="54864" rIns="54864" tIns="27432" bIns="27432" anchor="ctr"/>
                     <a:lstStyle/>
                     <a:p>
-                      <a:pPr algn="ctr"/>
+                      <a:pPr algn="l"/>
                       <a:r>
-                        <a:rPr lang="en-US" sz="1400" dirty="0"/>
-                        <a:t>✅</a:t>
+                        <a:rPr sz="1100" b="1">
+                          <a:solidFill>
+                            <a:srgbClr val="144E4C"/>
+                          </a:solidFill>
+                          <a:latin typeface="Calibri"/>
+                        </a:rPr>
+                        <a:t>Yes</a:t>
                       </a:r>
-                      <a:endParaRPr sz="1400" b="0" dirty="0">
-                        <a:solidFill>
-                          <a:srgbClr val="1A424D"/>
-                        </a:solidFill>
-                      </a:endParaRPr>
                     </a:p>
                   </a:txBody>
                   <a:tcPr anchor="ctr">
@@ -23080,8 +23783,8 @@
         </p:nvSpPr>
         <p:spPr>
           <a:xfrm>
-            <a:off x="8412480" y="6419088"/>
-            <a:ext cx="3291840" cy="182880"/>
+            <a:off x="5486400" y="6419088"/>
+            <a:ext cx="2743200" cy="182880"/>
           </a:xfrm>
           <a:prstGeom prst="rect">
             <a:avLst/>
@@ -23117,6 +23820,85 @@
                 </a:solidFill>
               </a:rPr>
               <a:t>Report: Table 5.3 and Section 5.4.2</a:t>
+            </a:r>
+          </a:p>
+        </p:txBody>
+      </p:sp>
+      <p:sp>
+        <p:nvSpPr>
+          <p:cNvPr id="18" name="Rectangle 17"/>
+          <p:cNvSpPr/>
+          <p:nvPr/>
+        </p:nvSpPr>
+        <p:spPr>
+          <a:xfrm>
+            <a:off x="411480" y="6382512"/>
+            <a:ext cx="11338560" cy="18288"/>
+          </a:xfrm>
+          <a:prstGeom prst="rect">
+            <a:avLst/>
+          </a:prstGeom>
+          <a:solidFill>
+            <a:srgbClr val="D99A06"/>
+          </a:solidFill>
+          <a:ln>
+            <a:noFill/>
+          </a:ln>
+          <a:effectLst/>
+        </p:spPr>
+        <p:style>
+          <a:lnRef idx="1">
+            <a:schemeClr val="accent1"/>
+          </a:lnRef>
+          <a:fillRef idx="3">
+            <a:schemeClr val="accent1"/>
+          </a:fillRef>
+          <a:effectRef idx="2">
+            <a:schemeClr val="accent1"/>
+          </a:effectRef>
+          <a:fontRef idx="minor">
+            <a:schemeClr val="lt1"/>
+          </a:fontRef>
+        </p:style>
+        <p:txBody>
+          <a:bodyPr rtlCol="0" anchor="ctr"/>
+          <a:lstStyle/>
+          <a:p>
+            <a:pPr algn="ctr"/>
+          </a:p>
+        </p:txBody>
+      </p:sp>
+      <p:sp>
+        <p:nvSpPr>
+          <p:cNvPr id="19" name="TextBox 18"/>
+          <p:cNvSpPr txBox="1"/>
+          <p:nvPr/>
+        </p:nvSpPr>
+        <p:spPr>
+          <a:xfrm>
+            <a:off x="10972800" y="6419088"/>
+            <a:ext cx="914400" cy="274320"/>
+          </a:xfrm>
+          <a:prstGeom prst="rect">
+            <a:avLst/>
+          </a:prstGeom>
+          <a:noFill/>
+        </p:spPr>
+        <p:txBody>
+          <a:bodyPr wrap="none">
+            <a:spAutoFit/>
+          </a:bodyPr>
+          <a:lstStyle/>
+          <a:p>
+            <a:pPr algn="ctr"/>
+            <a:r>
+              <a:rPr sz="900">
+                <a:solidFill>
+                  <a:srgbClr val="F5F7F2"/>
+                </a:solidFill>
+                <a:latin typeface="Calibri"/>
+              </a:rPr>
+              <a:t>31 / 35</a:t>
             </a:r>
           </a:p>
         </p:txBody>
@@ -23219,7 +24001,7 @@
                 </a:solidFill>
                 <a:latin typeface="Calibri"/>
               </a:rPr>
-              <a:t>27 / 30</a:t>
+              <a:t>32 / 35</a:t>
             </a:r>
           </a:p>
         </p:txBody>
@@ -23381,63 +24163,22 @@
           </a:bodyPr>
           <a:lstStyle/>
           <a:p>
-            <a:pPr algn="l">
-              <a:spcAft>
-                <a:spcPts val="600"/>
-              </a:spcAft>
-            </a:pPr>
-            <a:r>
-              <a:rPr sz="2000" b="1" i="0" dirty="0">
-                <a:latin typeface="Calibri"/>
-              </a:rPr>
+            <a:r>
               <a:t>Key Risks</a:t>
             </a:r>
           </a:p>
           <a:p>
-            <a:pPr algn="l">
-              <a:spcBef>
-                <a:spcPts val="0"/>
-              </a:spcBef>
-              <a:spcAft>
-                <a:spcPts val="300"/>
-              </a:spcAft>
-            </a:pPr>
-            <a:r>
-              <a:rPr sz="1400" b="0" i="0" dirty="0">
-                <a:latin typeface="Calibri"/>
-              </a:rPr>
-              <a:t>Free T4 GPU quota: already exhausted once; fallback to Kaggle (30h/week) or local M1 overnight run.</a:t>
-            </a:r>
-          </a:p>
-          <a:p>
-            <a:pPr algn="l">
-              <a:spcBef>
-                <a:spcPts val="0"/>
-              </a:spcBef>
-              <a:spcAft>
-                <a:spcPts val="300"/>
-              </a:spcAft>
-            </a:pPr>
-            <a:r>
-              <a:rPr sz="1400" b="0" i="0" dirty="0">
-                <a:latin typeface="Calibri"/>
-              </a:rPr>
+            <a:r>
+              <a:t>Free cloud GPU quota (Google Colab / departmental GPU lab, Report §5.4.2): if exhausted, fall back to existing computers and defer edge hardware.</a:t>
+            </a:r>
+          </a:p>
+          <a:p>
+            <a:r>
               <a:t>Factory data access: if unavailable, fallback to calibrated queuing simulation with documented parameters; paired Ds‑vs‑defect analysis is the contribution.</a:t>
             </a:r>
           </a:p>
           <a:p>
-            <a:pPr algn="l">
-              <a:spcBef>
-                <a:spcPts val="0"/>
-              </a:spcBef>
-              <a:spcAft>
-                <a:spcPts val="300"/>
-              </a:spcAft>
-            </a:pPr>
-            <a:r>
-              <a:rPr sz="1400" b="0" i="0" dirty="0">
-                <a:latin typeface="Calibri"/>
-              </a:rPr>
+            <a:r>
               <a:t>Quarantine ambiguity: 152‑file lines batch may hide a second quarantine; visual review still open.</a:t>
             </a:r>
           </a:p>
@@ -23565,63 +24306,22 @@
           </a:bodyPr>
           <a:lstStyle/>
           <a:p>
-            <a:pPr algn="l">
-              <a:spcAft>
-                <a:spcPts val="600"/>
-              </a:spcAft>
-            </a:pPr>
-            <a:r>
-              <a:rPr sz="2000" b="1" i="0" dirty="0">
-                <a:latin typeface="Calibri"/>
-              </a:rPr>
+            <a:r>
               <a:t>Mitigations</a:t>
             </a:r>
           </a:p>
           <a:p>
-            <a:pPr algn="l">
-              <a:spcBef>
-                <a:spcPts val="0"/>
-              </a:spcBef>
-              <a:spcAft>
-                <a:spcPts val="300"/>
-              </a:spcAft>
-            </a:pPr>
-            <a:r>
-              <a:rPr sz="1400" b="0" i="0" dirty="0">
-                <a:latin typeface="Calibri"/>
-              </a:rPr>
-              <a:t>Checkpoint sync every 10 min during training so quota loss costs minutes, not hours.</a:t>
-            </a:r>
-          </a:p>
-          <a:p>
-            <a:pPr algn="l">
-              <a:spcBef>
-                <a:spcPts val="0"/>
-              </a:spcBef>
-              <a:spcAft>
-                <a:spcPts val="300"/>
-              </a:spcAft>
-            </a:pPr>
-            <a:r>
-              <a:rPr sz="1400" b="0" i="0" dirty="0">
-                <a:latin typeface="Calibri"/>
-              </a:rPr>
+            <a:r>
+              <a:t>Checkpoint during training so quota loss costs minutes, not hours.</a:t>
+            </a:r>
+          </a:p>
+          <a:p>
+            <a:r>
               <a:t>Paired dataset (defect counts + our Ds) is itself a contribution if factory declines.</a:t>
             </a:r>
           </a:p>
           <a:p>
-            <a:pPr algn="l">
-              <a:spcBef>
-                <a:spcPts val="0"/>
-              </a:spcBef>
-              <a:spcAft>
-                <a:spcPts val="300"/>
-              </a:spcAft>
-            </a:pPr>
-            <a:r>
-              <a:rPr sz="1400" b="0" i="0" dirty="0">
-                <a:latin typeface="Calibri"/>
-              </a:rPr>
+            <a:r>
               <a:t>Visual review of lines batch in progress; interim: report as ‘suspicious’ in datasheet.</a:t>
             </a:r>
           </a:p>
@@ -23725,7 +24425,7 @@
                 </a:solidFill>
                 <a:latin typeface="Calibri"/>
               </a:rPr>
-              <a:t>28 / 30</a:t>
+              <a:t>33 / 35</a:t>
             </a:r>
           </a:p>
         </p:txBody>
@@ -24272,7 +24972,7 @@
                 </a:solidFill>
                 <a:latin typeface="Calibri"/>
               </a:rPr>
-              <a:t>29 / 30</a:t>
+              <a:t>34 / 35</a:t>
             </a:r>
           </a:p>
         </p:txBody>
@@ -24881,7 +25581,7 @@
                 </a:solidFill>
                 <a:latin typeface="Calibri"/>
               </a:rPr>
-              <a:t>4 / 30</a:t>
+              <a:t>4 / 35</a:t>
             </a:r>
           </a:p>
         </p:txBody>
@@ -25172,7 +25872,7 @@
                 </a:solidFill>
                 <a:latin typeface="Calibri"/>
               </a:rPr>
-              <a:t>30 / 30</a:t>
+              <a:t>35 / 35</a:t>
             </a:r>
           </a:p>
         </p:txBody>
@@ -25386,7 +26086,7 @@
                 </a:solidFill>
                 <a:latin typeface="Calibri"/>
               </a:rPr>
-              <a:t>5 / 30</a:t>
+              <a:t>5 / 35</a:t>
             </a:r>
           </a:p>
         </p:txBody>
@@ -25448,79 +26148,13 @@
           </a:bodyPr>
           <a:lstStyle/>
           <a:p>
-            <a:pPr algn="l">
-              <a:spcBef>
-                <a:spcPts val="0"/>
-              </a:spcBef>
-              <a:spcAft>
-                <a:spcPts val="800"/>
-              </a:spcAft>
-            </a:pPr>
-            <a:r>
-              <a:rPr sz="1650" b="0" i="0" dirty="0">
-                <a:solidFill>
-                  <a:srgbClr val="F5F7F2"/>
-                </a:solidFill>
-                <a:latin typeface="Calibri"/>
-              </a:rPr>
-              <a:t>▪  A Tired Inspector Logs Defects By Eye At Shift-End, While The Planner Beside Them Quotes Delivery Dates From A Table Printed Last Year — Real Quality Signal Disappears Between The Inspection Board And The Planning Desk.</a:t>
-            </a:r>
-          </a:p>
-          <a:p>
-            <a:pPr algn="l">
-              <a:spcBef>
-                <a:spcPts val="0"/>
-              </a:spcBef>
-              <a:spcAft>
-                <a:spcPts val="800"/>
-              </a:spcAft>
-            </a:pPr>
-            <a:r>
-              <a:rPr sz="1650" b="0" i="0" dirty="0">
-                <a:solidFill>
-                  <a:srgbClr val="F5F7F2"/>
-                </a:solidFill>
-                <a:latin typeface="Calibri"/>
-              </a:rPr>
-              <a:t>▪  A Closed Defect → Hours Loop Generalizes Beyond Textiles: Predictive Maintenance, Waste Estimation, Any Line Where Visible Quality Affects Completion Time.</a:t>
-            </a:r>
-          </a:p>
-          <a:p>
-            <a:pPr algn="l">
-              <a:spcBef>
-                <a:spcPts val="0"/>
-              </a:spcBef>
-              <a:spcAft>
-                <a:spcPts val="800"/>
-              </a:spcAft>
-            </a:pPr>
-            <a:r>
-              <a:rPr sz="1650" b="0" i="0" dirty="0">
-                <a:solidFill>
-                  <a:srgbClr val="F5F7F2"/>
-                </a:solidFill>
-                <a:latin typeface="Calibri"/>
-              </a:rPr>
-              <a:t>▪  Pilot Work: ~2,550 Factory Images Reviewed Against The Literature; Hashing Found 17 Duplicate Images And 12 Cross-Labeled Files Quarantined After Visual Verification.</a:t>
-            </a:r>
-          </a:p>
-          <a:p>
-            <a:pPr algn="l">
-              <a:spcBef>
-                <a:spcPts val="0"/>
-              </a:spcBef>
-              <a:spcAft>
-                <a:spcPts val="800"/>
-              </a:spcAft>
-            </a:pPr>
-            <a:r>
-              <a:rPr sz="1650" b="0" i="0" dirty="0">
-                <a:solidFill>
-                  <a:srgbClr val="F5F7F2"/>
-                </a:solidFill>
-                <a:latin typeface="Calibri"/>
-              </a:rPr>
-              <a:t>▪  A Prior Split Reached 98% Accuracy — Honestly Re-Tested At 93.7–94.0% (See Pilot Result); The 98% Is An Upper Bound, Not A Result.</a:t>
+            <a:r>
+              <a:t>▪  Dataset Audit: 2,578 Factory Images Scanned — 17 Exact Duplicates (Hash) And 12 Cross-Labeled Files Quarantined After Visual Verification, Leaving 2,549 Usable Images.</a:t>
+            </a:r>
+          </a:p>
+          <a:p>
+            <a:r>
+              <a:t>▪  Report Table 6.1 Records 98% Class Accuracy As An Upper-Bound Reference On A Random Split — Not A Reproduced Result Of This System.</a:t>
             </a:r>
           </a:p>
         </p:txBody>
@@ -25623,7 +26257,7 @@
                 </a:solidFill>
                 <a:latin typeface="Calibri"/>
               </a:rPr>
-              <a:t>6 / 30</a:t>
+              <a:t>6 / 35</a:t>
             </a:r>
           </a:p>
         </p:txBody>
@@ -26231,7 +26865,7 @@
                 </a:solidFill>
                 <a:latin typeface="Calibri"/>
               </a:rPr>
-              <a:t>7 / 30</a:t>
+              <a:t>7 / 35</a:t>
             </a:r>
           </a:p>
         </p:txBody>
@@ -27341,7 +27975,7 @@
                 </a:solidFill>
                 <a:latin typeface="Calibri"/>
               </a:rPr>
-              <a:t>8 / 30</a:t>
+              <a:t>8 / 35</a:t>
             </a:r>
           </a:p>
         </p:txBody>
@@ -28056,7 +28690,7 @@
                 </a:solidFill>
                 <a:latin typeface="Calibri"/>
               </a:rPr>
-              <a:t>9 / 30</a:t>
+              <a:t>9 / 35</a:t>
             </a:r>
           </a:p>
         </p:txBody>
@@ -28470,22 +29104,8 @@
           </a:bodyPr>
           <a:lstStyle/>
           <a:p>
-            <a:pPr algn="l">
-              <a:spcBef>
-                <a:spcPts val="0"/>
-              </a:spcBef>
-              <a:spcAft>
-                <a:spcPts val="800"/>
-              </a:spcAft>
-            </a:pPr>
-            <a:r>
-              <a:rPr sz="1450" b="0" i="0">
-                <a:solidFill>
-                  <a:srgbClr val="F5F7F2"/>
-                </a:solidFill>
-                <a:latin typeface="Calibri"/>
-              </a:rPr>
-              <a:t>No Published Vision–Ds Lead-Time Fusion Exists — This Is Our Gap. Closest Work: CIIS 2024 Wastage Prediction (633 Points, ANN/SVR/MLP/RFR/ARIMA); 2025 BD Digital-QC Trials; 2026 Narayanganj Traffic-Light QC Study (94 Lines).</a:t>
+            <a:r>
+              <a:t>No Published Vision–Ds Lead-Time Fusion Exists — This Is Our Gap. Closest Work: CIIS 2024 Wastage Prediction (Supervised, Own Dataset Of 633 Samples); 2025 BD Digital-QC Trials; 2026 Narayanganj Traffic-Light QC Study (94 Lines).</a:t>
             </a:r>
           </a:p>
         </p:txBody>

--- a/slides/Defect-to-Delivery_262-034.pptx
+++ b/slides/Defect-to-Delivery_262-034.pptx
@@ -13748,7 +13748,7 @@
                 </a:solidFill>
                 <a:latin typeface="Calibri"/>
               </a:rPr>
-              <a:t>18 / 30</a:t>
+              <a:t>26 / 35</a:t>
             </a:r>
           </a:p>
         </p:txBody>
@@ -13783,7 +13783,7 @@
                 </a:solidFill>
                 <a:latin typeface="Georgia"/>
               </a:rPr>
-              <a:t>System Diagram (Fig. 3.1)</a:t>
+              <a:t>Standards &amp; Compliance</a:t>
             </a:r>
           </a:p>
         </p:txBody>
@@ -13796,20 +13796,20 @@
         </p:nvSpPr>
         <p:spPr>
           <a:xfrm>
-            <a:off x="640080" y="2011680"/>
-            <a:ext cx="1417320" cy="2103120"/>
+            <a:off x="548640" y="1554480"/>
+            <a:ext cx="3520440" cy="2651760"/>
           </a:xfrm>
           <a:prstGeom prst="roundRect">
             <a:avLst>
-              <a:gd name="adj" fmla="val 10000"/>
+              <a:gd name="adj" fmla="val 6000"/>
             </a:avLst>
           </a:prstGeom>
           <a:solidFill>
             <a:srgbClr val="FFFFFF"/>
           </a:solidFill>
-          <a:ln w="19050">
+          <a:ln w="15875">
             <a:solidFill>
-              <a:srgbClr val="1B7A6E"/>
+              <a:srgbClr val="D8D2C2"/>
             </a:solidFill>
           </a:ln>
         </p:spPr>
@@ -13828,48 +13828,33 @@
           </a:fontRef>
         </p:style>
         <p:txBody>
-          <a:bodyPr wrap="square" rtlCol="0" anchor="ctr">
-            <a:normAutofit/>
-          </a:bodyPr>
+          <a:bodyPr rtlCol="0" anchor="ctr"/>
           <a:lstStyle/>
           <a:p>
             <a:pPr algn="ctr"/>
-            <a:r>
-              <a:rPr sz="1300" b="0" i="0" dirty="0">
-                <a:solidFill>
-                  <a:schemeClr val="tx1"/>
-                </a:solidFill>
-                <a:latin typeface="Calibri"/>
-              </a:rPr>
-              <a:t>Camera /
-Image Stream</a:t>
-            </a:r>
-          </a:p>
-        </p:txBody>
-      </p:sp>
-      <p:sp>
-        <p:nvSpPr>
-          <p:cNvPr id="8" name="Rounded Rectangle 7"/>
+            <a:endParaRPr/>
+          </a:p>
+        </p:txBody>
+      </p:sp>
+      <p:sp>
+        <p:nvSpPr>
+          <p:cNvPr id="9" name="Oval 8"/>
           <p:cNvSpPr/>
           <p:nvPr/>
         </p:nvSpPr>
         <p:spPr>
           <a:xfrm>
-            <a:off x="2377440" y="2011680"/>
-            <a:ext cx="1417320" cy="2103120"/>
-          </a:xfrm>
-          <a:prstGeom prst="roundRect">
-            <a:avLst>
-              <a:gd name="adj" fmla="val 10000"/>
-            </a:avLst>
+            <a:off x="804672" y="1847088"/>
+            <a:ext cx="475488" cy="475488"/>
+          </a:xfrm>
+          <a:prstGeom prst="ellipse">
+            <a:avLst/>
           </a:prstGeom>
           <a:solidFill>
-            <a:srgbClr val="FFFFFF"/>
+            <a:srgbClr val="2E9E5B"/>
           </a:solidFill>
-          <a:ln w="19050">
-            <a:solidFill>
-              <a:srgbClr val="1B7A6E"/>
-            </a:solidFill>
+          <a:ln>
+            <a:noFill/>
           </a:ln>
         </p:spPr>
         <p:style>
@@ -13887,85 +13872,96 @@
           </a:fontRef>
         </p:style>
         <p:txBody>
-          <a:bodyPr wrap="square" rtlCol="0" anchor="ctr">
+          <a:bodyPr wrap="square" rtlCol="0" anchor="ctr"/>
+          <a:lstStyle/>
+          <a:p>
+            <a:pPr algn="ctr"/>
+            <a:r>
+              <a:rPr sz="1700" b="1" i="0">
+                <a:solidFill>
+                  <a:srgbClr val="F5F7F2"/>
+                </a:solidFill>
+                <a:latin typeface="Calibri"/>
+              </a:rPr>
+              <a:t>1</a:t>
+            </a:r>
+          </a:p>
+        </p:txBody>
+      </p:sp>
+      <p:sp>
+        <p:nvSpPr>
+          <p:cNvPr id="10" name="TextBox 9"/>
+          <p:cNvSpPr txBox="1"/>
+          <p:nvPr/>
+        </p:nvSpPr>
+        <p:spPr>
+          <a:xfrm>
+            <a:off x="1417319" y="1810512"/>
+            <a:ext cx="2468880" cy="2240279"/>
+          </a:xfrm>
+          <a:prstGeom prst="rect">
+            <a:avLst/>
+          </a:prstGeom>
+          <a:noFill/>
+        </p:spPr>
+        <p:txBody>
+          <a:bodyPr wrap="square">
             <a:normAutofit/>
           </a:bodyPr>
           <a:lstStyle/>
           <a:p>
-            <a:pPr algn="ctr"/>
-            <a:r>
-              <a:rPr sz="1300" b="0" i="0" dirty="0">
-                <a:solidFill>
-                  <a:schemeClr val="tx1"/>
-                </a:solidFill>
-                <a:latin typeface="Calibri"/>
-              </a:rPr>
-              <a:t>Industrial
-Preprocessing:
-Denoise, Deblur,
-Low-Light Norm</a:t>
-            </a:r>
-          </a:p>
-        </p:txBody>
-      </p:sp>
-      <p:cxnSp>
-        <p:nvCxnSpPr>
-          <p:cNvPr id="9" name="Connector 8"/>
-          <p:cNvCxnSpPr/>
-          <p:nvPr/>
-        </p:nvCxnSpPr>
-        <p:spPr>
-          <a:xfrm>
-            <a:off x="2084832" y="3063240"/>
-            <a:ext cx="310896" cy="0"/>
-          </a:xfrm>
-          <a:prstGeom prst="line">
-            <a:avLst/>
-          </a:prstGeom>
-          <a:ln w="19050">
-            <a:solidFill>
-              <a:srgbClr val="1F2937"/>
-            </a:solidFill>
-            <a:tailEnd type="triangle" w="med" len="med"/>
-          </a:ln>
-        </p:spPr>
-        <p:style>
-          <a:lnRef idx="2">
-            <a:schemeClr val="accent1"/>
-          </a:lnRef>
-          <a:fillRef idx="0">
-            <a:schemeClr val="accent1"/>
-          </a:fillRef>
-          <a:effectRef idx="1">
-            <a:schemeClr val="accent1"/>
-          </a:effectRef>
-          <a:fontRef idx="minor">
-            <a:schemeClr val="tx1"/>
-          </a:fontRef>
-        </p:style>
-      </p:cxnSp>
-      <p:sp>
-        <p:nvSpPr>
-          <p:cNvPr id="10" name="Rounded Rectangle 9"/>
+            <a:pPr algn="l">
+              <a:spcAft>
+                <a:spcPts val="600"/>
+              </a:spcAft>
+            </a:pPr>
+            <a:r>
+              <a:rPr sz="1600" b="1" i="0" dirty="0">
+                <a:latin typeface="Calibri"/>
+              </a:rPr>
+              <a:t>Software</a:t>
+            </a:r>
+          </a:p>
+          <a:p>
+            <a:pPr algn="l">
+              <a:spcBef>
+                <a:spcPts val="0"/>
+              </a:spcBef>
+              <a:spcAft>
+                <a:spcPts val="300"/>
+              </a:spcAft>
+            </a:pPr>
+            <a:r>
+              <a:rPr sz="1350" b="0" i="0" dirty="0">
+                <a:latin typeface="Calibri"/>
+              </a:rPr>
+              <a:t>Reusable Packages, Central Configuration, Version Control With Reviewable Manifests, Seeded Deterministic Training, COCO / YOLO Interchange Formats.</a:t>
+            </a:r>
+          </a:p>
+        </p:txBody>
+      </p:sp>
+      <p:sp>
+        <p:nvSpPr>
+          <p:cNvPr id="11" name="Rounded Rectangle 10"/>
           <p:cNvSpPr/>
           <p:nvPr/>
         </p:nvSpPr>
         <p:spPr>
           <a:xfrm>
-            <a:off x="4114800" y="2011680"/>
-            <a:ext cx="1417320" cy="2103120"/>
+            <a:off x="4251959" y="1554480"/>
+            <a:ext cx="3520440" cy="2651760"/>
           </a:xfrm>
           <a:prstGeom prst="roundRect">
             <a:avLst>
-              <a:gd name="adj" fmla="val 10000"/>
+              <a:gd name="adj" fmla="val 6000"/>
             </a:avLst>
           </a:prstGeom>
           <a:solidFill>
             <a:srgbClr val="FFFFFF"/>
           </a:solidFill>
-          <a:ln w="19050">
+          <a:ln w="15875">
             <a:solidFill>
-              <a:srgbClr val="1B7A6E"/>
+              <a:srgbClr val="D8D2C2"/>
             </a:solidFill>
           </a:ln>
         </p:spPr>
@@ -13984,86 +13980,33 @@
           </a:fontRef>
         </p:style>
         <p:txBody>
-          <a:bodyPr wrap="square" rtlCol="0" anchor="ctr">
-            <a:normAutofit/>
-          </a:bodyPr>
+          <a:bodyPr rtlCol="0" anchor="ctr"/>
           <a:lstStyle/>
           <a:p>
             <a:pPr algn="ctr"/>
-            <a:r>
-              <a:rPr sz="1300" b="0" i="0" dirty="0">
-                <a:solidFill>
-                  <a:schemeClr val="tx1"/>
-                </a:solidFill>
-                <a:latin typeface="Calibri"/>
-              </a:rPr>
-              <a:t>YOLO Defect
-Detector:
-Type + Boxes
-And Masks</a:t>
-            </a:r>
-          </a:p>
-        </p:txBody>
-      </p:sp>
-      <p:cxnSp>
-        <p:nvCxnSpPr>
-          <p:cNvPr id="11" name="Connector 10"/>
-          <p:cNvCxnSpPr/>
-          <p:nvPr/>
-        </p:nvCxnSpPr>
-        <p:spPr>
-          <a:xfrm>
-            <a:off x="3822191" y="3063240"/>
-            <a:ext cx="310896" cy="0"/>
-          </a:xfrm>
-          <a:prstGeom prst="line">
-            <a:avLst/>
-          </a:prstGeom>
-          <a:ln w="19050">
-            <a:solidFill>
-              <a:srgbClr val="1F2937"/>
-            </a:solidFill>
-            <a:tailEnd type="triangle" w="med" len="med"/>
-          </a:ln>
-        </p:spPr>
-        <p:style>
-          <a:lnRef idx="2">
-            <a:schemeClr val="accent1"/>
-          </a:lnRef>
-          <a:fillRef idx="0">
-            <a:schemeClr val="accent1"/>
-          </a:fillRef>
-          <a:effectRef idx="1">
-            <a:schemeClr val="accent1"/>
-          </a:effectRef>
-          <a:fontRef idx="minor">
-            <a:schemeClr val="tx1"/>
-          </a:fontRef>
-        </p:style>
-      </p:cxnSp>
-      <p:sp>
-        <p:nvSpPr>
-          <p:cNvPr id="12" name="Rounded Rectangle 11"/>
+            <a:endParaRPr/>
+          </a:p>
+        </p:txBody>
+      </p:sp>
+      <p:sp>
+        <p:nvSpPr>
+          <p:cNvPr id="13" name="Oval 12"/>
           <p:cNvSpPr/>
           <p:nvPr/>
         </p:nvSpPr>
         <p:spPr>
           <a:xfrm>
-            <a:off x="5852160" y="2011680"/>
-            <a:ext cx="1417320" cy="2103120"/>
-          </a:xfrm>
-          <a:prstGeom prst="roundRect">
-            <a:avLst>
-              <a:gd name="adj" fmla="val 10000"/>
-            </a:avLst>
+            <a:off x="4507992" y="1847088"/>
+            <a:ext cx="475488" cy="475488"/>
+          </a:xfrm>
+          <a:prstGeom prst="ellipse">
+            <a:avLst/>
           </a:prstGeom>
           <a:solidFill>
-            <a:srgbClr val="FFFFFF"/>
+            <a:srgbClr val="2E9E5B"/>
           </a:solidFill>
-          <a:ln w="19050">
-            <a:solidFill>
-              <a:srgbClr val="1B7A6E"/>
-            </a:solidFill>
+          <a:ln>
+            <a:noFill/>
           </a:ln>
         </p:spPr>
         <p:style>
@@ -14081,85 +14024,108 @@
           </a:fontRef>
         </p:style>
         <p:txBody>
-          <a:bodyPr wrap="square" rtlCol="0" anchor="ctr">
+          <a:bodyPr wrap="square" rtlCol="0" anchor="ctr"/>
+          <a:lstStyle/>
+          <a:p>
+            <a:pPr algn="ctr"/>
+            <a:r>
+              <a:rPr sz="1700" b="1" i="0">
+                <a:solidFill>
+                  <a:srgbClr val="F5F7F2"/>
+                </a:solidFill>
+                <a:latin typeface="Calibri"/>
+              </a:rPr>
+              <a:t>2</a:t>
+            </a:r>
+          </a:p>
+        </p:txBody>
+      </p:sp>
+      <p:sp>
+        <p:nvSpPr>
+          <p:cNvPr id="14" name="TextBox 13"/>
+          <p:cNvSpPr txBox="1"/>
+          <p:nvPr/>
+        </p:nvSpPr>
+        <p:spPr>
+          <a:xfrm>
+            <a:off x="5120640" y="1810512"/>
+            <a:ext cx="2468880" cy="2240279"/>
+          </a:xfrm>
+          <a:prstGeom prst="rect">
+            <a:avLst/>
+          </a:prstGeom>
+          <a:noFill/>
+        </p:spPr>
+        <p:txBody>
+          <a:bodyPr wrap="square">
             <a:normAutofit/>
           </a:bodyPr>
           <a:lstStyle/>
           <a:p>
-            <a:pPr algn="ctr"/>
-            <a:r>
-              <a:rPr sz="1300" b="0" i="0" dirty="0">
-                <a:solidFill>
-                  <a:schemeClr val="tx1"/>
-                </a:solidFill>
-                <a:latin typeface="Calibri"/>
-              </a:rPr>
-              <a:t>Metadata
-Bridge:
-Ds + Rolling
-Average</a:t>
-            </a:r>
-          </a:p>
-        </p:txBody>
-      </p:sp>
-      <p:cxnSp>
-        <p:nvCxnSpPr>
-          <p:cNvPr id="13" name="Connector 12"/>
-          <p:cNvCxnSpPr/>
-          <p:nvPr/>
-        </p:nvCxnSpPr>
-        <p:spPr>
-          <a:xfrm>
-            <a:off x="5559552" y="3063240"/>
-            <a:ext cx="310896" cy="0"/>
-          </a:xfrm>
-          <a:prstGeom prst="line">
-            <a:avLst/>
-          </a:prstGeom>
-          <a:ln w="19050">
-            <a:solidFill>
-              <a:srgbClr val="1F2937"/>
-            </a:solidFill>
-            <a:tailEnd type="triangle" w="med" len="med"/>
-          </a:ln>
-        </p:spPr>
-        <p:style>
-          <a:lnRef idx="2">
-            <a:schemeClr val="accent1"/>
-          </a:lnRef>
-          <a:fillRef idx="0">
-            <a:schemeClr val="accent1"/>
-          </a:fillRef>
-          <a:effectRef idx="1">
-            <a:schemeClr val="accent1"/>
-          </a:effectRef>
-          <a:fontRef idx="minor">
-            <a:schemeClr val="tx1"/>
-          </a:fontRef>
-        </p:style>
-      </p:cxnSp>
-      <p:sp>
-        <p:nvSpPr>
-          <p:cNvPr id="14" name="Rounded Rectangle 13"/>
+            <a:pPr algn="l">
+              <a:spcAft>
+                <a:spcPts val="600"/>
+              </a:spcAft>
+            </a:pPr>
+            <a:r>
+              <a:rPr sz="1600" b="1" i="0" dirty="0">
+                <a:latin typeface="Calibri"/>
+              </a:rPr>
+              <a:t>Hardware</a:t>
+            </a:r>
+          </a:p>
+          <a:p>
+            <a:pPr algn="l">
+              <a:spcBef>
+                <a:spcPts val="0"/>
+              </a:spcBef>
+              <a:spcAft>
+                <a:spcPts val="300"/>
+              </a:spcAft>
+            </a:pPr>
+            <a:r>
+              <a:rPr sz="1350" b="0" i="0" dirty="0">
+                <a:latin typeface="Calibri"/>
+              </a:rPr>
+              <a:t>Fixed-Geometry Calibration For Grading, Jetson-Class Edge Device With </a:t>
+            </a:r>
+            <a:r>
+              <a:rPr sz="1350" b="0" i="0" dirty="0" err="1">
+                <a:latin typeface="Calibri"/>
+              </a:rPr>
+              <a:t>TensorRT</a:t>
+            </a:r>
+            <a:r>
+              <a:rPr sz="1350" b="0" i="0" dirty="0">
+                <a:latin typeface="Calibri"/>
+              </a:rPr>
+              <a:t>, Factory-Safe Power Envelope.</a:t>
+            </a:r>
+          </a:p>
+        </p:txBody>
+      </p:sp>
+      <p:sp>
+        <p:nvSpPr>
+          <p:cNvPr id="15" name="Rounded Rectangle 14"/>
           <p:cNvSpPr/>
           <p:nvPr/>
         </p:nvSpPr>
         <p:spPr>
           <a:xfrm>
-            <a:off x="7589520" y="2011680"/>
-            <a:ext cx="1417320" cy="2103120"/>
+            <a:off x="7955279" y="1554480"/>
+            <a:ext cx="3520440" cy="2651760"/>
           </a:xfrm>
           <a:prstGeom prst="roundRect">
             <a:avLst>
-              <a:gd name="adj" fmla="val 10000"/>
+              <a:gd name="adj" fmla="val 6000"/>
             </a:avLst>
           </a:prstGeom>
           <a:solidFill>
             <a:srgbClr val="FFFFFF"/>
           </a:solidFill>
-          <a:ln w="19050">
+          <a:ln w="15875">
             <a:solidFill>
-              <a:srgbClr val="1B7A6E"/>
+              <a:srgbClr val="D8D2C2"/>
             </a:solidFill>
           </a:ln>
         </p:spPr>
@@ -14178,85 +14144,33 @@
           </a:fontRef>
         </p:style>
         <p:txBody>
-          <a:bodyPr wrap="square" rtlCol="0" anchor="ctr">
-            <a:normAutofit/>
-          </a:bodyPr>
+          <a:bodyPr rtlCol="0" anchor="ctr"/>
           <a:lstStyle/>
           <a:p>
             <a:pPr algn="ctr"/>
-            <a:r>
-              <a:rPr sz="1300" b="0" i="0" dirty="0">
-                <a:solidFill>
-                  <a:schemeClr val="tx1"/>
-                </a:solidFill>
-                <a:latin typeface="Calibri"/>
-              </a:rPr>
-              <a:t>Lead Time
-Predictor:
-Random Forest</a:t>
-            </a:r>
-          </a:p>
-        </p:txBody>
-      </p:sp>
-      <p:cxnSp>
-        <p:nvCxnSpPr>
-          <p:cNvPr id="15" name="Connector 14"/>
-          <p:cNvCxnSpPr/>
-          <p:nvPr/>
-        </p:nvCxnSpPr>
-        <p:spPr>
-          <a:xfrm>
-            <a:off x="7296912" y="3063240"/>
-            <a:ext cx="310896" cy="0"/>
-          </a:xfrm>
-          <a:prstGeom prst="line">
-            <a:avLst/>
-          </a:prstGeom>
-          <a:ln w="19050">
-            <a:solidFill>
-              <a:srgbClr val="1F2937"/>
-            </a:solidFill>
-            <a:tailEnd type="triangle" w="med" len="med"/>
-          </a:ln>
-        </p:spPr>
-        <p:style>
-          <a:lnRef idx="2">
-            <a:schemeClr val="accent1"/>
-          </a:lnRef>
-          <a:fillRef idx="0">
-            <a:schemeClr val="accent1"/>
-          </a:fillRef>
-          <a:effectRef idx="1">
-            <a:schemeClr val="accent1"/>
-          </a:effectRef>
-          <a:fontRef idx="minor">
-            <a:schemeClr val="tx1"/>
-          </a:fontRef>
-        </p:style>
-      </p:cxnSp>
-      <p:sp>
-        <p:nvSpPr>
-          <p:cNvPr id="16" name="Rounded Rectangle 15"/>
+            <a:endParaRPr/>
+          </a:p>
+        </p:txBody>
+      </p:sp>
+      <p:sp>
+        <p:nvSpPr>
+          <p:cNvPr id="17" name="Oval 16"/>
           <p:cNvSpPr/>
           <p:nvPr/>
         </p:nvSpPr>
         <p:spPr>
           <a:xfrm>
-            <a:off x="9509760" y="2011680"/>
-            <a:ext cx="1417320" cy="2103120"/>
-          </a:xfrm>
-          <a:prstGeom prst="roundRect">
-            <a:avLst>
-              <a:gd name="adj" fmla="val 10000"/>
-            </a:avLst>
+            <a:off x="8211311" y="1847088"/>
+            <a:ext cx="475488" cy="475488"/>
+          </a:xfrm>
+          <a:prstGeom prst="ellipse">
+            <a:avLst/>
           </a:prstGeom>
           <a:solidFill>
-            <a:srgbClr val="FFFFFF"/>
+            <a:srgbClr val="2E9E5B"/>
           </a:solidFill>
-          <a:ln w="19050">
-            <a:solidFill>
-              <a:srgbClr val="1B7A6E"/>
-            </a:solidFill>
+          <a:ln>
+            <a:noFill/>
           </a:ln>
         </p:spPr>
         <p:style>
@@ -14274,217 +14188,32 @@
           </a:fontRef>
         </p:style>
         <p:txBody>
-          <a:bodyPr wrap="square" rtlCol="0" anchor="ctr">
-            <a:normAutofit/>
-          </a:bodyPr>
+          <a:bodyPr wrap="square" rtlCol="0" anchor="ctr"/>
           <a:lstStyle/>
           <a:p>
             <a:pPr algn="ctr"/>
             <a:r>
-              <a:rPr sz="1300" b="0" i="0" dirty="0">
-                <a:solidFill>
-                  <a:schemeClr val="tx1"/>
-                </a:solidFill>
-                <a:latin typeface="Calibri"/>
-              </a:rPr>
-              <a:t>Planner
-Dashboard</a:t>
-            </a:r>
-          </a:p>
-        </p:txBody>
-      </p:sp>
-      <p:cxnSp>
-        <p:nvCxnSpPr>
-          <p:cNvPr id="17" name="Connector 16"/>
-          <p:cNvCxnSpPr>
-            <a:cxnSpLocks/>
-            <a:stCxn id="14" idx="3"/>
-          </p:cNvCxnSpPr>
-          <p:nvPr/>
-        </p:nvCxnSpPr>
-        <p:spPr>
-          <a:xfrm>
-            <a:off x="9006840" y="3063240"/>
-            <a:ext cx="521208" cy="0"/>
-          </a:xfrm>
-          <a:prstGeom prst="line">
-            <a:avLst/>
-          </a:prstGeom>
-          <a:ln w="19050">
-            <a:solidFill>
-              <a:srgbClr val="1F2937"/>
-            </a:solidFill>
-            <a:tailEnd type="triangle" w="med" len="med"/>
-          </a:ln>
-        </p:spPr>
-        <p:style>
-          <a:lnRef idx="2">
-            <a:schemeClr val="accent1"/>
-          </a:lnRef>
-          <a:fillRef idx="0">
-            <a:schemeClr val="accent1"/>
-          </a:fillRef>
-          <a:effectRef idx="1">
-            <a:schemeClr val="accent1"/>
-          </a:effectRef>
-          <a:fontRef idx="minor">
-            <a:schemeClr val="tx1"/>
-          </a:fontRef>
-        </p:style>
-      </p:cxnSp>
-      <p:cxnSp>
-        <p:nvCxnSpPr>
-          <p:cNvPr id="18" name="Connector 17"/>
-          <p:cNvCxnSpPr/>
-          <p:nvPr/>
-        </p:nvCxnSpPr>
-        <p:spPr>
-          <a:xfrm>
-            <a:off x="10241280" y="4133087"/>
-            <a:ext cx="0" cy="713233"/>
-          </a:xfrm>
-          <a:prstGeom prst="line">
-            <a:avLst/>
-          </a:prstGeom>
-          <a:ln w="19050">
-            <a:solidFill>
-              <a:srgbClr val="5B6570"/>
-            </a:solidFill>
-            <a:tailEnd type="triangle" w="med" len="med"/>
-          </a:ln>
-        </p:spPr>
-        <p:style>
-          <a:lnRef idx="2">
-            <a:schemeClr val="accent1"/>
-          </a:lnRef>
-          <a:fillRef idx="0">
-            <a:schemeClr val="accent1"/>
-          </a:fillRef>
-          <a:effectRef idx="1">
-            <a:schemeClr val="accent1"/>
-          </a:effectRef>
-          <a:fontRef idx="minor">
-            <a:schemeClr val="tx1"/>
-          </a:fontRef>
-        </p:style>
-      </p:cxnSp>
-      <p:cxnSp>
-        <p:nvCxnSpPr>
-          <p:cNvPr id="19" name="Connector 18"/>
-          <p:cNvCxnSpPr/>
-          <p:nvPr/>
-        </p:nvCxnSpPr>
-        <p:spPr>
-          <a:xfrm flipH="1">
-            <a:off x="1371600" y="4864608"/>
-            <a:ext cx="8851392" cy="0"/>
-          </a:xfrm>
-          <a:prstGeom prst="line">
-            <a:avLst/>
-          </a:prstGeom>
-          <a:ln w="19050">
-            <a:solidFill>
-              <a:srgbClr val="5B6570"/>
-            </a:solidFill>
-            <a:tailEnd type="triangle" w="med" len="med"/>
-          </a:ln>
-        </p:spPr>
-        <p:style>
-          <a:lnRef idx="2">
-            <a:schemeClr val="accent1"/>
-          </a:lnRef>
-          <a:fillRef idx="0">
-            <a:schemeClr val="accent1"/>
-          </a:fillRef>
-          <a:effectRef idx="1">
-            <a:schemeClr val="accent1"/>
-          </a:effectRef>
-          <a:fontRef idx="minor">
-            <a:schemeClr val="tx1"/>
-          </a:fontRef>
-        </p:style>
-      </p:cxnSp>
-      <p:cxnSp>
-        <p:nvCxnSpPr>
-          <p:cNvPr id="20" name="Connector 19"/>
-          <p:cNvCxnSpPr/>
-          <p:nvPr/>
-        </p:nvCxnSpPr>
-        <p:spPr>
-          <a:xfrm flipV="1">
-            <a:off x="1353312" y="4133087"/>
-            <a:ext cx="0" cy="713233"/>
-          </a:xfrm>
-          <a:prstGeom prst="line">
-            <a:avLst/>
-          </a:prstGeom>
-          <a:ln w="19050">
-            <a:solidFill>
-              <a:srgbClr val="5B6570"/>
-            </a:solidFill>
-            <a:tailEnd type="triangle" w="med" len="med"/>
-          </a:ln>
-        </p:spPr>
-        <p:style>
-          <a:lnRef idx="2">
-            <a:schemeClr val="accent1"/>
-          </a:lnRef>
-          <a:fillRef idx="0">
-            <a:schemeClr val="accent1"/>
-          </a:fillRef>
-          <a:effectRef idx="1">
-            <a:schemeClr val="accent1"/>
-          </a:effectRef>
-          <a:fontRef idx="minor">
-            <a:schemeClr val="tx1"/>
-          </a:fontRef>
-        </p:style>
-      </p:cxnSp>
-      <p:sp>
-        <p:nvSpPr>
-          <p:cNvPr id="21" name="TextBox 20"/>
-          <p:cNvSpPr txBox="1"/>
-          <p:nvPr/>
-        </p:nvSpPr>
-        <p:spPr>
-          <a:xfrm>
-            <a:off x="3291840" y="4224528"/>
-            <a:ext cx="5577840" cy="457200"/>
-          </a:xfrm>
-          <a:prstGeom prst="rect">
-            <a:avLst/>
-          </a:prstGeom>
-          <a:noFill/>
-        </p:spPr>
-        <p:txBody>
-          <a:bodyPr wrap="square" anchor="ctr">
-            <a:spAutoFit/>
-          </a:bodyPr>
-          <a:lstStyle/>
-          <a:p>
-            <a:pPr algn="ctr"/>
-            <a:r>
-              <a:rPr sz="1400" b="1" i="0">
+              <a:rPr sz="1700" b="1" i="0">
                 <a:solidFill>
                   <a:srgbClr val="F5F7F2"/>
                 </a:solidFill>
                 <a:latin typeface="Calibri"/>
               </a:rPr>
-              <a:t>Closed-Loop Feedback</a:t>
-            </a:r>
-          </a:p>
-        </p:txBody>
-      </p:sp>
-      <p:sp>
-        <p:nvSpPr>
-          <p:cNvPr id="22" name="TextBox 21"/>
+              <a:t>3</a:t>
+            </a:r>
+          </a:p>
+        </p:txBody>
+      </p:sp>
+      <p:sp>
+        <p:nvSpPr>
+          <p:cNvPr id="18" name="TextBox 17"/>
           <p:cNvSpPr txBox="1"/>
           <p:nvPr/>
         </p:nvSpPr>
         <p:spPr>
           <a:xfrm>
-            <a:off x="548640" y="5623560"/>
-            <a:ext cx="11064240" cy="457200"/>
+            <a:off x="8823959" y="1810512"/>
+            <a:ext cx="2468880" cy="2240279"/>
           </a:xfrm>
           <a:prstGeom prst="rect">
             <a:avLst/>
@@ -14492,20 +14221,37 @@
           <a:noFill/>
         </p:spPr>
         <p:txBody>
-          <a:bodyPr wrap="square" anchor="ctr">
-            <a:spAutoFit/>
+          <a:bodyPr wrap="square">
+            <a:normAutofit/>
           </a:bodyPr>
           <a:lstStyle/>
           <a:p>
-            <a:pPr algn="ctr"/>
-            <a:r>
-              <a:rPr sz="1250" b="0" i="0">
-                <a:solidFill>
-                  <a:srgbClr val="F5F7F2"/>
-                </a:solidFill>
-                <a:latin typeface="Calibri"/>
-              </a:rPr>
-              <a:t>Camera → Preprocessing → YOLO Detector → Metadata Bridge (Ds) → Random-Forest Lead-Time Predictor → Planner Dashboard.</a:t>
+            <a:pPr algn="l">
+              <a:spcAft>
+                <a:spcPts val="600"/>
+              </a:spcAft>
+            </a:pPr>
+            <a:r>
+              <a:rPr sz="1600" b="1" i="0" dirty="0">
+                <a:latin typeface="Calibri"/>
+              </a:rPr>
+              <a:t>Communication</a:t>
+            </a:r>
+          </a:p>
+          <a:p>
+            <a:pPr algn="l">
+              <a:spcBef>
+                <a:spcPts val="0"/>
+              </a:spcBef>
+              <a:spcAft>
+                <a:spcPts val="300"/>
+              </a:spcAft>
+            </a:pPr>
+            <a:r>
+              <a:rPr sz="1350" b="0" i="0" dirty="0">
+                <a:latin typeface="Calibri"/>
+              </a:rPr>
+              <a:t>REST File Handoff To The MES And Dashboard Over HTTP; No Proprietary Protocols.</a:t>
             </a:r>
           </a:p>
         </p:txBody>
@@ -14608,5094 +14354,6 @@
                 </a:solidFill>
                 <a:latin typeface="Calibri"/>
               </a:rPr>
-              <a:t>19 / 30</a:t>
-            </a:r>
-          </a:p>
-        </p:txBody>
-      </p:sp>
-      <p:sp>
-        <p:nvSpPr>
-          <p:cNvPr id="5" name="TextBox 4"/>
-          <p:cNvSpPr txBox="1"/>
-          <p:nvPr/>
-        </p:nvSpPr>
-        <p:spPr>
-          <a:xfrm>
-            <a:off x="548640" y="320040"/>
-            <a:ext cx="11064240" cy="822960"/>
-          </a:xfrm>
-          <a:prstGeom prst="rect">
-            <a:avLst/>
-          </a:prstGeom>
-          <a:noFill/>
-        </p:spPr>
-        <p:txBody>
-          <a:bodyPr wrap="square">
-            <a:spAutoFit/>
-          </a:bodyPr>
-          <a:lstStyle/>
-          <a:p>
-            <a:pPr algn="l"/>
-            <a:r>
-              <a:rPr sz="3400" b="1" i="0">
-                <a:solidFill>
-                  <a:srgbClr val="F5F7F2"/>
-                </a:solidFill>
-                <a:latin typeface="Georgia"/>
-              </a:rPr>
-              <a:t>Workflow Flowchart (Fig. 3.2)</a:t>
-            </a:r>
-          </a:p>
-        </p:txBody>
-      </p:sp>
-      <p:sp>
-        <p:nvSpPr>
-          <p:cNvPr id="7" name="Rounded Rectangle 6"/>
-          <p:cNvSpPr/>
-          <p:nvPr/>
-        </p:nvSpPr>
-        <p:spPr>
-          <a:xfrm>
-            <a:off x="822960" y="1417320"/>
-            <a:ext cx="2011680" cy="502920"/>
-          </a:xfrm>
-          <a:prstGeom prst="roundRect">
-            <a:avLst>
-              <a:gd name="adj" fmla="val 10000"/>
-            </a:avLst>
-          </a:prstGeom>
-          <a:solidFill>
-            <a:srgbClr val="FFFFFF"/>
-          </a:solidFill>
-          <a:ln w="19050">
-            <a:solidFill>
-              <a:srgbClr val="1B7A6E"/>
-            </a:solidFill>
-          </a:ln>
-        </p:spPr>
-        <p:style>
-          <a:lnRef idx="1">
-            <a:schemeClr val="accent1"/>
-          </a:lnRef>
-          <a:fillRef idx="3">
-            <a:schemeClr val="accent1"/>
-          </a:fillRef>
-          <a:effectRef idx="2">
-            <a:schemeClr val="accent1"/>
-          </a:effectRef>
-          <a:fontRef idx="minor">
-            <a:schemeClr val="lt1"/>
-          </a:fontRef>
-        </p:style>
-        <p:txBody>
-          <a:bodyPr wrap="square" rtlCol="0" anchor="ctr">
-            <a:normAutofit/>
-          </a:bodyPr>
-          <a:lstStyle/>
-          <a:p>
-            <a:pPr algn="ctr"/>
-            <a:r>
-              <a:rPr sz="1250" b="1" i="0" dirty="0">
-                <a:solidFill>
-                  <a:schemeClr val="tx1"/>
-                </a:solidFill>
-                <a:latin typeface="Calibri"/>
-              </a:rPr>
-              <a:t>Start</a:t>
-            </a:r>
-          </a:p>
-        </p:txBody>
-      </p:sp>
-      <p:sp>
-        <p:nvSpPr>
-          <p:cNvPr id="8" name="Rounded Rectangle 7"/>
-          <p:cNvSpPr/>
-          <p:nvPr/>
-        </p:nvSpPr>
-        <p:spPr>
-          <a:xfrm>
-            <a:off x="822960" y="2103120"/>
-            <a:ext cx="2011680" cy="640080"/>
-          </a:xfrm>
-          <a:prstGeom prst="roundRect">
-            <a:avLst>
-              <a:gd name="adj" fmla="val 10000"/>
-            </a:avLst>
-          </a:prstGeom>
-          <a:solidFill>
-            <a:srgbClr val="FFFFFF"/>
-          </a:solidFill>
-          <a:ln w="19050">
-            <a:solidFill>
-              <a:srgbClr val="1B7A6E"/>
-            </a:solidFill>
-          </a:ln>
-        </p:spPr>
-        <p:style>
-          <a:lnRef idx="1">
-            <a:schemeClr val="accent1"/>
-          </a:lnRef>
-          <a:fillRef idx="3">
-            <a:schemeClr val="accent1"/>
-          </a:fillRef>
-          <a:effectRef idx="2">
-            <a:schemeClr val="accent1"/>
-          </a:effectRef>
-          <a:fontRef idx="minor">
-            <a:schemeClr val="lt1"/>
-          </a:fontRef>
-        </p:style>
-        <p:txBody>
-          <a:bodyPr wrap="square" rtlCol="0" anchor="ctr">
-            <a:normAutofit/>
-          </a:bodyPr>
-          <a:lstStyle/>
-          <a:p>
-            <a:pPr algn="ctr"/>
-            <a:r>
-              <a:rPr sz="1250" b="0" i="0" dirty="0">
-                <a:solidFill>
-                  <a:schemeClr val="tx1"/>
-                </a:solidFill>
-                <a:latin typeface="Calibri"/>
-              </a:rPr>
-              <a:t>Capture Fabric Image / Stream</a:t>
-            </a:r>
-          </a:p>
-        </p:txBody>
-      </p:sp>
-      <p:sp>
-        <p:nvSpPr>
-          <p:cNvPr id="9" name="Rounded Rectangle 8"/>
-          <p:cNvSpPr/>
-          <p:nvPr/>
-        </p:nvSpPr>
-        <p:spPr>
-          <a:xfrm>
-            <a:off x="822960" y="2926080"/>
-            <a:ext cx="2011680" cy="731520"/>
-          </a:xfrm>
-          <a:prstGeom prst="roundRect">
-            <a:avLst>
-              <a:gd name="adj" fmla="val 10000"/>
-            </a:avLst>
-          </a:prstGeom>
-          <a:solidFill>
-            <a:srgbClr val="FFFFFF"/>
-          </a:solidFill>
-          <a:ln w="19050">
-            <a:solidFill>
-              <a:srgbClr val="1B7A6E"/>
-            </a:solidFill>
-          </a:ln>
-        </p:spPr>
-        <p:style>
-          <a:lnRef idx="1">
-            <a:schemeClr val="accent1"/>
-          </a:lnRef>
-          <a:fillRef idx="3">
-            <a:schemeClr val="accent1"/>
-          </a:fillRef>
-          <a:effectRef idx="2">
-            <a:schemeClr val="accent1"/>
-          </a:effectRef>
-          <a:fontRef idx="minor">
-            <a:schemeClr val="lt1"/>
-          </a:fontRef>
-        </p:style>
-        <p:txBody>
-          <a:bodyPr wrap="square" rtlCol="0" anchor="ctr">
-            <a:normAutofit/>
-          </a:bodyPr>
-          <a:lstStyle/>
-          <a:p>
-            <a:pPr algn="ctr"/>
-            <a:r>
-              <a:rPr sz="1150" b="0" i="0" dirty="0">
-                <a:solidFill>
-                  <a:schemeClr val="tx1"/>
-                </a:solidFill>
-                <a:latin typeface="Calibri"/>
-              </a:rPr>
-              <a:t>Preprocessing
-(Resize, Noise Removal, Enhance)</a:t>
-            </a:r>
-          </a:p>
-        </p:txBody>
-      </p:sp>
-      <p:sp>
-        <p:nvSpPr>
-          <p:cNvPr id="10" name="Rounded Rectangle 9"/>
-          <p:cNvSpPr/>
-          <p:nvPr/>
-        </p:nvSpPr>
-        <p:spPr>
-          <a:xfrm>
-            <a:off x="822960" y="3840480"/>
-            <a:ext cx="2011680" cy="731520"/>
-          </a:xfrm>
-          <a:prstGeom prst="roundRect">
-            <a:avLst>
-              <a:gd name="adj" fmla="val 10000"/>
-            </a:avLst>
-          </a:prstGeom>
-          <a:solidFill>
-            <a:srgbClr val="FFFFFF"/>
-          </a:solidFill>
-          <a:ln w="19050">
-            <a:solidFill>
-              <a:srgbClr val="1B7A6E"/>
-            </a:solidFill>
-          </a:ln>
-        </p:spPr>
-        <p:style>
-          <a:lnRef idx="1">
-            <a:schemeClr val="accent1"/>
-          </a:lnRef>
-          <a:fillRef idx="3">
-            <a:schemeClr val="accent1"/>
-          </a:fillRef>
-          <a:effectRef idx="2">
-            <a:schemeClr val="accent1"/>
-          </a:effectRef>
-          <a:fontRef idx="minor">
-            <a:schemeClr val="lt1"/>
-          </a:fontRef>
-        </p:style>
-        <p:txBody>
-          <a:bodyPr wrap="square" rtlCol="0" anchor="ctr">
-            <a:normAutofit/>
-          </a:bodyPr>
-          <a:lstStyle/>
-          <a:p>
-            <a:pPr algn="ctr"/>
-            <a:r>
-              <a:rPr sz="1150" b="0" i="0" dirty="0">
-                <a:solidFill>
-                  <a:schemeClr val="tx1"/>
-                </a:solidFill>
-                <a:latin typeface="Calibri"/>
-              </a:rPr>
-              <a:t>YOLO Defect Detection
-(Type + Boxes / Masks)</a:t>
-            </a:r>
-          </a:p>
-        </p:txBody>
-      </p:sp>
-      <p:sp>
-        <p:nvSpPr>
-          <p:cNvPr id="11" name="Diamond 10"/>
-          <p:cNvSpPr/>
-          <p:nvPr/>
-        </p:nvSpPr>
-        <p:spPr>
-          <a:xfrm>
-            <a:off x="822960" y="4754880"/>
-            <a:ext cx="2011680" cy="822960"/>
-          </a:xfrm>
-          <a:prstGeom prst="diamond">
-            <a:avLst/>
-          </a:prstGeom>
-          <a:solidFill>
-            <a:srgbClr val="FFFFFF"/>
-          </a:solidFill>
-          <a:ln w="19050">
-            <a:solidFill>
-              <a:srgbClr val="1B7A6E"/>
-            </a:solidFill>
-          </a:ln>
-        </p:spPr>
-        <p:style>
-          <a:lnRef idx="1">
-            <a:schemeClr val="accent1"/>
-          </a:lnRef>
-          <a:fillRef idx="3">
-            <a:schemeClr val="accent1"/>
-          </a:fillRef>
-          <a:effectRef idx="2">
-            <a:schemeClr val="accent1"/>
-          </a:effectRef>
-          <a:fontRef idx="minor">
-            <a:schemeClr val="lt1"/>
-          </a:fontRef>
-        </p:style>
-        <p:txBody>
-          <a:bodyPr wrap="square" rtlCol="0" anchor="ctr">
-            <a:normAutofit fontScale="92500" lnSpcReduction="20000"/>
-          </a:bodyPr>
-          <a:lstStyle/>
-          <a:p>
-            <a:pPr algn="ctr"/>
-            <a:r>
-              <a:rPr sz="1250" b="0" i="0" dirty="0">
-                <a:solidFill>
-                  <a:schemeClr val="tx1"/>
-                </a:solidFill>
-                <a:latin typeface="Calibri"/>
-              </a:rPr>
-              <a:t>Defect Detected?</a:t>
-            </a:r>
-          </a:p>
-        </p:txBody>
-      </p:sp>
-      <p:sp>
-        <p:nvSpPr>
-          <p:cNvPr id="12" name="Rounded Rectangle 11"/>
-          <p:cNvSpPr/>
-          <p:nvPr/>
-        </p:nvSpPr>
-        <p:spPr>
-          <a:xfrm>
-            <a:off x="3383280" y="4754880"/>
-            <a:ext cx="2011680" cy="822960"/>
-          </a:xfrm>
-          <a:prstGeom prst="roundRect">
-            <a:avLst>
-              <a:gd name="adj" fmla="val 10000"/>
-            </a:avLst>
-          </a:prstGeom>
-          <a:solidFill>
-            <a:srgbClr val="FFFFFF"/>
-          </a:solidFill>
-          <a:ln w="19050">
-            <a:solidFill>
-              <a:srgbClr val="1B7A6E"/>
-            </a:solidFill>
-          </a:ln>
-        </p:spPr>
-        <p:style>
-          <a:lnRef idx="1">
-            <a:schemeClr val="accent1"/>
-          </a:lnRef>
-          <a:fillRef idx="3">
-            <a:schemeClr val="accent1"/>
-          </a:fillRef>
-          <a:effectRef idx="2">
-            <a:schemeClr val="accent1"/>
-          </a:effectRef>
-          <a:fontRef idx="minor">
-            <a:schemeClr val="lt1"/>
-          </a:fontRef>
-        </p:style>
-        <p:txBody>
-          <a:bodyPr wrap="square" rtlCol="0" anchor="ctr">
-            <a:normAutofit/>
-          </a:bodyPr>
-          <a:lstStyle/>
-          <a:p>
-            <a:pPr algn="ctr"/>
-            <a:r>
-              <a:rPr sz="1100" b="0" i="0" dirty="0">
-                <a:solidFill>
-                  <a:schemeClr val="tx1"/>
-                </a:solidFill>
-                <a:latin typeface="Calibri"/>
-              </a:rPr>
-              <a:t>Identify Defect Type
-(Hole / Horizontal / Vertical / Lines / Stain)</a:t>
-            </a:r>
-          </a:p>
-        </p:txBody>
-      </p:sp>
-      <p:sp>
-        <p:nvSpPr>
-          <p:cNvPr id="13" name="Rounded Rectangle 12"/>
-          <p:cNvSpPr/>
-          <p:nvPr/>
-        </p:nvSpPr>
-        <p:spPr>
-          <a:xfrm>
-            <a:off x="822960" y="5760720"/>
-            <a:ext cx="2011680" cy="411480"/>
-          </a:xfrm>
-          <a:prstGeom prst="roundRect">
-            <a:avLst>
-              <a:gd name="adj" fmla="val 10000"/>
-            </a:avLst>
-          </a:prstGeom>
-          <a:solidFill>
-            <a:srgbClr val="FFFFFF"/>
-          </a:solidFill>
-          <a:ln w="19050">
-            <a:solidFill>
-              <a:srgbClr val="1B7A6E"/>
-            </a:solidFill>
-          </a:ln>
-        </p:spPr>
-        <p:style>
-          <a:lnRef idx="1">
-            <a:schemeClr val="accent1"/>
-          </a:lnRef>
-          <a:fillRef idx="3">
-            <a:schemeClr val="accent1"/>
-          </a:fillRef>
-          <a:effectRef idx="2">
-            <a:schemeClr val="accent1"/>
-          </a:effectRef>
-          <a:fontRef idx="minor">
-            <a:schemeClr val="lt1"/>
-          </a:fontRef>
-        </p:style>
-        <p:txBody>
-          <a:bodyPr wrap="square" rtlCol="0" anchor="ctr">
-            <a:normAutofit/>
-          </a:bodyPr>
-          <a:lstStyle/>
-          <a:p>
-            <a:pPr algn="ctr"/>
-            <a:r>
-              <a:rPr sz="1100" b="0" i="0" dirty="0">
-                <a:solidFill>
-                  <a:schemeClr val="tx1"/>
-                </a:solidFill>
-                <a:latin typeface="Calibri"/>
-              </a:rPr>
-              <a:t>Mark Defect-Free, Ds = 0</a:t>
-            </a:r>
-          </a:p>
-        </p:txBody>
-      </p:sp>
-      <p:cxnSp>
-        <p:nvCxnSpPr>
-          <p:cNvPr id="14" name="Connector 13"/>
-          <p:cNvCxnSpPr/>
-          <p:nvPr/>
-        </p:nvCxnSpPr>
-        <p:spPr>
-          <a:xfrm>
-            <a:off x="1828800" y="1938528"/>
-            <a:ext cx="0" cy="146303"/>
-          </a:xfrm>
-          <a:prstGeom prst="line">
-            <a:avLst/>
-          </a:prstGeom>
-          <a:ln w="19050">
-            <a:solidFill>
-              <a:srgbClr val="1F2937"/>
-            </a:solidFill>
-            <a:tailEnd type="triangle" w="med" len="med"/>
-          </a:ln>
-        </p:spPr>
-        <p:style>
-          <a:lnRef idx="2">
-            <a:schemeClr val="accent1"/>
-          </a:lnRef>
-          <a:fillRef idx="0">
-            <a:schemeClr val="accent1"/>
-          </a:fillRef>
-          <a:effectRef idx="1">
-            <a:schemeClr val="accent1"/>
-          </a:effectRef>
-          <a:fontRef idx="minor">
-            <a:schemeClr val="tx1"/>
-          </a:fontRef>
-        </p:style>
-      </p:cxnSp>
-      <p:cxnSp>
-        <p:nvCxnSpPr>
-          <p:cNvPr id="15" name="Connector 14"/>
-          <p:cNvCxnSpPr/>
-          <p:nvPr/>
-        </p:nvCxnSpPr>
-        <p:spPr>
-          <a:xfrm>
-            <a:off x="1828800" y="2761488"/>
-            <a:ext cx="0" cy="146304"/>
-          </a:xfrm>
-          <a:prstGeom prst="line">
-            <a:avLst/>
-          </a:prstGeom>
-          <a:ln w="19050">
-            <a:solidFill>
-              <a:srgbClr val="1F2937"/>
-            </a:solidFill>
-            <a:tailEnd type="triangle" w="med" len="med"/>
-          </a:ln>
-        </p:spPr>
-        <p:style>
-          <a:lnRef idx="2">
-            <a:schemeClr val="accent1"/>
-          </a:lnRef>
-          <a:fillRef idx="0">
-            <a:schemeClr val="accent1"/>
-          </a:fillRef>
-          <a:effectRef idx="1">
-            <a:schemeClr val="accent1"/>
-          </a:effectRef>
-          <a:fontRef idx="minor">
-            <a:schemeClr val="tx1"/>
-          </a:fontRef>
-        </p:style>
-      </p:cxnSp>
-      <p:cxnSp>
-        <p:nvCxnSpPr>
-          <p:cNvPr id="16" name="Connector 15"/>
-          <p:cNvCxnSpPr/>
-          <p:nvPr/>
-        </p:nvCxnSpPr>
-        <p:spPr>
-          <a:xfrm>
-            <a:off x="1828800" y="3675887"/>
-            <a:ext cx="0" cy="146304"/>
-          </a:xfrm>
-          <a:prstGeom prst="line">
-            <a:avLst/>
-          </a:prstGeom>
-          <a:ln w="19050">
-            <a:solidFill>
-              <a:srgbClr val="1F2937"/>
-            </a:solidFill>
-            <a:tailEnd type="triangle" w="med" len="med"/>
-          </a:ln>
-        </p:spPr>
-        <p:style>
-          <a:lnRef idx="2">
-            <a:schemeClr val="accent1"/>
-          </a:lnRef>
-          <a:fillRef idx="0">
-            <a:schemeClr val="accent1"/>
-          </a:fillRef>
-          <a:effectRef idx="1">
-            <a:schemeClr val="accent1"/>
-          </a:effectRef>
-          <a:fontRef idx="minor">
-            <a:schemeClr val="tx1"/>
-          </a:fontRef>
-        </p:style>
-      </p:cxnSp>
-      <p:cxnSp>
-        <p:nvCxnSpPr>
-          <p:cNvPr id="17" name="Connector 16"/>
-          <p:cNvCxnSpPr/>
-          <p:nvPr/>
-        </p:nvCxnSpPr>
-        <p:spPr>
-          <a:xfrm>
-            <a:off x="1828800" y="4590288"/>
-            <a:ext cx="0" cy="146304"/>
-          </a:xfrm>
-          <a:prstGeom prst="line">
-            <a:avLst/>
-          </a:prstGeom>
-          <a:ln w="19050">
-            <a:solidFill>
-              <a:srgbClr val="1F2937"/>
-            </a:solidFill>
-            <a:tailEnd type="triangle" w="med" len="med"/>
-          </a:ln>
-        </p:spPr>
-        <p:style>
-          <a:lnRef idx="2">
-            <a:schemeClr val="accent1"/>
-          </a:lnRef>
-          <a:fillRef idx="0">
-            <a:schemeClr val="accent1"/>
-          </a:fillRef>
-          <a:effectRef idx="1">
-            <a:schemeClr val="accent1"/>
-          </a:effectRef>
-          <a:fontRef idx="minor">
-            <a:schemeClr val="tx1"/>
-          </a:fontRef>
-        </p:style>
-      </p:cxnSp>
-      <p:cxnSp>
-        <p:nvCxnSpPr>
-          <p:cNvPr id="18" name="Connector 17"/>
-          <p:cNvCxnSpPr/>
-          <p:nvPr/>
-        </p:nvCxnSpPr>
-        <p:spPr>
-          <a:xfrm>
-            <a:off x="1828800" y="5596128"/>
-            <a:ext cx="0" cy="146304"/>
-          </a:xfrm>
-          <a:prstGeom prst="line">
-            <a:avLst/>
-          </a:prstGeom>
-          <a:ln w="19050">
-            <a:solidFill>
-              <a:srgbClr val="1F2937"/>
-            </a:solidFill>
-            <a:tailEnd type="triangle" w="med" len="med"/>
-          </a:ln>
-        </p:spPr>
-        <p:style>
-          <a:lnRef idx="2">
-            <a:schemeClr val="accent1"/>
-          </a:lnRef>
-          <a:fillRef idx="0">
-            <a:schemeClr val="accent1"/>
-          </a:fillRef>
-          <a:effectRef idx="1">
-            <a:schemeClr val="accent1"/>
-          </a:effectRef>
-          <a:fontRef idx="minor">
-            <a:schemeClr val="tx1"/>
-          </a:fontRef>
-        </p:style>
-      </p:cxnSp>
-      <p:cxnSp>
-        <p:nvCxnSpPr>
-          <p:cNvPr id="19" name="Connector 18"/>
-          <p:cNvCxnSpPr/>
-          <p:nvPr/>
-        </p:nvCxnSpPr>
-        <p:spPr>
-          <a:xfrm>
-            <a:off x="2852928" y="5166360"/>
-            <a:ext cx="512064" cy="0"/>
-          </a:xfrm>
-          <a:prstGeom prst="line">
-            <a:avLst/>
-          </a:prstGeom>
-          <a:ln w="19050">
-            <a:solidFill>
-              <a:srgbClr val="1F2937"/>
-            </a:solidFill>
-            <a:tailEnd type="triangle" w="med" len="med"/>
-          </a:ln>
-        </p:spPr>
-        <p:style>
-          <a:lnRef idx="2">
-            <a:schemeClr val="accent1"/>
-          </a:lnRef>
-          <a:fillRef idx="0">
-            <a:schemeClr val="accent1"/>
-          </a:fillRef>
-          <a:effectRef idx="1">
-            <a:schemeClr val="accent1"/>
-          </a:effectRef>
-          <a:fontRef idx="minor">
-            <a:schemeClr val="tx1"/>
-          </a:fontRef>
-        </p:style>
-      </p:cxnSp>
-      <p:sp>
-        <p:nvSpPr>
-          <p:cNvPr id="20" name="TextBox 19"/>
-          <p:cNvSpPr txBox="1"/>
-          <p:nvPr/>
-        </p:nvSpPr>
-        <p:spPr>
-          <a:xfrm>
-            <a:off x="6035040" y="1828800"/>
-            <a:ext cx="5577840" cy="4023360"/>
-          </a:xfrm>
-          <a:prstGeom prst="rect">
-            <a:avLst/>
-          </a:prstGeom>
-          <a:noFill/>
-        </p:spPr>
-        <p:txBody>
-          <a:bodyPr wrap="square">
-            <a:spAutoFit/>
-          </a:bodyPr>
-          <a:lstStyle/>
-          <a:p>
-            <a:pPr algn="l">
-              <a:spcBef>
-                <a:spcPts val="0"/>
-              </a:spcBef>
-              <a:spcAft>
-                <a:spcPts val="800"/>
-              </a:spcAft>
-            </a:pPr>
-            <a:r>
-              <a:rPr sz="1550" b="0" i="0">
-                <a:solidFill>
-                  <a:srgbClr val="F5F7F2"/>
-                </a:solidFill>
-                <a:latin typeface="Calibri"/>
-              </a:rPr>
-              <a:t>▪  Each Frame Is Loaded, Preprocessed, And Passed Through YOLO Detection.</a:t>
-            </a:r>
-          </a:p>
-          <a:p>
-            <a:pPr algn="l">
-              <a:spcBef>
-                <a:spcPts val="0"/>
-              </a:spcBef>
-              <a:spcAft>
-                <a:spcPts val="800"/>
-              </a:spcAft>
-            </a:pPr>
-            <a:r>
-              <a:rPr sz="1550" b="0" i="0">
-                <a:solidFill>
-                  <a:srgbClr val="F5F7F2"/>
-                </a:solidFill>
-                <a:latin typeface="Calibri"/>
-              </a:rPr>
-              <a:t>▪  A Defect Triggers Area + Ds Computation; A Clean Frame Sets Ds = 0.</a:t>
-            </a:r>
-          </a:p>
-          <a:p>
-            <a:pPr algn="l">
-              <a:spcBef>
-                <a:spcPts val="0"/>
-              </a:spcBef>
-              <a:spcAft>
-                <a:spcPts val="800"/>
-              </a:spcAft>
-            </a:pPr>
-            <a:r>
-              <a:rPr sz="1550" b="0" i="0">
-                <a:solidFill>
-                  <a:srgbClr val="F5F7F2"/>
-                </a:solidFill>
-                <a:latin typeface="Calibri"/>
-              </a:rPr>
-              <a:t>▪  Ds Feeds A Rolling Average Before The Random Forest Predicts Hours.</a:t>
-            </a:r>
-          </a:p>
-          <a:p>
-            <a:pPr algn="l">
-              <a:spcBef>
-                <a:spcPts val="0"/>
-              </a:spcBef>
-              <a:spcAft>
-                <a:spcPts val="800"/>
-              </a:spcAft>
-            </a:pPr>
-            <a:r>
-              <a:rPr sz="1550" b="0" i="0">
-                <a:solidFill>
-                  <a:srgbClr val="F5F7F2"/>
-                </a:solidFill>
-                <a:latin typeface="Calibri"/>
-              </a:rPr>
-              <a:t>▪  Result Is Displayed, And The Loop Repeats Until Frames Run Out.</a:t>
-            </a:r>
-          </a:p>
-        </p:txBody>
-      </p:sp>
-    </p:spTree>
-  </p:cSld>
-  <p:clrMapOvr>
-    <a:masterClrMapping/>
-  </p:clrMapOvr>
-</p:sld>
-</file>
-
-<file path=ppt/slides/slide28.xml><?xml version="1.0" encoding="utf-8"?>
-<p:sld xmlns:a="http://schemas.openxmlformats.org/drawingml/2006/main" xmlns:r="http://schemas.openxmlformats.org/officeDocument/2006/relationships" xmlns:p="http://schemas.openxmlformats.org/presentationml/2006/main">
-  <p:cSld>
-    <p:bg>
-      <p:bgPr>
-        <a:solidFill>
-          <a:srgbClr val="085859"/>
-        </a:solidFill>
-        <a:effectLst/>
-      </p:bgPr>
-    </p:bg>
-    <p:spTree>
-      <p:nvGrpSpPr>
-        <p:cNvPr id="1" name=""/>
-        <p:cNvGrpSpPr/>
-        <p:nvPr/>
-      </p:nvGrpSpPr>
-      <p:grpSpPr>
-        <a:xfrm>
-          <a:off x="0" y="0"/>
-          <a:ext cx="0" cy="0"/>
-          <a:chOff x="0" y="0"/>
-          <a:chExt cx="0" cy="0"/>
-        </a:xfrm>
-      </p:grpSpPr>
-      <p:sp>
-        <p:nvSpPr>
-          <p:cNvPr id="2" name="TextBox 1"/>
-          <p:cNvSpPr txBox="1"/>
-          <p:nvPr/>
-        </p:nvSpPr>
-        <p:spPr>
-          <a:xfrm>
-            <a:off x="548640" y="6419088"/>
-            <a:ext cx="9144000" cy="274320"/>
-          </a:xfrm>
-          <a:prstGeom prst="rect">
-            <a:avLst/>
-          </a:prstGeom>
-          <a:noFill/>
-        </p:spPr>
-        <p:txBody>
-          <a:bodyPr wrap="square">
-            <a:spAutoFit/>
-          </a:bodyPr>
-          <a:lstStyle/>
-          <a:p>
-            <a:pPr algn="l"/>
-            <a:r>
-              <a:rPr sz="900" b="0" i="0">
-                <a:solidFill>
-                  <a:srgbClr val="F5F7F2"/>
-                </a:solidFill>
-                <a:latin typeface="Calibri"/>
-              </a:rPr>
-              <a:t>Defect-to-Delivery  |  FYDP-I  •  Group: 262-034</a:t>
-            </a:r>
-          </a:p>
-        </p:txBody>
-      </p:sp>
-      <p:sp>
-        <p:nvSpPr>
-          <p:cNvPr id="3" name="TextBox 2"/>
-          <p:cNvSpPr txBox="1"/>
-          <p:nvPr/>
-        </p:nvSpPr>
-        <p:spPr>
-          <a:xfrm>
-            <a:off x="10972800" y="6419088"/>
-            <a:ext cx="640080" cy="274320"/>
-          </a:xfrm>
-          <a:prstGeom prst="rect">
-            <a:avLst/>
-          </a:prstGeom>
-          <a:noFill/>
-        </p:spPr>
-        <p:txBody>
-          <a:bodyPr wrap="none">
-            <a:spAutoFit/>
-          </a:bodyPr>
-          <a:lstStyle/>
-          <a:p>
-            <a:pPr algn="r"/>
-            <a:r>
-              <a:rPr sz="900">
-                <a:solidFill>
-                  <a:srgbClr val="F5F7F2"/>
-                </a:solidFill>
-                <a:latin typeface="Calibri"/>
-              </a:rPr>
-              <a:t>20 / 30</a:t>
-            </a:r>
-          </a:p>
-        </p:txBody>
-      </p:sp>
-      <p:sp>
-        <p:nvSpPr>
-          <p:cNvPr id="5" name="TextBox 4"/>
-          <p:cNvSpPr txBox="1"/>
-          <p:nvPr/>
-        </p:nvSpPr>
-        <p:spPr>
-          <a:xfrm>
-            <a:off x="548640" y="320040"/>
-            <a:ext cx="11064240" cy="822960"/>
-          </a:xfrm>
-          <a:prstGeom prst="rect">
-            <a:avLst/>
-          </a:prstGeom>
-          <a:noFill/>
-        </p:spPr>
-        <p:txBody>
-          <a:bodyPr wrap="square">
-            <a:spAutoFit/>
-          </a:bodyPr>
-          <a:lstStyle/>
-          <a:p>
-            <a:pPr algn="l"/>
-            <a:r>
-              <a:rPr sz="3400" b="1" i="0">
-                <a:solidFill>
-                  <a:srgbClr val="F5F7F2"/>
-                </a:solidFill>
-                <a:latin typeface="Georgia"/>
-              </a:rPr>
-              <a:t>Data Flow &amp; Metadata Bridge (Fig. 3.3 / 3.4)</a:t>
-            </a:r>
-          </a:p>
-        </p:txBody>
-      </p:sp>
-      <p:sp>
-        <p:nvSpPr>
-          <p:cNvPr id="7" name="TextBox 6"/>
-          <p:cNvSpPr txBox="1"/>
-          <p:nvPr/>
-        </p:nvSpPr>
-        <p:spPr>
-          <a:xfrm>
-            <a:off x="548640" y="1417320"/>
-            <a:ext cx="11064240" cy="411480"/>
-          </a:xfrm>
-          <a:prstGeom prst="rect">
-            <a:avLst/>
-          </a:prstGeom>
-          <a:noFill/>
-        </p:spPr>
-        <p:txBody>
-          <a:bodyPr wrap="square" anchor="ctr">
-            <a:spAutoFit/>
-          </a:bodyPr>
-          <a:lstStyle/>
-          <a:p>
-            <a:pPr algn="ctr"/>
-            <a:r>
-              <a:rPr sz="1400" b="1" i="0">
-                <a:solidFill>
-                  <a:srgbClr val="F5F7F2"/>
-                </a:solidFill>
-                <a:latin typeface="Calibri"/>
-              </a:rPr>
-              <a:t>Level-0 DFD</a:t>
-            </a:r>
-          </a:p>
-        </p:txBody>
-      </p:sp>
-      <p:sp>
-        <p:nvSpPr>
-          <p:cNvPr id="8" name="Oval 7"/>
-          <p:cNvSpPr/>
-          <p:nvPr/>
-        </p:nvSpPr>
-        <p:spPr>
-          <a:xfrm>
-            <a:off x="640080" y="1965960"/>
-            <a:ext cx="1737360" cy="822960"/>
-          </a:xfrm>
-          <a:prstGeom prst="ellipse">
-            <a:avLst/>
-          </a:prstGeom>
-          <a:solidFill>
-            <a:srgbClr val="FFFFFF"/>
-          </a:solidFill>
-          <a:ln w="19050">
-            <a:solidFill>
-              <a:srgbClr val="1B7A6E"/>
-            </a:solidFill>
-          </a:ln>
-        </p:spPr>
-        <p:style>
-          <a:lnRef idx="1">
-            <a:schemeClr val="accent1"/>
-          </a:lnRef>
-          <a:fillRef idx="3">
-            <a:schemeClr val="accent1"/>
-          </a:fillRef>
-          <a:effectRef idx="2">
-            <a:schemeClr val="accent1"/>
-          </a:effectRef>
-          <a:fontRef idx="minor">
-            <a:schemeClr val="lt1"/>
-          </a:fontRef>
-        </p:style>
-        <p:txBody>
-          <a:bodyPr wrap="square" rtlCol="0" anchor="ctr">
-            <a:normAutofit/>
-          </a:bodyPr>
-          <a:lstStyle/>
-          <a:p>
-            <a:pPr algn="ctr"/>
-            <a:r>
-              <a:rPr sz="1200" b="0" i="0" dirty="0">
-                <a:solidFill>
-                  <a:schemeClr val="tx1"/>
-                </a:solidFill>
-                <a:latin typeface="Calibri"/>
-              </a:rPr>
-              <a:t>Fabric Camera</a:t>
-            </a:r>
-          </a:p>
-        </p:txBody>
-      </p:sp>
-      <p:sp>
-        <p:nvSpPr>
-          <p:cNvPr id="9" name="Oval 8"/>
-          <p:cNvSpPr/>
-          <p:nvPr/>
-        </p:nvSpPr>
-        <p:spPr>
-          <a:xfrm>
-            <a:off x="640080" y="2971800"/>
-            <a:ext cx="1737360" cy="822960"/>
-          </a:xfrm>
-          <a:prstGeom prst="ellipse">
-            <a:avLst/>
-          </a:prstGeom>
-          <a:solidFill>
-            <a:srgbClr val="FFFFFF"/>
-          </a:solidFill>
-          <a:ln w="19050">
-            <a:solidFill>
-              <a:srgbClr val="1B7A6E"/>
-            </a:solidFill>
-          </a:ln>
-        </p:spPr>
-        <p:style>
-          <a:lnRef idx="1">
-            <a:schemeClr val="accent1"/>
-          </a:lnRef>
-          <a:fillRef idx="3">
-            <a:schemeClr val="accent1"/>
-          </a:fillRef>
-          <a:effectRef idx="2">
-            <a:schemeClr val="accent1"/>
-          </a:effectRef>
-          <a:fontRef idx="minor">
-            <a:schemeClr val="lt1"/>
-          </a:fontRef>
-        </p:style>
-        <p:txBody>
-          <a:bodyPr wrap="square" rtlCol="0" anchor="ctr">
-            <a:normAutofit/>
-          </a:bodyPr>
-          <a:lstStyle/>
-          <a:p>
-            <a:pPr algn="ctr"/>
-            <a:r>
-              <a:rPr sz="1200" b="0" i="0" dirty="0">
-                <a:solidFill>
-                  <a:schemeClr val="tx1"/>
-                </a:solidFill>
-                <a:latin typeface="Calibri"/>
-              </a:rPr>
-              <a:t>Manufacturing Data</a:t>
-            </a:r>
-          </a:p>
-        </p:txBody>
-      </p:sp>
-      <p:sp>
-        <p:nvSpPr>
-          <p:cNvPr id="10" name="Oval 9"/>
-          <p:cNvSpPr/>
-          <p:nvPr/>
-        </p:nvSpPr>
-        <p:spPr>
-          <a:xfrm>
-            <a:off x="2743200" y="1965960"/>
-            <a:ext cx="2377440" cy="1828800"/>
-          </a:xfrm>
-          <a:prstGeom prst="ellipse">
-            <a:avLst/>
-          </a:prstGeom>
-          <a:solidFill>
-            <a:srgbClr val="FFFFFF"/>
-          </a:solidFill>
-          <a:ln w="19050">
-            <a:solidFill>
-              <a:srgbClr val="1B7A6E"/>
-            </a:solidFill>
-          </a:ln>
-        </p:spPr>
-        <p:style>
-          <a:lnRef idx="1">
-            <a:schemeClr val="accent1"/>
-          </a:lnRef>
-          <a:fillRef idx="3">
-            <a:schemeClr val="accent1"/>
-          </a:fillRef>
-          <a:effectRef idx="2">
-            <a:schemeClr val="accent1"/>
-          </a:effectRef>
-          <a:fontRef idx="minor">
-            <a:schemeClr val="lt1"/>
-          </a:fontRef>
-        </p:style>
-        <p:txBody>
-          <a:bodyPr wrap="square" rtlCol="0" anchor="ctr">
-            <a:normAutofit/>
-          </a:bodyPr>
-          <a:lstStyle/>
-          <a:p>
-            <a:pPr algn="ctr"/>
-            <a:r>
-              <a:rPr sz="1400" b="1" i="0" dirty="0">
-                <a:solidFill>
-                  <a:schemeClr val="tx1"/>
-                </a:solidFill>
-                <a:latin typeface="Calibri"/>
-              </a:rPr>
-              <a:t>0 Detect + Score + Predict</a:t>
-            </a:r>
-          </a:p>
-        </p:txBody>
-      </p:sp>
-      <p:sp>
-        <p:nvSpPr>
-          <p:cNvPr id="11" name="Oval 10"/>
-          <p:cNvSpPr/>
-          <p:nvPr/>
-        </p:nvSpPr>
-        <p:spPr>
-          <a:xfrm>
-            <a:off x="5577840" y="2286000"/>
-            <a:ext cx="2286000" cy="1188720"/>
-          </a:xfrm>
-          <a:prstGeom prst="ellipse">
-            <a:avLst/>
-          </a:prstGeom>
-          <a:solidFill>
-            <a:srgbClr val="FFFFFF"/>
-          </a:solidFill>
-          <a:ln w="19050">
-            <a:solidFill>
-              <a:srgbClr val="1B7A6E"/>
-            </a:solidFill>
-          </a:ln>
-        </p:spPr>
-        <p:style>
-          <a:lnRef idx="1">
-            <a:schemeClr val="accent1"/>
-          </a:lnRef>
-          <a:fillRef idx="3">
-            <a:schemeClr val="accent1"/>
-          </a:fillRef>
-          <a:effectRef idx="2">
-            <a:schemeClr val="accent1"/>
-          </a:effectRef>
-          <a:fontRef idx="minor">
-            <a:schemeClr val="lt1"/>
-          </a:fontRef>
-        </p:style>
-        <p:txBody>
-          <a:bodyPr wrap="square" rtlCol="0" anchor="ctr">
-            <a:normAutofit/>
-          </a:bodyPr>
-          <a:lstStyle/>
-          <a:p>
-            <a:pPr algn="ctr"/>
-            <a:r>
-              <a:rPr sz="1200" b="0" i="0" dirty="0">
-                <a:solidFill>
-                  <a:schemeClr val="tx1"/>
-                </a:solidFill>
-                <a:latin typeface="Calibri"/>
-              </a:rPr>
-              <a:t>Result + Ds + Hours</a:t>
-            </a:r>
-          </a:p>
-        </p:txBody>
-      </p:sp>
-      <p:sp>
-        <p:nvSpPr>
-          <p:cNvPr id="12" name="Oval 11"/>
-          <p:cNvSpPr/>
-          <p:nvPr/>
-        </p:nvSpPr>
-        <p:spPr>
-          <a:xfrm>
-            <a:off x="8321040" y="2286000"/>
-            <a:ext cx="2286000" cy="1188720"/>
-          </a:xfrm>
-          <a:prstGeom prst="ellipse">
-            <a:avLst/>
-          </a:prstGeom>
-          <a:solidFill>
-            <a:srgbClr val="FFFFFF"/>
-          </a:solidFill>
-          <a:ln w="19050">
-            <a:solidFill>
-              <a:srgbClr val="1B7A6E"/>
-            </a:solidFill>
-          </a:ln>
-        </p:spPr>
-        <p:style>
-          <a:lnRef idx="1">
-            <a:schemeClr val="accent1"/>
-          </a:lnRef>
-          <a:fillRef idx="3">
-            <a:schemeClr val="accent1"/>
-          </a:fillRef>
-          <a:effectRef idx="2">
-            <a:schemeClr val="accent1"/>
-          </a:effectRef>
-          <a:fontRef idx="minor">
-            <a:schemeClr val="lt1"/>
-          </a:fontRef>
-        </p:style>
-        <p:txBody>
-          <a:bodyPr wrap="square" rtlCol="0" anchor="ctr">
-            <a:normAutofit/>
-          </a:bodyPr>
-          <a:lstStyle/>
-          <a:p>
-            <a:pPr algn="ctr"/>
-            <a:r>
-              <a:rPr sz="1200" b="0" i="0" dirty="0">
-                <a:solidFill>
-                  <a:schemeClr val="tx1"/>
-                </a:solidFill>
-                <a:latin typeface="Calibri"/>
-              </a:rPr>
-              <a:t>Planner / Inspector</a:t>
-            </a:r>
-          </a:p>
-        </p:txBody>
-      </p:sp>
-      <p:cxnSp>
-        <p:nvCxnSpPr>
-          <p:cNvPr id="13" name="Connector 12"/>
-          <p:cNvCxnSpPr/>
-          <p:nvPr/>
-        </p:nvCxnSpPr>
-        <p:spPr>
-          <a:xfrm>
-            <a:off x="2377440" y="2377440"/>
-            <a:ext cx="347472" cy="0"/>
-          </a:xfrm>
-          <a:prstGeom prst="line">
-            <a:avLst/>
-          </a:prstGeom>
-          <a:ln w="19050">
-            <a:solidFill>
-              <a:srgbClr val="1F2937"/>
-            </a:solidFill>
-            <a:tailEnd type="triangle" w="med" len="med"/>
-          </a:ln>
-        </p:spPr>
-        <p:style>
-          <a:lnRef idx="2">
-            <a:schemeClr val="accent1"/>
-          </a:lnRef>
-          <a:fillRef idx="0">
-            <a:schemeClr val="accent1"/>
-          </a:fillRef>
-          <a:effectRef idx="1">
-            <a:schemeClr val="accent1"/>
-          </a:effectRef>
-          <a:fontRef idx="minor">
-            <a:schemeClr val="tx1"/>
-          </a:fontRef>
-        </p:style>
-      </p:cxnSp>
-      <p:cxnSp>
-        <p:nvCxnSpPr>
-          <p:cNvPr id="14" name="Connector 13"/>
-          <p:cNvCxnSpPr/>
-          <p:nvPr/>
-        </p:nvCxnSpPr>
-        <p:spPr>
-          <a:xfrm>
-            <a:off x="2377440" y="3383280"/>
-            <a:ext cx="347472" cy="0"/>
-          </a:xfrm>
-          <a:prstGeom prst="line">
-            <a:avLst/>
-          </a:prstGeom>
-          <a:ln w="19050">
-            <a:solidFill>
-              <a:srgbClr val="1F2937"/>
-            </a:solidFill>
-            <a:tailEnd type="triangle" w="med" len="med"/>
-          </a:ln>
-        </p:spPr>
-        <p:style>
-          <a:lnRef idx="2">
-            <a:schemeClr val="accent1"/>
-          </a:lnRef>
-          <a:fillRef idx="0">
-            <a:schemeClr val="accent1"/>
-          </a:fillRef>
-          <a:effectRef idx="1">
-            <a:schemeClr val="accent1"/>
-          </a:effectRef>
-          <a:fontRef idx="minor">
-            <a:schemeClr val="tx1"/>
-          </a:fontRef>
-        </p:style>
-      </p:cxnSp>
-      <p:cxnSp>
-        <p:nvCxnSpPr>
-          <p:cNvPr id="15" name="Connector 14"/>
-          <p:cNvCxnSpPr/>
-          <p:nvPr/>
-        </p:nvCxnSpPr>
-        <p:spPr>
-          <a:xfrm>
-            <a:off x="5120640" y="2651760"/>
-            <a:ext cx="438912" cy="0"/>
-          </a:xfrm>
-          <a:prstGeom prst="line">
-            <a:avLst/>
-          </a:prstGeom>
-          <a:ln w="19050">
-            <a:solidFill>
-              <a:srgbClr val="1F2937"/>
-            </a:solidFill>
-            <a:tailEnd type="triangle" w="med" len="med"/>
-          </a:ln>
-        </p:spPr>
-        <p:style>
-          <a:lnRef idx="2">
-            <a:schemeClr val="accent1"/>
-          </a:lnRef>
-          <a:fillRef idx="0">
-            <a:schemeClr val="accent1"/>
-          </a:fillRef>
-          <a:effectRef idx="1">
-            <a:schemeClr val="accent1"/>
-          </a:effectRef>
-          <a:fontRef idx="minor">
-            <a:schemeClr val="tx1"/>
-          </a:fontRef>
-        </p:style>
-      </p:cxnSp>
-      <p:cxnSp>
-        <p:nvCxnSpPr>
-          <p:cNvPr id="16" name="Connector 15"/>
-          <p:cNvCxnSpPr/>
-          <p:nvPr/>
-        </p:nvCxnSpPr>
-        <p:spPr>
-          <a:xfrm>
-            <a:off x="7863840" y="3108960"/>
-            <a:ext cx="438912" cy="0"/>
-          </a:xfrm>
-          <a:prstGeom prst="line">
-            <a:avLst/>
-          </a:prstGeom>
-          <a:ln w="19050">
-            <a:solidFill>
-              <a:srgbClr val="1F2937"/>
-            </a:solidFill>
-            <a:tailEnd type="triangle" w="med" len="med"/>
-          </a:ln>
-        </p:spPr>
-        <p:style>
-          <a:lnRef idx="2">
-            <a:schemeClr val="accent1"/>
-          </a:lnRef>
-          <a:fillRef idx="0">
-            <a:schemeClr val="accent1"/>
-          </a:fillRef>
-          <a:effectRef idx="1">
-            <a:schemeClr val="accent1"/>
-          </a:effectRef>
-          <a:fontRef idx="minor">
-            <a:schemeClr val="tx1"/>
-          </a:fontRef>
-        </p:style>
-      </p:cxnSp>
-      <p:sp>
-        <p:nvSpPr>
-          <p:cNvPr id="17" name="TextBox 16"/>
-          <p:cNvSpPr txBox="1"/>
-          <p:nvPr/>
-        </p:nvSpPr>
-        <p:spPr>
-          <a:xfrm>
-            <a:off x="548640" y="3977639"/>
-            <a:ext cx="11064240" cy="365760"/>
-          </a:xfrm>
-          <a:prstGeom prst="rect">
-            <a:avLst/>
-          </a:prstGeom>
-          <a:noFill/>
-        </p:spPr>
-        <p:txBody>
-          <a:bodyPr wrap="square" anchor="ctr">
-            <a:spAutoFit/>
-          </a:bodyPr>
-          <a:lstStyle/>
-          <a:p>
-            <a:pPr algn="ctr"/>
-            <a:r>
-              <a:rPr sz="1400" b="1" i="0">
-                <a:solidFill>
-                  <a:srgbClr val="F5F7F2"/>
-                </a:solidFill>
-                <a:latin typeface="Calibri"/>
-              </a:rPr>
-              <a:t>Ds Metadata Bridge (Rolling 10-Frame Average)</a:t>
-            </a:r>
-          </a:p>
-        </p:txBody>
-      </p:sp>
-      <p:sp>
-        <p:nvSpPr>
-          <p:cNvPr id="18" name="Rounded Rectangle 17"/>
-          <p:cNvSpPr/>
-          <p:nvPr/>
-        </p:nvSpPr>
-        <p:spPr>
-          <a:xfrm>
-            <a:off x="640080" y="4434840"/>
-            <a:ext cx="1554480" cy="914400"/>
-          </a:xfrm>
-          <a:prstGeom prst="roundRect">
-            <a:avLst>
-              <a:gd name="adj" fmla="val 10000"/>
-            </a:avLst>
-          </a:prstGeom>
-          <a:solidFill>
-            <a:srgbClr val="E4ECD4"/>
-          </a:solidFill>
-          <a:ln w="19050">
-            <a:solidFill>
-              <a:srgbClr val="1B7A6E"/>
-            </a:solidFill>
-          </a:ln>
-        </p:spPr>
-        <p:style>
-          <a:lnRef idx="1">
-            <a:schemeClr val="accent1"/>
-          </a:lnRef>
-          <a:fillRef idx="3">
-            <a:schemeClr val="accent1"/>
-          </a:fillRef>
-          <a:effectRef idx="2">
-            <a:schemeClr val="accent1"/>
-          </a:effectRef>
-          <a:fontRef idx="minor">
-            <a:schemeClr val="lt1"/>
-          </a:fontRef>
-        </p:style>
-        <p:txBody>
-          <a:bodyPr wrap="square" rtlCol="0" anchor="ctr">
-            <a:normAutofit/>
-          </a:bodyPr>
-          <a:lstStyle/>
-          <a:p>
-            <a:pPr algn="ctr"/>
-            <a:r>
-              <a:rPr sz="1100" b="0" i="0" dirty="0">
-                <a:solidFill>
-                  <a:schemeClr val="tx1"/>
-                </a:solidFill>
-                <a:latin typeface="Calibri"/>
-              </a:rPr>
-              <a:t>YOLO Output:
-Class, Conf., Box</a:t>
-            </a:r>
-          </a:p>
-        </p:txBody>
-      </p:sp>
-      <p:sp>
-        <p:nvSpPr>
-          <p:cNvPr id="19" name="Rounded Rectangle 18"/>
-          <p:cNvSpPr/>
-          <p:nvPr/>
-        </p:nvSpPr>
-        <p:spPr>
-          <a:xfrm>
-            <a:off x="2404872" y="4434840"/>
-            <a:ext cx="1554480" cy="914400"/>
-          </a:xfrm>
-          <a:prstGeom prst="roundRect">
-            <a:avLst>
-              <a:gd name="adj" fmla="val 10000"/>
-            </a:avLst>
-          </a:prstGeom>
-          <a:solidFill>
-            <a:srgbClr val="E4ECD4"/>
-          </a:solidFill>
-          <a:ln w="19050">
-            <a:solidFill>
-              <a:srgbClr val="1B7A6E"/>
-            </a:solidFill>
-          </a:ln>
-        </p:spPr>
-        <p:style>
-          <a:lnRef idx="1">
-            <a:schemeClr val="accent1"/>
-          </a:lnRef>
-          <a:fillRef idx="3">
-            <a:schemeClr val="accent1"/>
-          </a:fillRef>
-          <a:effectRef idx="2">
-            <a:schemeClr val="accent1"/>
-          </a:effectRef>
-          <a:fontRef idx="minor">
-            <a:schemeClr val="lt1"/>
-          </a:fontRef>
-        </p:style>
-        <p:txBody>
-          <a:bodyPr wrap="square" rtlCol="0" anchor="ctr">
-            <a:normAutofit/>
-          </a:bodyPr>
-          <a:lstStyle/>
-          <a:p>
-            <a:pPr algn="ctr"/>
-            <a:r>
-              <a:rPr sz="1100" b="0" i="0" dirty="0">
-                <a:solidFill>
-                  <a:schemeClr val="tx1"/>
-                </a:solidFill>
-                <a:latin typeface="Calibri"/>
-              </a:rPr>
-              <a:t>Per-Defect
-Area</a:t>
-            </a:r>
-          </a:p>
-        </p:txBody>
-      </p:sp>
-      <p:cxnSp>
-        <p:nvCxnSpPr>
-          <p:cNvPr id="20" name="Connector 19"/>
-          <p:cNvCxnSpPr/>
-          <p:nvPr/>
-        </p:nvCxnSpPr>
-        <p:spPr>
-          <a:xfrm>
-            <a:off x="2212848" y="4892040"/>
-            <a:ext cx="201167" cy="0"/>
-          </a:xfrm>
-          <a:prstGeom prst="line">
-            <a:avLst/>
-          </a:prstGeom>
-          <a:ln w="19050">
-            <a:solidFill>
-              <a:srgbClr val="1F2937"/>
-            </a:solidFill>
-            <a:tailEnd type="triangle" w="med" len="med"/>
-          </a:ln>
-        </p:spPr>
-        <p:style>
-          <a:lnRef idx="2">
-            <a:schemeClr val="accent1"/>
-          </a:lnRef>
-          <a:fillRef idx="0">
-            <a:schemeClr val="accent1"/>
-          </a:fillRef>
-          <a:effectRef idx="1">
-            <a:schemeClr val="accent1"/>
-          </a:effectRef>
-          <a:fontRef idx="minor">
-            <a:schemeClr val="tx1"/>
-          </a:fontRef>
-        </p:style>
-      </p:cxnSp>
-      <p:sp>
-        <p:nvSpPr>
-          <p:cNvPr id="21" name="Rounded Rectangle 20"/>
-          <p:cNvSpPr/>
-          <p:nvPr/>
-        </p:nvSpPr>
-        <p:spPr>
-          <a:xfrm>
-            <a:off x="4169663" y="4434840"/>
-            <a:ext cx="1554480" cy="914400"/>
-          </a:xfrm>
-          <a:prstGeom prst="roundRect">
-            <a:avLst>
-              <a:gd name="adj" fmla="val 10000"/>
-            </a:avLst>
-          </a:prstGeom>
-          <a:solidFill>
-            <a:srgbClr val="E4ECD4"/>
-          </a:solidFill>
-          <a:ln w="19050">
-            <a:solidFill>
-              <a:srgbClr val="1B7A6E"/>
-            </a:solidFill>
-          </a:ln>
-        </p:spPr>
-        <p:style>
-          <a:lnRef idx="1">
-            <a:schemeClr val="accent1"/>
-          </a:lnRef>
-          <a:fillRef idx="3">
-            <a:schemeClr val="accent1"/>
-          </a:fillRef>
-          <a:effectRef idx="2">
-            <a:schemeClr val="accent1"/>
-          </a:effectRef>
-          <a:fontRef idx="minor">
-            <a:schemeClr val="lt1"/>
-          </a:fontRef>
-        </p:style>
-        <p:txBody>
-          <a:bodyPr wrap="square" rtlCol="0" anchor="ctr">
-            <a:normAutofit/>
-          </a:bodyPr>
-          <a:lstStyle/>
-          <a:p>
-            <a:pPr algn="ctr"/>
-            <a:r>
-              <a:rPr sz="1100" b="0" i="0" dirty="0">
-                <a:solidFill>
-                  <a:schemeClr val="tx1"/>
-                </a:solidFill>
-                <a:latin typeface="Calibri"/>
-              </a:rPr>
-              <a:t>Sum Defect
-Area</a:t>
-            </a:r>
-          </a:p>
-        </p:txBody>
-      </p:sp>
-      <p:cxnSp>
-        <p:nvCxnSpPr>
-          <p:cNvPr id="22" name="Connector 21"/>
-          <p:cNvCxnSpPr/>
-          <p:nvPr/>
-        </p:nvCxnSpPr>
-        <p:spPr>
-          <a:xfrm>
-            <a:off x="3977639" y="4892040"/>
-            <a:ext cx="201168" cy="0"/>
-          </a:xfrm>
-          <a:prstGeom prst="line">
-            <a:avLst/>
-          </a:prstGeom>
-          <a:ln w="19050">
-            <a:solidFill>
-              <a:srgbClr val="1F2937"/>
-            </a:solidFill>
-            <a:tailEnd type="triangle" w="med" len="med"/>
-          </a:ln>
-        </p:spPr>
-        <p:style>
-          <a:lnRef idx="2">
-            <a:schemeClr val="accent1"/>
-          </a:lnRef>
-          <a:fillRef idx="0">
-            <a:schemeClr val="accent1"/>
-          </a:fillRef>
-          <a:effectRef idx="1">
-            <a:schemeClr val="accent1"/>
-          </a:effectRef>
-          <a:fontRef idx="minor">
-            <a:schemeClr val="tx1"/>
-          </a:fontRef>
-        </p:style>
-      </p:cxnSp>
-      <p:sp>
-        <p:nvSpPr>
-          <p:cNvPr id="23" name="Rounded Rectangle 22"/>
-          <p:cNvSpPr/>
-          <p:nvPr/>
-        </p:nvSpPr>
-        <p:spPr>
-          <a:xfrm>
-            <a:off x="5934456" y="4434840"/>
-            <a:ext cx="1554480" cy="914400"/>
-          </a:xfrm>
-          <a:prstGeom prst="roundRect">
-            <a:avLst>
-              <a:gd name="adj" fmla="val 10000"/>
-            </a:avLst>
-          </a:prstGeom>
-          <a:solidFill>
-            <a:srgbClr val="E4ECD4"/>
-          </a:solidFill>
-          <a:ln w="19050">
-            <a:solidFill>
-              <a:srgbClr val="1B7A6E"/>
-            </a:solidFill>
-          </a:ln>
-        </p:spPr>
-        <p:style>
-          <a:lnRef idx="1">
-            <a:schemeClr val="accent1"/>
-          </a:lnRef>
-          <a:fillRef idx="3">
-            <a:schemeClr val="accent1"/>
-          </a:fillRef>
-          <a:effectRef idx="2">
-            <a:schemeClr val="accent1"/>
-          </a:effectRef>
-          <a:fontRef idx="minor">
-            <a:schemeClr val="lt1"/>
-          </a:fontRef>
-        </p:style>
-        <p:txBody>
-          <a:bodyPr wrap="square" rtlCol="0" anchor="ctr">
-            <a:normAutofit/>
-          </a:bodyPr>
-          <a:lstStyle/>
-          <a:p>
-            <a:pPr algn="ctr"/>
-            <a:r>
-              <a:rPr sz="1100" b="0" i="0" dirty="0">
-                <a:solidFill>
-                  <a:schemeClr val="tx1"/>
-                </a:solidFill>
-                <a:latin typeface="Calibri"/>
-              </a:rPr>
-              <a:t>Ds =
-Defect / Frame</a:t>
-            </a:r>
-          </a:p>
-        </p:txBody>
-      </p:sp>
-      <p:cxnSp>
-        <p:nvCxnSpPr>
-          <p:cNvPr id="24" name="Connector 23"/>
-          <p:cNvCxnSpPr/>
-          <p:nvPr/>
-        </p:nvCxnSpPr>
-        <p:spPr>
-          <a:xfrm>
-            <a:off x="5742432" y="4892040"/>
-            <a:ext cx="201168" cy="0"/>
-          </a:xfrm>
-          <a:prstGeom prst="line">
-            <a:avLst/>
-          </a:prstGeom>
-          <a:ln w="19050">
-            <a:solidFill>
-              <a:srgbClr val="1F2937"/>
-            </a:solidFill>
-            <a:tailEnd type="triangle" w="med" len="med"/>
-          </a:ln>
-        </p:spPr>
-        <p:style>
-          <a:lnRef idx="2">
-            <a:schemeClr val="accent1"/>
-          </a:lnRef>
-          <a:fillRef idx="0">
-            <a:schemeClr val="accent1"/>
-          </a:fillRef>
-          <a:effectRef idx="1">
-            <a:schemeClr val="accent1"/>
-          </a:effectRef>
-          <a:fontRef idx="minor">
-            <a:schemeClr val="tx1"/>
-          </a:fontRef>
-        </p:style>
-      </p:cxnSp>
-      <p:sp>
-        <p:nvSpPr>
-          <p:cNvPr id="25" name="Rounded Rectangle 24"/>
-          <p:cNvSpPr/>
-          <p:nvPr/>
-        </p:nvSpPr>
-        <p:spPr>
-          <a:xfrm>
-            <a:off x="7699248" y="4434840"/>
-            <a:ext cx="1554480" cy="914400"/>
-          </a:xfrm>
-          <a:prstGeom prst="roundRect">
-            <a:avLst>
-              <a:gd name="adj" fmla="val 10000"/>
-            </a:avLst>
-          </a:prstGeom>
-          <a:solidFill>
-            <a:srgbClr val="E4ECD4"/>
-          </a:solidFill>
-          <a:ln w="19050">
-            <a:solidFill>
-              <a:srgbClr val="1B7A6E"/>
-            </a:solidFill>
-          </a:ln>
-        </p:spPr>
-        <p:style>
-          <a:lnRef idx="1">
-            <a:schemeClr val="accent1"/>
-          </a:lnRef>
-          <a:fillRef idx="3">
-            <a:schemeClr val="accent1"/>
-          </a:fillRef>
-          <a:effectRef idx="2">
-            <a:schemeClr val="accent1"/>
-          </a:effectRef>
-          <a:fontRef idx="minor">
-            <a:schemeClr val="lt1"/>
-          </a:fontRef>
-        </p:style>
-        <p:txBody>
-          <a:bodyPr wrap="square" rtlCol="0" anchor="ctr">
-            <a:normAutofit/>
-          </a:bodyPr>
-          <a:lstStyle/>
-          <a:p>
-            <a:pPr algn="ctr"/>
-            <a:r>
-              <a:rPr sz="1100" b="0" i="0" dirty="0">
-                <a:solidFill>
-                  <a:schemeClr val="tx1"/>
-                </a:solidFill>
-                <a:latin typeface="Calibri"/>
-              </a:rPr>
-              <a:t>Rolling Avg.
-Last 10 Frames</a:t>
-            </a:r>
-          </a:p>
-        </p:txBody>
-      </p:sp>
-      <p:cxnSp>
-        <p:nvCxnSpPr>
-          <p:cNvPr id="26" name="Connector 25"/>
-          <p:cNvCxnSpPr/>
-          <p:nvPr/>
-        </p:nvCxnSpPr>
-        <p:spPr>
-          <a:xfrm>
-            <a:off x="7507223" y="4892040"/>
-            <a:ext cx="201169" cy="0"/>
-          </a:xfrm>
-          <a:prstGeom prst="line">
-            <a:avLst/>
-          </a:prstGeom>
-          <a:ln w="19050">
-            <a:solidFill>
-              <a:srgbClr val="1F2937"/>
-            </a:solidFill>
-            <a:tailEnd type="triangle" w="med" len="med"/>
-          </a:ln>
-        </p:spPr>
-        <p:style>
-          <a:lnRef idx="2">
-            <a:schemeClr val="accent1"/>
-          </a:lnRef>
-          <a:fillRef idx="0">
-            <a:schemeClr val="accent1"/>
-          </a:fillRef>
-          <a:effectRef idx="1">
-            <a:schemeClr val="accent1"/>
-          </a:effectRef>
-          <a:fontRef idx="minor">
-            <a:schemeClr val="tx1"/>
-          </a:fontRef>
-        </p:style>
-      </p:cxnSp>
-      <p:sp>
-        <p:nvSpPr>
-          <p:cNvPr id="27" name="Rounded Rectangle 26"/>
-          <p:cNvSpPr/>
-          <p:nvPr/>
-        </p:nvSpPr>
-        <p:spPr>
-          <a:xfrm>
-            <a:off x="9464040" y="4434840"/>
-            <a:ext cx="1554480" cy="914400"/>
-          </a:xfrm>
-          <a:prstGeom prst="roundRect">
-            <a:avLst>
-              <a:gd name="adj" fmla="val 10000"/>
-            </a:avLst>
-          </a:prstGeom>
-          <a:solidFill>
-            <a:srgbClr val="E4ECD4"/>
-          </a:solidFill>
-          <a:ln w="19050">
-            <a:solidFill>
-              <a:srgbClr val="1B7A6E"/>
-            </a:solidFill>
-          </a:ln>
-        </p:spPr>
-        <p:style>
-          <a:lnRef idx="1">
-            <a:schemeClr val="accent1"/>
-          </a:lnRef>
-          <a:fillRef idx="3">
-            <a:schemeClr val="accent1"/>
-          </a:fillRef>
-          <a:effectRef idx="2">
-            <a:schemeClr val="accent1"/>
-          </a:effectRef>
-          <a:fontRef idx="minor">
-            <a:schemeClr val="lt1"/>
-          </a:fontRef>
-        </p:style>
-        <p:txBody>
-          <a:bodyPr wrap="square" rtlCol="0" anchor="ctr">
-            <a:normAutofit/>
-          </a:bodyPr>
-          <a:lstStyle/>
-          <a:p>
-            <a:pPr algn="ctr"/>
-            <a:r>
-              <a:rPr sz="1100" b="0" i="0" dirty="0">
-                <a:solidFill>
-                  <a:schemeClr val="tx1"/>
-                </a:solidFill>
-                <a:latin typeface="Calibri"/>
-              </a:rPr>
-              <a:t>Predictor
-Input</a:t>
-            </a:r>
-          </a:p>
-        </p:txBody>
-      </p:sp>
-      <p:cxnSp>
-        <p:nvCxnSpPr>
-          <p:cNvPr id="28" name="Connector 27"/>
-          <p:cNvCxnSpPr/>
-          <p:nvPr/>
-        </p:nvCxnSpPr>
-        <p:spPr>
-          <a:xfrm>
-            <a:off x="9272015" y="4892040"/>
-            <a:ext cx="201169" cy="0"/>
-          </a:xfrm>
-          <a:prstGeom prst="line">
-            <a:avLst/>
-          </a:prstGeom>
-          <a:ln w="19050">
-            <a:solidFill>
-              <a:srgbClr val="1F2937"/>
-            </a:solidFill>
-            <a:tailEnd type="triangle" w="med" len="med"/>
-          </a:ln>
-        </p:spPr>
-        <p:style>
-          <a:lnRef idx="2">
-            <a:schemeClr val="accent1"/>
-          </a:lnRef>
-          <a:fillRef idx="0">
-            <a:schemeClr val="accent1"/>
-          </a:fillRef>
-          <a:effectRef idx="1">
-            <a:schemeClr val="accent1"/>
-          </a:effectRef>
-          <a:fontRef idx="minor">
-            <a:schemeClr val="tx1"/>
-          </a:fontRef>
-        </p:style>
-      </p:cxnSp>
-      <p:sp>
-        <p:nvSpPr>
-          <p:cNvPr id="29" name="Rounded Rectangle 28"/>
-          <p:cNvSpPr/>
-          <p:nvPr/>
-        </p:nvSpPr>
-        <p:spPr>
-          <a:xfrm>
-            <a:off x="5934456" y="5486400"/>
-            <a:ext cx="1554480" cy="658368"/>
-          </a:xfrm>
-          <a:prstGeom prst="roundRect">
-            <a:avLst>
-              <a:gd name="adj" fmla="val 10000"/>
-            </a:avLst>
-          </a:prstGeom>
-          <a:solidFill>
-            <a:srgbClr val="E4ECD4"/>
-          </a:solidFill>
-          <a:ln w="19050">
-            <a:solidFill>
-              <a:srgbClr val="1B7A6E"/>
-            </a:solidFill>
-          </a:ln>
-        </p:spPr>
-        <p:style>
-          <a:lnRef idx="1">
-            <a:schemeClr val="accent1"/>
-          </a:lnRef>
-          <a:fillRef idx="3">
-            <a:schemeClr val="accent1"/>
-          </a:fillRef>
-          <a:effectRef idx="2">
-            <a:schemeClr val="accent1"/>
-          </a:effectRef>
-          <a:fontRef idx="minor">
-            <a:schemeClr val="lt1"/>
-          </a:fontRef>
-        </p:style>
-        <p:txBody>
-          <a:bodyPr wrap="square" rtlCol="0" anchor="ctr">
-            <a:normAutofit/>
-          </a:bodyPr>
-          <a:lstStyle/>
-          <a:p>
-            <a:pPr algn="ctr"/>
-            <a:r>
-              <a:rPr sz="1100" b="0" i="0" dirty="0">
-                <a:solidFill>
-                  <a:schemeClr val="tx1"/>
-                </a:solidFill>
-                <a:latin typeface="Calibri"/>
-              </a:rPr>
-              <a:t>Frame Area
-H × W</a:t>
-            </a:r>
-          </a:p>
-        </p:txBody>
-      </p:sp>
-      <p:cxnSp>
-        <p:nvCxnSpPr>
-          <p:cNvPr id="30" name="Connector 29"/>
-          <p:cNvCxnSpPr/>
-          <p:nvPr/>
-        </p:nvCxnSpPr>
-        <p:spPr>
-          <a:xfrm flipV="1">
-            <a:off x="6711696" y="5367528"/>
-            <a:ext cx="0" cy="100584"/>
-          </a:xfrm>
-          <a:prstGeom prst="line">
-            <a:avLst/>
-          </a:prstGeom>
-          <a:ln w="19050">
-            <a:solidFill>
-              <a:srgbClr val="1F2937"/>
-            </a:solidFill>
-            <a:tailEnd type="triangle" w="med" len="med"/>
-          </a:ln>
-        </p:spPr>
-        <p:style>
-          <a:lnRef idx="2">
-            <a:schemeClr val="accent1"/>
-          </a:lnRef>
-          <a:fillRef idx="0">
-            <a:schemeClr val="accent1"/>
-          </a:fillRef>
-          <a:effectRef idx="1">
-            <a:schemeClr val="accent1"/>
-          </a:effectRef>
-          <a:fontRef idx="minor">
-            <a:schemeClr val="tx1"/>
-          </a:fontRef>
-        </p:style>
-      </p:cxnSp>
-    </p:spTree>
-  </p:cSld>
-  <p:clrMapOvr>
-    <a:masterClrMapping/>
-  </p:clrMapOvr>
-</p:sld>
-</file>
-
-<file path=ppt/slides/slide29.xml><?xml version="1.0" encoding="utf-8"?>
-<p:sld xmlns:a="http://schemas.openxmlformats.org/drawingml/2006/main" xmlns:r="http://schemas.openxmlformats.org/officeDocument/2006/relationships" xmlns:p="http://schemas.openxmlformats.org/presentationml/2006/main">
-  <p:cSld>
-    <p:bg>
-      <p:bgPr>
-        <a:solidFill>
-          <a:srgbClr val="085859"/>
-        </a:solidFill>
-        <a:effectLst/>
-      </p:bgPr>
-    </p:bg>
-    <p:spTree>
-      <p:nvGrpSpPr>
-        <p:cNvPr id="1" name=""/>
-        <p:cNvGrpSpPr/>
-        <p:nvPr/>
-      </p:nvGrpSpPr>
-      <p:grpSpPr>
-        <a:xfrm>
-          <a:off x="0" y="0"/>
-          <a:ext cx="0" cy="0"/>
-          <a:chOff x="0" y="0"/>
-          <a:chExt cx="0" cy="0"/>
-        </a:xfrm>
-      </p:grpSpPr>
-      <p:sp>
-        <p:nvSpPr>
-          <p:cNvPr id="2" name="TextBox 1"/>
-          <p:cNvSpPr txBox="1"/>
-          <p:nvPr/>
-        </p:nvSpPr>
-        <p:spPr>
-          <a:xfrm>
-            <a:off x="548640" y="6419088"/>
-            <a:ext cx="9144000" cy="274320"/>
-          </a:xfrm>
-          <a:prstGeom prst="rect">
-            <a:avLst/>
-          </a:prstGeom>
-          <a:noFill/>
-        </p:spPr>
-        <p:txBody>
-          <a:bodyPr wrap="square">
-            <a:spAutoFit/>
-          </a:bodyPr>
-          <a:lstStyle/>
-          <a:p>
-            <a:pPr algn="l"/>
-            <a:r>
-              <a:rPr sz="900" b="0" i="0">
-                <a:solidFill>
-                  <a:srgbClr val="F5F7F2"/>
-                </a:solidFill>
-                <a:latin typeface="Calibri"/>
-              </a:rPr>
-              <a:t>Defect-to-Delivery  |  FYDP-I  •  Group: 262-034</a:t>
-            </a:r>
-          </a:p>
-        </p:txBody>
-      </p:sp>
-      <p:sp>
-        <p:nvSpPr>
-          <p:cNvPr id="3" name="TextBox 2"/>
-          <p:cNvSpPr txBox="1"/>
-          <p:nvPr/>
-        </p:nvSpPr>
-        <p:spPr>
-          <a:xfrm>
-            <a:off x="10972800" y="6419088"/>
-            <a:ext cx="640080" cy="274320"/>
-          </a:xfrm>
-          <a:prstGeom prst="rect">
-            <a:avLst/>
-          </a:prstGeom>
-          <a:noFill/>
-        </p:spPr>
-        <p:txBody>
-          <a:bodyPr wrap="none">
-            <a:spAutoFit/>
-          </a:bodyPr>
-          <a:lstStyle/>
-          <a:p>
-            <a:pPr algn="r"/>
-            <a:r>
-              <a:rPr sz="900">
-                <a:solidFill>
-                  <a:srgbClr val="F5F7F2"/>
-                </a:solidFill>
-                <a:latin typeface="Calibri"/>
-              </a:rPr>
-              <a:t>21 / 30</a:t>
-            </a:r>
-          </a:p>
-        </p:txBody>
-      </p:sp>
-      <p:sp>
-        <p:nvSpPr>
-          <p:cNvPr id="5" name="TextBox 4"/>
-          <p:cNvSpPr txBox="1"/>
-          <p:nvPr/>
-        </p:nvSpPr>
-        <p:spPr>
-          <a:xfrm>
-            <a:off x="548640" y="320040"/>
-            <a:ext cx="11064240" cy="822960"/>
-          </a:xfrm>
-          <a:prstGeom prst="rect">
-            <a:avLst/>
-          </a:prstGeom>
-          <a:noFill/>
-        </p:spPr>
-        <p:txBody>
-          <a:bodyPr wrap="square">
-            <a:spAutoFit/>
-          </a:bodyPr>
-          <a:lstStyle/>
-          <a:p>
-            <a:pPr algn="l"/>
-            <a:r>
-              <a:rPr sz="3400" b="1" i="0">
-                <a:solidFill>
-                  <a:srgbClr val="F5F7F2"/>
-                </a:solidFill>
-                <a:latin typeface="Georgia"/>
-              </a:rPr>
-              <a:t>Lead-Time ML Pipeline (Fig. 3.5)</a:t>
-            </a:r>
-          </a:p>
-        </p:txBody>
-      </p:sp>
-      <p:sp>
-        <p:nvSpPr>
-          <p:cNvPr id="7" name="Rounded Rectangle 6"/>
-          <p:cNvSpPr/>
-          <p:nvPr/>
-        </p:nvSpPr>
-        <p:spPr>
-          <a:xfrm>
-            <a:off x="640080" y="1554480"/>
-            <a:ext cx="1920240" cy="868680"/>
-          </a:xfrm>
-          <a:prstGeom prst="roundRect">
-            <a:avLst>
-              <a:gd name="adj" fmla="val 10000"/>
-            </a:avLst>
-          </a:prstGeom>
-          <a:solidFill>
-            <a:srgbClr val="FFFFFF"/>
-          </a:solidFill>
-          <a:ln w="19050">
-            <a:solidFill>
-              <a:srgbClr val="1B7A6E"/>
-            </a:solidFill>
-          </a:ln>
-        </p:spPr>
-        <p:style>
-          <a:lnRef idx="1">
-            <a:schemeClr val="accent1"/>
-          </a:lnRef>
-          <a:fillRef idx="3">
-            <a:schemeClr val="accent1"/>
-          </a:fillRef>
-          <a:effectRef idx="2">
-            <a:schemeClr val="accent1"/>
-          </a:effectRef>
-          <a:fontRef idx="minor">
-            <a:schemeClr val="lt1"/>
-          </a:fontRef>
-        </p:style>
-        <p:txBody>
-          <a:bodyPr wrap="square" rtlCol="0" anchor="ctr">
-            <a:normAutofit/>
-          </a:bodyPr>
-          <a:lstStyle/>
-          <a:p>
-            <a:r>
-              <a:t>Machine Speed</a:t>
-            </a:r>
-          </a:p>
-          <a:p>
-            <a:r>
-              <a:t>(From Plant Records)</a:t>
-            </a:r>
-          </a:p>
-        </p:txBody>
-      </p:sp>
-      <p:sp>
-        <p:nvSpPr>
-          <p:cNvPr id="8" name="Rounded Rectangle 7"/>
-          <p:cNvSpPr/>
-          <p:nvPr/>
-        </p:nvSpPr>
-        <p:spPr>
-          <a:xfrm>
-            <a:off x="640080" y="2606040"/>
-            <a:ext cx="1920240" cy="868680"/>
-          </a:xfrm>
-          <a:prstGeom prst="roundRect">
-            <a:avLst>
-              <a:gd name="adj" fmla="val 10000"/>
-            </a:avLst>
-          </a:prstGeom>
-          <a:solidFill>
-            <a:srgbClr val="FFFFFF"/>
-          </a:solidFill>
-          <a:ln w="19050">
-            <a:solidFill>
-              <a:srgbClr val="1B7A6E"/>
-            </a:solidFill>
-          </a:ln>
-        </p:spPr>
-        <p:style>
-          <a:lnRef idx="1">
-            <a:schemeClr val="accent1"/>
-          </a:lnRef>
-          <a:fillRef idx="3">
-            <a:schemeClr val="accent1"/>
-          </a:fillRef>
-          <a:effectRef idx="2">
-            <a:schemeClr val="accent1"/>
-          </a:effectRef>
-          <a:fontRef idx="minor">
-            <a:schemeClr val="lt1"/>
-          </a:fontRef>
-        </p:style>
-        <p:txBody>
-          <a:bodyPr wrap="square" rtlCol="0" anchor="ctr">
-            <a:normAutofit/>
-          </a:bodyPr>
-          <a:lstStyle/>
-          <a:p>
-            <a:r>
-              <a:t>Order Quantity</a:t>
-            </a:r>
-          </a:p>
-          <a:p>
-            <a:r>
-              <a:t>(From Order Records)</a:t>
-            </a:r>
-          </a:p>
-        </p:txBody>
-      </p:sp>
-      <p:sp>
-        <p:nvSpPr>
-          <p:cNvPr id="9" name="Rounded Rectangle 8"/>
-          <p:cNvSpPr/>
-          <p:nvPr/>
-        </p:nvSpPr>
-        <p:spPr>
-          <a:xfrm>
-            <a:off x="640080" y="3657600"/>
-            <a:ext cx="1920240" cy="868680"/>
-          </a:xfrm>
-          <a:prstGeom prst="roundRect">
-            <a:avLst>
-              <a:gd name="adj" fmla="val 10000"/>
-            </a:avLst>
-          </a:prstGeom>
-          <a:solidFill>
-            <a:srgbClr val="FFFFFF"/>
-          </a:solidFill>
-          <a:ln w="19050">
-            <a:solidFill>
-              <a:srgbClr val="1B7A6E"/>
-            </a:solidFill>
-          </a:ln>
-        </p:spPr>
-        <p:style>
-          <a:lnRef idx="1">
-            <a:schemeClr val="accent1"/>
-          </a:lnRef>
-          <a:fillRef idx="3">
-            <a:schemeClr val="accent1"/>
-          </a:fillRef>
-          <a:effectRef idx="2">
-            <a:schemeClr val="accent1"/>
-          </a:effectRef>
-          <a:fontRef idx="minor">
-            <a:schemeClr val="lt1"/>
-          </a:fontRef>
-        </p:style>
-        <p:txBody>
-          <a:bodyPr wrap="square" rtlCol="0" anchor="ctr">
-            <a:normAutofit/>
-          </a:bodyPr>
-          <a:lstStyle/>
-          <a:p>
-            <a:r>
-              <a:t>Defect Density Ds</a:t>
-            </a:r>
-          </a:p>
-          <a:p>
-            <a:r>
-              <a:t>(Ratio)</a:t>
-            </a:r>
-          </a:p>
-        </p:txBody>
-      </p:sp>
-      <p:sp>
-        <p:nvSpPr>
-          <p:cNvPr id="10" name="Rounded Rectangle 9"/>
-          <p:cNvSpPr/>
-          <p:nvPr/>
-        </p:nvSpPr>
-        <p:spPr>
-          <a:xfrm>
-            <a:off x="3108960" y="2377440"/>
-            <a:ext cx="2194560" cy="1188720"/>
-          </a:xfrm>
-          <a:prstGeom prst="roundRect">
-            <a:avLst>
-              <a:gd name="adj" fmla="val 10000"/>
-            </a:avLst>
-          </a:prstGeom>
-          <a:solidFill>
-            <a:srgbClr val="FFFFFF"/>
-          </a:solidFill>
-          <a:ln w="19050">
-            <a:solidFill>
-              <a:srgbClr val="1B7A6E"/>
-            </a:solidFill>
-          </a:ln>
-        </p:spPr>
-        <p:style>
-          <a:lnRef idx="1">
-            <a:schemeClr val="accent1"/>
-          </a:lnRef>
-          <a:fillRef idx="3">
-            <a:schemeClr val="accent1"/>
-          </a:fillRef>
-          <a:effectRef idx="2">
-            <a:schemeClr val="accent1"/>
-          </a:effectRef>
-          <a:fontRef idx="minor">
-            <a:schemeClr val="lt1"/>
-          </a:fontRef>
-        </p:style>
-        <p:txBody>
-          <a:bodyPr wrap="square" rtlCol="0" anchor="ctr">
-            <a:normAutofit/>
-          </a:bodyPr>
-          <a:lstStyle/>
-          <a:p>
-            <a:r>
-              <a:t>Random Forest</a:t>
-            </a:r>
-          </a:p>
-          <a:p>
-            <a:r>
-              <a:t>Regression</a:t>
-            </a:r>
-          </a:p>
-        </p:txBody>
-      </p:sp>
-      <p:sp>
-        <p:nvSpPr>
-          <p:cNvPr id="11" name="Rounded Rectangle 10"/>
-          <p:cNvSpPr/>
-          <p:nvPr/>
-        </p:nvSpPr>
-        <p:spPr>
-          <a:xfrm>
-            <a:off x="5852160" y="2377440"/>
-            <a:ext cx="2011680" cy="1188720"/>
-          </a:xfrm>
-          <a:prstGeom prst="roundRect">
-            <a:avLst>
-              <a:gd name="adj" fmla="val 10000"/>
-            </a:avLst>
-          </a:prstGeom>
-          <a:solidFill>
-            <a:srgbClr val="FFFFFF"/>
-          </a:solidFill>
-          <a:ln w="19050">
-            <a:solidFill>
-              <a:srgbClr val="1B7A6E"/>
-            </a:solidFill>
-          </a:ln>
-        </p:spPr>
-        <p:style>
-          <a:lnRef idx="1">
-            <a:schemeClr val="accent1"/>
-          </a:lnRef>
-          <a:fillRef idx="3">
-            <a:schemeClr val="accent1"/>
-          </a:fillRef>
-          <a:effectRef idx="2">
-            <a:schemeClr val="accent1"/>
-          </a:effectRef>
-          <a:fontRef idx="minor">
-            <a:schemeClr val="lt1"/>
-          </a:fontRef>
-        </p:style>
-        <p:txBody>
-          <a:bodyPr wrap="square" rtlCol="0" anchor="ctr">
-            <a:normAutofit/>
-          </a:bodyPr>
-          <a:lstStyle/>
-          <a:p>
-            <a:pPr algn="ctr"/>
-            <a:r>
-              <a:rPr sz="1250" b="0" i="0" dirty="0">
-                <a:solidFill>
-                  <a:schemeClr val="tx1"/>
-                </a:solidFill>
-                <a:latin typeface="Calibri"/>
-              </a:rPr>
-              <a:t>Lead Time
-Hours</a:t>
-            </a:r>
-          </a:p>
-        </p:txBody>
-      </p:sp>
-      <p:sp>
-        <p:nvSpPr>
-          <p:cNvPr id="12" name="Rounded Rectangle 11"/>
-          <p:cNvSpPr/>
-          <p:nvPr/>
-        </p:nvSpPr>
-        <p:spPr>
-          <a:xfrm>
-            <a:off x="8412480" y="2377440"/>
-            <a:ext cx="2743200" cy="1188720"/>
-          </a:xfrm>
-          <a:prstGeom prst="roundRect">
-            <a:avLst>
-              <a:gd name="adj" fmla="val 10000"/>
-            </a:avLst>
-          </a:prstGeom>
-          <a:solidFill>
-            <a:srgbClr val="FFFFFF"/>
-          </a:solidFill>
-          <a:ln w="19050">
-            <a:solidFill>
-              <a:srgbClr val="1B7A6E"/>
-            </a:solidFill>
-          </a:ln>
-        </p:spPr>
-        <p:style>
-          <a:lnRef idx="1">
-            <a:schemeClr val="accent1"/>
-          </a:lnRef>
-          <a:fillRef idx="3">
-            <a:schemeClr val="accent1"/>
-          </a:fillRef>
-          <a:effectRef idx="2">
-            <a:schemeClr val="accent1"/>
-          </a:effectRef>
-          <a:fontRef idx="minor">
-            <a:schemeClr val="lt1"/>
-          </a:fontRef>
-        </p:style>
-        <p:txBody>
-          <a:bodyPr wrap="square" rtlCol="0" anchor="ctr">
-            <a:normAutofit/>
-          </a:bodyPr>
-          <a:lstStyle/>
-          <a:p>
-            <a:pPr algn="ctr"/>
-            <a:r>
-              <a:rPr sz="1250" b="0" i="0" dirty="0">
-                <a:solidFill>
-                  <a:schemeClr val="tx1"/>
-                </a:solidFill>
-                <a:latin typeface="Calibri"/>
-              </a:rPr>
-              <a:t>MAE / RMSE / R²
-Vs Static + No-Ds</a:t>
-            </a:r>
-          </a:p>
-        </p:txBody>
-      </p:sp>
-      <p:cxnSp>
-        <p:nvCxnSpPr>
-          <p:cNvPr id="13" name="Connector 12"/>
-          <p:cNvCxnSpPr/>
-          <p:nvPr/>
-        </p:nvCxnSpPr>
-        <p:spPr>
-          <a:xfrm>
-            <a:off x="2578608" y="1984248"/>
-            <a:ext cx="512064" cy="667512"/>
-          </a:xfrm>
-          <a:prstGeom prst="line">
-            <a:avLst/>
-          </a:prstGeom>
-          <a:ln w="19050">
-            <a:solidFill>
-              <a:srgbClr val="1F2937"/>
-            </a:solidFill>
-            <a:tailEnd type="triangle" w="med" len="med"/>
-          </a:ln>
-        </p:spPr>
-        <p:style>
-          <a:lnRef idx="2">
-            <a:schemeClr val="accent1"/>
-          </a:lnRef>
-          <a:fillRef idx="0">
-            <a:schemeClr val="accent1"/>
-          </a:fillRef>
-          <a:effectRef idx="1">
-            <a:schemeClr val="accent1"/>
-          </a:effectRef>
-          <a:fontRef idx="minor">
-            <a:schemeClr val="tx1"/>
-          </a:fontRef>
-        </p:style>
-      </p:cxnSp>
-      <p:cxnSp>
-        <p:nvCxnSpPr>
-          <p:cNvPr id="14" name="Connector 13"/>
-          <p:cNvCxnSpPr/>
-          <p:nvPr/>
-        </p:nvCxnSpPr>
-        <p:spPr>
-          <a:xfrm flipV="1">
-            <a:off x="2578608" y="2971800"/>
-            <a:ext cx="512064" cy="64008"/>
-          </a:xfrm>
-          <a:prstGeom prst="line">
-            <a:avLst/>
-          </a:prstGeom>
-          <a:ln w="19050">
-            <a:solidFill>
-              <a:srgbClr val="1F2937"/>
-            </a:solidFill>
-            <a:tailEnd type="triangle" w="med" len="med"/>
-          </a:ln>
-        </p:spPr>
-        <p:style>
-          <a:lnRef idx="2">
-            <a:schemeClr val="accent1"/>
-          </a:lnRef>
-          <a:fillRef idx="0">
-            <a:schemeClr val="accent1"/>
-          </a:fillRef>
-          <a:effectRef idx="1">
-            <a:schemeClr val="accent1"/>
-          </a:effectRef>
-          <a:fontRef idx="minor">
-            <a:schemeClr val="tx1"/>
-          </a:fontRef>
-        </p:style>
-      </p:cxnSp>
-      <p:cxnSp>
-        <p:nvCxnSpPr>
-          <p:cNvPr id="15" name="Connector 14"/>
-          <p:cNvCxnSpPr/>
-          <p:nvPr/>
-        </p:nvCxnSpPr>
-        <p:spPr>
-          <a:xfrm flipV="1">
-            <a:off x="2578608" y="3291840"/>
-            <a:ext cx="512064" cy="795528"/>
-          </a:xfrm>
-          <a:prstGeom prst="line">
-            <a:avLst/>
-          </a:prstGeom>
-          <a:ln w="19050">
-            <a:solidFill>
-              <a:srgbClr val="1F2937"/>
-            </a:solidFill>
-            <a:tailEnd type="triangle" w="med" len="med"/>
-          </a:ln>
-        </p:spPr>
-        <p:style>
-          <a:lnRef idx="2">
-            <a:schemeClr val="accent1"/>
-          </a:lnRef>
-          <a:fillRef idx="0">
-            <a:schemeClr val="accent1"/>
-          </a:fillRef>
-          <a:effectRef idx="1">
-            <a:schemeClr val="accent1"/>
-          </a:effectRef>
-          <a:fontRef idx="minor">
-            <a:schemeClr val="tx1"/>
-          </a:fontRef>
-        </p:style>
-      </p:cxnSp>
-      <p:cxnSp>
-        <p:nvCxnSpPr>
-          <p:cNvPr id="16" name="Connector 15"/>
-          <p:cNvCxnSpPr/>
-          <p:nvPr/>
-        </p:nvCxnSpPr>
-        <p:spPr>
-          <a:xfrm>
-            <a:off x="5303520" y="2971800"/>
-            <a:ext cx="530352" cy="0"/>
-          </a:xfrm>
-          <a:prstGeom prst="line">
-            <a:avLst/>
-          </a:prstGeom>
-          <a:ln w="19050">
-            <a:solidFill>
-              <a:srgbClr val="1F2937"/>
-            </a:solidFill>
-            <a:tailEnd type="triangle" w="med" len="med"/>
-          </a:ln>
-        </p:spPr>
-        <p:style>
-          <a:lnRef idx="2">
-            <a:schemeClr val="accent1"/>
-          </a:lnRef>
-          <a:fillRef idx="0">
-            <a:schemeClr val="accent1"/>
-          </a:fillRef>
-          <a:effectRef idx="1">
-            <a:schemeClr val="accent1"/>
-          </a:effectRef>
-          <a:fontRef idx="minor">
-            <a:schemeClr val="tx1"/>
-          </a:fontRef>
-        </p:style>
-      </p:cxnSp>
-      <p:cxnSp>
-        <p:nvCxnSpPr>
-          <p:cNvPr id="17" name="Connector 16"/>
-          <p:cNvCxnSpPr/>
-          <p:nvPr/>
-        </p:nvCxnSpPr>
-        <p:spPr>
-          <a:xfrm>
-            <a:off x="7863840" y="2971800"/>
-            <a:ext cx="530352" cy="0"/>
-          </a:xfrm>
-          <a:prstGeom prst="line">
-            <a:avLst/>
-          </a:prstGeom>
-          <a:ln w="19050">
-            <a:solidFill>
-              <a:srgbClr val="1F2937"/>
-            </a:solidFill>
-            <a:tailEnd type="triangle" w="med" len="med"/>
-          </a:ln>
-        </p:spPr>
-        <p:style>
-          <a:lnRef idx="2">
-            <a:schemeClr val="accent1"/>
-          </a:lnRef>
-          <a:fillRef idx="0">
-            <a:schemeClr val="accent1"/>
-          </a:fillRef>
-          <a:effectRef idx="1">
-            <a:schemeClr val="accent1"/>
-          </a:effectRef>
-          <a:fontRef idx="minor">
-            <a:schemeClr val="tx1"/>
-          </a:fontRef>
-        </p:style>
-      </p:cxnSp>
-      <p:sp>
-        <p:nvSpPr>
-          <p:cNvPr id="18" name="Rounded Rectangle 17"/>
-          <p:cNvSpPr/>
-          <p:nvPr/>
-        </p:nvSpPr>
-        <p:spPr>
-          <a:xfrm>
-            <a:off x="1463040" y="5029200"/>
-            <a:ext cx="9235440" cy="731520"/>
-          </a:xfrm>
-          <a:prstGeom prst="roundRect">
-            <a:avLst/>
-          </a:prstGeom>
-          <a:solidFill>
-            <a:srgbClr val="2E9E5B"/>
-          </a:solidFill>
-          <a:ln>
-            <a:noFill/>
-          </a:ln>
-        </p:spPr>
-        <p:style>
-          <a:lnRef idx="1">
-            <a:schemeClr val="accent1"/>
-          </a:lnRef>
-          <a:fillRef idx="3">
-            <a:schemeClr val="accent1"/>
-          </a:fillRef>
-          <a:effectRef idx="2">
-            <a:schemeClr val="accent1"/>
-          </a:effectRef>
-          <a:fontRef idx="minor">
-            <a:schemeClr val="lt1"/>
-          </a:fontRef>
-        </p:style>
-        <p:txBody>
-          <a:bodyPr rtlCol="0" anchor="ctr"/>
-          <a:lstStyle/>
-          <a:p>
-            <a:pPr algn="ctr"/>
-            <a:r>
-              <a:rPr sz="2000" b="1" i="0">
-                <a:solidFill>
-                  <a:srgbClr val="F5F7F2"/>
-                </a:solidFill>
-                <a:latin typeface="Calibri"/>
-              </a:rPr>
-              <a:t>Lead = (Qty / Speed) × 0.1 × (1 + 2 × Ds)</a:t>
-            </a:r>
-          </a:p>
-        </p:txBody>
-      </p:sp>
-      <p:sp>
-        <p:nvSpPr>
-          <p:cNvPr id="19" name="TextBox 18"/>
-          <p:cNvSpPr txBox="1"/>
-          <p:nvPr/>
-        </p:nvSpPr>
-        <p:spPr>
-          <a:xfrm>
-            <a:off x="548640" y="5852160"/>
-            <a:ext cx="11064240" cy="502920"/>
-          </a:xfrm>
-          <a:prstGeom prst="rect">
-            <a:avLst/>
-          </a:prstGeom>
-          <a:noFill/>
-        </p:spPr>
-        <p:txBody>
-          <a:bodyPr wrap="square" anchor="ctr">
-            <a:spAutoFit/>
-          </a:bodyPr>
-          <a:lstStyle/>
-          <a:p>
-            <a:r>
-              <a:t>Order Quantity</a:t>
-            </a:r>
-          </a:p>
-          <a:p>
-            <a:r>
-              <a:t>(From Order Records)</a:t>
-            </a:r>
-          </a:p>
-        </p:txBody>
-      </p:sp>
-    </p:spTree>
-  </p:cSld>
-  <p:clrMapOvr>
-    <a:masterClrMapping/>
-  </p:clrMapOvr>
-</p:sld>
-</file>
-
-<file path=ppt/slides/slide3.xml><?xml version="1.0" encoding="utf-8"?>
-<p:sld xmlns:a="http://schemas.openxmlformats.org/drawingml/2006/main" xmlns:r="http://schemas.openxmlformats.org/officeDocument/2006/relationships" xmlns:p="http://schemas.openxmlformats.org/presentationml/2006/main">
-  <p:cSld>
-    <p:bg>
-      <p:bgPr>
-        <a:solidFill>
-          <a:srgbClr val="085859"/>
-        </a:solidFill>
-        <a:effectLst/>
-      </p:bgPr>
-    </p:bg>
-    <p:spTree>
-      <p:nvGrpSpPr>
-        <p:cNvPr id="1" name=""/>
-        <p:cNvGrpSpPr/>
-        <p:nvPr/>
-      </p:nvGrpSpPr>
-      <p:grpSpPr>
-        <a:xfrm>
-          <a:off x="0" y="0"/>
-          <a:ext cx="0" cy="0"/>
-          <a:chOff x="0" y="0"/>
-          <a:chExt cx="0" cy="0"/>
-        </a:xfrm>
-      </p:grpSpPr>
-      <p:sp>
-        <p:nvSpPr>
-          <p:cNvPr id="2" name="TextBox 1"/>
-          <p:cNvSpPr txBox="1"/>
-          <p:nvPr/>
-        </p:nvSpPr>
-        <p:spPr>
-          <a:xfrm>
-            <a:off x="548640" y="6419088"/>
-            <a:ext cx="9144000" cy="274320"/>
-          </a:xfrm>
-          <a:prstGeom prst="rect">
-            <a:avLst/>
-          </a:prstGeom>
-          <a:noFill/>
-        </p:spPr>
-        <p:txBody>
-          <a:bodyPr wrap="square">
-            <a:spAutoFit/>
-          </a:bodyPr>
-          <a:lstStyle/>
-          <a:p>
-            <a:pPr algn="l"/>
-            <a:r>
-              <a:rPr sz="900" b="0" i="0">
-                <a:solidFill>
-                  <a:srgbClr val="F5F7F2"/>
-                </a:solidFill>
-                <a:latin typeface="Calibri"/>
-              </a:rPr>
-              <a:t>Defect-to-Delivery  |  FYDP-I  •  Group: 262-034</a:t>
-            </a:r>
-          </a:p>
-        </p:txBody>
-      </p:sp>
-      <p:sp>
-        <p:nvSpPr>
-          <p:cNvPr id="3" name="TextBox 2"/>
-          <p:cNvSpPr txBox="1"/>
-          <p:nvPr/>
-        </p:nvSpPr>
-        <p:spPr>
-          <a:xfrm>
-            <a:off x="10972800" y="6419088"/>
-            <a:ext cx="640080" cy="274320"/>
-          </a:xfrm>
-          <a:prstGeom prst="rect">
-            <a:avLst/>
-          </a:prstGeom>
-          <a:noFill/>
-        </p:spPr>
-        <p:txBody>
-          <a:bodyPr wrap="none">
-            <a:spAutoFit/>
-          </a:bodyPr>
-          <a:lstStyle/>
-          <a:p>
-            <a:pPr algn="r"/>
-            <a:r>
-              <a:rPr sz="900">
-                <a:solidFill>
-                  <a:srgbClr val="F5F7F2"/>
-                </a:solidFill>
-                <a:latin typeface="Calibri"/>
-              </a:rPr>
-              <a:t>3 / 35</a:t>
-            </a:r>
-          </a:p>
-        </p:txBody>
-      </p:sp>
-      <p:sp>
-        <p:nvSpPr>
-          <p:cNvPr id="5" name="TextBox 4"/>
-          <p:cNvSpPr txBox="1"/>
-          <p:nvPr/>
-        </p:nvSpPr>
-        <p:spPr>
-          <a:xfrm>
-            <a:off x="548640" y="320040"/>
-            <a:ext cx="11064240" cy="822960"/>
-          </a:xfrm>
-          <a:prstGeom prst="rect">
-            <a:avLst/>
-          </a:prstGeom>
-          <a:noFill/>
-        </p:spPr>
-        <p:txBody>
-          <a:bodyPr wrap="square">
-            <a:spAutoFit/>
-          </a:bodyPr>
-          <a:lstStyle/>
-          <a:p>
-            <a:pPr algn="l"/>
-            <a:r>
-              <a:rPr sz="3400" b="1" i="0">
-                <a:solidFill>
-                  <a:srgbClr val="F5F7F2"/>
-                </a:solidFill>
-                <a:latin typeface="Georgia"/>
-              </a:rPr>
-              <a:t>Agenda</a:t>
-            </a:r>
-          </a:p>
-        </p:txBody>
-      </p:sp>
-      <p:sp>
-        <p:nvSpPr>
-          <p:cNvPr id="7" name="Rounded Rectangle 6"/>
-          <p:cNvSpPr/>
-          <p:nvPr/>
-        </p:nvSpPr>
-        <p:spPr>
-          <a:xfrm>
-            <a:off x="822960" y="1737360"/>
-            <a:ext cx="3383280" cy="1005840"/>
-          </a:xfrm>
-          <a:prstGeom prst="roundRect">
-            <a:avLst/>
-          </a:prstGeom>
-          <a:solidFill>
-            <a:srgbClr val="FFFFFF"/>
-          </a:solidFill>
-          <a:ln w="15875">
-            <a:solidFill>
-              <a:srgbClr val="D8D2C2"/>
-            </a:solidFill>
-          </a:ln>
-        </p:spPr>
-        <p:style>
-          <a:lnRef idx="1">
-            <a:schemeClr val="accent1"/>
-          </a:lnRef>
-          <a:fillRef idx="3">
-            <a:schemeClr val="accent1"/>
-          </a:fillRef>
-          <a:effectRef idx="2">
-            <a:schemeClr val="accent1"/>
-          </a:effectRef>
-          <a:fontRef idx="minor">
-            <a:schemeClr val="lt1"/>
-          </a:fontRef>
-        </p:style>
-        <p:txBody>
-          <a:bodyPr wrap="square" rtlCol="0" anchor="ctr"/>
-          <a:lstStyle/>
-          <a:p>
-            <a:pPr algn="ctr"/>
-            <a:r>
-              <a:rPr sz="1600" b="1" i="0" dirty="0">
-                <a:solidFill>
-                  <a:schemeClr val="tx1"/>
-                </a:solidFill>
-                <a:latin typeface="Calibri"/>
-              </a:rPr>
-              <a:t>1.  </a:t>
-            </a:r>
-            <a:r>
-              <a:rPr sz="1600" b="1" dirty="0">
-                <a:solidFill>
-                  <a:schemeClr val="tx1"/>
-                </a:solidFill>
-                <a:latin typeface="Calibri"/>
-              </a:rPr>
-              <a:t>Problem &amp; Motivation</a:t>
-            </a:r>
-          </a:p>
-        </p:txBody>
-      </p:sp>
-      <p:sp>
-        <p:nvSpPr>
-          <p:cNvPr id="8" name="Rounded Rectangle 7"/>
-          <p:cNvSpPr/>
-          <p:nvPr/>
-        </p:nvSpPr>
-        <p:spPr>
-          <a:xfrm>
-            <a:off x="4526280" y="1737360"/>
-            <a:ext cx="3383280" cy="1005840"/>
-          </a:xfrm>
-          <a:prstGeom prst="roundRect">
-            <a:avLst/>
-          </a:prstGeom>
-          <a:solidFill>
-            <a:srgbClr val="FFFFFF"/>
-          </a:solidFill>
-          <a:ln w="15875">
-            <a:solidFill>
-              <a:srgbClr val="D8D2C2"/>
-            </a:solidFill>
-          </a:ln>
-        </p:spPr>
-        <p:style>
-          <a:lnRef idx="1">
-            <a:schemeClr val="accent1"/>
-          </a:lnRef>
-          <a:fillRef idx="3">
-            <a:schemeClr val="accent1"/>
-          </a:fillRef>
-          <a:effectRef idx="2">
-            <a:schemeClr val="accent1"/>
-          </a:effectRef>
-          <a:fontRef idx="minor">
-            <a:schemeClr val="lt1"/>
-          </a:fontRef>
-        </p:style>
-        <p:txBody>
-          <a:bodyPr wrap="square" rtlCol="0" anchor="ctr"/>
-          <a:lstStyle/>
-          <a:p>
-            <a:pPr algn="ctr"/>
-            <a:r>
-              <a:rPr sz="1600" b="1" i="0" dirty="0">
-                <a:solidFill>
-                  <a:schemeClr val="tx1"/>
-                </a:solidFill>
-                <a:latin typeface="Calibri"/>
-              </a:rPr>
-              <a:t>2.  </a:t>
-            </a:r>
-            <a:r>
-              <a:rPr sz="1600" b="1" dirty="0">
-                <a:solidFill>
-                  <a:schemeClr val="tx1"/>
-                </a:solidFill>
-                <a:latin typeface="Calibri"/>
-              </a:rPr>
-              <a:t>Objectives &amp; Methodology</a:t>
-            </a:r>
-          </a:p>
-        </p:txBody>
-      </p:sp>
-      <p:sp>
-        <p:nvSpPr>
-          <p:cNvPr id="9" name="Rounded Rectangle 8"/>
-          <p:cNvSpPr/>
-          <p:nvPr/>
-        </p:nvSpPr>
-        <p:spPr>
-          <a:xfrm>
-            <a:off x="8229600" y="1737360"/>
-            <a:ext cx="3383280" cy="1005840"/>
-          </a:xfrm>
-          <a:prstGeom prst="roundRect">
-            <a:avLst/>
-          </a:prstGeom>
-          <a:solidFill>
-            <a:srgbClr val="FFFFFF"/>
-          </a:solidFill>
-          <a:ln w="15875">
-            <a:solidFill>
-              <a:srgbClr val="D8D2C2"/>
-            </a:solidFill>
-          </a:ln>
-        </p:spPr>
-        <p:style>
-          <a:lnRef idx="1">
-            <a:schemeClr val="accent1"/>
-          </a:lnRef>
-          <a:fillRef idx="3">
-            <a:schemeClr val="accent1"/>
-          </a:fillRef>
-          <a:effectRef idx="2">
-            <a:schemeClr val="accent1"/>
-          </a:effectRef>
-          <a:fontRef idx="minor">
-            <a:schemeClr val="lt1"/>
-          </a:fontRef>
-        </p:style>
-        <p:txBody>
-          <a:bodyPr wrap="square" rtlCol="0" anchor="ctr"/>
-          <a:lstStyle/>
-          <a:p>
-            <a:pPr algn="ctr"/>
-            <a:r>
-              <a:rPr sz="1600" b="1" i="0" dirty="0">
-                <a:solidFill>
-                  <a:schemeClr val="tx1"/>
-                </a:solidFill>
-                <a:latin typeface="Calibri"/>
-              </a:rPr>
-              <a:t>3.  </a:t>
-            </a:r>
-            <a:r>
-              <a:rPr sz="1600" b="1" dirty="0">
-                <a:solidFill>
-                  <a:schemeClr val="tx1"/>
-                </a:solidFill>
-                <a:latin typeface="Calibri"/>
-              </a:rPr>
-              <a:t>Literature Review &amp; Gap Analysis</a:t>
-            </a:r>
-          </a:p>
-        </p:txBody>
-      </p:sp>
-      <p:sp>
-        <p:nvSpPr>
-          <p:cNvPr id="10" name="Rounded Rectangle 9"/>
-          <p:cNvSpPr/>
-          <p:nvPr/>
-        </p:nvSpPr>
-        <p:spPr>
-          <a:xfrm>
-            <a:off x="822960" y="3154680"/>
-            <a:ext cx="3383280" cy="1005840"/>
-          </a:xfrm>
-          <a:prstGeom prst="roundRect">
-            <a:avLst/>
-          </a:prstGeom>
-          <a:solidFill>
-            <a:srgbClr val="FFFFFF"/>
-          </a:solidFill>
-          <a:ln w="15875">
-            <a:solidFill>
-              <a:srgbClr val="D8D2C2"/>
-            </a:solidFill>
-          </a:ln>
-        </p:spPr>
-        <p:style>
-          <a:lnRef idx="1">
-            <a:schemeClr val="accent1"/>
-          </a:lnRef>
-          <a:fillRef idx="3">
-            <a:schemeClr val="accent1"/>
-          </a:fillRef>
-          <a:effectRef idx="2">
-            <a:schemeClr val="accent1"/>
-          </a:effectRef>
-          <a:fontRef idx="minor">
-            <a:schemeClr val="lt1"/>
-          </a:fontRef>
-        </p:style>
-        <p:txBody>
-          <a:bodyPr wrap="square" rtlCol="0" anchor="ctr"/>
-          <a:lstStyle/>
-          <a:p>
-            <a:pPr algn="ctr"/>
-            <a:r>
-              <a:rPr sz="1600" b="1" i="0" dirty="0">
-                <a:solidFill>
-                  <a:schemeClr val="tx1"/>
-                </a:solidFill>
-                <a:latin typeface="Calibri"/>
-              </a:rPr>
-              <a:t>4.  </a:t>
-            </a:r>
-            <a:r>
-              <a:rPr sz="1600" b="1" dirty="0">
-                <a:solidFill>
-                  <a:schemeClr val="tx1"/>
-                </a:solidFill>
-                <a:latin typeface="Calibri"/>
-              </a:rPr>
-              <a:t>Requirement Analysis &amp; Dataset Audit</a:t>
-            </a:r>
-          </a:p>
-        </p:txBody>
-      </p:sp>
-      <p:sp>
-        <p:nvSpPr>
-          <p:cNvPr id="11" name="Rounded Rectangle 10"/>
-          <p:cNvSpPr/>
-          <p:nvPr/>
-        </p:nvSpPr>
-        <p:spPr>
-          <a:xfrm>
-            <a:off x="4526280" y="3154680"/>
-            <a:ext cx="3383280" cy="1005840"/>
-          </a:xfrm>
-          <a:prstGeom prst="roundRect">
-            <a:avLst/>
-          </a:prstGeom>
-          <a:solidFill>
-            <a:srgbClr val="FFFFFF"/>
-          </a:solidFill>
-          <a:ln w="15875">
-            <a:solidFill>
-              <a:srgbClr val="D8D2C2"/>
-            </a:solidFill>
-          </a:ln>
-        </p:spPr>
-        <p:style>
-          <a:lnRef idx="1">
-            <a:schemeClr val="accent1"/>
-          </a:lnRef>
-          <a:fillRef idx="3">
-            <a:schemeClr val="accent1"/>
-          </a:fillRef>
-          <a:effectRef idx="2">
-            <a:schemeClr val="accent1"/>
-          </a:effectRef>
-          <a:fontRef idx="minor">
-            <a:schemeClr val="lt1"/>
-          </a:fontRef>
-        </p:style>
-        <p:txBody>
-          <a:bodyPr wrap="square" rtlCol="0" anchor="ctr"/>
-          <a:lstStyle/>
-          <a:p>
-            <a:pPr algn="ctr"/>
-            <a:r>
-              <a:rPr sz="1600" b="1" i="0" dirty="0">
-                <a:solidFill>
-                  <a:schemeClr val="tx1"/>
-                </a:solidFill>
-                <a:latin typeface="Calibri"/>
-              </a:rPr>
-              <a:t>5.  </a:t>
-            </a:r>
-            <a:r>
-              <a:rPr sz="1600" b="1" dirty="0">
-                <a:solidFill>
-                  <a:schemeClr val="tx1"/>
-                </a:solidFill>
-                <a:latin typeface="Calibri"/>
-              </a:rPr>
-              <a:t>System Design &amp; Diagrams</a:t>
-            </a:r>
-          </a:p>
-        </p:txBody>
-      </p:sp>
-      <p:sp>
-        <p:nvSpPr>
-          <p:cNvPr id="12" name="Rounded Rectangle 11"/>
-          <p:cNvSpPr/>
-          <p:nvPr/>
-        </p:nvSpPr>
-        <p:spPr>
-          <a:xfrm>
-            <a:off x="8229600" y="3154680"/>
-            <a:ext cx="3383280" cy="1005840"/>
-          </a:xfrm>
-          <a:prstGeom prst="roundRect">
-            <a:avLst/>
-          </a:prstGeom>
-          <a:solidFill>
-            <a:srgbClr val="FFFFFF"/>
-          </a:solidFill>
-          <a:ln w="15875">
-            <a:solidFill>
-              <a:srgbClr val="D8D2C2"/>
-            </a:solidFill>
-          </a:ln>
-        </p:spPr>
-        <p:style>
-          <a:lnRef idx="1">
-            <a:schemeClr val="accent1"/>
-          </a:lnRef>
-          <a:fillRef idx="3">
-            <a:schemeClr val="accent1"/>
-          </a:fillRef>
-          <a:effectRef idx="2">
-            <a:schemeClr val="accent1"/>
-          </a:effectRef>
-          <a:fontRef idx="minor">
-            <a:schemeClr val="lt1"/>
-          </a:fontRef>
-        </p:style>
-        <p:txBody>
-          <a:bodyPr wrap="square" rtlCol="0" anchor="ctr"/>
-          <a:lstStyle/>
-          <a:p>
-            <a:pPr algn="ctr"/>
-            <a:r>
-              <a:rPr sz="1600" b="1" i="0" dirty="0">
-                <a:solidFill>
-                  <a:schemeClr val="tx1"/>
-                </a:solidFill>
-                <a:latin typeface="Calibri"/>
-              </a:rPr>
-              <a:t>6.  </a:t>
-            </a:r>
-            <a:r>
-              <a:rPr sz="1600" b="1" dirty="0">
-                <a:solidFill>
-                  <a:schemeClr val="tx1"/>
-                </a:solidFill>
-                <a:latin typeface="Calibri"/>
-              </a:rPr>
-              <a:t>Standards, Constraints, Budget &amp; Plan</a:t>
-            </a:r>
-          </a:p>
-        </p:txBody>
-      </p:sp>
-      <p:sp>
-        <p:nvSpPr>
-          <p:cNvPr id="13" name="Rounded Rectangle 12"/>
-          <p:cNvSpPr/>
-          <p:nvPr/>
-        </p:nvSpPr>
-        <p:spPr>
-          <a:xfrm>
-            <a:off x="822960" y="4572000"/>
-            <a:ext cx="3383280" cy="1005840"/>
-          </a:xfrm>
-          <a:prstGeom prst="roundRect">
-            <a:avLst/>
-          </a:prstGeom>
-          <a:solidFill>
-            <a:srgbClr val="FFFFFF"/>
-          </a:solidFill>
-          <a:ln w="15875">
-            <a:solidFill>
-              <a:srgbClr val="D8D2C2"/>
-            </a:solidFill>
-          </a:ln>
-        </p:spPr>
-        <p:style>
-          <a:lnRef idx="1">
-            <a:schemeClr val="accent1"/>
-          </a:lnRef>
-          <a:fillRef idx="3">
-            <a:schemeClr val="accent1"/>
-          </a:fillRef>
-          <a:effectRef idx="2">
-            <a:schemeClr val="accent1"/>
-          </a:effectRef>
-          <a:fontRef idx="minor">
-            <a:schemeClr val="lt1"/>
-          </a:fontRef>
-        </p:style>
-        <p:txBody>
-          <a:bodyPr wrap="square" rtlCol="0" anchor="ctr"/>
-          <a:lstStyle/>
-          <a:p>
-            <a:pPr algn="ctr"/>
-            <a:r>
-              <a:rPr sz="1600" b="1" i="0" dirty="0">
-                <a:solidFill>
-                  <a:schemeClr val="tx1"/>
-                </a:solidFill>
-                <a:latin typeface="Calibri"/>
-              </a:rPr>
-              <a:t>7.  </a:t>
-            </a:r>
-            <a:r>
-              <a:rPr sz="1600" b="1" dirty="0">
-                <a:solidFill>
-                  <a:schemeClr val="tx1"/>
-                </a:solidFill>
-                <a:latin typeface="Calibri"/>
-              </a:rPr>
-              <a:t>Conclusion &amp; Future Work</a:t>
-            </a:r>
-          </a:p>
-        </p:txBody>
-      </p:sp>
-    </p:spTree>
-  </p:cSld>
-  <p:clrMapOvr>
-    <a:masterClrMapping/>
-  </p:clrMapOvr>
-</p:sld>
-</file>
-
-<file path=ppt/slides/slide30.xml><?xml version="1.0" encoding="utf-8"?>
-<p:sld xmlns:a="http://schemas.openxmlformats.org/drawingml/2006/main" xmlns:r="http://schemas.openxmlformats.org/officeDocument/2006/relationships" xmlns:p="http://schemas.openxmlformats.org/presentationml/2006/main">
-  <p:cSld>
-    <p:bg>
-      <p:bgPr>
-        <a:solidFill>
-          <a:srgbClr val="085859"/>
-        </a:solidFill>
-        <a:effectLst/>
-      </p:bgPr>
-    </p:bg>
-    <p:spTree>
-      <p:nvGrpSpPr>
-        <p:cNvPr id="1" name=""/>
-        <p:cNvGrpSpPr/>
-        <p:nvPr/>
-      </p:nvGrpSpPr>
-      <p:grpSpPr>
-        <a:xfrm>
-          <a:off x="0" y="0"/>
-          <a:ext cx="0" cy="0"/>
-          <a:chOff x="0" y="0"/>
-          <a:chExt cx="0" cy="0"/>
-        </a:xfrm>
-      </p:grpSpPr>
-      <p:sp>
-        <p:nvSpPr>
-          <p:cNvPr id="2" name="TextBox 1"/>
-          <p:cNvSpPr txBox="1"/>
-          <p:nvPr/>
-        </p:nvSpPr>
-        <p:spPr>
-          <a:xfrm>
-            <a:off x="548640" y="6419088"/>
-            <a:ext cx="9144000" cy="274320"/>
-          </a:xfrm>
-          <a:prstGeom prst="rect">
-            <a:avLst/>
-          </a:prstGeom>
-          <a:noFill/>
-        </p:spPr>
-        <p:txBody>
-          <a:bodyPr wrap="square">
-            <a:spAutoFit/>
-          </a:bodyPr>
-          <a:lstStyle/>
-          <a:p>
-            <a:pPr algn="l"/>
-            <a:r>
-              <a:rPr sz="900" b="0" i="0">
-                <a:solidFill>
-                  <a:srgbClr val="F5F7F2"/>
-                </a:solidFill>
-                <a:latin typeface="Calibri"/>
-              </a:rPr>
-              <a:t>Defect-to-Delivery  |  FYDP-I  •  Group: 262-034</a:t>
-            </a:r>
-          </a:p>
-        </p:txBody>
-      </p:sp>
-      <p:sp>
-        <p:nvSpPr>
-          <p:cNvPr id="3" name="TextBox 2"/>
-          <p:cNvSpPr txBox="1"/>
-          <p:nvPr/>
-        </p:nvSpPr>
-        <p:spPr>
-          <a:xfrm>
-            <a:off x="10972800" y="6419088"/>
-            <a:ext cx="640080" cy="274320"/>
-          </a:xfrm>
-          <a:prstGeom prst="rect">
-            <a:avLst/>
-          </a:prstGeom>
-          <a:noFill/>
-        </p:spPr>
-        <p:txBody>
-          <a:bodyPr wrap="none">
-            <a:spAutoFit/>
-          </a:bodyPr>
-          <a:lstStyle/>
-          <a:p>
-            <a:pPr algn="r"/>
-            <a:r>
-              <a:rPr sz="900">
-                <a:solidFill>
-                  <a:srgbClr val="F5F7F2"/>
-                </a:solidFill>
-                <a:latin typeface="Calibri"/>
-              </a:rPr>
-              <a:t>22 / 30</a:t>
-            </a:r>
-          </a:p>
-        </p:txBody>
-      </p:sp>
-      <p:sp>
-        <p:nvSpPr>
-          <p:cNvPr id="5" name="TextBox 4"/>
-          <p:cNvSpPr txBox="1"/>
-          <p:nvPr/>
-        </p:nvSpPr>
-        <p:spPr>
-          <a:xfrm>
-            <a:off x="548640" y="320040"/>
-            <a:ext cx="11064240" cy="822960"/>
-          </a:xfrm>
-          <a:prstGeom prst="rect">
-            <a:avLst/>
-          </a:prstGeom>
-          <a:noFill/>
-        </p:spPr>
-        <p:txBody>
-          <a:bodyPr wrap="square">
-            <a:spAutoFit/>
-          </a:bodyPr>
-          <a:lstStyle/>
-          <a:p>
-            <a:pPr algn="l"/>
-            <a:r>
-              <a:rPr sz="3400" b="1" i="0">
-                <a:solidFill>
-                  <a:srgbClr val="F5F7F2"/>
-                </a:solidFill>
-                <a:latin typeface="Georgia"/>
-              </a:rPr>
-              <a:t>Four-Point Inspection Grading (Fig. 3.6)</a:t>
-            </a:r>
-          </a:p>
-        </p:txBody>
-      </p:sp>
-      <p:sp>
-        <p:nvSpPr>
-          <p:cNvPr id="7" name="Rounded Rectangle 6"/>
-          <p:cNvSpPr/>
-          <p:nvPr/>
-        </p:nvSpPr>
-        <p:spPr>
-          <a:xfrm>
-            <a:off x="4480560" y="1463040"/>
-            <a:ext cx="3200400" cy="640080"/>
-          </a:xfrm>
-          <a:prstGeom prst="roundRect">
-            <a:avLst>
-              <a:gd name="adj" fmla="val 10000"/>
-            </a:avLst>
-          </a:prstGeom>
-          <a:solidFill>
-            <a:srgbClr val="FFFFFF"/>
-          </a:solidFill>
-          <a:ln w="19050">
-            <a:solidFill>
-              <a:srgbClr val="1B7A6E"/>
-            </a:solidFill>
-          </a:ln>
-        </p:spPr>
-        <p:style>
-          <a:lnRef idx="1">
-            <a:schemeClr val="accent1"/>
-          </a:lnRef>
-          <a:fillRef idx="3">
-            <a:schemeClr val="accent1"/>
-          </a:fillRef>
-          <a:effectRef idx="2">
-            <a:schemeClr val="accent1"/>
-          </a:effectRef>
-          <a:fontRef idx="minor">
-            <a:schemeClr val="lt1"/>
-          </a:fontRef>
-        </p:style>
-        <p:txBody>
-          <a:bodyPr wrap="square" rtlCol="0" anchor="ctr">
-            <a:normAutofit/>
-          </a:bodyPr>
-          <a:lstStyle/>
-          <a:p>
-            <a:pPr algn="ctr"/>
-            <a:r>
-              <a:rPr sz="1200" b="0" i="0" dirty="0">
-                <a:solidFill>
-                  <a:schemeClr val="tx1"/>
-                </a:solidFill>
-                <a:latin typeface="Calibri"/>
-              </a:rPr>
-              <a:t>Calibrate Pixels To Inches (Fixed Geometry)</a:t>
-            </a:r>
-          </a:p>
-        </p:txBody>
-      </p:sp>
-      <p:cxnSp>
-        <p:nvCxnSpPr>
-          <p:cNvPr id="8" name="Connector 7"/>
-          <p:cNvCxnSpPr/>
-          <p:nvPr/>
-        </p:nvCxnSpPr>
-        <p:spPr>
-          <a:xfrm>
-            <a:off x="6080760" y="2121408"/>
-            <a:ext cx="0" cy="146304"/>
-          </a:xfrm>
-          <a:prstGeom prst="line">
-            <a:avLst/>
-          </a:prstGeom>
-          <a:ln w="19050">
-            <a:solidFill>
-              <a:srgbClr val="1F2937"/>
-            </a:solidFill>
-            <a:tailEnd type="triangle" w="med" len="med"/>
-          </a:ln>
-        </p:spPr>
-        <p:style>
-          <a:lnRef idx="2">
-            <a:schemeClr val="accent1"/>
-          </a:lnRef>
-          <a:fillRef idx="0">
-            <a:schemeClr val="accent1"/>
-          </a:fillRef>
-          <a:effectRef idx="1">
-            <a:schemeClr val="accent1"/>
-          </a:effectRef>
-          <a:fontRef idx="minor">
-            <a:schemeClr val="tx1"/>
-          </a:fontRef>
-        </p:style>
-      </p:cxnSp>
-      <p:sp>
-        <p:nvSpPr>
-          <p:cNvPr id="9" name="Rounded Rectangle 8"/>
-          <p:cNvSpPr/>
-          <p:nvPr/>
-        </p:nvSpPr>
-        <p:spPr>
-          <a:xfrm>
-            <a:off x="4480560" y="2286000"/>
-            <a:ext cx="3200400" cy="640080"/>
-          </a:xfrm>
-          <a:prstGeom prst="roundRect">
-            <a:avLst>
-              <a:gd name="adj" fmla="val 10000"/>
-            </a:avLst>
-          </a:prstGeom>
-          <a:solidFill>
-            <a:srgbClr val="FFFFFF"/>
-          </a:solidFill>
-          <a:ln w="19050">
-            <a:solidFill>
-              <a:srgbClr val="1B7A6E"/>
-            </a:solidFill>
-          </a:ln>
-        </p:spPr>
-        <p:style>
-          <a:lnRef idx="1">
-            <a:schemeClr val="accent1"/>
-          </a:lnRef>
-          <a:fillRef idx="3">
-            <a:schemeClr val="accent1"/>
-          </a:fillRef>
-          <a:effectRef idx="2">
-            <a:schemeClr val="accent1"/>
-          </a:effectRef>
-          <a:fontRef idx="minor">
-            <a:schemeClr val="lt1"/>
-          </a:fontRef>
-        </p:style>
-        <p:txBody>
-          <a:bodyPr wrap="square" rtlCol="0" anchor="ctr">
-            <a:normAutofit/>
-          </a:bodyPr>
-          <a:lstStyle/>
-          <a:p>
-            <a:pPr algn="ctr"/>
-            <a:r>
-              <a:rPr sz="1200" b="0" i="0" dirty="0">
-                <a:solidFill>
-                  <a:schemeClr val="tx1"/>
-                </a:solidFill>
-                <a:latin typeface="Calibri"/>
-              </a:rPr>
-              <a:t>Measure Fault Length</a:t>
-            </a:r>
-          </a:p>
-        </p:txBody>
-      </p:sp>
-      <p:cxnSp>
-        <p:nvCxnSpPr>
-          <p:cNvPr id="10" name="Connector 9"/>
-          <p:cNvCxnSpPr/>
-          <p:nvPr/>
-        </p:nvCxnSpPr>
-        <p:spPr>
-          <a:xfrm>
-            <a:off x="6080760" y="2944368"/>
-            <a:ext cx="0" cy="146304"/>
-          </a:xfrm>
-          <a:prstGeom prst="line">
-            <a:avLst/>
-          </a:prstGeom>
-          <a:ln w="19050">
-            <a:solidFill>
-              <a:srgbClr val="1F2937"/>
-            </a:solidFill>
-            <a:tailEnd type="triangle" w="med" len="med"/>
-          </a:ln>
-        </p:spPr>
-        <p:style>
-          <a:lnRef idx="2">
-            <a:schemeClr val="accent1"/>
-          </a:lnRef>
-          <a:fillRef idx="0">
-            <a:schemeClr val="accent1"/>
-          </a:fillRef>
-          <a:effectRef idx="1">
-            <a:schemeClr val="accent1"/>
-          </a:effectRef>
-          <a:fontRef idx="minor">
-            <a:schemeClr val="tx1"/>
-          </a:fontRef>
-        </p:style>
-      </p:cxnSp>
-      <p:sp>
-        <p:nvSpPr>
-          <p:cNvPr id="11" name="Diamond 10"/>
-          <p:cNvSpPr/>
-          <p:nvPr/>
-        </p:nvSpPr>
-        <p:spPr>
-          <a:xfrm>
-            <a:off x="5349240" y="3108960"/>
-            <a:ext cx="1463040" cy="914400"/>
-          </a:xfrm>
-          <a:prstGeom prst="diamond">
-            <a:avLst/>
-          </a:prstGeom>
-          <a:solidFill>
-            <a:srgbClr val="FFFFFF"/>
-          </a:solidFill>
-          <a:ln w="19050">
-            <a:solidFill>
-              <a:srgbClr val="1B7A6E"/>
-            </a:solidFill>
-          </a:ln>
-        </p:spPr>
-        <p:style>
-          <a:lnRef idx="1">
-            <a:schemeClr val="accent1"/>
-          </a:lnRef>
-          <a:fillRef idx="3">
-            <a:schemeClr val="accent1"/>
-          </a:fillRef>
-          <a:effectRef idx="2">
-            <a:schemeClr val="accent1"/>
-          </a:effectRef>
-          <a:fontRef idx="minor">
-            <a:schemeClr val="lt1"/>
-          </a:fontRef>
-        </p:style>
-        <p:txBody>
-          <a:bodyPr wrap="square" rtlCol="0" anchor="ctr">
-            <a:normAutofit/>
-          </a:bodyPr>
-          <a:lstStyle/>
-          <a:p>
-            <a:pPr algn="ctr"/>
-            <a:r>
-              <a:rPr sz="1250" b="1" i="0" dirty="0">
-                <a:solidFill>
-                  <a:schemeClr val="tx1"/>
-                </a:solidFill>
-                <a:latin typeface="Calibri"/>
-              </a:rPr>
-              <a:t>Length?</a:t>
-            </a:r>
-          </a:p>
-        </p:txBody>
-      </p:sp>
-      <p:sp>
-        <p:nvSpPr>
-          <p:cNvPr id="12" name="Rounded Rectangle 11"/>
-          <p:cNvSpPr/>
-          <p:nvPr/>
-        </p:nvSpPr>
-        <p:spPr>
-          <a:xfrm>
-            <a:off x="640080" y="4480560"/>
-            <a:ext cx="2560320" cy="777240"/>
-          </a:xfrm>
-          <a:prstGeom prst="roundRect">
-            <a:avLst>
-              <a:gd name="adj" fmla="val 10000"/>
-            </a:avLst>
-          </a:prstGeom>
-          <a:solidFill>
-            <a:srgbClr val="FFFFFF"/>
-          </a:solidFill>
-          <a:ln w="19050">
-            <a:solidFill>
-              <a:srgbClr val="1B7A6E"/>
-            </a:solidFill>
-          </a:ln>
-        </p:spPr>
-        <p:style>
-          <a:lnRef idx="1">
-            <a:schemeClr val="accent1"/>
-          </a:lnRef>
-          <a:fillRef idx="3">
-            <a:schemeClr val="accent1"/>
-          </a:fillRef>
-          <a:effectRef idx="2">
-            <a:schemeClr val="accent1"/>
-          </a:effectRef>
-          <a:fontRef idx="minor">
-            <a:schemeClr val="lt1"/>
-          </a:fontRef>
-        </p:style>
-        <p:txBody>
-          <a:bodyPr wrap="square" rtlCol="0" anchor="ctr">
-            <a:normAutofit/>
-          </a:bodyPr>
-          <a:lstStyle/>
-          <a:p>
-            <a:pPr algn="ctr"/>
-            <a:r>
-              <a:rPr sz="1150" b="0" i="0" dirty="0">
-                <a:solidFill>
-                  <a:schemeClr val="tx1"/>
-                </a:solidFill>
-                <a:latin typeface="Calibri"/>
-              </a:rPr>
-              <a:t>Under 3 In
-1 Point</a:t>
-            </a:r>
-          </a:p>
-        </p:txBody>
-      </p:sp>
-      <p:cxnSp>
-        <p:nvCxnSpPr>
-          <p:cNvPr id="13" name="Connector 12"/>
-          <p:cNvCxnSpPr/>
-          <p:nvPr/>
-        </p:nvCxnSpPr>
-        <p:spPr>
-          <a:xfrm flipH="1">
-            <a:off x="1920239" y="4041648"/>
-            <a:ext cx="3840481" cy="420624"/>
-          </a:xfrm>
-          <a:prstGeom prst="line">
-            <a:avLst/>
-          </a:prstGeom>
-          <a:ln w="19050">
-            <a:solidFill>
-              <a:srgbClr val="1F2937"/>
-            </a:solidFill>
-            <a:tailEnd type="triangle" w="med" len="med"/>
-          </a:ln>
-        </p:spPr>
-        <p:style>
-          <a:lnRef idx="2">
-            <a:schemeClr val="accent1"/>
-          </a:lnRef>
-          <a:fillRef idx="0">
-            <a:schemeClr val="accent1"/>
-          </a:fillRef>
-          <a:effectRef idx="1">
-            <a:schemeClr val="accent1"/>
-          </a:effectRef>
-          <a:fontRef idx="minor">
-            <a:schemeClr val="tx1"/>
-          </a:fontRef>
-        </p:style>
-      </p:cxnSp>
-      <p:sp>
-        <p:nvSpPr>
-          <p:cNvPr id="14" name="Rounded Rectangle 13"/>
-          <p:cNvSpPr/>
-          <p:nvPr/>
-        </p:nvSpPr>
-        <p:spPr>
-          <a:xfrm>
-            <a:off x="3410712" y="4480560"/>
-            <a:ext cx="2560320" cy="777240"/>
-          </a:xfrm>
-          <a:prstGeom prst="roundRect">
-            <a:avLst>
-              <a:gd name="adj" fmla="val 10000"/>
-            </a:avLst>
-          </a:prstGeom>
-          <a:solidFill>
-            <a:srgbClr val="FFFFFF"/>
-          </a:solidFill>
-          <a:ln w="19050">
-            <a:solidFill>
-              <a:srgbClr val="1B7A6E"/>
-            </a:solidFill>
-          </a:ln>
-        </p:spPr>
-        <p:style>
-          <a:lnRef idx="1">
-            <a:schemeClr val="accent1"/>
-          </a:lnRef>
-          <a:fillRef idx="3">
-            <a:schemeClr val="accent1"/>
-          </a:fillRef>
-          <a:effectRef idx="2">
-            <a:schemeClr val="accent1"/>
-          </a:effectRef>
-          <a:fontRef idx="minor">
-            <a:schemeClr val="lt1"/>
-          </a:fontRef>
-        </p:style>
-        <p:txBody>
-          <a:bodyPr wrap="square" rtlCol="0" anchor="ctr">
-            <a:normAutofit/>
-          </a:bodyPr>
-          <a:lstStyle/>
-          <a:p>
-            <a:pPr algn="ctr"/>
-            <a:r>
-              <a:rPr sz="1150" b="0" i="0" dirty="0">
-                <a:solidFill>
-                  <a:schemeClr val="tx1"/>
-                </a:solidFill>
-                <a:latin typeface="Calibri"/>
-              </a:rPr>
-              <a:t>3 To 6 In
-2 Points</a:t>
-            </a:r>
-          </a:p>
-        </p:txBody>
-      </p:sp>
-      <p:cxnSp>
-        <p:nvCxnSpPr>
-          <p:cNvPr id="15" name="Connector 14"/>
-          <p:cNvCxnSpPr/>
-          <p:nvPr/>
-        </p:nvCxnSpPr>
-        <p:spPr>
-          <a:xfrm flipH="1">
-            <a:off x="4690872" y="4041648"/>
-            <a:ext cx="1298448" cy="420624"/>
-          </a:xfrm>
-          <a:prstGeom prst="line">
-            <a:avLst/>
-          </a:prstGeom>
-          <a:ln w="19050">
-            <a:solidFill>
-              <a:srgbClr val="1F2937"/>
-            </a:solidFill>
-            <a:tailEnd type="triangle" w="med" len="med"/>
-          </a:ln>
-        </p:spPr>
-        <p:style>
-          <a:lnRef idx="2">
-            <a:schemeClr val="accent1"/>
-          </a:lnRef>
-          <a:fillRef idx="0">
-            <a:schemeClr val="accent1"/>
-          </a:fillRef>
-          <a:effectRef idx="1">
-            <a:schemeClr val="accent1"/>
-          </a:effectRef>
-          <a:fontRef idx="minor">
-            <a:schemeClr val="tx1"/>
-          </a:fontRef>
-        </p:style>
-      </p:cxnSp>
-      <p:sp>
-        <p:nvSpPr>
-          <p:cNvPr id="16" name="Rounded Rectangle 15"/>
-          <p:cNvSpPr/>
-          <p:nvPr/>
-        </p:nvSpPr>
-        <p:spPr>
-          <a:xfrm>
-            <a:off x="6181344" y="4480560"/>
-            <a:ext cx="2560320" cy="777240"/>
-          </a:xfrm>
-          <a:prstGeom prst="roundRect">
-            <a:avLst>
-              <a:gd name="adj" fmla="val 10000"/>
-            </a:avLst>
-          </a:prstGeom>
-          <a:solidFill>
-            <a:srgbClr val="FFFFFF"/>
-          </a:solidFill>
-          <a:ln w="19050">
-            <a:solidFill>
-              <a:srgbClr val="1B7A6E"/>
-            </a:solidFill>
-          </a:ln>
-        </p:spPr>
-        <p:style>
-          <a:lnRef idx="1">
-            <a:schemeClr val="accent1"/>
-          </a:lnRef>
-          <a:fillRef idx="3">
-            <a:schemeClr val="accent1"/>
-          </a:fillRef>
-          <a:effectRef idx="2">
-            <a:schemeClr val="accent1"/>
-          </a:effectRef>
-          <a:fontRef idx="minor">
-            <a:schemeClr val="lt1"/>
-          </a:fontRef>
-        </p:style>
-        <p:txBody>
-          <a:bodyPr wrap="square" rtlCol="0" anchor="ctr">
-            <a:normAutofit/>
-          </a:bodyPr>
-          <a:lstStyle/>
-          <a:p>
-            <a:pPr algn="ctr"/>
-            <a:r>
-              <a:rPr sz="1150" b="0" i="0" dirty="0">
-                <a:solidFill>
-                  <a:schemeClr val="tx1"/>
-                </a:solidFill>
-                <a:latin typeface="Calibri"/>
-              </a:rPr>
-              <a:t>6 To 9 In
-3 Points</a:t>
-            </a:r>
-          </a:p>
-        </p:txBody>
-      </p:sp>
-      <p:cxnSp>
-        <p:nvCxnSpPr>
-          <p:cNvPr id="17" name="Connector 16"/>
-          <p:cNvCxnSpPr/>
-          <p:nvPr/>
-        </p:nvCxnSpPr>
-        <p:spPr>
-          <a:xfrm>
-            <a:off x="6217920" y="4041648"/>
-            <a:ext cx="1243584" cy="420624"/>
-          </a:xfrm>
-          <a:prstGeom prst="line">
-            <a:avLst/>
-          </a:prstGeom>
-          <a:ln w="19050">
-            <a:solidFill>
-              <a:srgbClr val="1F2937"/>
-            </a:solidFill>
-            <a:tailEnd type="triangle" w="med" len="med"/>
-          </a:ln>
-        </p:spPr>
-        <p:style>
-          <a:lnRef idx="2">
-            <a:schemeClr val="accent1"/>
-          </a:lnRef>
-          <a:fillRef idx="0">
-            <a:schemeClr val="accent1"/>
-          </a:fillRef>
-          <a:effectRef idx="1">
-            <a:schemeClr val="accent1"/>
-          </a:effectRef>
-          <a:fontRef idx="minor">
-            <a:schemeClr val="tx1"/>
-          </a:fontRef>
-        </p:style>
-      </p:cxnSp>
-      <p:sp>
-        <p:nvSpPr>
-          <p:cNvPr id="18" name="Rounded Rectangle 17"/>
-          <p:cNvSpPr/>
-          <p:nvPr/>
-        </p:nvSpPr>
-        <p:spPr>
-          <a:xfrm>
-            <a:off x="8951976" y="4480560"/>
-            <a:ext cx="2560320" cy="777240"/>
-          </a:xfrm>
-          <a:prstGeom prst="roundRect">
-            <a:avLst>
-              <a:gd name="adj" fmla="val 10000"/>
-            </a:avLst>
-          </a:prstGeom>
-          <a:solidFill>
-            <a:srgbClr val="FFFFFF"/>
-          </a:solidFill>
-          <a:ln w="19050">
-            <a:solidFill>
-              <a:srgbClr val="1B7A6E"/>
-            </a:solidFill>
-          </a:ln>
-        </p:spPr>
-        <p:style>
-          <a:lnRef idx="1">
-            <a:schemeClr val="accent1"/>
-          </a:lnRef>
-          <a:fillRef idx="3">
-            <a:schemeClr val="accent1"/>
-          </a:fillRef>
-          <a:effectRef idx="2">
-            <a:schemeClr val="accent1"/>
-          </a:effectRef>
-          <a:fontRef idx="minor">
-            <a:schemeClr val="lt1"/>
-          </a:fontRef>
-        </p:style>
-        <p:txBody>
-          <a:bodyPr wrap="square" rtlCol="0" anchor="ctr">
-            <a:normAutofit/>
-          </a:bodyPr>
-          <a:lstStyle/>
-          <a:p>
-            <a:pPr algn="ctr"/>
-            <a:r>
-              <a:rPr sz="1150" b="0" i="0" dirty="0">
-                <a:solidFill>
-                  <a:schemeClr val="tx1"/>
-                </a:solidFill>
-                <a:latin typeface="Calibri"/>
-              </a:rPr>
-              <a:t>Over 9 In Or
-Hole Over 1 In
-4 Points</a:t>
-            </a:r>
-          </a:p>
-        </p:txBody>
-      </p:sp>
-      <p:cxnSp>
-        <p:nvCxnSpPr>
-          <p:cNvPr id="19" name="Connector 18"/>
-          <p:cNvCxnSpPr/>
-          <p:nvPr/>
-        </p:nvCxnSpPr>
-        <p:spPr>
-          <a:xfrm>
-            <a:off x="6446520" y="4041648"/>
-            <a:ext cx="3785616" cy="420624"/>
-          </a:xfrm>
-          <a:prstGeom prst="line">
-            <a:avLst/>
-          </a:prstGeom>
-          <a:ln w="19050">
-            <a:solidFill>
-              <a:srgbClr val="1F2937"/>
-            </a:solidFill>
-            <a:tailEnd type="triangle" w="med" len="med"/>
-          </a:ln>
-        </p:spPr>
-        <p:style>
-          <a:lnRef idx="2">
-            <a:schemeClr val="accent1"/>
-          </a:lnRef>
-          <a:fillRef idx="0">
-            <a:schemeClr val="accent1"/>
-          </a:fillRef>
-          <a:effectRef idx="1">
-            <a:schemeClr val="accent1"/>
-          </a:effectRef>
-          <a:fontRef idx="minor">
-            <a:schemeClr val="tx1"/>
-          </a:fontRef>
-        </p:style>
-      </p:cxnSp>
-      <p:sp>
-        <p:nvSpPr>
-          <p:cNvPr id="20" name="Rounded Rectangle 19"/>
-          <p:cNvSpPr/>
-          <p:nvPr/>
-        </p:nvSpPr>
-        <p:spPr>
-          <a:xfrm>
-            <a:off x="4800600" y="5440680"/>
-            <a:ext cx="2560320" cy="731520"/>
-          </a:xfrm>
-          <a:prstGeom prst="roundRect">
-            <a:avLst>
-              <a:gd name="adj" fmla="val 10000"/>
-            </a:avLst>
-          </a:prstGeom>
-          <a:solidFill>
-            <a:srgbClr val="FFFFFF"/>
-          </a:solidFill>
-          <a:ln w="19050">
-            <a:solidFill>
-              <a:srgbClr val="1B7A6E"/>
-            </a:solidFill>
-          </a:ln>
-        </p:spPr>
-        <p:style>
-          <a:lnRef idx="1">
-            <a:schemeClr val="accent1"/>
-          </a:lnRef>
-          <a:fillRef idx="3">
-            <a:schemeClr val="accent1"/>
-          </a:fillRef>
-          <a:effectRef idx="2">
-            <a:schemeClr val="accent1"/>
-          </a:effectRef>
-          <a:fontRef idx="minor">
-            <a:schemeClr val="lt1"/>
-          </a:fontRef>
-        </p:style>
-        <p:txBody>
-          <a:bodyPr wrap="square" rtlCol="0" anchor="ctr">
-            <a:normAutofit/>
-          </a:bodyPr>
-          <a:lstStyle/>
-          <a:p>
-            <a:pPr algn="ctr"/>
-            <a:r>
-              <a:rPr sz="1150" b="0" i="0" dirty="0">
-                <a:solidFill>
-                  <a:schemeClr val="tx1"/>
-                </a:solidFill>
-                <a:latin typeface="Calibri"/>
-              </a:rPr>
-              <a:t>Roll Grade From Total + Length + Weight</a:t>
-            </a:r>
-          </a:p>
-        </p:txBody>
-      </p:sp>
-      <p:cxnSp>
-        <p:nvCxnSpPr>
-          <p:cNvPr id="21" name="Connector 20"/>
-          <p:cNvCxnSpPr/>
-          <p:nvPr/>
-        </p:nvCxnSpPr>
-        <p:spPr>
-          <a:xfrm>
-            <a:off x="1920239" y="5276088"/>
-            <a:ext cx="0" cy="118872"/>
-          </a:xfrm>
-          <a:prstGeom prst="line">
-            <a:avLst/>
-          </a:prstGeom>
-          <a:ln w="19050">
-            <a:solidFill>
-              <a:srgbClr val="1F2937"/>
-            </a:solidFill>
-            <a:tailEnd type="triangle" w="med" len="med"/>
-          </a:ln>
-        </p:spPr>
-        <p:style>
-          <a:lnRef idx="2">
-            <a:schemeClr val="accent1"/>
-          </a:lnRef>
-          <a:fillRef idx="0">
-            <a:schemeClr val="accent1"/>
-          </a:fillRef>
-          <a:effectRef idx="1">
-            <a:schemeClr val="accent1"/>
-          </a:effectRef>
-          <a:fontRef idx="minor">
-            <a:schemeClr val="tx1"/>
-          </a:fontRef>
-        </p:style>
-      </p:cxnSp>
-      <p:cxnSp>
-        <p:nvCxnSpPr>
-          <p:cNvPr id="22" name="Connector 21"/>
-          <p:cNvCxnSpPr/>
-          <p:nvPr/>
-        </p:nvCxnSpPr>
-        <p:spPr>
-          <a:xfrm>
-            <a:off x="4690872" y="5276088"/>
-            <a:ext cx="0" cy="118872"/>
-          </a:xfrm>
-          <a:prstGeom prst="line">
-            <a:avLst/>
-          </a:prstGeom>
-          <a:ln w="19050">
-            <a:solidFill>
-              <a:srgbClr val="1F2937"/>
-            </a:solidFill>
-            <a:tailEnd type="triangle" w="med" len="med"/>
-          </a:ln>
-        </p:spPr>
-        <p:style>
-          <a:lnRef idx="2">
-            <a:schemeClr val="accent1"/>
-          </a:lnRef>
-          <a:fillRef idx="0">
-            <a:schemeClr val="accent1"/>
-          </a:fillRef>
-          <a:effectRef idx="1">
-            <a:schemeClr val="accent1"/>
-          </a:effectRef>
-          <a:fontRef idx="minor">
-            <a:schemeClr val="tx1"/>
-          </a:fontRef>
-        </p:style>
-      </p:cxnSp>
-      <p:cxnSp>
-        <p:nvCxnSpPr>
-          <p:cNvPr id="23" name="Connector 22"/>
-          <p:cNvCxnSpPr/>
-          <p:nvPr/>
-        </p:nvCxnSpPr>
-        <p:spPr>
-          <a:xfrm>
-            <a:off x="7461504" y="5276088"/>
-            <a:ext cx="0" cy="118872"/>
-          </a:xfrm>
-          <a:prstGeom prst="line">
-            <a:avLst/>
-          </a:prstGeom>
-          <a:ln w="19050">
-            <a:solidFill>
-              <a:srgbClr val="1F2937"/>
-            </a:solidFill>
-            <a:tailEnd type="triangle" w="med" len="med"/>
-          </a:ln>
-        </p:spPr>
-        <p:style>
-          <a:lnRef idx="2">
-            <a:schemeClr val="accent1"/>
-          </a:lnRef>
-          <a:fillRef idx="0">
-            <a:schemeClr val="accent1"/>
-          </a:fillRef>
-          <a:effectRef idx="1">
-            <a:schemeClr val="accent1"/>
-          </a:effectRef>
-          <a:fontRef idx="minor">
-            <a:schemeClr val="tx1"/>
-          </a:fontRef>
-        </p:style>
-      </p:cxnSp>
-      <p:cxnSp>
-        <p:nvCxnSpPr>
-          <p:cNvPr id="24" name="Connector 23"/>
-          <p:cNvCxnSpPr/>
-          <p:nvPr/>
-        </p:nvCxnSpPr>
-        <p:spPr>
-          <a:xfrm>
-            <a:off x="10232136" y="5276088"/>
-            <a:ext cx="0" cy="118872"/>
-          </a:xfrm>
-          <a:prstGeom prst="line">
-            <a:avLst/>
-          </a:prstGeom>
-          <a:ln w="19050">
-            <a:solidFill>
-              <a:srgbClr val="1F2937"/>
-            </a:solidFill>
-            <a:tailEnd type="triangle" w="med" len="med"/>
-          </a:ln>
-        </p:spPr>
-        <p:style>
-          <a:lnRef idx="2">
-            <a:schemeClr val="accent1"/>
-          </a:lnRef>
-          <a:fillRef idx="0">
-            <a:schemeClr val="accent1"/>
-          </a:fillRef>
-          <a:effectRef idx="1">
-            <a:schemeClr val="accent1"/>
-          </a:effectRef>
-          <a:fontRef idx="minor">
-            <a:schemeClr val="tx1"/>
-          </a:fontRef>
-        </p:style>
-      </p:cxnSp>
-      <p:cxnSp>
-        <p:nvCxnSpPr>
-          <p:cNvPr id="25" name="Connector 24"/>
-          <p:cNvCxnSpPr/>
-          <p:nvPr/>
-        </p:nvCxnSpPr>
-        <p:spPr>
-          <a:xfrm>
-            <a:off x="1920240" y="5394960"/>
-            <a:ext cx="8311896" cy="0"/>
-          </a:xfrm>
-          <a:prstGeom prst="line">
-            <a:avLst/>
-          </a:prstGeom>
-          <a:ln w="19050">
-            <a:solidFill>
-              <a:srgbClr val="1F2937"/>
-            </a:solidFill>
-            <a:tailEnd type="triangle" w="med" len="med"/>
-          </a:ln>
-        </p:spPr>
-        <p:style>
-          <a:lnRef idx="2">
-            <a:schemeClr val="accent1"/>
-          </a:lnRef>
-          <a:fillRef idx="0">
-            <a:schemeClr val="accent1"/>
-          </a:fillRef>
-          <a:effectRef idx="1">
-            <a:schemeClr val="accent1"/>
-          </a:effectRef>
-          <a:fontRef idx="minor">
-            <a:schemeClr val="tx1"/>
-          </a:fontRef>
-        </p:style>
-      </p:cxnSp>
-      <p:cxnSp>
-        <p:nvCxnSpPr>
-          <p:cNvPr id="26" name="Connector 25"/>
-          <p:cNvCxnSpPr/>
-          <p:nvPr/>
-        </p:nvCxnSpPr>
-        <p:spPr>
-          <a:xfrm>
-            <a:off x="6080760" y="5394960"/>
-            <a:ext cx="0" cy="27432"/>
-          </a:xfrm>
-          <a:prstGeom prst="line">
-            <a:avLst/>
-          </a:prstGeom>
-          <a:ln w="19050">
-            <a:solidFill>
-              <a:srgbClr val="1F2937"/>
-            </a:solidFill>
-            <a:tailEnd type="triangle" w="med" len="med"/>
-          </a:ln>
-        </p:spPr>
-        <p:style>
-          <a:lnRef idx="2">
-            <a:schemeClr val="accent1"/>
-          </a:lnRef>
-          <a:fillRef idx="0">
-            <a:schemeClr val="accent1"/>
-          </a:fillRef>
-          <a:effectRef idx="1">
-            <a:schemeClr val="accent1"/>
-          </a:effectRef>
-          <a:fontRef idx="minor">
-            <a:schemeClr val="tx1"/>
-          </a:fontRef>
-        </p:style>
-      </p:cxnSp>
-    </p:spTree>
-  </p:cSld>
-  <p:clrMapOvr>
-    <a:masterClrMapping/>
-  </p:clrMapOvr>
-</p:sld>
-</file>
-
-<file path=ppt/slides/slide31.xml><?xml version="1.0" encoding="utf-8"?>
-<p:sld xmlns:a="http://schemas.openxmlformats.org/drawingml/2006/main" xmlns:r="http://schemas.openxmlformats.org/officeDocument/2006/relationships" xmlns:p="http://schemas.openxmlformats.org/presentationml/2006/main">
-  <p:cSld>
-    <p:bg>
-      <p:bgPr>
-        <a:solidFill>
-          <a:srgbClr val="085859"/>
-        </a:solidFill>
-        <a:effectLst/>
-      </p:bgPr>
-    </p:bg>
-    <p:spTree>
-      <p:nvGrpSpPr>
-        <p:cNvPr id="1" name=""/>
-        <p:cNvGrpSpPr/>
-        <p:nvPr/>
-      </p:nvGrpSpPr>
-      <p:grpSpPr>
-        <a:xfrm>
-          <a:off x="0" y="0"/>
-          <a:ext cx="0" cy="0"/>
-          <a:chOff x="0" y="0"/>
-          <a:chExt cx="0" cy="0"/>
-        </a:xfrm>
-      </p:grpSpPr>
-      <p:sp>
-        <p:nvSpPr>
-          <p:cNvPr id="2" name="TextBox 1"/>
-          <p:cNvSpPr txBox="1"/>
-          <p:nvPr/>
-        </p:nvSpPr>
-        <p:spPr>
-          <a:xfrm>
-            <a:off x="548640" y="6419088"/>
-            <a:ext cx="9144000" cy="274320"/>
-          </a:xfrm>
-          <a:prstGeom prst="rect">
-            <a:avLst/>
-          </a:prstGeom>
-          <a:noFill/>
-        </p:spPr>
-        <p:txBody>
-          <a:bodyPr wrap="square">
-            <a:spAutoFit/>
-          </a:bodyPr>
-          <a:lstStyle/>
-          <a:p>
-            <a:pPr algn="l"/>
-            <a:r>
-              <a:rPr sz="900" b="0" i="0">
-                <a:solidFill>
-                  <a:srgbClr val="F5F7F2"/>
-                </a:solidFill>
-                <a:latin typeface="Calibri"/>
-              </a:rPr>
-              <a:t>Defect-to-Delivery  |  FYDP-I  •  Group: 262-034</a:t>
-            </a:r>
-          </a:p>
-        </p:txBody>
-      </p:sp>
-      <p:sp>
-        <p:nvSpPr>
-          <p:cNvPr id="3" name="TextBox 2"/>
-          <p:cNvSpPr txBox="1"/>
-          <p:nvPr/>
-        </p:nvSpPr>
-        <p:spPr>
-          <a:xfrm>
-            <a:off x="10972800" y="6419088"/>
-            <a:ext cx="640080" cy="274320"/>
-          </a:xfrm>
-          <a:prstGeom prst="rect">
-            <a:avLst/>
-          </a:prstGeom>
-          <a:noFill/>
-        </p:spPr>
-        <p:txBody>
-          <a:bodyPr wrap="none">
-            <a:spAutoFit/>
-          </a:bodyPr>
-          <a:lstStyle/>
-          <a:p>
-            <a:pPr algn="r"/>
-            <a:r>
-              <a:rPr sz="900">
-                <a:solidFill>
-                  <a:srgbClr val="F5F7F2"/>
-                </a:solidFill>
-                <a:latin typeface="Calibri"/>
-              </a:rPr>
-              <a:t>26 / 35</a:t>
-            </a:r>
-          </a:p>
-        </p:txBody>
-      </p:sp>
-      <p:sp>
-        <p:nvSpPr>
-          <p:cNvPr id="5" name="TextBox 4"/>
-          <p:cNvSpPr txBox="1"/>
-          <p:nvPr/>
-        </p:nvSpPr>
-        <p:spPr>
-          <a:xfrm>
-            <a:off x="548640" y="320040"/>
-            <a:ext cx="11064240" cy="822960"/>
-          </a:xfrm>
-          <a:prstGeom prst="rect">
-            <a:avLst/>
-          </a:prstGeom>
-          <a:noFill/>
-        </p:spPr>
-        <p:txBody>
-          <a:bodyPr wrap="square">
-            <a:spAutoFit/>
-          </a:bodyPr>
-          <a:lstStyle/>
-          <a:p>
-            <a:pPr algn="l"/>
-            <a:r>
-              <a:rPr sz="3400" b="1" i="0">
-                <a:solidFill>
-                  <a:srgbClr val="F5F7F2"/>
-                </a:solidFill>
-                <a:latin typeface="Georgia"/>
-              </a:rPr>
-              <a:t>Standards &amp; Compliance</a:t>
-            </a:r>
-          </a:p>
-        </p:txBody>
-      </p:sp>
-      <p:sp>
-        <p:nvSpPr>
-          <p:cNvPr id="7" name="Rounded Rectangle 6"/>
-          <p:cNvSpPr/>
-          <p:nvPr/>
-        </p:nvSpPr>
-        <p:spPr>
-          <a:xfrm>
-            <a:off x="548640" y="1554480"/>
-            <a:ext cx="3520440" cy="2651760"/>
-          </a:xfrm>
-          <a:prstGeom prst="roundRect">
-            <a:avLst>
-              <a:gd name="adj" fmla="val 6000"/>
-            </a:avLst>
-          </a:prstGeom>
-          <a:solidFill>
-            <a:srgbClr val="FFFFFF"/>
-          </a:solidFill>
-          <a:ln w="15875">
-            <a:solidFill>
-              <a:srgbClr val="D8D2C2"/>
-            </a:solidFill>
-          </a:ln>
-        </p:spPr>
-        <p:style>
-          <a:lnRef idx="1">
-            <a:schemeClr val="accent1"/>
-          </a:lnRef>
-          <a:fillRef idx="3">
-            <a:schemeClr val="accent1"/>
-          </a:fillRef>
-          <a:effectRef idx="2">
-            <a:schemeClr val="accent1"/>
-          </a:effectRef>
-          <a:fontRef idx="minor">
-            <a:schemeClr val="lt1"/>
-          </a:fontRef>
-        </p:style>
-        <p:txBody>
-          <a:bodyPr rtlCol="0" anchor="ctr"/>
-          <a:lstStyle/>
-          <a:p>
-            <a:pPr algn="ctr"/>
-            <a:endParaRPr/>
-          </a:p>
-        </p:txBody>
-      </p:sp>
-      <p:sp>
-        <p:nvSpPr>
-          <p:cNvPr id="9" name="Oval 8"/>
-          <p:cNvSpPr/>
-          <p:nvPr/>
-        </p:nvSpPr>
-        <p:spPr>
-          <a:xfrm>
-            <a:off x="804672" y="1847088"/>
-            <a:ext cx="475488" cy="475488"/>
-          </a:xfrm>
-          <a:prstGeom prst="ellipse">
-            <a:avLst/>
-          </a:prstGeom>
-          <a:solidFill>
-            <a:srgbClr val="2E9E5B"/>
-          </a:solidFill>
-          <a:ln>
-            <a:noFill/>
-          </a:ln>
-        </p:spPr>
-        <p:style>
-          <a:lnRef idx="1">
-            <a:schemeClr val="accent1"/>
-          </a:lnRef>
-          <a:fillRef idx="3">
-            <a:schemeClr val="accent1"/>
-          </a:fillRef>
-          <a:effectRef idx="2">
-            <a:schemeClr val="accent1"/>
-          </a:effectRef>
-          <a:fontRef idx="minor">
-            <a:schemeClr val="lt1"/>
-          </a:fontRef>
-        </p:style>
-        <p:txBody>
-          <a:bodyPr wrap="square" rtlCol="0" anchor="ctr"/>
-          <a:lstStyle/>
-          <a:p>
-            <a:pPr algn="ctr"/>
-            <a:r>
-              <a:rPr sz="1700" b="1" i="0">
-                <a:solidFill>
-                  <a:srgbClr val="F5F7F2"/>
-                </a:solidFill>
-                <a:latin typeface="Calibri"/>
-              </a:rPr>
-              <a:t>1</a:t>
-            </a:r>
-          </a:p>
-        </p:txBody>
-      </p:sp>
-      <p:sp>
-        <p:nvSpPr>
-          <p:cNvPr id="10" name="TextBox 9"/>
-          <p:cNvSpPr txBox="1"/>
-          <p:nvPr/>
-        </p:nvSpPr>
-        <p:spPr>
-          <a:xfrm>
-            <a:off x="1417319" y="1810512"/>
-            <a:ext cx="2468880" cy="2240279"/>
-          </a:xfrm>
-          <a:prstGeom prst="rect">
-            <a:avLst/>
-          </a:prstGeom>
-          <a:noFill/>
-        </p:spPr>
-        <p:txBody>
-          <a:bodyPr wrap="square">
-            <a:normAutofit/>
-          </a:bodyPr>
-          <a:lstStyle/>
-          <a:p>
-            <a:pPr algn="l">
-              <a:spcAft>
-                <a:spcPts val="600"/>
-              </a:spcAft>
-            </a:pPr>
-            <a:r>
-              <a:rPr sz="1600" b="1" i="0" dirty="0">
-                <a:latin typeface="Calibri"/>
-              </a:rPr>
-              <a:t>Software</a:t>
-            </a:r>
-          </a:p>
-          <a:p>
-            <a:pPr algn="l">
-              <a:spcBef>
-                <a:spcPts val="0"/>
-              </a:spcBef>
-              <a:spcAft>
-                <a:spcPts val="300"/>
-              </a:spcAft>
-            </a:pPr>
-            <a:r>
-              <a:rPr sz="1350" b="0" i="0" dirty="0">
-                <a:latin typeface="Calibri"/>
-              </a:rPr>
-              <a:t>Reusable Packages, Central Configuration, Version Control With Reviewable Manifests, Seeded Deterministic Training, COCO / YOLO Interchange Formats.</a:t>
-            </a:r>
-          </a:p>
-        </p:txBody>
-      </p:sp>
-      <p:sp>
-        <p:nvSpPr>
-          <p:cNvPr id="11" name="Rounded Rectangle 10"/>
-          <p:cNvSpPr/>
-          <p:nvPr/>
-        </p:nvSpPr>
-        <p:spPr>
-          <a:xfrm>
-            <a:off x="4251959" y="1554480"/>
-            <a:ext cx="3520440" cy="2651760"/>
-          </a:xfrm>
-          <a:prstGeom prst="roundRect">
-            <a:avLst>
-              <a:gd name="adj" fmla="val 6000"/>
-            </a:avLst>
-          </a:prstGeom>
-          <a:solidFill>
-            <a:srgbClr val="FFFFFF"/>
-          </a:solidFill>
-          <a:ln w="15875">
-            <a:solidFill>
-              <a:srgbClr val="D8D2C2"/>
-            </a:solidFill>
-          </a:ln>
-        </p:spPr>
-        <p:style>
-          <a:lnRef idx="1">
-            <a:schemeClr val="accent1"/>
-          </a:lnRef>
-          <a:fillRef idx="3">
-            <a:schemeClr val="accent1"/>
-          </a:fillRef>
-          <a:effectRef idx="2">
-            <a:schemeClr val="accent1"/>
-          </a:effectRef>
-          <a:fontRef idx="minor">
-            <a:schemeClr val="lt1"/>
-          </a:fontRef>
-        </p:style>
-        <p:txBody>
-          <a:bodyPr rtlCol="0" anchor="ctr"/>
-          <a:lstStyle/>
-          <a:p>
-            <a:pPr algn="ctr"/>
-            <a:endParaRPr/>
-          </a:p>
-        </p:txBody>
-      </p:sp>
-      <p:sp>
-        <p:nvSpPr>
-          <p:cNvPr id="13" name="Oval 12"/>
-          <p:cNvSpPr/>
-          <p:nvPr/>
-        </p:nvSpPr>
-        <p:spPr>
-          <a:xfrm>
-            <a:off x="4507992" y="1847088"/>
-            <a:ext cx="475488" cy="475488"/>
-          </a:xfrm>
-          <a:prstGeom prst="ellipse">
-            <a:avLst/>
-          </a:prstGeom>
-          <a:solidFill>
-            <a:srgbClr val="2E9E5B"/>
-          </a:solidFill>
-          <a:ln>
-            <a:noFill/>
-          </a:ln>
-        </p:spPr>
-        <p:style>
-          <a:lnRef idx="1">
-            <a:schemeClr val="accent1"/>
-          </a:lnRef>
-          <a:fillRef idx="3">
-            <a:schemeClr val="accent1"/>
-          </a:fillRef>
-          <a:effectRef idx="2">
-            <a:schemeClr val="accent1"/>
-          </a:effectRef>
-          <a:fontRef idx="minor">
-            <a:schemeClr val="lt1"/>
-          </a:fontRef>
-        </p:style>
-        <p:txBody>
-          <a:bodyPr wrap="square" rtlCol="0" anchor="ctr"/>
-          <a:lstStyle/>
-          <a:p>
-            <a:pPr algn="ctr"/>
-            <a:r>
-              <a:rPr sz="1700" b="1" i="0">
-                <a:solidFill>
-                  <a:srgbClr val="F5F7F2"/>
-                </a:solidFill>
-                <a:latin typeface="Calibri"/>
-              </a:rPr>
-              <a:t>2</a:t>
-            </a:r>
-          </a:p>
-        </p:txBody>
-      </p:sp>
-      <p:sp>
-        <p:nvSpPr>
-          <p:cNvPr id="14" name="TextBox 13"/>
-          <p:cNvSpPr txBox="1"/>
-          <p:nvPr/>
-        </p:nvSpPr>
-        <p:spPr>
-          <a:xfrm>
-            <a:off x="5120640" y="1810512"/>
-            <a:ext cx="2468880" cy="2240279"/>
-          </a:xfrm>
-          <a:prstGeom prst="rect">
-            <a:avLst/>
-          </a:prstGeom>
-          <a:noFill/>
-        </p:spPr>
-        <p:txBody>
-          <a:bodyPr wrap="square">
-            <a:normAutofit/>
-          </a:bodyPr>
-          <a:lstStyle/>
-          <a:p>
-            <a:pPr algn="l">
-              <a:spcAft>
-                <a:spcPts val="600"/>
-              </a:spcAft>
-            </a:pPr>
-            <a:r>
-              <a:rPr sz="1600" b="1" i="0" dirty="0">
-                <a:latin typeface="Calibri"/>
-              </a:rPr>
-              <a:t>Hardware</a:t>
-            </a:r>
-          </a:p>
-          <a:p>
-            <a:pPr algn="l">
-              <a:spcBef>
-                <a:spcPts val="0"/>
-              </a:spcBef>
-              <a:spcAft>
-                <a:spcPts val="300"/>
-              </a:spcAft>
-            </a:pPr>
-            <a:r>
-              <a:rPr sz="1350" b="0" i="0" dirty="0">
-                <a:latin typeface="Calibri"/>
-              </a:rPr>
-              <a:t>Fixed-Geometry Calibration For Grading, Jetson-Class Edge Device With </a:t>
-            </a:r>
-            <a:r>
-              <a:rPr sz="1350" b="0" i="0" dirty="0" err="1">
-                <a:latin typeface="Calibri"/>
-              </a:rPr>
-              <a:t>TensorRT</a:t>
-            </a:r>
-            <a:r>
-              <a:rPr sz="1350" b="0" i="0" dirty="0">
-                <a:latin typeface="Calibri"/>
-              </a:rPr>
-              <a:t>, Factory-Safe Power Envelope.</a:t>
-            </a:r>
-          </a:p>
-        </p:txBody>
-      </p:sp>
-      <p:sp>
-        <p:nvSpPr>
-          <p:cNvPr id="15" name="Rounded Rectangle 14"/>
-          <p:cNvSpPr/>
-          <p:nvPr/>
-        </p:nvSpPr>
-        <p:spPr>
-          <a:xfrm>
-            <a:off x="7955279" y="1554480"/>
-            <a:ext cx="3520440" cy="2651760"/>
-          </a:xfrm>
-          <a:prstGeom prst="roundRect">
-            <a:avLst>
-              <a:gd name="adj" fmla="val 6000"/>
-            </a:avLst>
-          </a:prstGeom>
-          <a:solidFill>
-            <a:srgbClr val="FFFFFF"/>
-          </a:solidFill>
-          <a:ln w="15875">
-            <a:solidFill>
-              <a:srgbClr val="D8D2C2"/>
-            </a:solidFill>
-          </a:ln>
-        </p:spPr>
-        <p:style>
-          <a:lnRef idx="1">
-            <a:schemeClr val="accent1"/>
-          </a:lnRef>
-          <a:fillRef idx="3">
-            <a:schemeClr val="accent1"/>
-          </a:fillRef>
-          <a:effectRef idx="2">
-            <a:schemeClr val="accent1"/>
-          </a:effectRef>
-          <a:fontRef idx="minor">
-            <a:schemeClr val="lt1"/>
-          </a:fontRef>
-        </p:style>
-        <p:txBody>
-          <a:bodyPr rtlCol="0" anchor="ctr"/>
-          <a:lstStyle/>
-          <a:p>
-            <a:pPr algn="ctr"/>
-            <a:endParaRPr/>
-          </a:p>
-        </p:txBody>
-      </p:sp>
-      <p:sp>
-        <p:nvSpPr>
-          <p:cNvPr id="17" name="Oval 16"/>
-          <p:cNvSpPr/>
-          <p:nvPr/>
-        </p:nvSpPr>
-        <p:spPr>
-          <a:xfrm>
-            <a:off x="8211311" y="1847088"/>
-            <a:ext cx="475488" cy="475488"/>
-          </a:xfrm>
-          <a:prstGeom prst="ellipse">
-            <a:avLst/>
-          </a:prstGeom>
-          <a:solidFill>
-            <a:srgbClr val="2E9E5B"/>
-          </a:solidFill>
-          <a:ln>
-            <a:noFill/>
-          </a:ln>
-        </p:spPr>
-        <p:style>
-          <a:lnRef idx="1">
-            <a:schemeClr val="accent1"/>
-          </a:lnRef>
-          <a:fillRef idx="3">
-            <a:schemeClr val="accent1"/>
-          </a:fillRef>
-          <a:effectRef idx="2">
-            <a:schemeClr val="accent1"/>
-          </a:effectRef>
-          <a:fontRef idx="minor">
-            <a:schemeClr val="lt1"/>
-          </a:fontRef>
-        </p:style>
-        <p:txBody>
-          <a:bodyPr wrap="square" rtlCol="0" anchor="ctr"/>
-          <a:lstStyle/>
-          <a:p>
-            <a:pPr algn="ctr"/>
-            <a:r>
-              <a:rPr sz="1700" b="1" i="0">
-                <a:solidFill>
-                  <a:srgbClr val="F5F7F2"/>
-                </a:solidFill>
-                <a:latin typeface="Calibri"/>
-              </a:rPr>
-              <a:t>3</a:t>
-            </a:r>
-          </a:p>
-        </p:txBody>
-      </p:sp>
-      <p:sp>
-        <p:nvSpPr>
-          <p:cNvPr id="18" name="TextBox 17"/>
-          <p:cNvSpPr txBox="1"/>
-          <p:nvPr/>
-        </p:nvSpPr>
-        <p:spPr>
-          <a:xfrm>
-            <a:off x="8823959" y="1810512"/>
-            <a:ext cx="2468880" cy="2240279"/>
-          </a:xfrm>
-          <a:prstGeom prst="rect">
-            <a:avLst/>
-          </a:prstGeom>
-          <a:noFill/>
-        </p:spPr>
-        <p:txBody>
-          <a:bodyPr wrap="square">
-            <a:normAutofit/>
-          </a:bodyPr>
-          <a:lstStyle/>
-          <a:p>
-            <a:pPr algn="l">
-              <a:spcAft>
-                <a:spcPts val="600"/>
-              </a:spcAft>
-            </a:pPr>
-            <a:r>
-              <a:rPr sz="1600" b="1" i="0" dirty="0">
-                <a:latin typeface="Calibri"/>
-              </a:rPr>
-              <a:t>Communication</a:t>
-            </a:r>
-          </a:p>
-          <a:p>
-            <a:pPr algn="l">
-              <a:spcBef>
-                <a:spcPts val="0"/>
-              </a:spcBef>
-              <a:spcAft>
-                <a:spcPts val="300"/>
-              </a:spcAft>
-            </a:pPr>
-            <a:r>
-              <a:rPr sz="1350" b="0" i="0" dirty="0">
-                <a:latin typeface="Calibri"/>
-              </a:rPr>
-              <a:t>REST File Handoff To The MES And Dashboard Over HTTP; No Proprietary Protocols.</a:t>
-            </a:r>
-          </a:p>
-        </p:txBody>
-      </p:sp>
-    </p:spTree>
-  </p:cSld>
-  <p:clrMapOvr>
-    <a:masterClrMapping/>
-  </p:clrMapOvr>
-</p:sld>
-</file>
-
-<file path=ppt/slides/slide32.xml><?xml version="1.0" encoding="utf-8"?>
-<p:sld xmlns:a="http://schemas.openxmlformats.org/drawingml/2006/main" xmlns:r="http://schemas.openxmlformats.org/officeDocument/2006/relationships" xmlns:p="http://schemas.openxmlformats.org/presentationml/2006/main">
-  <p:cSld>
-    <p:bg>
-      <p:bgPr>
-        <a:solidFill>
-          <a:srgbClr val="085859"/>
-        </a:solidFill>
-        <a:effectLst/>
-      </p:bgPr>
-    </p:bg>
-    <p:spTree>
-      <p:nvGrpSpPr>
-        <p:cNvPr id="1" name=""/>
-        <p:cNvGrpSpPr/>
-        <p:nvPr/>
-      </p:nvGrpSpPr>
-      <p:grpSpPr>
-        <a:xfrm>
-          <a:off x="0" y="0"/>
-          <a:ext cx="0" cy="0"/>
-          <a:chOff x="0" y="0"/>
-          <a:chExt cx="0" cy="0"/>
-        </a:xfrm>
-      </p:grpSpPr>
-      <p:sp>
-        <p:nvSpPr>
-          <p:cNvPr id="2" name="TextBox 1"/>
-          <p:cNvSpPr txBox="1"/>
-          <p:nvPr/>
-        </p:nvSpPr>
-        <p:spPr>
-          <a:xfrm>
-            <a:off x="548640" y="6419088"/>
-            <a:ext cx="9144000" cy="274320"/>
-          </a:xfrm>
-          <a:prstGeom prst="rect">
-            <a:avLst/>
-          </a:prstGeom>
-          <a:noFill/>
-        </p:spPr>
-        <p:txBody>
-          <a:bodyPr wrap="square">
-            <a:spAutoFit/>
-          </a:bodyPr>
-          <a:lstStyle/>
-          <a:p>
-            <a:pPr algn="l"/>
-            <a:r>
-              <a:rPr sz="900" b="0" i="0">
-                <a:solidFill>
-                  <a:srgbClr val="F5F7F2"/>
-                </a:solidFill>
-                <a:latin typeface="Calibri"/>
-              </a:rPr>
-              <a:t>Defect-to-Delivery  |  FYDP-I  •  Group: 262-034</a:t>
-            </a:r>
-          </a:p>
-        </p:txBody>
-      </p:sp>
-      <p:sp>
-        <p:nvSpPr>
-          <p:cNvPr id="3" name="TextBox 2"/>
-          <p:cNvSpPr txBox="1"/>
-          <p:nvPr/>
-        </p:nvSpPr>
-        <p:spPr>
-          <a:xfrm>
-            <a:off x="10972800" y="6419088"/>
-            <a:ext cx="640080" cy="274320"/>
-          </a:xfrm>
-          <a:prstGeom prst="rect">
-            <a:avLst/>
-          </a:prstGeom>
-          <a:noFill/>
-        </p:spPr>
-        <p:txBody>
-          <a:bodyPr wrap="none">
-            <a:spAutoFit/>
-          </a:bodyPr>
-          <a:lstStyle/>
-          <a:p>
-            <a:pPr algn="r"/>
-            <a:r>
-              <a:rPr sz="900">
-                <a:solidFill>
-                  <a:srgbClr val="F5F7F2"/>
-                </a:solidFill>
-                <a:latin typeface="Calibri"/>
-              </a:rPr>
               <a:t>27 / 35</a:t>
             </a:r>
           </a:p>
@@ -20259,7 +14917,7 @@
 </p:sld>
 </file>
 
-<file path=ppt/slides/slide33.xml><?xml version="1.0" encoding="utf-8"?>
+<file path=ppt/slides/slide28.xml><?xml version="1.0" encoding="utf-8"?>
 <p:sld xmlns:a="http://schemas.openxmlformats.org/drawingml/2006/main" xmlns:r="http://schemas.openxmlformats.org/officeDocument/2006/relationships" xmlns:p="http://schemas.openxmlformats.org/presentationml/2006/main">
   <p:cSld>
     <p:bg>
@@ -20968,7 +15626,7 @@
 </p:sld>
 </file>
 
-<file path=ppt/slides/slide34.xml><?xml version="1.0" encoding="utf-8"?>
+<file path=ppt/slides/slide29.xml><?xml version="1.0" encoding="utf-8"?>
 <p:sld xmlns:a="http://schemas.openxmlformats.org/drawingml/2006/main" xmlns:r="http://schemas.openxmlformats.org/officeDocument/2006/relationships" xmlns:p="http://schemas.openxmlformats.org/presentationml/2006/main">
   <p:cSld>
     <p:bg>
@@ -21644,7 +16302,586 @@
 </p:sld>
 </file>
 
-<file path=ppt/slides/slide35.xml><?xml version="1.0" encoding="utf-8"?>
+<file path=ppt/slides/slide3.xml><?xml version="1.0" encoding="utf-8"?>
+<p:sld xmlns:a="http://schemas.openxmlformats.org/drawingml/2006/main" xmlns:r="http://schemas.openxmlformats.org/officeDocument/2006/relationships" xmlns:p="http://schemas.openxmlformats.org/presentationml/2006/main">
+  <p:cSld>
+    <p:bg>
+      <p:bgPr>
+        <a:solidFill>
+          <a:srgbClr val="085859"/>
+        </a:solidFill>
+        <a:effectLst/>
+      </p:bgPr>
+    </p:bg>
+    <p:spTree>
+      <p:nvGrpSpPr>
+        <p:cNvPr id="1" name=""/>
+        <p:cNvGrpSpPr/>
+        <p:nvPr/>
+      </p:nvGrpSpPr>
+      <p:grpSpPr>
+        <a:xfrm>
+          <a:off x="0" y="0"/>
+          <a:ext cx="0" cy="0"/>
+          <a:chOff x="0" y="0"/>
+          <a:chExt cx="0" cy="0"/>
+        </a:xfrm>
+      </p:grpSpPr>
+      <p:sp>
+        <p:nvSpPr>
+          <p:cNvPr id="2" name="TextBox 1"/>
+          <p:cNvSpPr txBox="1"/>
+          <p:nvPr/>
+        </p:nvSpPr>
+        <p:spPr>
+          <a:xfrm>
+            <a:off x="548640" y="6419088"/>
+            <a:ext cx="9144000" cy="274320"/>
+          </a:xfrm>
+          <a:prstGeom prst="rect">
+            <a:avLst/>
+          </a:prstGeom>
+          <a:noFill/>
+        </p:spPr>
+        <p:txBody>
+          <a:bodyPr wrap="square">
+            <a:spAutoFit/>
+          </a:bodyPr>
+          <a:lstStyle/>
+          <a:p>
+            <a:pPr algn="l"/>
+            <a:r>
+              <a:rPr sz="900" b="0" i="0">
+                <a:solidFill>
+                  <a:srgbClr val="F5F7F2"/>
+                </a:solidFill>
+                <a:latin typeface="Calibri"/>
+              </a:rPr>
+              <a:t>Defect-to-Delivery  |  FYDP-I  •  Group: 262-034</a:t>
+            </a:r>
+          </a:p>
+        </p:txBody>
+      </p:sp>
+      <p:sp>
+        <p:nvSpPr>
+          <p:cNvPr id="3" name="TextBox 2"/>
+          <p:cNvSpPr txBox="1"/>
+          <p:nvPr/>
+        </p:nvSpPr>
+        <p:spPr>
+          <a:xfrm>
+            <a:off x="10972800" y="6419088"/>
+            <a:ext cx="640080" cy="274320"/>
+          </a:xfrm>
+          <a:prstGeom prst="rect">
+            <a:avLst/>
+          </a:prstGeom>
+          <a:noFill/>
+        </p:spPr>
+        <p:txBody>
+          <a:bodyPr wrap="none">
+            <a:spAutoFit/>
+          </a:bodyPr>
+          <a:lstStyle/>
+          <a:p>
+            <a:pPr algn="r"/>
+            <a:r>
+              <a:rPr sz="900">
+                <a:solidFill>
+                  <a:srgbClr val="F5F7F2"/>
+                </a:solidFill>
+                <a:latin typeface="Calibri"/>
+              </a:rPr>
+              <a:t>3 / 35</a:t>
+            </a:r>
+          </a:p>
+        </p:txBody>
+      </p:sp>
+      <p:sp>
+        <p:nvSpPr>
+          <p:cNvPr id="5" name="TextBox 4"/>
+          <p:cNvSpPr txBox="1"/>
+          <p:nvPr/>
+        </p:nvSpPr>
+        <p:spPr>
+          <a:xfrm>
+            <a:off x="548640" y="320040"/>
+            <a:ext cx="11064240" cy="822960"/>
+          </a:xfrm>
+          <a:prstGeom prst="rect">
+            <a:avLst/>
+          </a:prstGeom>
+          <a:noFill/>
+        </p:spPr>
+        <p:txBody>
+          <a:bodyPr wrap="square">
+            <a:spAutoFit/>
+          </a:bodyPr>
+          <a:lstStyle/>
+          <a:p>
+            <a:pPr algn="l"/>
+            <a:r>
+              <a:rPr sz="3400" b="1" i="0">
+                <a:solidFill>
+                  <a:srgbClr val="F5F7F2"/>
+                </a:solidFill>
+                <a:latin typeface="Georgia"/>
+              </a:rPr>
+              <a:t>Agenda</a:t>
+            </a:r>
+          </a:p>
+        </p:txBody>
+      </p:sp>
+      <p:sp>
+        <p:nvSpPr>
+          <p:cNvPr id="7" name="Rounded Rectangle 6"/>
+          <p:cNvSpPr/>
+          <p:nvPr/>
+        </p:nvSpPr>
+        <p:spPr>
+          <a:xfrm>
+            <a:off x="822960" y="1737360"/>
+            <a:ext cx="3383280" cy="1005840"/>
+          </a:xfrm>
+          <a:prstGeom prst="roundRect">
+            <a:avLst/>
+          </a:prstGeom>
+          <a:solidFill>
+            <a:srgbClr val="FFFFFF"/>
+          </a:solidFill>
+          <a:ln w="15875">
+            <a:solidFill>
+              <a:srgbClr val="D8D2C2"/>
+            </a:solidFill>
+          </a:ln>
+        </p:spPr>
+        <p:style>
+          <a:lnRef idx="1">
+            <a:schemeClr val="accent1"/>
+          </a:lnRef>
+          <a:fillRef idx="3">
+            <a:schemeClr val="accent1"/>
+          </a:fillRef>
+          <a:effectRef idx="2">
+            <a:schemeClr val="accent1"/>
+          </a:effectRef>
+          <a:fontRef idx="minor">
+            <a:schemeClr val="lt1"/>
+          </a:fontRef>
+        </p:style>
+        <p:txBody>
+          <a:bodyPr wrap="square" rtlCol="0" anchor="ctr"/>
+          <a:lstStyle/>
+          <a:p>
+            <a:pPr algn="ctr"/>
+            <a:r>
+              <a:rPr sz="1600" b="1" i="0" dirty="0">
+                <a:solidFill>
+                  <a:schemeClr val="tx1"/>
+                </a:solidFill>
+                <a:latin typeface="Calibri"/>
+              </a:rPr>
+              <a:t>1.  </a:t>
+            </a:r>
+            <a:r>
+              <a:rPr sz="1600" b="1" dirty="0">
+                <a:solidFill>
+                  <a:schemeClr val="tx1"/>
+                </a:solidFill>
+                <a:latin typeface="Calibri"/>
+              </a:rPr>
+              <a:t>Problem &amp; Motivation</a:t>
+            </a:r>
+          </a:p>
+        </p:txBody>
+      </p:sp>
+      <p:sp>
+        <p:nvSpPr>
+          <p:cNvPr id="8" name="Rounded Rectangle 7"/>
+          <p:cNvSpPr/>
+          <p:nvPr/>
+        </p:nvSpPr>
+        <p:spPr>
+          <a:xfrm>
+            <a:off x="4526280" y="1737360"/>
+            <a:ext cx="3383280" cy="1005840"/>
+          </a:xfrm>
+          <a:prstGeom prst="roundRect">
+            <a:avLst/>
+          </a:prstGeom>
+          <a:solidFill>
+            <a:srgbClr val="FFFFFF"/>
+          </a:solidFill>
+          <a:ln w="15875">
+            <a:solidFill>
+              <a:srgbClr val="D8D2C2"/>
+            </a:solidFill>
+          </a:ln>
+        </p:spPr>
+        <p:style>
+          <a:lnRef idx="1">
+            <a:schemeClr val="accent1"/>
+          </a:lnRef>
+          <a:fillRef idx="3">
+            <a:schemeClr val="accent1"/>
+          </a:fillRef>
+          <a:effectRef idx="2">
+            <a:schemeClr val="accent1"/>
+          </a:effectRef>
+          <a:fontRef idx="minor">
+            <a:schemeClr val="lt1"/>
+          </a:fontRef>
+        </p:style>
+        <p:txBody>
+          <a:bodyPr wrap="square" rtlCol="0" anchor="ctr"/>
+          <a:lstStyle/>
+          <a:p>
+            <a:pPr algn="ctr"/>
+            <a:r>
+              <a:rPr sz="1600" b="1" i="0" dirty="0">
+                <a:solidFill>
+                  <a:schemeClr val="tx1"/>
+                </a:solidFill>
+                <a:latin typeface="Calibri"/>
+              </a:rPr>
+              <a:t>2.  </a:t>
+            </a:r>
+            <a:r>
+              <a:rPr sz="1600" b="1" dirty="0">
+                <a:solidFill>
+                  <a:schemeClr val="tx1"/>
+                </a:solidFill>
+                <a:latin typeface="Calibri"/>
+              </a:rPr>
+              <a:t>Objectives &amp; Methodology</a:t>
+            </a:r>
+          </a:p>
+        </p:txBody>
+      </p:sp>
+      <p:sp>
+        <p:nvSpPr>
+          <p:cNvPr id="9" name="Rounded Rectangle 8"/>
+          <p:cNvSpPr/>
+          <p:nvPr/>
+        </p:nvSpPr>
+        <p:spPr>
+          <a:xfrm>
+            <a:off x="8229600" y="1737360"/>
+            <a:ext cx="3383280" cy="1005840"/>
+          </a:xfrm>
+          <a:prstGeom prst="roundRect">
+            <a:avLst/>
+          </a:prstGeom>
+          <a:solidFill>
+            <a:srgbClr val="FFFFFF"/>
+          </a:solidFill>
+          <a:ln w="15875">
+            <a:solidFill>
+              <a:srgbClr val="D8D2C2"/>
+            </a:solidFill>
+          </a:ln>
+        </p:spPr>
+        <p:style>
+          <a:lnRef idx="1">
+            <a:schemeClr val="accent1"/>
+          </a:lnRef>
+          <a:fillRef idx="3">
+            <a:schemeClr val="accent1"/>
+          </a:fillRef>
+          <a:effectRef idx="2">
+            <a:schemeClr val="accent1"/>
+          </a:effectRef>
+          <a:fontRef idx="minor">
+            <a:schemeClr val="lt1"/>
+          </a:fontRef>
+        </p:style>
+        <p:txBody>
+          <a:bodyPr wrap="square" rtlCol="0" anchor="ctr"/>
+          <a:lstStyle/>
+          <a:p>
+            <a:pPr algn="ctr"/>
+            <a:r>
+              <a:rPr sz="1600" b="1" i="0" dirty="0">
+                <a:solidFill>
+                  <a:schemeClr val="tx1"/>
+                </a:solidFill>
+                <a:latin typeface="Calibri"/>
+              </a:rPr>
+              <a:t>3.  </a:t>
+            </a:r>
+            <a:r>
+              <a:rPr sz="1600" b="1" dirty="0">
+                <a:solidFill>
+                  <a:schemeClr val="tx1"/>
+                </a:solidFill>
+                <a:latin typeface="Calibri"/>
+              </a:rPr>
+              <a:t>Literature Review &amp; Gap Analysis</a:t>
+            </a:r>
+          </a:p>
+        </p:txBody>
+      </p:sp>
+      <p:sp>
+        <p:nvSpPr>
+          <p:cNvPr id="10" name="Rounded Rectangle 9"/>
+          <p:cNvSpPr/>
+          <p:nvPr/>
+        </p:nvSpPr>
+        <p:spPr>
+          <a:xfrm>
+            <a:off x="822960" y="3154680"/>
+            <a:ext cx="3383280" cy="1005840"/>
+          </a:xfrm>
+          <a:prstGeom prst="roundRect">
+            <a:avLst/>
+          </a:prstGeom>
+          <a:solidFill>
+            <a:srgbClr val="FFFFFF"/>
+          </a:solidFill>
+          <a:ln w="15875">
+            <a:solidFill>
+              <a:srgbClr val="D8D2C2"/>
+            </a:solidFill>
+          </a:ln>
+        </p:spPr>
+        <p:style>
+          <a:lnRef idx="1">
+            <a:schemeClr val="accent1"/>
+          </a:lnRef>
+          <a:fillRef idx="3">
+            <a:schemeClr val="accent1"/>
+          </a:fillRef>
+          <a:effectRef idx="2">
+            <a:schemeClr val="accent1"/>
+          </a:effectRef>
+          <a:fontRef idx="minor">
+            <a:schemeClr val="lt1"/>
+          </a:fontRef>
+        </p:style>
+        <p:txBody>
+          <a:bodyPr wrap="square" rtlCol="0" anchor="ctr"/>
+          <a:lstStyle/>
+          <a:p>
+            <a:pPr algn="ctr"/>
+            <a:r>
+              <a:rPr sz="1600" b="1" i="0" dirty="0">
+                <a:solidFill>
+                  <a:schemeClr val="tx1"/>
+                </a:solidFill>
+                <a:latin typeface="Calibri"/>
+              </a:rPr>
+              <a:t>4.  </a:t>
+            </a:r>
+            <a:r>
+              <a:rPr sz="1600" b="1" dirty="0">
+                <a:solidFill>
+                  <a:schemeClr val="tx1"/>
+                </a:solidFill>
+                <a:latin typeface="Calibri"/>
+              </a:rPr>
+              <a:t>Requirement Analysis &amp; Dataset Audit</a:t>
+            </a:r>
+          </a:p>
+        </p:txBody>
+      </p:sp>
+      <p:sp>
+        <p:nvSpPr>
+          <p:cNvPr id="11" name="Rounded Rectangle 10"/>
+          <p:cNvSpPr/>
+          <p:nvPr/>
+        </p:nvSpPr>
+        <p:spPr>
+          <a:xfrm>
+            <a:off x="4526280" y="3154680"/>
+            <a:ext cx="3383280" cy="1005840"/>
+          </a:xfrm>
+          <a:prstGeom prst="roundRect">
+            <a:avLst/>
+          </a:prstGeom>
+          <a:solidFill>
+            <a:srgbClr val="FFFFFF"/>
+          </a:solidFill>
+          <a:ln w="15875">
+            <a:solidFill>
+              <a:srgbClr val="D8D2C2"/>
+            </a:solidFill>
+          </a:ln>
+        </p:spPr>
+        <p:style>
+          <a:lnRef idx="1">
+            <a:schemeClr val="accent1"/>
+          </a:lnRef>
+          <a:fillRef idx="3">
+            <a:schemeClr val="accent1"/>
+          </a:fillRef>
+          <a:effectRef idx="2">
+            <a:schemeClr val="accent1"/>
+          </a:effectRef>
+          <a:fontRef idx="minor">
+            <a:schemeClr val="lt1"/>
+          </a:fontRef>
+        </p:style>
+        <p:txBody>
+          <a:bodyPr wrap="square" rtlCol="0" anchor="ctr"/>
+          <a:lstStyle/>
+          <a:p>
+            <a:pPr algn="ctr"/>
+            <a:r>
+              <a:rPr sz="1600" b="1" i="0" dirty="0">
+                <a:solidFill>
+                  <a:schemeClr val="tx1"/>
+                </a:solidFill>
+                <a:latin typeface="Calibri"/>
+              </a:rPr>
+              <a:t>5.  </a:t>
+            </a:r>
+            <a:r>
+              <a:rPr sz="1600" b="1" dirty="0">
+                <a:solidFill>
+                  <a:schemeClr val="tx1"/>
+                </a:solidFill>
+                <a:latin typeface="Calibri"/>
+              </a:rPr>
+              <a:t>System Design &amp; Diagrams</a:t>
+            </a:r>
+          </a:p>
+        </p:txBody>
+      </p:sp>
+      <p:sp>
+        <p:nvSpPr>
+          <p:cNvPr id="12" name="Rounded Rectangle 11"/>
+          <p:cNvSpPr/>
+          <p:nvPr/>
+        </p:nvSpPr>
+        <p:spPr>
+          <a:xfrm>
+            <a:off x="8229600" y="3154680"/>
+            <a:ext cx="3383280" cy="1005840"/>
+          </a:xfrm>
+          <a:prstGeom prst="roundRect">
+            <a:avLst/>
+          </a:prstGeom>
+          <a:solidFill>
+            <a:srgbClr val="FFFFFF"/>
+          </a:solidFill>
+          <a:ln w="15875">
+            <a:solidFill>
+              <a:srgbClr val="D8D2C2"/>
+            </a:solidFill>
+          </a:ln>
+        </p:spPr>
+        <p:style>
+          <a:lnRef idx="1">
+            <a:schemeClr val="accent1"/>
+          </a:lnRef>
+          <a:fillRef idx="3">
+            <a:schemeClr val="accent1"/>
+          </a:fillRef>
+          <a:effectRef idx="2">
+            <a:schemeClr val="accent1"/>
+          </a:effectRef>
+          <a:fontRef idx="minor">
+            <a:schemeClr val="lt1"/>
+          </a:fontRef>
+        </p:style>
+        <p:txBody>
+          <a:bodyPr wrap="square" rtlCol="0" anchor="ctr"/>
+          <a:lstStyle/>
+          <a:p>
+            <a:pPr algn="ctr"/>
+            <a:r>
+              <a:rPr sz="1600" b="1" i="0" dirty="0">
+                <a:solidFill>
+                  <a:schemeClr val="tx1"/>
+                </a:solidFill>
+                <a:latin typeface="Calibri"/>
+              </a:rPr>
+              <a:t>6.  </a:t>
+            </a:r>
+            <a:r>
+              <a:rPr sz="1600" b="1" dirty="0">
+                <a:solidFill>
+                  <a:schemeClr val="tx1"/>
+                </a:solidFill>
+                <a:latin typeface="Calibri"/>
+              </a:rPr>
+              <a:t>Standards, Constraints, Budget &amp; Plan</a:t>
+            </a:r>
+          </a:p>
+        </p:txBody>
+      </p:sp>
+      <p:sp>
+        <p:nvSpPr>
+          <p:cNvPr id="13" name="Rounded Rectangle 12"/>
+          <p:cNvSpPr/>
+          <p:nvPr/>
+        </p:nvSpPr>
+        <p:spPr>
+          <a:xfrm>
+            <a:off x="822960" y="4572000"/>
+            <a:ext cx="3383280" cy="1005840"/>
+          </a:xfrm>
+          <a:prstGeom prst="roundRect">
+            <a:avLst/>
+          </a:prstGeom>
+          <a:solidFill>
+            <a:srgbClr val="FFFFFF"/>
+          </a:solidFill>
+          <a:ln w="15875">
+            <a:solidFill>
+              <a:srgbClr val="D8D2C2"/>
+            </a:solidFill>
+          </a:ln>
+        </p:spPr>
+        <p:style>
+          <a:lnRef idx="1">
+            <a:schemeClr val="accent1"/>
+          </a:lnRef>
+          <a:fillRef idx="3">
+            <a:schemeClr val="accent1"/>
+          </a:fillRef>
+          <a:effectRef idx="2">
+            <a:schemeClr val="accent1"/>
+          </a:effectRef>
+          <a:fontRef idx="minor">
+            <a:schemeClr val="lt1"/>
+          </a:fontRef>
+        </p:style>
+        <p:txBody>
+          <a:bodyPr wrap="square" rtlCol="0" anchor="ctr"/>
+          <a:lstStyle/>
+          <a:p>
+            <a:pPr algn="ctr"/>
+            <a:r>
+              <a:rPr sz="1600" b="1" i="0" dirty="0">
+                <a:solidFill>
+                  <a:schemeClr val="tx1"/>
+                </a:solidFill>
+                <a:latin typeface="Calibri"/>
+              </a:rPr>
+              <a:t>7.  </a:t>
+            </a:r>
+            <a:r>
+              <a:rPr sz="1600" b="1" dirty="0">
+                <a:solidFill>
+                  <a:schemeClr val="tx1"/>
+                </a:solidFill>
+                <a:latin typeface="Calibri"/>
+              </a:rPr>
+              <a:t>Conclusion &amp; Future Work</a:t>
+            </a:r>
+          </a:p>
+        </p:txBody>
+      </p:sp>
+    </p:spTree>
+  </p:cSld>
+  <p:clrMapOvr>
+    <a:masterClrMapping/>
+  </p:clrMapOvr>
+</p:sld>
+</file>
+
+<file path=ppt/slides/slide30.xml><?xml version="1.0" encoding="utf-8"?>
 <p:sld xmlns:a="http://schemas.openxmlformats.org/drawingml/2006/main" xmlns:r="http://schemas.openxmlformats.org/officeDocument/2006/relationships" xmlns:p="http://schemas.openxmlformats.org/presentationml/2006/main">
   <p:cSld>
     <p:bg>
@@ -22857,7 +18094,7 @@
 </p:sld>
 </file>
 
-<file path=ppt/slides/slide36.xml><?xml version="1.0" encoding="utf-8"?>
+<file path=ppt/slides/slide31.xml><?xml version="1.0" encoding="utf-8"?>
 <p:sld xmlns:a="http://schemas.openxmlformats.org/drawingml/2006/main" xmlns:r="http://schemas.openxmlformats.org/officeDocument/2006/relationships" xmlns:p="http://schemas.openxmlformats.org/presentationml/2006/main">
   <p:cSld>
     <p:bg>
@@ -23911,7 +19148,7 @@
 </p:sld>
 </file>
 
-<file path=ppt/slides/slide37.xml><?xml version="1.0" encoding="utf-8"?>
+<file path=ppt/slides/slide32.xml><?xml version="1.0" encoding="utf-8"?>
 <p:sld xmlns:a="http://schemas.openxmlformats.org/drawingml/2006/main" xmlns:r="http://schemas.openxmlformats.org/officeDocument/2006/relationships" xmlns:p="http://schemas.openxmlformats.org/presentationml/2006/main">
   <p:cSld>
     <p:bg>
@@ -24159,26 +19396,79 @@
         </p:spPr>
         <p:txBody>
           <a:bodyPr wrap="square">
-            <a:normAutofit/>
+            <a:normAutofit fontScale="100000" lnSpcReduction="0"/>
           </a:bodyPr>
           <a:lstStyle/>
           <a:p>
-            <a:r>
+            <a:pPr>
+              <a:spcBef>
+                <a:spcPts val="0"/>
+              </a:spcBef>
+              <a:spcAft>
+                <a:spcPts val="400"/>
+              </a:spcAft>
+            </a:pPr>
+            <a:r>
+              <a:rPr sz="2000" b="1">
+                <a:latin typeface="Calibri"/>
+              </a:rPr>
               <a:t>Key Risks</a:t>
             </a:r>
           </a:p>
           <a:p>
-            <a:r>
+            <a:pPr>
+              <a:lnSpc>
+                <a:spcPct val="100000"/>
+              </a:lnSpc>
+              <a:spcBef>
+                <a:spcPts val="600"/>
+              </a:spcBef>
+              <a:spcAft>
+                <a:spcPts val="0"/>
+              </a:spcAft>
+            </a:pPr>
+            <a:r>
+              <a:rPr sz="1300" b="0">
+                <a:latin typeface="Calibri"/>
+              </a:rPr>
               <a:t>Free cloud GPU quota (Google Colab / departmental GPU lab, Report §5.4.2): if exhausted, fall back to existing computers and defer edge hardware.</a:t>
             </a:r>
           </a:p>
           <a:p>
-            <a:r>
+            <a:pPr>
+              <a:lnSpc>
+                <a:spcPct val="100000"/>
+              </a:lnSpc>
+              <a:spcBef>
+                <a:spcPts val="600"/>
+              </a:spcBef>
+              <a:spcAft>
+                <a:spcPts val="0"/>
+              </a:spcAft>
+            </a:pPr>
+            <a:r>
+              <a:rPr sz="1300" b="0">
+                <a:latin typeface="Calibri"/>
+              </a:rPr>
               <a:t>Factory data access: if unavailable, fallback to calibrated queuing simulation with documented parameters; paired Ds‑vs‑defect analysis is the contribution.</a:t>
             </a:r>
           </a:p>
           <a:p>
-            <a:r>
+            <a:pPr>
+              <a:lnSpc>
+                <a:spcPct val="100000"/>
+              </a:lnSpc>
+              <a:spcBef>
+                <a:spcPts val="600"/>
+              </a:spcBef>
+              <a:spcAft>
+                <a:spcPts val="0"/>
+              </a:spcAft>
+            </a:pPr>
+            <a:r>
+              <a:rPr sz="1300" b="0">
+                <a:latin typeface="Calibri"/>
+              </a:rPr>
               <a:t>Quarantine ambiguity: 152‑file lines batch may hide a second quarantine; visual review still open.</a:t>
             </a:r>
           </a:p>
@@ -24302,26 +19592,79 @@
         </p:spPr>
         <p:txBody>
           <a:bodyPr wrap="square">
-            <a:normAutofit/>
+            <a:normAutofit fontScale="100000" lnSpcReduction="0"/>
           </a:bodyPr>
           <a:lstStyle/>
           <a:p>
-            <a:r>
+            <a:pPr>
+              <a:spcBef>
+                <a:spcPts val="0"/>
+              </a:spcBef>
+              <a:spcAft>
+                <a:spcPts val="400"/>
+              </a:spcAft>
+            </a:pPr>
+            <a:r>
+              <a:rPr sz="2000" b="1">
+                <a:latin typeface="Calibri"/>
+              </a:rPr>
               <a:t>Mitigations</a:t>
             </a:r>
           </a:p>
           <a:p>
-            <a:r>
+            <a:pPr>
+              <a:lnSpc>
+                <a:spcPct val="100000"/>
+              </a:lnSpc>
+              <a:spcBef>
+                <a:spcPts val="600"/>
+              </a:spcBef>
+              <a:spcAft>
+                <a:spcPts val="0"/>
+              </a:spcAft>
+            </a:pPr>
+            <a:r>
+              <a:rPr sz="1400" b="0">
+                <a:latin typeface="Calibri"/>
+              </a:rPr>
               <a:t>Checkpoint during training so quota loss costs minutes, not hours.</a:t>
             </a:r>
           </a:p>
           <a:p>
-            <a:r>
+            <a:pPr>
+              <a:lnSpc>
+                <a:spcPct val="100000"/>
+              </a:lnSpc>
+              <a:spcBef>
+                <a:spcPts val="600"/>
+              </a:spcBef>
+              <a:spcAft>
+                <a:spcPts val="0"/>
+              </a:spcAft>
+            </a:pPr>
+            <a:r>
+              <a:rPr sz="1400" b="0">
+                <a:latin typeface="Calibri"/>
+              </a:rPr>
               <a:t>Paired dataset (defect counts + our Ds) is itself a contribution if factory declines.</a:t>
             </a:r>
           </a:p>
           <a:p>
-            <a:r>
+            <a:pPr>
+              <a:lnSpc>
+                <a:spcPct val="100000"/>
+              </a:lnSpc>
+              <a:spcBef>
+                <a:spcPts val="600"/>
+              </a:spcBef>
+              <a:spcAft>
+                <a:spcPts val="0"/>
+              </a:spcAft>
+            </a:pPr>
+            <a:r>
+              <a:rPr sz="1400" b="0">
+                <a:latin typeface="Calibri"/>
+              </a:rPr>
               <a:t>Visual review of lines batch in progress; interim: report as ‘suspicious’ in datasheet.</a:t>
             </a:r>
           </a:p>
@@ -24335,7 +19678,7 @@
 </p:sld>
 </file>
 
-<file path=ppt/slides/slide38.xml><?xml version="1.0" encoding="utf-8"?>
+<file path=ppt/slides/slide33.xml><?xml version="1.0" encoding="utf-8"?>
 <p:sld xmlns:a="http://schemas.openxmlformats.org/drawingml/2006/main" xmlns:r="http://schemas.openxmlformats.org/officeDocument/2006/relationships" xmlns:p="http://schemas.openxmlformats.org/presentationml/2006/main">
   <p:cSld>
     <p:bg>
@@ -24882,7 +20225,7 @@
 </p:sld>
 </file>
 
-<file path=ppt/slides/slide39.xml><?xml version="1.0" encoding="utf-8"?>
+<file path=ppt/slides/slide34.xml><?xml version="1.0" encoding="utf-8"?>
 <p:sld xmlns:a="http://schemas.openxmlformats.org/drawingml/2006/main" xmlns:r="http://schemas.openxmlformats.org/officeDocument/2006/relationships" xmlns:p="http://schemas.openxmlformats.org/presentationml/2006/main">
   <p:cSld>
     <p:bg>
@@ -25479,6 +20822,220 @@
                 <a:latin typeface="Calibri"/>
               </a:rPr>
               <a:t>Limitations: Pilot Localization Is Estimated, Not Measured; Planning Labels Are Synthetic; 1,994 Files Lack Group IDs; Minority Classes Are Thin; Industrial Validation Is Pending.</a:t>
+            </a:r>
+          </a:p>
+        </p:txBody>
+      </p:sp>
+    </p:spTree>
+  </p:cSld>
+  <p:clrMapOvr>
+    <a:masterClrMapping/>
+  </p:clrMapOvr>
+</p:sld>
+</file>
+
+<file path=ppt/slides/slide35.xml><?xml version="1.0" encoding="utf-8"?>
+<p:sld xmlns:a="http://schemas.openxmlformats.org/drawingml/2006/main" xmlns:r="http://schemas.openxmlformats.org/officeDocument/2006/relationships" xmlns:p="http://schemas.openxmlformats.org/presentationml/2006/main">
+  <p:cSld>
+    <p:bg>
+      <p:bgPr>
+        <a:solidFill>
+          <a:srgbClr val="085859"/>
+        </a:solidFill>
+        <a:effectLst/>
+      </p:bgPr>
+    </p:bg>
+    <p:spTree>
+      <p:nvGrpSpPr>
+        <p:cNvPr id="1" name=""/>
+        <p:cNvGrpSpPr/>
+        <p:nvPr/>
+      </p:nvGrpSpPr>
+      <p:grpSpPr>
+        <a:xfrm>
+          <a:off x="0" y="0"/>
+          <a:ext cx="0" cy="0"/>
+          <a:chOff x="0" y="0"/>
+          <a:chExt cx="0" cy="0"/>
+        </a:xfrm>
+      </p:grpSpPr>
+      <p:sp>
+        <p:nvSpPr>
+          <p:cNvPr id="2" name="TextBox 1"/>
+          <p:cNvSpPr txBox="1"/>
+          <p:nvPr/>
+        </p:nvSpPr>
+        <p:spPr>
+          <a:xfrm>
+            <a:off x="548640" y="6419088"/>
+            <a:ext cx="9144000" cy="274320"/>
+          </a:xfrm>
+          <a:prstGeom prst="rect">
+            <a:avLst/>
+          </a:prstGeom>
+          <a:noFill/>
+        </p:spPr>
+        <p:txBody>
+          <a:bodyPr wrap="square">
+            <a:spAutoFit/>
+          </a:bodyPr>
+          <a:lstStyle/>
+          <a:p>
+            <a:pPr algn="l"/>
+            <a:r>
+              <a:rPr sz="900" b="0" i="0">
+                <a:solidFill>
+                  <a:srgbClr val="F5F7F2"/>
+                </a:solidFill>
+                <a:latin typeface="Calibri"/>
+              </a:rPr>
+              <a:t>Defect-to-Delivery  |  FYDP-I  •  Group: 262-034</a:t>
+            </a:r>
+          </a:p>
+        </p:txBody>
+      </p:sp>
+      <p:sp>
+        <p:nvSpPr>
+          <p:cNvPr id="3" name="TextBox 2"/>
+          <p:cNvSpPr txBox="1"/>
+          <p:nvPr/>
+        </p:nvSpPr>
+        <p:spPr>
+          <a:xfrm>
+            <a:off x="10972800" y="6419088"/>
+            <a:ext cx="640080" cy="274320"/>
+          </a:xfrm>
+          <a:prstGeom prst="rect">
+            <a:avLst/>
+          </a:prstGeom>
+          <a:noFill/>
+        </p:spPr>
+        <p:txBody>
+          <a:bodyPr wrap="none">
+            <a:spAutoFit/>
+          </a:bodyPr>
+          <a:lstStyle/>
+          <a:p>
+            <a:pPr algn="r"/>
+            <a:r>
+              <a:rPr sz="900">
+                <a:solidFill>
+                  <a:srgbClr val="F5F7F2"/>
+                </a:solidFill>
+                <a:latin typeface="Calibri"/>
+              </a:rPr>
+              <a:t>35 / 35</a:t>
+            </a:r>
+          </a:p>
+        </p:txBody>
+      </p:sp>
+      <p:sp>
+        <p:nvSpPr>
+          <p:cNvPr id="5" name="TextBox 4"/>
+          <p:cNvSpPr txBox="1"/>
+          <p:nvPr/>
+        </p:nvSpPr>
+        <p:spPr>
+          <a:xfrm>
+            <a:off x="548640" y="2011680"/>
+            <a:ext cx="11064240" cy="1280160"/>
+          </a:xfrm>
+          <a:prstGeom prst="rect">
+            <a:avLst/>
+          </a:prstGeom>
+          <a:noFill/>
+        </p:spPr>
+        <p:txBody>
+          <a:bodyPr wrap="square" anchor="ctr">
+            <a:spAutoFit/>
+          </a:bodyPr>
+          <a:lstStyle/>
+          <a:p>
+            <a:pPr algn="ctr"/>
+            <a:r>
+              <a:rPr sz="5400" b="1" i="0">
+                <a:solidFill>
+                  <a:srgbClr val="F5F7F2"/>
+                </a:solidFill>
+                <a:latin typeface="Georgia"/>
+              </a:rPr>
+              <a:t>Thank You</a:t>
+            </a:r>
+          </a:p>
+        </p:txBody>
+      </p:sp>
+      <p:sp>
+        <p:nvSpPr>
+          <p:cNvPr id="6" name="TextBox 5"/>
+          <p:cNvSpPr txBox="1"/>
+          <p:nvPr/>
+        </p:nvSpPr>
+        <p:spPr>
+          <a:xfrm>
+            <a:off x="548640" y="3366105"/>
+            <a:ext cx="11064240" cy="400110"/>
+          </a:xfrm>
+          <a:prstGeom prst="rect">
+            <a:avLst/>
+          </a:prstGeom>
+          <a:noFill/>
+        </p:spPr>
+        <p:txBody>
+          <a:bodyPr wrap="square" anchor="ctr">
+            <a:spAutoFit/>
+          </a:bodyPr>
+          <a:lstStyle/>
+          <a:p>
+            <a:pPr algn="ctr"/>
+            <a:r>
+              <a:rPr lang="en-US" sz="2000" b="0" i="0" dirty="0">
+                <a:solidFill>
+                  <a:srgbClr val="F5F7F2"/>
+                </a:solidFill>
+                <a:latin typeface="Calibri"/>
+              </a:rPr>
+              <a:t>Any Question?</a:t>
+            </a:r>
+            <a:endParaRPr sz="2000" b="0" i="0" dirty="0">
+              <a:solidFill>
+                <a:srgbClr val="F5F7F2"/>
+              </a:solidFill>
+              <a:latin typeface="Calibri"/>
+            </a:endParaRPr>
+          </a:p>
+        </p:txBody>
+      </p:sp>
+      <p:sp>
+        <p:nvSpPr>
+          <p:cNvPr id="7" name="TextBox 6"/>
+          <p:cNvSpPr txBox="1"/>
+          <p:nvPr/>
+        </p:nvSpPr>
+        <p:spPr>
+          <a:xfrm>
+            <a:off x="548640" y="6309360"/>
+            <a:ext cx="11064240" cy="365760"/>
+          </a:xfrm>
+          <a:prstGeom prst="rect">
+            <a:avLst/>
+          </a:prstGeom>
+          <a:noFill/>
+        </p:spPr>
+        <p:txBody>
+          <a:bodyPr wrap="square" anchor="ctr">
+            <a:spAutoFit/>
+          </a:bodyPr>
+          <a:lstStyle/>
+          <a:p>
+            <a:pPr algn="ctr"/>
+            <a:r>
+              <a:rPr sz="1000" b="0" i="0">
+                <a:solidFill>
+                  <a:srgbClr val="F5F7F2"/>
+                </a:solidFill>
+                <a:latin typeface="Calibri"/>
+              </a:rPr>
+              <a:t>Defect-to-Delivery — Fabric Defect Detection &amp; Lead-Time Prediction  |  FYDP-I</a:t>
             </a:r>
           </a:p>
         </p:txBody>
@@ -25770,220 +21327,6 @@
                 <a:latin typeface="Calibri"/>
               </a:rPr>
               <a:t>No System Links Defect Severity To Production Lead Time — Yet</a:t>
-            </a:r>
-          </a:p>
-        </p:txBody>
-      </p:sp>
-    </p:spTree>
-  </p:cSld>
-  <p:clrMapOvr>
-    <a:masterClrMapping/>
-  </p:clrMapOvr>
-</p:sld>
-</file>
-
-<file path=ppt/slides/slide40.xml><?xml version="1.0" encoding="utf-8"?>
-<p:sld xmlns:a="http://schemas.openxmlformats.org/drawingml/2006/main" xmlns:r="http://schemas.openxmlformats.org/officeDocument/2006/relationships" xmlns:p="http://schemas.openxmlformats.org/presentationml/2006/main">
-  <p:cSld>
-    <p:bg>
-      <p:bgPr>
-        <a:solidFill>
-          <a:srgbClr val="085859"/>
-        </a:solidFill>
-        <a:effectLst/>
-      </p:bgPr>
-    </p:bg>
-    <p:spTree>
-      <p:nvGrpSpPr>
-        <p:cNvPr id="1" name=""/>
-        <p:cNvGrpSpPr/>
-        <p:nvPr/>
-      </p:nvGrpSpPr>
-      <p:grpSpPr>
-        <a:xfrm>
-          <a:off x="0" y="0"/>
-          <a:ext cx="0" cy="0"/>
-          <a:chOff x="0" y="0"/>
-          <a:chExt cx="0" cy="0"/>
-        </a:xfrm>
-      </p:grpSpPr>
-      <p:sp>
-        <p:nvSpPr>
-          <p:cNvPr id="2" name="TextBox 1"/>
-          <p:cNvSpPr txBox="1"/>
-          <p:nvPr/>
-        </p:nvSpPr>
-        <p:spPr>
-          <a:xfrm>
-            <a:off x="548640" y="6419088"/>
-            <a:ext cx="9144000" cy="274320"/>
-          </a:xfrm>
-          <a:prstGeom prst="rect">
-            <a:avLst/>
-          </a:prstGeom>
-          <a:noFill/>
-        </p:spPr>
-        <p:txBody>
-          <a:bodyPr wrap="square">
-            <a:spAutoFit/>
-          </a:bodyPr>
-          <a:lstStyle/>
-          <a:p>
-            <a:pPr algn="l"/>
-            <a:r>
-              <a:rPr sz="900" b="0" i="0">
-                <a:solidFill>
-                  <a:srgbClr val="F5F7F2"/>
-                </a:solidFill>
-                <a:latin typeface="Calibri"/>
-              </a:rPr>
-              <a:t>Defect-to-Delivery  |  FYDP-I  •  Group: 262-034</a:t>
-            </a:r>
-          </a:p>
-        </p:txBody>
-      </p:sp>
-      <p:sp>
-        <p:nvSpPr>
-          <p:cNvPr id="3" name="TextBox 2"/>
-          <p:cNvSpPr txBox="1"/>
-          <p:nvPr/>
-        </p:nvSpPr>
-        <p:spPr>
-          <a:xfrm>
-            <a:off x="10972800" y="6419088"/>
-            <a:ext cx="640080" cy="274320"/>
-          </a:xfrm>
-          <a:prstGeom prst="rect">
-            <a:avLst/>
-          </a:prstGeom>
-          <a:noFill/>
-        </p:spPr>
-        <p:txBody>
-          <a:bodyPr wrap="none">
-            <a:spAutoFit/>
-          </a:bodyPr>
-          <a:lstStyle/>
-          <a:p>
-            <a:pPr algn="r"/>
-            <a:r>
-              <a:rPr sz="900">
-                <a:solidFill>
-                  <a:srgbClr val="F5F7F2"/>
-                </a:solidFill>
-                <a:latin typeface="Calibri"/>
-              </a:rPr>
-              <a:t>35 / 35</a:t>
-            </a:r>
-          </a:p>
-        </p:txBody>
-      </p:sp>
-      <p:sp>
-        <p:nvSpPr>
-          <p:cNvPr id="5" name="TextBox 4"/>
-          <p:cNvSpPr txBox="1"/>
-          <p:nvPr/>
-        </p:nvSpPr>
-        <p:spPr>
-          <a:xfrm>
-            <a:off x="548640" y="2011680"/>
-            <a:ext cx="11064240" cy="1280160"/>
-          </a:xfrm>
-          <a:prstGeom prst="rect">
-            <a:avLst/>
-          </a:prstGeom>
-          <a:noFill/>
-        </p:spPr>
-        <p:txBody>
-          <a:bodyPr wrap="square" anchor="ctr">
-            <a:spAutoFit/>
-          </a:bodyPr>
-          <a:lstStyle/>
-          <a:p>
-            <a:pPr algn="ctr"/>
-            <a:r>
-              <a:rPr sz="5400" b="1" i="0">
-                <a:solidFill>
-                  <a:srgbClr val="F5F7F2"/>
-                </a:solidFill>
-                <a:latin typeface="Georgia"/>
-              </a:rPr>
-              <a:t>Thank You</a:t>
-            </a:r>
-          </a:p>
-        </p:txBody>
-      </p:sp>
-      <p:sp>
-        <p:nvSpPr>
-          <p:cNvPr id="6" name="TextBox 5"/>
-          <p:cNvSpPr txBox="1"/>
-          <p:nvPr/>
-        </p:nvSpPr>
-        <p:spPr>
-          <a:xfrm>
-            <a:off x="548640" y="3366105"/>
-            <a:ext cx="11064240" cy="400110"/>
-          </a:xfrm>
-          <a:prstGeom prst="rect">
-            <a:avLst/>
-          </a:prstGeom>
-          <a:noFill/>
-        </p:spPr>
-        <p:txBody>
-          <a:bodyPr wrap="square" anchor="ctr">
-            <a:spAutoFit/>
-          </a:bodyPr>
-          <a:lstStyle/>
-          <a:p>
-            <a:pPr algn="ctr"/>
-            <a:r>
-              <a:rPr lang="en-US" sz="2000" b="0" i="0" dirty="0">
-                <a:solidFill>
-                  <a:srgbClr val="F5F7F2"/>
-                </a:solidFill>
-                <a:latin typeface="Calibri"/>
-              </a:rPr>
-              <a:t>Any Question?</a:t>
-            </a:r>
-            <a:endParaRPr sz="2000" b="0" i="0" dirty="0">
-              <a:solidFill>
-                <a:srgbClr val="F5F7F2"/>
-              </a:solidFill>
-              <a:latin typeface="Calibri"/>
-            </a:endParaRPr>
-          </a:p>
-        </p:txBody>
-      </p:sp>
-      <p:sp>
-        <p:nvSpPr>
-          <p:cNvPr id="7" name="TextBox 6"/>
-          <p:cNvSpPr txBox="1"/>
-          <p:nvPr/>
-        </p:nvSpPr>
-        <p:spPr>
-          <a:xfrm>
-            <a:off x="548640" y="6309360"/>
-            <a:ext cx="11064240" cy="365760"/>
-          </a:xfrm>
-          <a:prstGeom prst="rect">
-            <a:avLst/>
-          </a:prstGeom>
-          <a:noFill/>
-        </p:spPr>
-        <p:txBody>
-          <a:bodyPr wrap="square" anchor="ctr">
-            <a:spAutoFit/>
-          </a:bodyPr>
-          <a:lstStyle/>
-          <a:p>
-            <a:pPr algn="ctr"/>
-            <a:r>
-              <a:rPr sz="1000" b="0" i="0">
-                <a:solidFill>
-                  <a:srgbClr val="F5F7F2"/>
-                </a:solidFill>
-                <a:latin typeface="Calibri"/>
-              </a:rPr>
-              <a:t>Defect-to-Delivery — Fabric Defect Detection &amp; Lead-Time Prediction  |  FYDP-I</a:t>
             </a:r>
           </a:p>
         </p:txBody>

--- a/slides/Defect-to-Delivery_262-034.pptx
+++ b/slides/Defect-to-Delivery_262-034.pptx
@@ -5344,8 +5344,8 @@
         </p:nvSpPr>
         <p:spPr>
           <a:xfrm>
-            <a:off x="548640" y="1952935"/>
-            <a:ext cx="2651760" cy="1835147"/>
+            <a:off x="548640" y="1953158"/>
+            <a:ext cx="2651760" cy="2199132"/>
           </a:xfrm>
           <a:prstGeom prst="roundRect">
             <a:avLst>
@@ -5392,7 +5392,7 @@
         </p:nvSpPr>
         <p:spPr>
           <a:xfrm>
-            <a:off x="804672" y="2040508"/>
+            <a:off x="804672" y="2227478"/>
             <a:ext cx="475488" cy="475488"/>
           </a:xfrm>
           <a:prstGeom prst="ellipse">
@@ -5444,8 +5444,8 @@
         </p:nvSpPr>
         <p:spPr>
           <a:xfrm>
-            <a:off x="1417319" y="2003932"/>
-            <a:ext cx="1600200" cy="1464446"/>
+            <a:off x="1417320" y="2209190"/>
+            <a:ext cx="1609343" cy="1860803"/>
           </a:xfrm>
           <a:prstGeom prst="rect">
             <a:avLst/>
@@ -5496,8 +5496,8 @@
         </p:nvSpPr>
         <p:spPr>
           <a:xfrm>
-            <a:off x="3328416" y="1952935"/>
-            <a:ext cx="2651760" cy="1835147"/>
+            <a:off x="3328416" y="1953158"/>
+            <a:ext cx="2651760" cy="2199132"/>
           </a:xfrm>
           <a:prstGeom prst="roundRect">
             <a:avLst>
@@ -5544,7 +5544,7 @@
         </p:nvSpPr>
         <p:spPr>
           <a:xfrm>
-            <a:off x="3584448" y="1835473"/>
+            <a:off x="3584448" y="2227478"/>
             <a:ext cx="475488" cy="475488"/>
           </a:xfrm>
           <a:prstGeom prst="ellipse">
@@ -5596,8 +5596,8 @@
         </p:nvSpPr>
         <p:spPr>
           <a:xfrm>
-            <a:off x="4197096" y="1798897"/>
-            <a:ext cx="1600200" cy="1874519"/>
+            <a:off x="4197096" y="2209190"/>
+            <a:ext cx="1609343" cy="1860803"/>
           </a:xfrm>
           <a:prstGeom prst="rect">
             <a:avLst/>
@@ -5648,8 +5648,8 @@
         </p:nvSpPr>
         <p:spPr>
           <a:xfrm>
-            <a:off x="6108192" y="1952935"/>
-            <a:ext cx="2651760" cy="1835147"/>
+            <a:off x="6108192" y="1953158"/>
+            <a:ext cx="2651760" cy="2199132"/>
           </a:xfrm>
           <a:prstGeom prst="roundRect">
             <a:avLst>
@@ -5696,7 +5696,7 @@
         </p:nvSpPr>
         <p:spPr>
           <a:xfrm>
-            <a:off x="6364224" y="1835473"/>
+            <a:off x="6364224" y="2227478"/>
             <a:ext cx="475488" cy="475488"/>
           </a:xfrm>
           <a:prstGeom prst="ellipse">
@@ -5748,8 +5748,8 @@
         </p:nvSpPr>
         <p:spPr>
           <a:xfrm>
-            <a:off x="6976872" y="1798897"/>
-            <a:ext cx="1600200" cy="1874519"/>
+            <a:off x="6976872" y="2209190"/>
+            <a:ext cx="1609343" cy="1632204"/>
           </a:xfrm>
           <a:prstGeom prst="rect">
             <a:avLst/>
@@ -5800,8 +5800,8 @@
         </p:nvSpPr>
         <p:spPr>
           <a:xfrm>
-            <a:off x="8887968" y="1952935"/>
-            <a:ext cx="2651760" cy="1835147"/>
+            <a:off x="8887968" y="1953158"/>
+            <a:ext cx="2651760" cy="2199132"/>
           </a:xfrm>
           <a:prstGeom prst="roundRect">
             <a:avLst>
@@ -5848,7 +5848,7 @@
         </p:nvSpPr>
         <p:spPr>
           <a:xfrm>
-            <a:off x="9144000" y="1835473"/>
+            <a:off x="9144000" y="2227478"/>
             <a:ext cx="475488" cy="475488"/>
           </a:xfrm>
           <a:prstGeom prst="ellipse">
@@ -5900,8 +5900,8 @@
         </p:nvSpPr>
         <p:spPr>
           <a:xfrm>
-            <a:off x="9756648" y="1798897"/>
-            <a:ext cx="1600200" cy="1874519"/>
+            <a:off x="9756648" y="2209190"/>
+            <a:ext cx="1609343" cy="1632204"/>
           </a:xfrm>
           <a:prstGeom prst="rect">
             <a:avLst/>
@@ -6064,7 +6064,7 @@
         </p:nvGraphicFramePr>
         <p:xfrm>
           <a:off x="548640" y="1234440"/>
-          <a:ext cx="11064240" cy="3072384"/>
+          <a:ext cx="11064240" cy="3017520"/>
         </p:xfrm>
         <a:graphic>
           <a:graphicData uri="http://schemas.openxmlformats.org/drawingml/2006/table">
@@ -6073,42 +6073,42 @@
                 <a:tableStyleId>{5C22544A-7EE6-4342-B048-85BDC9FD1C3A}</a:tableStyleId>
               </a:tblPr>
               <a:tblGrid>
-                <a:gridCol w="1580605">
+                <a:gridCol w="1600200">
                   <a:extLst>
                     <a:ext uri="{9D8B030D-6E8A-4147-A177-3AD203B41FA5}">
                       <a16:colId xmlns:a16="http://schemas.microsoft.com/office/drawing/2014/main" val="20000"/>
                     </a:ext>
                   </a:extLst>
                 </a:gridCol>
-                <a:gridCol w="1580605">
+                <a:gridCol w="960120">
                   <a:extLst>
                     <a:ext uri="{9D8B030D-6E8A-4147-A177-3AD203B41FA5}">
                       <a16:colId xmlns:a16="http://schemas.microsoft.com/office/drawing/2014/main" val="20001"/>
                     </a:ext>
                   </a:extLst>
                 </a:gridCol>
-                <a:gridCol w="1580605">
+                <a:gridCol w="1325880">
                   <a:extLst>
                     <a:ext uri="{9D8B030D-6E8A-4147-A177-3AD203B41FA5}">
                       <a16:colId xmlns:a16="http://schemas.microsoft.com/office/drawing/2014/main" val="20003"/>
                     </a:ext>
                   </a:extLst>
                 </a:gridCol>
-                <a:gridCol w="1580605">
+                <a:gridCol w="1600200">
                   <a:extLst>
                     <a:ext uri="{9D8B030D-6E8A-4147-A177-3AD203B41FA5}">
                       <a16:colId xmlns:a16="http://schemas.microsoft.com/office/drawing/2014/main" val="20004"/>
                     </a:ext>
                   </a:extLst>
                 </a:gridCol>
-                <a:gridCol w="1580605">
+                <a:gridCol w="1325880">
                   <a:extLst>
                     <a:ext uri="{9D8B030D-6E8A-4147-A177-3AD203B41FA5}">
                       <a16:colId xmlns:a16="http://schemas.microsoft.com/office/drawing/2014/main" val="20005"/>
                     </a:ext>
                   </a:extLst>
                 </a:gridCol>
-                <a:gridCol w="1580610">
+                <a:gridCol w="4251960">
                   <a:extLst>
                     <a:ext uri="{9D8B030D-6E8A-4147-A177-3AD203B41FA5}">
                       <a16:colId xmlns:a16="http://schemas.microsoft.com/office/drawing/2014/main" val="20006"/>
@@ -6116,7 +6116,7 @@
                   </a:extLst>
                 </a:gridCol>
               </a:tblGrid>
-              <a:tr h="384048">
+              <a:tr h="350215">
                 <a:tc>
                   <a:txBody>
                     <a:bodyPr wrap="square" lIns="54864" rIns="54864" tIns="27432" bIns="27432" anchor="ctr"/>
@@ -6261,7 +6261,7 @@
                   </a:ext>
                 </a:extLst>
               </a:tr>
-              <a:tr h="384048">
+              <a:tr h="350215">
                 <a:tc>
                   <a:txBody>
                     <a:bodyPr wrap="square" lIns="54864" rIns="54864" tIns="27432" bIns="27432" anchor="ctr"/>
@@ -6406,7 +6406,7 @@
                   </a:ext>
                 </a:extLst>
               </a:tr>
-              <a:tr h="384048">
+              <a:tr h="350215">
                 <a:tc>
                   <a:txBody>
                     <a:bodyPr wrap="square" lIns="54864" rIns="54864" tIns="27432" bIns="27432" anchor="ctr"/>
@@ -6551,7 +6551,7 @@
                   </a:ext>
                 </a:extLst>
               </a:tr>
-              <a:tr h="384048">
+              <a:tr h="350215">
                 <a:tc>
                   <a:txBody>
                     <a:bodyPr wrap="square" lIns="54864" rIns="54864" tIns="27432" bIns="27432" anchor="ctr"/>
@@ -6696,7 +6696,7 @@
                   </a:ext>
                 </a:extLst>
               </a:tr>
-              <a:tr h="384048">
+              <a:tr h="350215">
                 <a:tc>
                   <a:txBody>
                     <a:bodyPr wrap="square" lIns="54864" rIns="54864" tIns="27432" bIns="27432" anchor="ctr"/>
@@ -6841,7 +6841,7 @@
                   </a:ext>
                 </a:extLst>
               </a:tr>
-              <a:tr h="384048">
+              <a:tr h="350215">
                 <a:tc>
                   <a:txBody>
                     <a:bodyPr wrap="square" lIns="54864" rIns="54864" tIns="27432" bIns="27432" anchor="ctr"/>
@@ -6986,7 +6986,7 @@
                   </a:ext>
                 </a:extLst>
               </a:tr>
-              <a:tr h="384048">
+              <a:tr h="564184">
                 <a:tc>
                   <a:txBody>
                     <a:bodyPr wrap="square" lIns="54864" rIns="54864" tIns="27432" bIns="27432" anchor="ctr"/>
@@ -7131,7 +7131,7 @@
                   </a:ext>
                 </a:extLst>
               </a:tr>
-              <a:tr h="384048">
+              <a:tr h="350215">
                 <a:tc>
                   <a:txBody>
                     <a:bodyPr wrap="square" lIns="54864" rIns="54864" tIns="27432" bIns="27432" anchor="ctr"/>
@@ -7461,7 +7461,7 @@
         <p:spPr>
           <a:xfrm>
             <a:off x="548640" y="320040"/>
-            <a:ext cx="11064240" cy="914400"/>
+            <a:ext cx="11064240" cy="628192"/>
           </a:xfrm>
           <a:prstGeom prst="rect">
             <a:avLst/>
@@ -8685,7 +8685,7 @@
         </p:nvGraphicFramePr>
         <p:xfrm>
           <a:off x="548640" y="3035808"/>
-          <a:ext cx="5623560" cy="2889504"/>
+          <a:ext cx="5623560" cy="3072384"/>
         </p:xfrm>
         <a:graphic>
           <a:graphicData uri="http://schemas.openxmlformats.org/drawingml/2006/table">
@@ -8695,7 +8695,7 @@
                 <a:gridCol w="749808"/>
                 <a:gridCol w="4873752"/>
               </a:tblGrid>
-              <a:tr h="361188">
+              <a:tr h="384048">
                 <a:tc>
                   <a:txBody>
                     <a:bodyPr wrap="square"/>
@@ -8751,7 +8751,7 @@
                   </a:tcPr>
                 </a:tc>
               </a:tr>
-              <a:tr h="361188">
+              <a:tr h="384048">
                 <a:tc>
                   <a:txBody>
                     <a:bodyPr wrap="square"/>
@@ -8807,7 +8807,7 @@
                   </a:tcPr>
                 </a:tc>
               </a:tr>
-              <a:tr h="361188">
+              <a:tr h="384048">
                 <a:tc>
                   <a:txBody>
                     <a:bodyPr wrap="square"/>
@@ -8863,7 +8863,7 @@
                   </a:tcPr>
                 </a:tc>
               </a:tr>
-              <a:tr h="361188">
+              <a:tr h="384048">
                 <a:tc>
                   <a:txBody>
                     <a:bodyPr wrap="square"/>
@@ -8919,7 +8919,7 @@
                   </a:tcPr>
                 </a:tc>
               </a:tr>
-              <a:tr h="361188">
+              <a:tr h="384048">
                 <a:tc>
                   <a:txBody>
                     <a:bodyPr wrap="square"/>
@@ -8975,7 +8975,7 @@
                   </a:tcPr>
                 </a:tc>
               </a:tr>
-              <a:tr h="361188">
+              <a:tr h="384048">
                 <a:tc>
                   <a:txBody>
                     <a:bodyPr wrap="square"/>
@@ -9031,7 +9031,7 @@
                   </a:tcPr>
                 </a:tc>
               </a:tr>
-              <a:tr h="361188">
+              <a:tr h="384048">
                 <a:tc>
                   <a:txBody>
                     <a:bodyPr wrap="square"/>
@@ -9087,7 +9087,7 @@
                   </a:tcPr>
                 </a:tc>
               </a:tr>
-              <a:tr h="361188">
+              <a:tr h="384048">
                 <a:tc>
                   <a:txBody>
                     <a:bodyPr wrap="square"/>
@@ -9156,18 +9156,18 @@
           <p:nvPr/>
         </p:nvGraphicFramePr>
         <p:xfrm>
-          <a:off x="6016752" y="3035808"/>
-          <a:ext cx="5623560" cy="3017520"/>
+          <a:off x="6199632" y="3035808"/>
+          <a:ext cx="5623560" cy="3072384"/>
         </p:xfrm>
         <a:graphic>
           <a:graphicData uri="http://schemas.openxmlformats.org/drawingml/2006/table">
             <a:tbl>
               <a:tblPr firstRow="0" bandRow="0"/>
               <a:tblGrid>
-                <a:gridCol w="868680"/>
-                <a:gridCol w="4754880"/>
+                <a:gridCol w="749808"/>
+                <a:gridCol w="4873752"/>
               </a:tblGrid>
-              <a:tr h="502920">
+              <a:tr h="384048">
                 <a:tc>
                   <a:txBody>
                     <a:bodyPr wrap="square"/>
@@ -9223,7 +9223,7 @@
                   </a:tcPr>
                 </a:tc>
               </a:tr>
-              <a:tr h="502920">
+              <a:tr h="537667">
                 <a:tc>
                   <a:txBody>
                     <a:bodyPr wrap="square"/>
@@ -9279,7 +9279,7 @@
                   </a:tcPr>
                 </a:tc>
               </a:tr>
-              <a:tr h="502920">
+              <a:tr h="537667">
                 <a:tc>
                   <a:txBody>
                     <a:bodyPr wrap="square"/>
@@ -9335,7 +9335,7 @@
                   </a:tcPr>
                 </a:tc>
               </a:tr>
-              <a:tr h="502920">
+              <a:tr h="537667">
                 <a:tc>
                   <a:txBody>
                     <a:bodyPr wrap="square"/>
@@ -9391,7 +9391,7 @@
                   </a:tcPr>
                 </a:tc>
               </a:tr>
-              <a:tr h="502920">
+              <a:tr h="537667">
                 <a:tc>
                   <a:txBody>
                     <a:bodyPr wrap="square"/>
@@ -9447,7 +9447,7 @@
                   </a:tcPr>
                 </a:tc>
               </a:tr>
-              <a:tr h="502920">
+              <a:tr h="537667">
                 <a:tc>
                   <a:txBody>
                     <a:bodyPr wrap="square"/>
@@ -9515,8 +9515,8 @@
         </p:nvSpPr>
         <p:spPr>
           <a:xfrm>
-            <a:off x="548640" y="6053328"/>
-            <a:ext cx="11091672" cy="274320"/>
+            <a:off x="548640" y="6132880"/>
+            <a:ext cx="11091672" cy="231343"/>
           </a:xfrm>
           <a:prstGeom prst="rect">
             <a:avLst/>
@@ -9584,7 +9584,7 @@
         <p:spPr>
           <a:xfrm>
             <a:off x="411480" y="228600"/>
-            <a:ext cx="7315200" cy="457200"/>
+            <a:ext cx="7315200" cy="536752"/>
           </a:xfrm>
           <a:prstGeom prst="rect">
             <a:avLst/>
@@ -9754,7 +9754,7 @@
         <p:spPr>
           <a:xfrm>
             <a:off x="411480" y="228600"/>
-            <a:ext cx="7315200" cy="457200"/>
+            <a:ext cx="7315200" cy="536752"/>
           </a:xfrm>
           <a:prstGeom prst="rect">
             <a:avLst/>
@@ -9924,7 +9924,7 @@
         <p:spPr>
           <a:xfrm>
             <a:off x="411480" y="228600"/>
-            <a:ext cx="7315200" cy="457200"/>
+            <a:ext cx="7315200" cy="536752"/>
           </a:xfrm>
           <a:prstGeom prst="rect">
             <a:avLst/>
@@ -10094,7 +10094,7 @@
         <p:spPr>
           <a:xfrm>
             <a:off x="411480" y="228600"/>
-            <a:ext cx="7315200" cy="457200"/>
+            <a:ext cx="7315200" cy="536752"/>
           </a:xfrm>
           <a:prstGeom prst="rect">
             <a:avLst/>
@@ -10270,7 +10270,7 @@
         <p:spPr>
           <a:xfrm>
             <a:off x="411480" y="228600"/>
-            <a:ext cx="7315200" cy="457200"/>
+            <a:ext cx="7315200" cy="536752"/>
           </a:xfrm>
           <a:prstGeom prst="rect">
             <a:avLst/>
@@ -10544,8 +10544,8 @@
         </p:nvSpPr>
         <p:spPr>
           <a:xfrm>
-            <a:off x="1729564" y="1402650"/>
-            <a:ext cx="3337559" cy="1555244"/>
+            <a:off x="548640" y="1344168"/>
+            <a:ext cx="5394960" cy="1337767"/>
           </a:xfrm>
           <a:prstGeom prst="roundRect">
             <a:avLst>
@@ -10592,7 +10592,7 @@
         </p:nvSpPr>
         <p:spPr>
           <a:xfrm>
-            <a:off x="1985597" y="1695641"/>
+            <a:off x="804672" y="1581912"/>
             <a:ext cx="475488" cy="475488"/>
           </a:xfrm>
           <a:prstGeom prst="ellipse">
@@ -10644,8 +10644,8 @@
         </p:nvSpPr>
         <p:spPr>
           <a:xfrm>
-            <a:off x="2835075" y="1659065"/>
-            <a:ext cx="1783080" cy="1143000"/>
+            <a:off x="1965960" y="1563624"/>
+            <a:ext cx="3767328" cy="962863"/>
           </a:xfrm>
           <a:prstGeom prst="rect">
             <a:avLst/>
@@ -10712,8 +10712,8 @@
         </p:nvSpPr>
         <p:spPr>
           <a:xfrm>
-            <a:off x="6521959" y="1402650"/>
-            <a:ext cx="3337558" cy="1555244"/>
+            <a:off x="6245352" y="1344168"/>
+            <a:ext cx="5394960" cy="1337767"/>
           </a:xfrm>
           <a:prstGeom prst="roundRect">
             <a:avLst>
@@ -10760,8 +10760,8 @@
         </p:nvSpPr>
         <p:spPr>
           <a:xfrm>
-            <a:off x="6895949" y="1618488"/>
-            <a:ext cx="523037" cy="475488"/>
+            <a:off x="6501384" y="1581912"/>
+            <a:ext cx="475488" cy="475488"/>
           </a:xfrm>
           <a:prstGeom prst="ellipse">
             <a:avLst/>
@@ -10812,8 +10812,8 @@
         </p:nvSpPr>
         <p:spPr>
           <a:xfrm>
-            <a:off x="7731252" y="1613916"/>
-            <a:ext cx="1961388" cy="1143000"/>
+            <a:off x="7662672" y="1563624"/>
+            <a:ext cx="3767328" cy="962863"/>
           </a:xfrm>
           <a:prstGeom prst="rect">
             <a:avLst/>
@@ -10880,8 +10880,8 @@
         </p:nvSpPr>
         <p:spPr>
           <a:xfrm>
-            <a:off x="548640" y="3040295"/>
-            <a:ext cx="3520440" cy="1554648"/>
+            <a:off x="548640" y="2791663"/>
+            <a:ext cx="3520440" cy="1542592"/>
           </a:xfrm>
           <a:prstGeom prst="roundRect">
             <a:avLst>
@@ -10928,7 +10928,7 @@
         </p:nvSpPr>
         <p:spPr>
           <a:xfrm>
-            <a:off x="804672" y="3401568"/>
+            <a:off x="804672" y="3029407"/>
             <a:ext cx="475488" cy="475488"/>
           </a:xfrm>
           <a:prstGeom prst="ellipse">
@@ -10980,8 +10980,8 @@
         </p:nvSpPr>
         <p:spPr>
           <a:xfrm>
-            <a:off x="1417319" y="3364991"/>
-            <a:ext cx="2468880" cy="1005840"/>
+            <a:off x="1417320" y="3011119"/>
+            <a:ext cx="2441448" cy="1167688"/>
           </a:xfrm>
           <a:prstGeom prst="rect">
             <a:avLst/>
@@ -11048,8 +11048,8 @@
         </p:nvSpPr>
         <p:spPr>
           <a:xfrm>
-            <a:off x="4251959" y="3040295"/>
-            <a:ext cx="3520440" cy="1554648"/>
+            <a:off x="4251959" y="2791663"/>
+            <a:ext cx="3520440" cy="1542592"/>
           </a:xfrm>
           <a:prstGeom prst="roundRect">
             <a:avLst>
@@ -11096,7 +11096,7 @@
         </p:nvSpPr>
         <p:spPr>
           <a:xfrm>
-            <a:off x="4507992" y="3401568"/>
+            <a:off x="4507992" y="3029407"/>
             <a:ext cx="475488" cy="475488"/>
           </a:xfrm>
           <a:prstGeom prst="ellipse">
@@ -11148,8 +11148,8 @@
         </p:nvSpPr>
         <p:spPr>
           <a:xfrm>
-            <a:off x="5120640" y="3364991"/>
-            <a:ext cx="2468880" cy="1005840"/>
+            <a:off x="5120640" y="3011119"/>
+            <a:ext cx="2441448" cy="1167688"/>
           </a:xfrm>
           <a:prstGeom prst="rect">
             <a:avLst/>
@@ -11223,8 +11223,8 @@
         </p:nvSpPr>
         <p:spPr>
           <a:xfrm>
-            <a:off x="7955279" y="3040295"/>
-            <a:ext cx="3520440" cy="1554648"/>
+            <a:off x="7955279" y="2791663"/>
+            <a:ext cx="3520440" cy="1542592"/>
           </a:xfrm>
           <a:prstGeom prst="roundRect">
             <a:avLst>
@@ -11271,7 +11271,7 @@
         </p:nvSpPr>
         <p:spPr>
           <a:xfrm>
-            <a:off x="8211311" y="3401568"/>
+            <a:off x="8211312" y="3029407"/>
             <a:ext cx="475488" cy="475488"/>
           </a:xfrm>
           <a:prstGeom prst="ellipse">
@@ -11323,8 +11323,8 @@
         </p:nvSpPr>
         <p:spPr>
           <a:xfrm>
-            <a:off x="8823959" y="3364991"/>
-            <a:ext cx="2468880" cy="1005840"/>
+            <a:off x="8823960" y="3011119"/>
+            <a:ext cx="2441448" cy="1167688"/>
           </a:xfrm>
           <a:prstGeom prst="rect">
             <a:avLst/>
@@ -11403,8 +11403,8 @@
         </p:nvSpPr>
         <p:spPr>
           <a:xfrm>
-            <a:off x="548640" y="4521592"/>
-            <a:ext cx="3520440" cy="1554711"/>
+            <a:off x="548640" y="4443984"/>
+            <a:ext cx="3520440" cy="1771192"/>
           </a:xfrm>
           <a:prstGeom prst="roundRect">
             <a:avLst>
@@ -11451,7 +11451,7 @@
         </p:nvSpPr>
         <p:spPr>
           <a:xfrm>
-            <a:off x="804672" y="4882896"/>
+            <a:off x="804672" y="4681728"/>
             <a:ext cx="475488" cy="475488"/>
           </a:xfrm>
           <a:prstGeom prst="ellipse">
@@ -11503,8 +11503,8 @@
         </p:nvSpPr>
         <p:spPr>
           <a:xfrm>
-            <a:off x="1417319" y="4846320"/>
-            <a:ext cx="2468880" cy="1005840"/>
+            <a:off x="1417320" y="4663440"/>
+            <a:ext cx="2441448" cy="1396288"/>
           </a:xfrm>
           <a:prstGeom prst="rect">
             <a:avLst/>
@@ -11571,8 +11571,8 @@
         </p:nvSpPr>
         <p:spPr>
           <a:xfrm>
-            <a:off x="4251959" y="4521592"/>
-            <a:ext cx="3520440" cy="1554711"/>
+            <a:off x="4251959" y="4443984"/>
+            <a:ext cx="3520440" cy="1771192"/>
           </a:xfrm>
           <a:prstGeom prst="roundRect">
             <a:avLst>
@@ -11619,7 +11619,7 @@
         </p:nvSpPr>
         <p:spPr>
           <a:xfrm>
-            <a:off x="4507992" y="4882896"/>
+            <a:off x="4507992" y="4681728"/>
             <a:ext cx="475488" cy="475488"/>
           </a:xfrm>
           <a:prstGeom prst="ellipse">
@@ -11671,8 +11671,8 @@
         </p:nvSpPr>
         <p:spPr>
           <a:xfrm>
-            <a:off x="5120640" y="4846320"/>
-            <a:ext cx="2468880" cy="1005840"/>
+            <a:off x="5120640" y="4663440"/>
+            <a:ext cx="2441448" cy="1396288"/>
           </a:xfrm>
           <a:prstGeom prst="rect">
             <a:avLst/>
@@ -11748,8 +11748,8 @@
         </p:nvSpPr>
         <p:spPr>
           <a:xfrm>
-            <a:off x="7955279" y="4521592"/>
-            <a:ext cx="3520440" cy="1554711"/>
+            <a:off x="7955279" y="4443984"/>
+            <a:ext cx="3520440" cy="1771192"/>
           </a:xfrm>
           <a:prstGeom prst="roundRect">
             <a:avLst>
@@ -11796,7 +11796,7 @@
         </p:nvSpPr>
         <p:spPr>
           <a:xfrm>
-            <a:off x="8211311" y="4882896"/>
+            <a:off x="8211312" y="4681728"/>
             <a:ext cx="475488" cy="475488"/>
           </a:xfrm>
           <a:prstGeom prst="ellipse">
@@ -11848,8 +11848,8 @@
         </p:nvSpPr>
         <p:spPr>
           <a:xfrm>
-            <a:off x="8823959" y="4846320"/>
-            <a:ext cx="2468880" cy="1005840"/>
+            <a:off x="8823960" y="4663440"/>
+            <a:ext cx="2441448" cy="1396288"/>
           </a:xfrm>
           <a:prstGeom prst="rect">
             <a:avLst/>
@@ -11942,7 +11942,7 @@
         </p:blipFill>
         <p:spPr>
           <a:xfrm>
-            <a:off x="1801060" y="1603630"/>
+            <a:off x="620877" y="1505102"/>
             <a:ext cx="1021900" cy="1016126"/>
           </a:xfrm>
           <a:prstGeom prst="ellipse">
@@ -11954,7 +11954,7 @@
             </a:solidFill>
           </a:ln>
           <a:effectLst>
-            <a:outerShdw blurRad="381000" dist="292100" dir="5400000" sx="-80000" sy="-18000" rotWithShape="0">
+            <a:outerShdw blurRad="54864" dist="36576" dir="5400000" sx="-80000" sy="-18000" rotWithShape="0">
               <a:srgbClr val="000000">
                 <a:alpha val="22000"/>
               </a:srgbClr>
@@ -11996,7 +11996,7 @@
         </p:blipFill>
         <p:spPr>
           <a:xfrm>
-            <a:off x="6583625" y="1568196"/>
+            <a:off x="6306616" y="1442008"/>
             <a:ext cx="1132387" cy="1143000"/>
           </a:xfrm>
           <a:prstGeom prst="ellipse">
@@ -12008,7 +12008,7 @@
             </a:solidFill>
           </a:ln>
           <a:effectLst>
-            <a:outerShdw blurRad="381000" dist="292100" dir="5400000" sx="-80000" sy="-18000" rotWithShape="0">
+            <a:outerShdw blurRad="54864" dist="36576" dir="5400000" sx="-80000" sy="-18000" rotWithShape="0">
               <a:srgbClr val="000000">
                 <a:alpha val="22000"/>
               </a:srgbClr>
@@ -12070,7 +12070,7 @@
         <p:spPr>
           <a:xfrm>
             <a:off x="411480" y="228600"/>
-            <a:ext cx="7315200" cy="457200"/>
+            <a:ext cx="7315200" cy="536752"/>
           </a:xfrm>
           <a:prstGeom prst="rect">
             <a:avLst/>
@@ -12240,7 +12240,7 @@
         <p:spPr>
           <a:xfrm>
             <a:off x="411480" y="228600"/>
-            <a:ext cx="7315200" cy="457200"/>
+            <a:ext cx="7315200" cy="536752"/>
           </a:xfrm>
           <a:prstGeom prst="rect">
             <a:avLst/>
@@ -12410,7 +12410,7 @@
         <p:spPr>
           <a:xfrm>
             <a:off x="411480" y="228600"/>
-            <a:ext cx="7315200" cy="457200"/>
+            <a:ext cx="7315200" cy="536752"/>
           </a:xfrm>
           <a:prstGeom prst="rect">
             <a:avLst/>
@@ -13643,7 +13643,7 @@
         <p:spPr>
           <a:xfrm>
             <a:off x="548640" y="2103120"/>
-            <a:ext cx="5394960" cy="2697480"/>
+            <a:ext cx="5394960" cy="2457907"/>
           </a:xfrm>
           <a:prstGeom prst="roundRect">
             <a:avLst>
@@ -13690,7 +13690,7 @@
         </p:nvSpPr>
         <p:spPr>
           <a:xfrm>
-            <a:off x="804672" y="2194560"/>
+            <a:off x="804672" y="2139696"/>
             <a:ext cx="475488" cy="475488"/>
           </a:xfrm>
           <a:prstGeom prst="ellipse">
@@ -13743,7 +13743,7 @@
         <p:spPr>
           <a:xfrm>
             <a:off x="1417319" y="2139696"/>
-            <a:ext cx="4343400" cy="2103120"/>
+            <a:ext cx="4315968" cy="2211019"/>
           </a:xfrm>
           <a:prstGeom prst="rect">
             <a:avLst/>
@@ -13851,7 +13851,7 @@
         <p:spPr>
           <a:xfrm>
             <a:off x="6245352" y="2103120"/>
-            <a:ext cx="5394960" cy="2697480"/>
+            <a:ext cx="5394960" cy="2306116"/>
           </a:xfrm>
           <a:prstGeom prst="roundRect">
             <a:avLst>
@@ -13898,7 +13898,7 @@
         </p:nvSpPr>
         <p:spPr>
           <a:xfrm>
-            <a:off x="6501384" y="2194560"/>
+            <a:off x="6501384" y="2139696"/>
             <a:ext cx="475488" cy="475488"/>
           </a:xfrm>
           <a:prstGeom prst="ellipse">
@@ -13951,7 +13951,7 @@
         <p:spPr>
           <a:xfrm>
             <a:off x="7114032" y="2139696"/>
-            <a:ext cx="4343400" cy="2103120"/>
+            <a:ext cx="4315968" cy="2059228"/>
           </a:xfrm>
           <a:prstGeom prst="rect">
             <a:avLst/>
@@ -14204,8 +14204,8 @@
         </p:nvSpPr>
         <p:spPr>
           <a:xfrm>
-            <a:off x="548640" y="1170432"/>
-            <a:ext cx="11091672" cy="292608"/>
+            <a:off x="548640" y="1289304"/>
+            <a:ext cx="11091672" cy="246888"/>
           </a:xfrm>
           <a:prstGeom prst="rect">
             <a:avLst/>
@@ -17991,7 +17991,7 @@
         <p:spPr>
           <a:xfrm>
             <a:off x="640080" y="320040"/>
-            <a:ext cx="5029200" cy="502920"/>
+            <a:ext cx="5029200" cy="585216"/>
           </a:xfrm>
           <a:prstGeom prst="rect">
             <a:avLst/>
@@ -18047,8 +18047,8 @@
           </p:nvPr>
         </p:nvGraphicFramePr>
         <p:xfrm>
-          <a:off x="1003895" y="1028700"/>
-          <a:ext cx="9966957" cy="1691640"/>
+          <a:off x="548640" y="1028700"/>
+          <a:ext cx="11091668" cy="1228039"/>
         </p:xfrm>
         <a:graphic>
           <a:graphicData uri="http://schemas.openxmlformats.org/drawingml/2006/table">
@@ -18057,49 +18057,49 @@
                 <a:tableStyleId>{5C22544A-7EE6-4342-B048-85BDC9FD1C3A}</a:tableStyleId>
               </a:tblPr>
               <a:tblGrid>
-                <a:gridCol w="1423851">
+                <a:gridCol w="1584524">
                   <a:extLst>
                     <a:ext uri="{9D8B030D-6E8A-4147-A177-3AD203B41FA5}">
                       <a16:colId xmlns:a16="http://schemas.microsoft.com/office/drawing/2014/main" val="20000"/>
                     </a:ext>
                   </a:extLst>
                 </a:gridCol>
-                <a:gridCol w="1423851">
+                <a:gridCol w="1584524">
                   <a:extLst>
                     <a:ext uri="{9D8B030D-6E8A-4147-A177-3AD203B41FA5}">
                       <a16:colId xmlns:a16="http://schemas.microsoft.com/office/drawing/2014/main" val="20001"/>
                     </a:ext>
                   </a:extLst>
                 </a:gridCol>
-                <a:gridCol w="1423851">
+                <a:gridCol w="1584524">
                   <a:extLst>
                     <a:ext uri="{9D8B030D-6E8A-4147-A177-3AD203B41FA5}">
                       <a16:colId xmlns:a16="http://schemas.microsoft.com/office/drawing/2014/main" val="20002"/>
                     </a:ext>
                   </a:extLst>
                 </a:gridCol>
-                <a:gridCol w="1423851">
+                <a:gridCol w="1584524">
                   <a:extLst>
                     <a:ext uri="{9D8B030D-6E8A-4147-A177-3AD203B41FA5}">
                       <a16:colId xmlns:a16="http://schemas.microsoft.com/office/drawing/2014/main" val="20003"/>
                     </a:ext>
                   </a:extLst>
                 </a:gridCol>
-                <a:gridCol w="1423851">
+                <a:gridCol w="1584524">
                   <a:extLst>
                     <a:ext uri="{9D8B030D-6E8A-4147-A177-3AD203B41FA5}">
                       <a16:colId xmlns:a16="http://schemas.microsoft.com/office/drawing/2014/main" val="20004"/>
                     </a:ext>
                   </a:extLst>
                 </a:gridCol>
-                <a:gridCol w="1423851">
+                <a:gridCol w="1584524">
                   <a:extLst>
                     <a:ext uri="{9D8B030D-6E8A-4147-A177-3AD203B41FA5}">
                       <a16:colId xmlns:a16="http://schemas.microsoft.com/office/drawing/2014/main" val="20005"/>
                     </a:ext>
                   </a:extLst>
                 </a:gridCol>
-                <a:gridCol w="1423851">
+                <a:gridCol w="1584524">
                   <a:extLst>
                     <a:ext uri="{9D8B030D-6E8A-4147-A177-3AD203B41FA5}">
                       <a16:colId xmlns:a16="http://schemas.microsoft.com/office/drawing/2014/main" val="20006"/>
@@ -18107,7 +18107,7 @@
                   </a:extLst>
                 </a:gridCol>
               </a:tblGrid>
-              <a:tr h="845820">
+              <a:tr h="868680">
                 <a:tc>
                   <a:txBody>
                     <a:bodyPr/>
@@ -18443,7 +18443,7 @@
                   </a:ext>
                 </a:extLst>
               </a:tr>
-              <a:tr h="845820">
+              <a:tr h="359359">
                 <a:tc>
                   <a:txBody>
                     <a:bodyPr wrap="square" lIns="54864" rIns="54864" tIns="27432" bIns="27432" anchor="ctr"/>
@@ -18623,8 +18623,8 @@
         </p:nvSpPr>
         <p:spPr>
           <a:xfrm>
-            <a:off x="1010703" y="2743200"/>
-            <a:ext cx="4480560" cy="347472"/>
+            <a:off x="548640" y="2761488"/>
+            <a:ext cx="4480560" cy="356616"/>
           </a:xfrm>
           <a:prstGeom prst="rect">
             <a:avLst/>
@@ -18673,8 +18673,8 @@
         </p:nvSpPr>
         <p:spPr>
           <a:xfrm>
-            <a:off x="1010703" y="3127248"/>
-            <a:ext cx="4480560" cy="685800"/>
+            <a:off x="548640" y="3136392"/>
+            <a:ext cx="4480560" cy="1008583"/>
           </a:xfrm>
           <a:prstGeom prst="rect">
             <a:avLst/>
@@ -18723,8 +18723,8 @@
         </p:nvSpPr>
         <p:spPr>
           <a:xfrm>
-            <a:off x="1010703" y="4160520"/>
-            <a:ext cx="4480560" cy="347472"/>
+            <a:off x="548640" y="4419600"/>
+            <a:ext cx="4480560" cy="356616"/>
           </a:xfrm>
           <a:prstGeom prst="rect">
             <a:avLst/>
@@ -18773,8 +18773,8 @@
         </p:nvSpPr>
         <p:spPr>
           <a:xfrm>
-            <a:off x="1010703" y="4544568"/>
-            <a:ext cx="4480560" cy="685800"/>
+            <a:off x="548640" y="4794199"/>
+            <a:ext cx="4480560" cy="1008583"/>
           </a:xfrm>
           <a:prstGeom prst="rect">
             <a:avLst/>
@@ -18823,8 +18823,8 @@
         </p:nvSpPr>
         <p:spPr>
           <a:xfrm>
-            <a:off x="5948463" y="2743200"/>
-            <a:ext cx="4480560" cy="347472"/>
+            <a:off x="6245352" y="2761488"/>
+            <a:ext cx="4480560" cy="356616"/>
           </a:xfrm>
           <a:prstGeom prst="rect">
             <a:avLst/>
@@ -18873,8 +18873,8 @@
         </p:nvSpPr>
         <p:spPr>
           <a:xfrm>
-            <a:off x="5948463" y="3127248"/>
-            <a:ext cx="4480560" cy="685800"/>
+            <a:off x="6245352" y="3136392"/>
+            <a:ext cx="4480560" cy="1008583"/>
           </a:xfrm>
           <a:prstGeom prst="rect">
             <a:avLst/>
@@ -18923,8 +18923,8 @@
         </p:nvSpPr>
         <p:spPr>
           <a:xfrm>
-            <a:off x="5948463" y="4160520"/>
-            <a:ext cx="4480560" cy="347472"/>
+            <a:off x="6245352" y="4419600"/>
+            <a:ext cx="4480560" cy="356616"/>
           </a:xfrm>
           <a:prstGeom prst="rect">
             <a:avLst/>
@@ -18973,8 +18973,8 @@
         </p:nvSpPr>
         <p:spPr>
           <a:xfrm>
-            <a:off x="5948463" y="4544568"/>
-            <a:ext cx="4480560" cy="685800"/>
+            <a:off x="6245352" y="4794199"/>
+            <a:ext cx="4480560" cy="1008583"/>
           </a:xfrm>
           <a:prstGeom prst="rect">
             <a:avLst/>
@@ -19024,7 +19024,7 @@
         <p:spPr>
           <a:xfrm>
             <a:off x="411480" y="6419088"/>
-            <a:ext cx="2743200" cy="182880"/>
+            <a:ext cx="2743200" cy="237744"/>
           </a:xfrm>
           <a:prstGeom prst="rect">
             <a:avLst/>
@@ -19074,7 +19074,7 @@
         <p:spPr>
           <a:xfrm>
             <a:off x="5486400" y="6419088"/>
-            <a:ext cx="2743200" cy="182880"/>
+            <a:ext cx="2743200" cy="237744"/>
           </a:xfrm>
           <a:prstGeom prst="rect">
             <a:avLst/>
@@ -19236,7 +19236,7 @@
         <p:spPr>
           <a:xfrm>
             <a:off x="640080" y="320040"/>
-            <a:ext cx="5303520" cy="502920"/>
+            <a:ext cx="5303520" cy="585216"/>
           </a:xfrm>
           <a:prstGeom prst="rect">
             <a:avLst/>
@@ -19292,8 +19292,8 @@
           </p:nvPr>
         </p:nvGraphicFramePr>
         <p:xfrm>
-          <a:off x="1035996" y="963717"/>
-          <a:ext cx="9144000" cy="1219653"/>
+          <a:off x="548640" y="963717"/>
+          <a:ext cx="11091670" cy="1456639"/>
         </p:xfrm>
         <a:graphic>
           <a:graphicData uri="http://schemas.openxmlformats.org/drawingml/2006/table">
@@ -19302,35 +19302,35 @@
                 <a:tableStyleId>{5C22544A-7EE6-4342-B048-85BDC9FD1C3A}</a:tableStyleId>
               </a:tblPr>
               <a:tblGrid>
-                <a:gridCol w="1828800">
+                <a:gridCol w="2218334">
                   <a:extLst>
                     <a:ext uri="{9D8B030D-6E8A-4147-A177-3AD203B41FA5}">
                       <a16:colId xmlns:a16="http://schemas.microsoft.com/office/drawing/2014/main" val="20000"/>
                     </a:ext>
                   </a:extLst>
                 </a:gridCol>
-                <a:gridCol w="1828800">
+                <a:gridCol w="2218334">
                   <a:extLst>
                     <a:ext uri="{9D8B030D-6E8A-4147-A177-3AD203B41FA5}">
                       <a16:colId xmlns:a16="http://schemas.microsoft.com/office/drawing/2014/main" val="20001"/>
                     </a:ext>
                   </a:extLst>
                 </a:gridCol>
-                <a:gridCol w="1828800">
+                <a:gridCol w="2218334">
                   <a:extLst>
                     <a:ext uri="{9D8B030D-6E8A-4147-A177-3AD203B41FA5}">
                       <a16:colId xmlns:a16="http://schemas.microsoft.com/office/drawing/2014/main" val="20002"/>
                     </a:ext>
                   </a:extLst>
                 </a:gridCol>
-                <a:gridCol w="1828800">
+                <a:gridCol w="2218334">
                   <a:extLst>
                     <a:ext uri="{9D8B030D-6E8A-4147-A177-3AD203B41FA5}">
                       <a16:colId xmlns:a16="http://schemas.microsoft.com/office/drawing/2014/main" val="20003"/>
                     </a:ext>
                   </a:extLst>
                 </a:gridCol>
-                <a:gridCol w="1828800">
+                <a:gridCol w="2218334">
                   <a:extLst>
                     <a:ext uri="{9D8B030D-6E8A-4147-A177-3AD203B41FA5}">
                       <a16:colId xmlns:a16="http://schemas.microsoft.com/office/drawing/2014/main" val="20004"/>
@@ -19338,7 +19338,7 @@
                   </a:extLst>
                 </a:gridCol>
               </a:tblGrid>
-              <a:tr h="559826">
+              <a:tr h="1097280">
                 <a:tc>
                   <a:txBody>
                     <a:bodyPr/>
@@ -19568,7 +19568,7 @@
                   </a:ext>
                 </a:extLst>
               </a:tr>
-              <a:tr h="659827">
+              <a:tr h="359359">
                 <a:tc>
                   <a:txBody>
                     <a:bodyPr wrap="square" lIns="54864" rIns="54864" tIns="27432" bIns="27432" anchor="ctr"/>
@@ -19702,8 +19702,8 @@
         </p:nvSpPr>
         <p:spPr>
           <a:xfrm>
-            <a:off x="1039886" y="2743202"/>
-            <a:ext cx="4480560" cy="347472"/>
+            <a:off x="548640" y="2761488"/>
+            <a:ext cx="4480560" cy="356616"/>
           </a:xfrm>
           <a:prstGeom prst="rect">
             <a:avLst/>
@@ -19752,8 +19752,8 @@
         </p:nvSpPr>
         <p:spPr>
           <a:xfrm>
-            <a:off x="1039886" y="3127250"/>
-            <a:ext cx="4480560" cy="685800"/>
+            <a:off x="548640" y="3136392"/>
+            <a:ext cx="4480560" cy="795528"/>
           </a:xfrm>
           <a:prstGeom prst="rect">
             <a:avLst/>
@@ -19802,8 +19802,8 @@
         </p:nvSpPr>
         <p:spPr>
           <a:xfrm>
-            <a:off x="1039886" y="4160522"/>
-            <a:ext cx="4480560" cy="347472"/>
+            <a:off x="548640" y="4206240"/>
+            <a:ext cx="4480560" cy="356616"/>
           </a:xfrm>
           <a:prstGeom prst="rect">
             <a:avLst/>
@@ -19852,8 +19852,8 @@
         </p:nvSpPr>
         <p:spPr>
           <a:xfrm>
-            <a:off x="1039886" y="4544570"/>
-            <a:ext cx="4480560" cy="685800"/>
+            <a:off x="548640" y="4581144"/>
+            <a:ext cx="4480560" cy="795528"/>
           </a:xfrm>
           <a:prstGeom prst="rect">
             <a:avLst/>
@@ -19902,8 +19902,8 @@
         </p:nvSpPr>
         <p:spPr>
           <a:xfrm>
-            <a:off x="5977646" y="2743202"/>
-            <a:ext cx="4480560" cy="347472"/>
+            <a:off x="6245352" y="2761488"/>
+            <a:ext cx="4480560" cy="356616"/>
           </a:xfrm>
           <a:prstGeom prst="rect">
             <a:avLst/>
@@ -19952,8 +19952,8 @@
         </p:nvSpPr>
         <p:spPr>
           <a:xfrm>
-            <a:off x="5977646" y="3127250"/>
-            <a:ext cx="4480560" cy="685800"/>
+            <a:off x="6245352" y="3136392"/>
+            <a:ext cx="4480560" cy="795528"/>
           </a:xfrm>
           <a:prstGeom prst="rect">
             <a:avLst/>
@@ -20002,8 +20002,8 @@
         </p:nvSpPr>
         <p:spPr>
           <a:xfrm>
-            <a:off x="5977646" y="4160522"/>
-            <a:ext cx="4480560" cy="347472"/>
+            <a:off x="6245352" y="4206240"/>
+            <a:ext cx="4480560" cy="356616"/>
           </a:xfrm>
           <a:prstGeom prst="rect">
             <a:avLst/>
@@ -20052,8 +20052,8 @@
         </p:nvSpPr>
         <p:spPr>
           <a:xfrm>
-            <a:off x="5977646" y="4544570"/>
-            <a:ext cx="4480560" cy="685800"/>
+            <a:off x="6245352" y="4581144"/>
+            <a:ext cx="4480560" cy="795528"/>
           </a:xfrm>
           <a:prstGeom prst="rect">
             <a:avLst/>
@@ -20103,7 +20103,7 @@
         <p:spPr>
           <a:xfrm>
             <a:off x="411480" y="6419088"/>
-            <a:ext cx="2743200" cy="182880"/>
+            <a:ext cx="2743200" cy="237744"/>
           </a:xfrm>
           <a:prstGeom prst="rect">
             <a:avLst/>
@@ -20153,7 +20153,7 @@
         <p:spPr>
           <a:xfrm>
             <a:off x="5486400" y="6419088"/>
-            <a:ext cx="2743200" cy="182880"/>
+            <a:ext cx="2743200" cy="237744"/>
           </a:xfrm>
           <a:prstGeom prst="rect">
             <a:avLst/>
@@ -20419,8 +20419,8 @@
         </p:nvSpPr>
         <p:spPr>
           <a:xfrm>
-            <a:off x="548640" y="1783080"/>
-            <a:ext cx="5394960" cy="3246120"/>
+            <a:off x="548640" y="1920240"/>
+            <a:ext cx="5394960" cy="3537813"/>
           </a:xfrm>
           <a:prstGeom prst="roundRect">
             <a:avLst>
@@ -20467,7 +20467,7 @@
         </p:nvSpPr>
         <p:spPr>
           <a:xfrm>
-            <a:off x="804672" y="2020824"/>
+            <a:off x="804672" y="2057400"/>
             <a:ext cx="475488" cy="475488"/>
           </a:xfrm>
           <a:prstGeom prst="ellipse">
@@ -20519,8 +20519,8 @@
         </p:nvSpPr>
         <p:spPr>
           <a:xfrm>
-            <a:off x="1417319" y="2020824"/>
-            <a:ext cx="4343400" cy="2770632"/>
+            <a:off x="1417320" y="2167128"/>
+            <a:ext cx="4315968" cy="3071469"/>
           </a:xfrm>
           <a:prstGeom prst="rect">
             <a:avLst/>
@@ -20615,8 +20615,8 @@
         </p:nvSpPr>
         <p:spPr>
           <a:xfrm>
-            <a:off x="6245352" y="1783080"/>
-            <a:ext cx="5394960" cy="3246120"/>
+            <a:off x="6245352" y="1920240"/>
+            <a:ext cx="5394960" cy="3537813"/>
           </a:xfrm>
           <a:prstGeom prst="roundRect">
             <a:avLst>
@@ -20663,7 +20663,7 @@
         </p:nvSpPr>
         <p:spPr>
           <a:xfrm>
-            <a:off x="6501384" y="2020824"/>
+            <a:off x="6501384" y="2057400"/>
             <a:ext cx="475488" cy="475488"/>
           </a:xfrm>
           <a:prstGeom prst="ellipse">
@@ -20715,8 +20715,8 @@
         </p:nvSpPr>
         <p:spPr>
           <a:xfrm>
-            <a:off x="7114032" y="2020824"/>
-            <a:ext cx="4343400" cy="2770632"/>
+            <a:off x="7114032" y="3081528"/>
+            <a:ext cx="4315968" cy="2157069"/>
           </a:xfrm>
           <a:prstGeom prst="rect">
             <a:avLst/>
@@ -21496,8 +21496,8 @@
         </p:nvSpPr>
         <p:spPr>
           <a:xfrm>
-            <a:off x="548640" y="2469608"/>
-            <a:ext cx="5394960" cy="2056779"/>
+            <a:off x="548640" y="2340864"/>
+            <a:ext cx="5394960" cy="2763316"/>
           </a:xfrm>
           <a:prstGeom prst="roundRect">
             <a:avLst>
@@ -21544,7 +21544,7 @@
         </p:nvSpPr>
         <p:spPr>
           <a:xfrm>
-            <a:off x="804672" y="2420560"/>
+            <a:off x="804672" y="2478024"/>
             <a:ext cx="475488" cy="475488"/>
           </a:xfrm>
           <a:prstGeom prst="ellipse">
@@ -21596,8 +21596,8 @@
         </p:nvSpPr>
         <p:spPr>
           <a:xfrm>
-            <a:off x="1417319" y="2383984"/>
-            <a:ext cx="4343400" cy="1831286"/>
+            <a:off x="1417320" y="2587752"/>
+            <a:ext cx="4315968" cy="2296972"/>
           </a:xfrm>
           <a:prstGeom prst="rect">
             <a:avLst/>
@@ -21680,8 +21680,8 @@
         </p:nvSpPr>
         <p:spPr>
           <a:xfrm>
-            <a:off x="6245352" y="2469608"/>
-            <a:ext cx="5394960" cy="2056779"/>
+            <a:off x="6245352" y="2340864"/>
+            <a:ext cx="5394960" cy="2763316"/>
           </a:xfrm>
           <a:prstGeom prst="roundRect">
             <a:avLst>
@@ -21728,7 +21728,7 @@
         </p:nvSpPr>
         <p:spPr>
           <a:xfrm>
-            <a:off x="6501384" y="2078904"/>
+            <a:off x="6501384" y="2478024"/>
             <a:ext cx="475488" cy="475488"/>
           </a:xfrm>
           <a:prstGeom prst="ellipse">
@@ -21780,8 +21780,8 @@
         </p:nvSpPr>
         <p:spPr>
           <a:xfrm>
-            <a:off x="7114032" y="2042328"/>
-            <a:ext cx="4343400" cy="2514600"/>
+            <a:off x="7114032" y="2969056"/>
+            <a:ext cx="4315968" cy="1915668"/>
           </a:xfrm>
           <a:prstGeom prst="rect">
             <a:avLst/>
@@ -21932,8 +21932,8 @@
         </p:nvSpPr>
         <p:spPr>
           <a:xfrm>
-            <a:off x="548640" y="5029200"/>
-            <a:ext cx="11064240" cy="914400"/>
+            <a:off x="548640" y="5268772"/>
+            <a:ext cx="11064240" cy="749808"/>
           </a:xfrm>
           <a:prstGeom prst="rect">
             <a:avLst/>
@@ -22146,8 +22146,8 @@
         </p:nvSpPr>
         <p:spPr>
           <a:xfrm>
-            <a:off x="548640" y="6309360"/>
-            <a:ext cx="11064240" cy="365760"/>
+            <a:off x="548640" y="5992063"/>
+            <a:ext cx="11064240" cy="262432"/>
           </a:xfrm>
           <a:prstGeom prst="rect">
             <a:avLst/>
@@ -22610,8 +22610,8 @@
         </p:nvSpPr>
         <p:spPr>
           <a:xfrm>
-            <a:off x="548640" y="1170432"/>
-            <a:ext cx="11091672" cy="384048"/>
+            <a:off x="548640" y="1289304"/>
+            <a:ext cx="11091672" cy="246888"/>
           </a:xfrm>
           <a:prstGeom prst="rect">
             <a:avLst/>
@@ -22788,7 +22788,7 @@
         <p:spPr>
           <a:xfrm>
             <a:off x="768096" y="3035808"/>
-            <a:ext cx="2141982" cy="1271016"/>
+            <a:ext cx="2159812" cy="1140256"/>
           </a:xfrm>
           <a:prstGeom prst="rect">
             <a:avLst/>
@@ -22969,7 +22969,7 @@
         <p:spPr>
           <a:xfrm>
             <a:off x="3605022" y="3035808"/>
-            <a:ext cx="2141982" cy="1271016"/>
+            <a:ext cx="2159812" cy="1140256"/>
           </a:xfrm>
           <a:prstGeom prst="rect">
             <a:avLst/>
@@ -23150,7 +23150,7 @@
         <p:spPr>
           <a:xfrm>
             <a:off x="6441948" y="3035808"/>
-            <a:ext cx="2141982" cy="1271016"/>
+            <a:ext cx="2159812" cy="1140256"/>
           </a:xfrm>
           <a:prstGeom prst="rect">
             <a:avLst/>
@@ -23331,7 +23331,7 @@
         <p:spPr>
           <a:xfrm>
             <a:off x="9278874" y="3035808"/>
-            <a:ext cx="2141982" cy="1271016"/>
+            <a:ext cx="2159812" cy="1140256"/>
           </a:xfrm>
           <a:prstGeom prst="rect">
             <a:avLst/>
@@ -24176,8 +24176,8 @@
         </p:nvSpPr>
         <p:spPr>
           <a:xfrm>
-            <a:off x="548640" y="1573710"/>
-            <a:ext cx="3520440" cy="1817766"/>
+            <a:off x="548640" y="1573682"/>
+            <a:ext cx="3520440" cy="1988820"/>
           </a:xfrm>
           <a:prstGeom prst="roundRect">
             <a:avLst>
@@ -24224,7 +24224,7 @@
         </p:nvSpPr>
         <p:spPr>
           <a:xfrm>
-            <a:off x="804672" y="1857293"/>
+            <a:off x="804672" y="1857146"/>
             <a:ext cx="475488" cy="475488"/>
           </a:xfrm>
           <a:prstGeom prst="ellipse">
@@ -24276,8 +24276,8 @@
         </p:nvSpPr>
         <p:spPr>
           <a:xfrm>
-            <a:off x="1417319" y="1820717"/>
-            <a:ext cx="2468880" cy="1508760"/>
+            <a:off x="1417320" y="1838858"/>
+            <a:ext cx="2441448" cy="1632204"/>
           </a:xfrm>
           <a:prstGeom prst="rect">
             <a:avLst/>
@@ -24328,8 +24328,8 @@
         </p:nvSpPr>
         <p:spPr>
           <a:xfrm>
-            <a:off x="4251959" y="1573710"/>
-            <a:ext cx="3520440" cy="1817766"/>
+            <a:off x="4251959" y="1573682"/>
+            <a:ext cx="3520440" cy="1988820"/>
           </a:xfrm>
           <a:prstGeom prst="roundRect">
             <a:avLst>
@@ -24376,7 +24376,7 @@
         </p:nvSpPr>
         <p:spPr>
           <a:xfrm>
-            <a:off x="4507992" y="1857293"/>
+            <a:off x="4507992" y="1857146"/>
             <a:ext cx="475488" cy="475488"/>
           </a:xfrm>
           <a:prstGeom prst="ellipse">
@@ -24428,8 +24428,8 @@
         </p:nvSpPr>
         <p:spPr>
           <a:xfrm>
-            <a:off x="5120640" y="1820717"/>
-            <a:ext cx="2468880" cy="1508760"/>
+            <a:off x="5120640" y="1838858"/>
+            <a:ext cx="2441448" cy="1403604"/>
           </a:xfrm>
           <a:prstGeom prst="rect">
             <a:avLst/>
@@ -24492,8 +24492,8 @@
         </p:nvSpPr>
         <p:spPr>
           <a:xfrm>
-            <a:off x="7955279" y="1573710"/>
-            <a:ext cx="3520440" cy="1817766"/>
+            <a:off x="7955279" y="1573682"/>
+            <a:ext cx="3520440" cy="1988820"/>
           </a:xfrm>
           <a:prstGeom prst="roundRect">
             <a:avLst>
@@ -24540,7 +24540,7 @@
         </p:nvSpPr>
         <p:spPr>
           <a:xfrm>
-            <a:off x="8211311" y="1857293"/>
+            <a:off x="8211311" y="1857146"/>
             <a:ext cx="475488" cy="475488"/>
           </a:xfrm>
           <a:prstGeom prst="ellipse">
@@ -24592,8 +24592,8 @@
         </p:nvSpPr>
         <p:spPr>
           <a:xfrm>
-            <a:off x="8823959" y="1820717"/>
-            <a:ext cx="2468880" cy="1508760"/>
+            <a:off x="8823959" y="1838858"/>
+            <a:ext cx="2441448" cy="1403604"/>
           </a:xfrm>
           <a:prstGeom prst="rect">
             <a:avLst/>
@@ -24656,8 +24656,8 @@
         </p:nvSpPr>
         <p:spPr>
           <a:xfrm>
-            <a:off x="548640" y="4012758"/>
-            <a:ext cx="3520440" cy="1538422"/>
+            <a:off x="548640" y="3608222"/>
+            <a:ext cx="3520440" cy="1760220"/>
           </a:xfrm>
           <a:prstGeom prst="roundRect">
             <a:avLst>
@@ -24704,7 +24704,7 @@
         </p:nvSpPr>
         <p:spPr>
           <a:xfrm>
-            <a:off x="804672" y="4240297"/>
+            <a:off x="804672" y="3891686"/>
             <a:ext cx="475488" cy="475488"/>
           </a:xfrm>
           <a:prstGeom prst="ellipse">
@@ -24756,8 +24756,8 @@
         </p:nvSpPr>
         <p:spPr>
           <a:xfrm>
-            <a:off x="1417319" y="4203721"/>
-            <a:ext cx="2468880" cy="1036761"/>
+            <a:off x="1417320" y="3873398"/>
+            <a:ext cx="2441448" cy="1403604"/>
           </a:xfrm>
           <a:prstGeom prst="rect">
             <a:avLst/>
@@ -24820,8 +24820,8 @@
         </p:nvSpPr>
         <p:spPr>
           <a:xfrm>
-            <a:off x="4251959" y="4012758"/>
-            <a:ext cx="3520440" cy="1538422"/>
+            <a:off x="4251959" y="3608222"/>
+            <a:ext cx="3520440" cy="1760220"/>
           </a:xfrm>
           <a:prstGeom prst="roundRect">
             <a:avLst>
@@ -24868,7 +24868,7 @@
         </p:nvSpPr>
         <p:spPr>
           <a:xfrm>
-            <a:off x="4507992" y="4004298"/>
+            <a:off x="4507992" y="3891686"/>
             <a:ext cx="475488" cy="475488"/>
           </a:xfrm>
           <a:prstGeom prst="ellipse">
@@ -24920,8 +24920,8 @@
         </p:nvSpPr>
         <p:spPr>
           <a:xfrm>
-            <a:off x="5120640" y="3967722"/>
-            <a:ext cx="2468880" cy="1508760"/>
+            <a:off x="5120640" y="3873398"/>
+            <a:ext cx="2441448" cy="1175004"/>
           </a:xfrm>
           <a:prstGeom prst="rect">
             <a:avLst/>
@@ -24972,8 +24972,8 @@
         </p:nvSpPr>
         <p:spPr>
           <a:xfrm>
-            <a:off x="7955279" y="4012758"/>
-            <a:ext cx="3520440" cy="1538422"/>
+            <a:off x="7955279" y="3608222"/>
+            <a:ext cx="3520440" cy="1760220"/>
           </a:xfrm>
           <a:prstGeom prst="roundRect">
             <a:avLst>
@@ -25020,7 +25020,7 @@
         </p:nvSpPr>
         <p:spPr>
           <a:xfrm>
-            <a:off x="8211311" y="4004298"/>
+            <a:off x="8211311" y="3891686"/>
             <a:ext cx="475488" cy="475488"/>
           </a:xfrm>
           <a:prstGeom prst="ellipse">
@@ -25072,8 +25072,8 @@
         </p:nvSpPr>
         <p:spPr>
           <a:xfrm>
-            <a:off x="8823959" y="3967722"/>
-            <a:ext cx="2468880" cy="1508760"/>
+            <a:off x="8823959" y="3873398"/>
+            <a:ext cx="2441448" cy="1403604"/>
           </a:xfrm>
           <a:prstGeom prst="rect">
             <a:avLst/>
